--- a/reports/portfolio/포트폴리오_충북대기질_SPC.pptx
+++ b/reports/portfolio/포트폴리오_충북대기질_SPC.pptx
@@ -18,9 +18,10 @@
     <p:sldId id="266" r:id="rId12"/>
     <p:sldId id="267" r:id="rId13"/>
     <p:sldId id="268" r:id="rId14"/>
+    <p:sldId id="269" r:id="rId15"/>
   </p:sldIdLst>
   <p:notesMasterIdLst>
-    <p:notesMasterId r:id="rId15"/>
+    <p:notesMasterId r:id="rId16"/>
   </p:notesMasterIdLst>
   <p:sldSz cx="12188952" cy="6858000"/>
   <p:notesSz cx="6858000" cy="12188952"/>
@@ -890,6 +891,94 @@
             <a:fld id="{F7021451-1387-4CA6-816F-3879F97B5CBC}" type="slidenum">
               <a:rPr lang="en-US"/>
               <a:t>13</a:t>
+            </a:fld>
+            <a:endParaRPr lang="en-US"/>
+          </a:p>
+        </p:txBody>
+      </p:sp>
+    </p:spTree>
+    <p:extLst>
+      <p:ext uri="{BB962C8B-B14F-4D97-AF65-F5344CB8AC3E}">
+        <p14:creationId xmlns:p14="http://schemas.microsoft.com/office/powerpoint/2010/main" val="1024086991"/>
+      </p:ext>
+    </p:extLst>
+  </p:cSld>
+  <p:clrMapOvr>
+    <a:masterClrMapping/>
+  </p:clrMapOvr>
+</p:notes>
+</file>
+
+<file path=ppt/notesSlides/notesSlide14.xml><?xml version="1.0" encoding="utf-8"?>
+<p:notes xmlns:a="http://schemas.openxmlformats.org/drawingml/2006/main" xmlns:r="http://schemas.openxmlformats.org/officeDocument/2006/relationships" xmlns:p="http://schemas.openxmlformats.org/presentationml/2006/main">
+  <p:cSld>
+    <p:spTree>
+      <p:nvGrpSpPr>
+        <p:cNvPr id="1" name=""/>
+        <p:cNvGrpSpPr/>
+        <p:nvPr/>
+      </p:nvGrpSpPr>
+      <p:grpSpPr>
+        <a:xfrm>
+          <a:off x="0" y="0"/>
+          <a:ext cx="0" cy="0"/>
+          <a:chOff x="0" y="0"/>
+          <a:chExt cx="0" cy="0"/>
+        </a:xfrm>
+      </p:grpSpPr>
+      <p:sp>
+        <p:nvSpPr>
+          <p:cNvPr id="2" name="Slide Image Placeholder 1"/>
+          <p:cNvSpPr>
+            <a:spLocks noGrp="1" noRot="1" noChangeAspect="1"/>
+          </p:cNvSpPr>
+          <p:nvPr>
+            <p:ph type="sldImg"/>
+          </p:nvPr>
+        </p:nvSpPr>
+        <p:spPr/>
+      </p:sp>
+      <p:sp>
+        <p:nvSpPr>
+          <p:cNvPr id="3" name="Notes Placeholder 2"/>
+          <p:cNvSpPr>
+            <a:spLocks noGrp="1"/>
+          </p:cNvSpPr>
+          <p:nvPr>
+            <p:ph type="body" idx="1"/>
+          </p:nvPr>
+        </p:nvSpPr>
+        <p:spPr/>
+        <p:txBody>
+          <a:bodyPr/>
+          <a:lstStyle/>
+          <a:p>
+            <a:r>
+              <a:rPr lang="en-US" dirty="0"/>
+              <a:t/>
+            </a:r>
+            <a:endParaRPr lang="en-US" dirty="0"/>
+          </a:p>
+        </p:txBody>
+      </p:sp>
+      <p:sp>
+        <p:nvSpPr>
+          <p:cNvPr id="4" name="Slide Number Placeholder 3"/>
+          <p:cNvSpPr>
+            <a:spLocks noGrp="1"/>
+          </p:cNvSpPr>
+          <p:nvPr>
+            <p:ph type="sldNum" sz="quarter" idx="10"/>
+          </p:nvPr>
+        </p:nvSpPr>
+        <p:spPr/>
+        <p:txBody>
+          <a:bodyPr/>
+          <a:lstStyle/>
+          <a:p>
+            <a:fld id="{F7021451-1387-4CA6-816F-3879F97B5CBC}" type="slidenum">
+              <a:rPr lang="en-US"/>
+              <a:t>14</a:t>
             </a:fld>
             <a:endParaRPr lang="en-US"/>
           </a:p>
@@ -2475,7 +2564,7 @@
                 <a:ea typeface="Pretendard" pitchFamily="34" charset="-122"/>
                 <a:cs typeface="Pretendard" pitchFamily="34" charset="-120"/>
               </a:rPr>
-              <a:t>통계 분석 — 자기상관 보정 성과</a:t>
+              <a:t>통계 분석 — 공정능력지수 Cpk</a:t>
             </a:r>
             <a:endParaRPr lang="en-US" sz="2700" dirty="0"/>
           </a:p>
@@ -2534,7 +2623,7 @@
                 <a:ea typeface="Pretendard" pitchFamily="34" charset="-122"/>
                 <a:cs typeface="Pretendard" pitchFamily="34" charset="-120"/>
               </a:rPr>
-              <a:t>잔차 관리도로 거짓경보 96% 감소</a:t>
+              <a:t>측정소 × 오염물질 30개 조합 진단</a:t>
             </a:r>
             <a:endParaRPr lang="en-US" sz="1300" dirty="0"/>
           </a:p>
@@ -2542,7 +2631,7 @@
       </p:sp>
       <p:pic>
         <p:nvPicPr>
-          <p:cNvPr id="6" name="Image 0" descr="/Users/t2025-m0190/workspace/chungbuk-air-quality-monitor/build/deck/img/residual_ba.png">    </p:cNvPr>
+          <p:cNvPr id="6" name="Image 0" descr="/Users/t2025-m0190/workspace/chungbuk-air-quality-monitor/build/deck/img/cpk_heatmap.png">    </p:cNvPr>
           <p:cNvPicPr>
             <a:picLocks noChangeAspect="1"/>
           </p:cNvPicPr>
@@ -2556,8 +2645,8 @@
         </p:blipFill>
         <p:spPr>
           <a:xfrm>
-            <a:off x="640080" y="1554480"/>
-            <a:ext cx="7589520" cy="2750743"/>
+            <a:off x="548640" y="2148840"/>
+            <a:ext cx="7315200" cy="3292870"/>
           </a:xfrm>
           <a:prstGeom prst="rect">
             <a:avLst/>
@@ -2566,18 +2655,160 @@
       </p:pic>
       <p:sp>
         <p:nvSpPr>
-          <p:cNvPr id="7" name="Shape 4"/>
-          <p:cNvSpPr/>
-          <p:nvPr/>
-        </p:nvSpPr>
-        <p:spPr>
-          <a:xfrm>
-            <a:off x="8549640" y="1737360"/>
-            <a:ext cx="3154680" cy="1554480"/>
+          <p:cNvPr id="7" name="Text 4"/>
+          <p:cNvSpPr/>
+          <p:nvPr/>
+        </p:nvSpPr>
+        <p:spPr>
+          <a:xfrm>
+            <a:off x="640080" y="5532120"/>
+            <a:ext cx="7315200" cy="320040"/>
+          </a:xfrm>
+          <a:prstGeom prst="rect">
+            <a:avLst/>
+          </a:prstGeom>
+          <a:noFill/>
+          <a:ln/>
+        </p:spPr>
+        <p:txBody>
+          <a:bodyPr wrap="square" lIns="0" tIns="0" rIns="0" bIns="0" rtlCol="0" anchor="ctr"/>
+          <a:lstStyle/>
+          <a:p>
+            <a:pPr indent="0" marL="0">
+              <a:buNone/>
+            </a:pPr>
+            <a:r>
+              <a:rPr lang="en-US" sz="1100" i="1" dirty="0">
+                <a:solidFill>
+                  <a:srgbClr val="8A94A6"/>
+                </a:solidFill>
+                <a:latin typeface="Pretendard" pitchFamily="34" charset="0"/>
+                <a:ea typeface="Pretendard" pitchFamily="34" charset="-122"/>
+                <a:cs typeface="Pretendard" pitchFamily="34" charset="-120"/>
+              </a:rPr>
+              <a:t>USL=대기환경보전법 환경기준 · Cpk&lt;1.0=불량 위험 · Cpk≥1.33=양호</a:t>
+            </a:r>
+            <a:endParaRPr lang="en-US" sz="1100" dirty="0"/>
+          </a:p>
+        </p:txBody>
+      </p:sp>
+      <p:sp>
+        <p:nvSpPr>
+          <p:cNvPr id="8" name="Shape 5"/>
+          <p:cNvSpPr/>
+          <p:nvPr/>
+        </p:nvSpPr>
+        <p:spPr>
+          <a:xfrm>
+            <a:off x="8092440" y="1783080"/>
+            <a:ext cx="3611880" cy="2057400"/>
           </a:xfrm>
           <a:prstGeom prst="roundRect">
             <a:avLst>
-              <a:gd name="adj" fmla="val 4706"/>
+              <a:gd name="adj" fmla="val 3556"/>
+            </a:avLst>
+          </a:prstGeom>
+          <a:solidFill>
+            <a:srgbClr val="FDEDED"/>
+          </a:solidFill>
+          <a:ln/>
+        </p:spPr>
+      </p:sp>
+      <p:sp>
+        <p:nvSpPr>
+          <p:cNvPr id="9" name="Text 6"/>
+          <p:cNvSpPr/>
+          <p:nvPr/>
+        </p:nvSpPr>
+        <p:spPr>
+          <a:xfrm>
+            <a:off x="8321040" y="2011680"/>
+            <a:ext cx="3200400" cy="365760"/>
+          </a:xfrm>
+          <a:prstGeom prst="rect">
+            <a:avLst/>
+          </a:prstGeom>
+          <a:noFill/>
+          <a:ln/>
+        </p:spPr>
+        <p:txBody>
+          <a:bodyPr wrap="square" lIns="0" tIns="0" rIns="0" bIns="0" rtlCol="0" anchor="ctr"/>
+          <a:lstStyle/>
+          <a:p>
+            <a:pPr indent="0" marL="0">
+              <a:buNone/>
+            </a:pPr>
+            <a:r>
+              <a:rPr lang="en-US" sz="1450" b="1" dirty="0">
+                <a:solidFill>
+                  <a:srgbClr val="E04646"/>
+                </a:solidFill>
+                <a:latin typeface="Pretendard" pitchFamily="34" charset="0"/>
+                <a:ea typeface="Pretendard" pitchFamily="34" charset="-122"/>
+                <a:cs typeface="Pretendard" pitchFamily="34" charset="-120"/>
+              </a:rPr>
+              <a:t>우선 관리 — PM2.5 · PM10</a:t>
+            </a:r>
+            <a:endParaRPr lang="en-US" sz="1450" dirty="0"/>
+          </a:p>
+        </p:txBody>
+      </p:sp>
+      <p:sp>
+        <p:nvSpPr>
+          <p:cNvPr id="10" name="Text 7"/>
+          <p:cNvSpPr/>
+          <p:nvPr/>
+        </p:nvSpPr>
+        <p:spPr>
+          <a:xfrm>
+            <a:off x="8321040" y="2450592"/>
+            <a:ext cx="3200400" cy="1325880"/>
+          </a:xfrm>
+          <a:prstGeom prst="rect">
+            <a:avLst/>
+          </a:prstGeom>
+          <a:noFill/>
+          <a:ln/>
+        </p:spPr>
+        <p:txBody>
+          <a:bodyPr wrap="square" lIns="0" tIns="0" rIns="0" bIns="0" rtlCol="0" anchor="t"/>
+          <a:lstStyle/>
+          <a:p>
+            <a:pPr indent="0" marL="0">
+              <a:lnSpc>
+                <a:spcPct val="130000"/>
+              </a:lnSpc>
+              <a:buNone/>
+            </a:pPr>
+            <a:r>
+              <a:rPr lang="en-US" sz="1250" dirty="0">
+                <a:solidFill>
+                  <a:srgbClr val="44506A"/>
+                </a:solidFill>
+                <a:latin typeface="Pretendard" pitchFamily="34" charset="0"/>
+                <a:ea typeface="Pretendard" pitchFamily="34" charset="-122"/>
+                <a:cs typeface="Pretendard" pitchFamily="34" charset="-120"/>
+              </a:rPr>
+              <a:t>전 측정소 Cpk &lt; 1.0 ‘불량 위험’. 특히 오송읍 PM2.5 Cpk 0.28로 최저 → 1순위 관리 대상. 미세먼지가 구조적 핵심 인자.</a:t>
+            </a:r>
+            <a:endParaRPr lang="en-US" sz="1250" dirty="0"/>
+          </a:p>
+        </p:txBody>
+      </p:sp>
+      <p:sp>
+        <p:nvSpPr>
+          <p:cNvPr id="11" name="Shape 8"/>
+          <p:cNvSpPr/>
+          <p:nvPr/>
+        </p:nvSpPr>
+        <p:spPr>
+          <a:xfrm>
+            <a:off x="8092440" y="4069080"/>
+            <a:ext cx="3611880" cy="2057400"/>
+          </a:xfrm>
+          <a:prstGeom prst="roundRect">
+            <a:avLst>
+              <a:gd name="adj" fmla="val 3556"/>
             </a:avLst>
           </a:prstGeom>
           <a:solidFill>
@@ -2600,14 +2831,14 @@
       </p:sp>
       <p:sp>
         <p:nvSpPr>
-          <p:cNvPr id="8" name="Text 5"/>
-          <p:cNvSpPr/>
-          <p:nvPr/>
-        </p:nvSpPr>
-        <p:spPr>
-          <a:xfrm>
-            <a:off x="8549640" y="1901952"/>
-            <a:ext cx="3154680" cy="292608"/>
+          <p:cNvPr id="12" name="Text 9"/>
+          <p:cNvSpPr/>
+          <p:nvPr/>
+        </p:nvSpPr>
+        <p:spPr>
+          <a:xfrm>
+            <a:off x="8321040" y="4315968"/>
+            <a:ext cx="3200400" cy="365760"/>
           </a:xfrm>
           <a:prstGeom prst="rect">
             <a:avLst/>
@@ -2619,11 +2850,92 @@
           <a:bodyPr wrap="square" lIns="0" tIns="0" rIns="0" bIns="0" rtlCol="0" anchor="ctr"/>
           <a:lstStyle/>
           <a:p>
-            <a:pPr algn="ctr" indent="0" marL="0">
-              <a:buNone/>
-            </a:pPr>
-            <a:r>
-              <a:rPr lang="en-US" sz="1200" b="1" spc="100" kern="0" dirty="0">
+            <a:pPr indent="0" marL="0">
+              <a:buNone/>
+            </a:pPr>
+            <a:r>
+              <a:rPr lang="en-US" sz="1450" b="1" dirty="0">
+                <a:solidFill>
+                  <a:srgbClr val="0E9488"/>
+                </a:solidFill>
+                <a:latin typeface="Pretendard" pitchFamily="34" charset="0"/>
+                <a:ea typeface="Pretendard" pitchFamily="34" charset="-122"/>
+                <a:cs typeface="Pretendard" pitchFamily="34" charset="-120"/>
+              </a:rPr>
+              <a:t>관리 양호 — SO₂ · CO</a:t>
+            </a:r>
+            <a:endParaRPr lang="en-US" sz="1450" dirty="0"/>
+          </a:p>
+        </p:txBody>
+      </p:sp>
+      <p:sp>
+        <p:nvSpPr>
+          <p:cNvPr id="13" name="Text 10"/>
+          <p:cNvSpPr/>
+          <p:nvPr/>
+        </p:nvSpPr>
+        <p:spPr>
+          <a:xfrm>
+            <a:off x="8321040" y="4754880"/>
+            <a:ext cx="3200400" cy="1280160"/>
+          </a:xfrm>
+          <a:prstGeom prst="rect">
+            <a:avLst/>
+          </a:prstGeom>
+          <a:noFill/>
+          <a:ln/>
+        </p:spPr>
+        <p:txBody>
+          <a:bodyPr wrap="square" lIns="0" tIns="0" rIns="0" bIns="0" rtlCol="0" anchor="t"/>
+          <a:lstStyle/>
+          <a:p>
+            <a:pPr indent="0" marL="0">
+              <a:lnSpc>
+                <a:spcPct val="130000"/>
+              </a:lnSpc>
+              <a:buNone/>
+            </a:pPr>
+            <a:r>
+              <a:rPr lang="en-US" sz="1250" dirty="0">
+                <a:solidFill>
+                  <a:srgbClr val="44506A"/>
+                </a:solidFill>
+                <a:latin typeface="Pretendard" pitchFamily="34" charset="0"/>
+                <a:ea typeface="Pretendard" pitchFamily="34" charset="-122"/>
+                <a:cs typeface="Pretendard" pitchFamily="34" charset="-120"/>
+              </a:rPr>
+              <a:t>Cpk ≥ 1.2로 규격 대비 여유. Cp/Cpk·USL은 대기환경보전법 환경기준(일·연평균) 기반으로 산출.</a:t>
+            </a:r>
+            <a:endParaRPr lang="en-US" sz="1250" dirty="0"/>
+          </a:p>
+        </p:txBody>
+      </p:sp>
+      <p:sp>
+        <p:nvSpPr>
+          <p:cNvPr id="14" name="Text 11"/>
+          <p:cNvSpPr/>
+          <p:nvPr/>
+        </p:nvSpPr>
+        <p:spPr>
+          <a:xfrm>
+            <a:off x="11320272" y="6437376"/>
+            <a:ext cx="548640" cy="274320"/>
+          </a:xfrm>
+          <a:prstGeom prst="rect">
+            <a:avLst/>
+          </a:prstGeom>
+          <a:noFill/>
+          <a:ln/>
+        </p:spPr>
+        <p:txBody>
+          <a:bodyPr wrap="square" rtlCol="0" anchor="ctr"/>
+          <a:lstStyle/>
+          <a:p>
+            <a:pPr algn="r" indent="0" marL="0">
+              <a:buNone/>
+            </a:pPr>
+            <a:r>
+              <a:rPr lang="en-US" sz="1000" dirty="0">
                 <a:solidFill>
                   <a:srgbClr val="8A94A6"/>
                 </a:solidFill>
@@ -2631,340 +2943,9 @@
                 <a:ea typeface="Pretendard" pitchFamily="34" charset="-122"/>
                 <a:cs typeface="Pretendard" pitchFamily="34" charset="-120"/>
               </a:rPr>
-              <a:t>BEFORE</a:t>
-            </a:r>
-            <a:endParaRPr lang="en-US" sz="1200" dirty="0"/>
-          </a:p>
-        </p:txBody>
-      </p:sp>
-      <p:sp>
-        <p:nvSpPr>
-          <p:cNvPr id="9" name="Text 6"/>
-          <p:cNvSpPr/>
-          <p:nvPr/>
-        </p:nvSpPr>
-        <p:spPr>
-          <a:xfrm>
-            <a:off x="8549640" y="2148840"/>
-            <a:ext cx="3154680" cy="777240"/>
-          </a:xfrm>
-          <a:prstGeom prst="rect">
-            <a:avLst/>
-          </a:prstGeom>
-          <a:noFill/>
-          <a:ln/>
-        </p:spPr>
-        <p:txBody>
-          <a:bodyPr wrap="square" lIns="0" tIns="0" rIns="0" bIns="0" rtlCol="0" anchor="ctr"/>
-          <a:lstStyle/>
-          <a:p>
-            <a:pPr algn="ctr" indent="0" marL="0">
-              <a:buNone/>
-            </a:pPr>
-            <a:r>
-              <a:rPr lang="en-US" sz="5000" b="1" dirty="0">
-                <a:solidFill>
-                  <a:srgbClr val="E04646"/>
-                </a:solidFill>
-                <a:latin typeface="Pretendard" pitchFamily="34" charset="0"/>
-                <a:ea typeface="Pretendard" pitchFamily="34" charset="-122"/>
-                <a:cs typeface="Pretendard" pitchFamily="34" charset="-120"/>
-              </a:rPr>
-              <a:t>46%</a:t>
-            </a:r>
-            <a:endParaRPr lang="en-US" sz="5000" dirty="0"/>
-          </a:p>
-        </p:txBody>
-      </p:sp>
-      <p:sp>
-        <p:nvSpPr>
-          <p:cNvPr id="10" name="Text 7"/>
-          <p:cNvSpPr/>
-          <p:nvPr/>
-        </p:nvSpPr>
-        <p:spPr>
-          <a:xfrm>
-            <a:off x="8549640" y="2926080"/>
-            <a:ext cx="3154680" cy="292608"/>
-          </a:xfrm>
-          <a:prstGeom prst="rect">
-            <a:avLst/>
-          </a:prstGeom>
-          <a:noFill/>
-          <a:ln/>
-        </p:spPr>
-        <p:txBody>
-          <a:bodyPr wrap="square" lIns="0" tIns="0" rIns="0" bIns="0" rtlCol="0" anchor="ctr"/>
-          <a:lstStyle/>
-          <a:p>
-            <a:pPr algn="ctr" indent="0" marL="0">
-              <a:buNone/>
-            </a:pPr>
-            <a:r>
-              <a:rPr lang="en-US" sz="1150" dirty="0">
-                <a:solidFill>
-                  <a:srgbClr val="44506A"/>
-                </a:solidFill>
-                <a:latin typeface="Pretendard" pitchFamily="34" charset="0"/>
-                <a:ea typeface="Pretendard" pitchFamily="34" charset="-122"/>
-                <a:cs typeface="Pretendard" pitchFamily="34" charset="-120"/>
-              </a:rPr>
-              <a:t>전통 I-Chart 거짓경보율</a:t>
-            </a:r>
-            <a:endParaRPr lang="en-US" sz="1150" dirty="0"/>
-          </a:p>
-        </p:txBody>
-      </p:sp>
-      <p:sp>
-        <p:nvSpPr>
-          <p:cNvPr id="11" name="Text 8"/>
-          <p:cNvSpPr/>
-          <p:nvPr/>
-        </p:nvSpPr>
-        <p:spPr>
-          <a:xfrm>
-            <a:off x="8549640" y="3346704"/>
-            <a:ext cx="3154680" cy="292608"/>
-          </a:xfrm>
-          <a:prstGeom prst="rect">
-            <a:avLst/>
-          </a:prstGeom>
-          <a:noFill/>
-          <a:ln/>
-        </p:spPr>
-        <p:txBody>
-          <a:bodyPr wrap="square" lIns="0" tIns="0" rIns="0" bIns="0" rtlCol="0" anchor="ctr"/>
-          <a:lstStyle/>
-          <a:p>
-            <a:pPr algn="ctr" indent="0" marL="0">
-              <a:buNone/>
-            </a:pPr>
-            <a:r>
-              <a:rPr lang="en-US" sz="1600" b="1" dirty="0">
-                <a:solidFill>
-                  <a:srgbClr val="0E9488"/>
-                </a:solidFill>
-                <a:latin typeface="Pretendard" pitchFamily="34" charset="0"/>
-                <a:ea typeface="Pretendard" pitchFamily="34" charset="-122"/>
-                <a:cs typeface="Pretendard" pitchFamily="34" charset="-120"/>
-              </a:rPr>
-              <a:t>▼</a:t>
-            </a:r>
-            <a:endParaRPr lang="en-US" sz="1600" dirty="0"/>
-          </a:p>
-        </p:txBody>
-      </p:sp>
-      <p:sp>
-        <p:nvSpPr>
-          <p:cNvPr id="12" name="Shape 9"/>
-          <p:cNvSpPr/>
-          <p:nvPr/>
-        </p:nvSpPr>
-        <p:spPr>
-          <a:xfrm>
-            <a:off x="8549640" y="3703320"/>
-            <a:ext cx="3154680" cy="1554480"/>
-          </a:xfrm>
-          <a:prstGeom prst="roundRect">
-            <a:avLst>
-              <a:gd name="adj" fmla="val 4706"/>
-            </a:avLst>
-          </a:prstGeom>
-          <a:solidFill>
-            <a:srgbClr val="F0F8F6"/>
-          </a:solidFill>
-          <a:ln/>
-        </p:spPr>
-      </p:sp>
-      <p:sp>
-        <p:nvSpPr>
-          <p:cNvPr id="13" name="Text 10"/>
-          <p:cNvSpPr/>
-          <p:nvPr/>
-        </p:nvSpPr>
-        <p:spPr>
-          <a:xfrm>
-            <a:off x="8549640" y="3867912"/>
-            <a:ext cx="3154680" cy="292608"/>
-          </a:xfrm>
-          <a:prstGeom prst="rect">
-            <a:avLst/>
-          </a:prstGeom>
-          <a:noFill/>
-          <a:ln/>
-        </p:spPr>
-        <p:txBody>
-          <a:bodyPr wrap="square" lIns="0" tIns="0" rIns="0" bIns="0" rtlCol="0" anchor="ctr"/>
-          <a:lstStyle/>
-          <a:p>
-            <a:pPr algn="ctr" indent="0" marL="0">
-              <a:buNone/>
-            </a:pPr>
-            <a:r>
-              <a:rPr lang="en-US" sz="1200" b="1" spc="100" kern="0" dirty="0">
-                <a:solidFill>
-                  <a:srgbClr val="0B6B61"/>
-                </a:solidFill>
-                <a:latin typeface="Pretendard" pitchFamily="34" charset="0"/>
-                <a:ea typeface="Pretendard" pitchFamily="34" charset="-122"/>
-                <a:cs typeface="Pretendard" pitchFamily="34" charset="-120"/>
-              </a:rPr>
-              <a:t>AFTER</a:t>
-            </a:r>
-            <a:endParaRPr lang="en-US" sz="1200" dirty="0"/>
-          </a:p>
-        </p:txBody>
-      </p:sp>
-      <p:sp>
-        <p:nvSpPr>
-          <p:cNvPr id="14" name="Text 11"/>
-          <p:cNvSpPr/>
-          <p:nvPr/>
-        </p:nvSpPr>
-        <p:spPr>
-          <a:xfrm>
-            <a:off x="8549640" y="4114800"/>
-            <a:ext cx="3154680" cy="777240"/>
-          </a:xfrm>
-          <a:prstGeom prst="rect">
-            <a:avLst/>
-          </a:prstGeom>
-          <a:noFill/>
-          <a:ln/>
-        </p:spPr>
-        <p:txBody>
-          <a:bodyPr wrap="square" lIns="0" tIns="0" rIns="0" bIns="0" rtlCol="0" anchor="ctr"/>
-          <a:lstStyle/>
-          <a:p>
-            <a:pPr algn="ctr" indent="0" marL="0">
-              <a:buNone/>
-            </a:pPr>
-            <a:r>
-              <a:rPr lang="en-US" sz="5000" b="1" dirty="0">
-                <a:solidFill>
-                  <a:srgbClr val="0E9488"/>
-                </a:solidFill>
-                <a:latin typeface="Pretendard" pitchFamily="34" charset="0"/>
-                <a:ea typeface="Pretendard" pitchFamily="34" charset="-122"/>
-                <a:cs typeface="Pretendard" pitchFamily="34" charset="-120"/>
-              </a:rPr>
-              <a:t>2%</a:t>
-            </a:r>
-            <a:endParaRPr lang="en-US" sz="5000" dirty="0"/>
-          </a:p>
-        </p:txBody>
-      </p:sp>
-      <p:sp>
-        <p:nvSpPr>
-          <p:cNvPr id="15" name="Text 12"/>
-          <p:cNvSpPr/>
-          <p:nvPr/>
-        </p:nvSpPr>
-        <p:spPr>
-          <a:xfrm>
-            <a:off x="8549640" y="4892040"/>
-            <a:ext cx="3154680" cy="292608"/>
-          </a:xfrm>
-          <a:prstGeom prst="rect">
-            <a:avLst/>
-          </a:prstGeom>
-          <a:noFill/>
-          <a:ln/>
-        </p:spPr>
-        <p:txBody>
-          <a:bodyPr wrap="square" lIns="0" tIns="0" rIns="0" bIns="0" rtlCol="0" anchor="ctr"/>
-          <a:lstStyle/>
-          <a:p>
-            <a:pPr algn="ctr" indent="0" marL="0">
-              <a:buNone/>
-            </a:pPr>
-            <a:r>
-              <a:rPr lang="en-US" sz="1150" dirty="0">
-                <a:solidFill>
-                  <a:srgbClr val="0B6B61"/>
-                </a:solidFill>
-                <a:latin typeface="Pretendard" pitchFamily="34" charset="0"/>
-                <a:ea typeface="Pretendard" pitchFamily="34" charset="-122"/>
-                <a:cs typeface="Pretendard" pitchFamily="34" charset="-120"/>
-              </a:rPr>
-              <a:t>잔차 관리도 거짓경보율</a:t>
-            </a:r>
-            <a:endParaRPr lang="en-US" sz="1150" dirty="0"/>
-          </a:p>
-        </p:txBody>
-      </p:sp>
-      <p:sp>
-        <p:nvSpPr>
-          <p:cNvPr id="16" name="Shape 13"/>
-          <p:cNvSpPr/>
-          <p:nvPr/>
-        </p:nvSpPr>
-        <p:spPr>
-          <a:xfrm>
-            <a:off x="640080" y="5852160"/>
-            <a:ext cx="11064240" cy="749808"/>
-          </a:xfrm>
-          <a:prstGeom prst="roundRect">
-            <a:avLst>
-              <a:gd name="adj" fmla="val 9756"/>
-            </a:avLst>
-          </a:prstGeom>
-          <a:solidFill>
-            <a:srgbClr val="1F40E6"/>
-          </a:solidFill>
-          <a:ln/>
-        </p:spPr>
-      </p:sp>
-      <p:sp>
-        <p:nvSpPr>
-          <p:cNvPr id="17" name="Text 14"/>
-          <p:cNvSpPr/>
-          <p:nvPr/>
-        </p:nvSpPr>
-        <p:spPr>
-          <a:xfrm>
-            <a:off x="960120" y="5852160"/>
-            <a:ext cx="10607040" cy="749808"/>
-          </a:xfrm>
-          <a:prstGeom prst="rect">
-            <a:avLst/>
-          </a:prstGeom>
-          <a:noFill/>
-          <a:ln/>
-        </p:spPr>
-        <p:txBody>
-          <a:bodyPr wrap="square" lIns="0" tIns="0" rIns="0" bIns="0" rtlCol="0" anchor="ctr"/>
-          <a:lstStyle/>
-          <a:p>
-            <a:pPr indent="0" marL="0">
-              <a:buNone/>
-            </a:pPr>
-            <a:r>
-              <a:rPr lang="en-US" sz="1350" b="1" dirty="0">
-                <a:solidFill>
-                  <a:srgbClr val="C9D4FF"/>
-                </a:solidFill>
-                <a:latin typeface="Pretendard" pitchFamily="34" charset="0"/>
-                <a:ea typeface="Pretendard" pitchFamily="34" charset="-122"/>
-                <a:cs typeface="Pretendard" pitchFamily="34" charset="-120"/>
-              </a:rPr>
-              <a:t>핵심 성과   </a:t>
-            </a:r>
-            <a:pPr indent="0" marL="0">
-              <a:buNone/>
-            </a:pPr>
-            <a:r>
-              <a:rPr lang="en-US" sz="1350" b="1" dirty="0">
-                <a:solidFill>
-                  <a:srgbClr val="FFFFFF"/>
-                </a:solidFill>
-                <a:latin typeface="Pretendard" pitchFamily="34" charset="0"/>
-                <a:ea typeface="Pretendard" pitchFamily="34" charset="-122"/>
-                <a:cs typeface="Pretendard" pitchFamily="34" charset="-120"/>
-              </a:rPr>
-              <a:t>|   원시 관리도의 이탈은 대부분 자기상관에 의한 거짓경보 — 잔차에 남는 이탈만이 진짜 특수원인 후보</a:t>
-            </a:r>
-            <a:endParaRPr lang="en-US" sz="1350" dirty="0"/>
+              <a:t>10</a:t>
+            </a:r>
+            <a:endParaRPr lang="en-US" sz="1000" dirty="0"/>
           </a:p>
         </p:txBody>
       </p:sp>
@@ -3053,7 +3034,7 @@
                 <a:ea typeface="Pretendard" pitchFamily="34" charset="-122"/>
                 <a:cs typeface="Pretendard" pitchFamily="34" charset="-120"/>
               </a:rPr>
-              <a:t>통계 분석 — 단지 비교 검정</a:t>
+              <a:t>통계 분석 — 자기상관 보정 성과</a:t>
             </a:r>
             <a:endParaRPr lang="en-US" sz="2700" dirty="0"/>
           </a:p>
@@ -3112,7 +3093,7 @@
                 <a:ea typeface="Pretendard" pitchFamily="34" charset="-122"/>
                 <a:cs typeface="Pretendard" pitchFamily="34" charset="-120"/>
               </a:rPr>
-              <a:t>산단 영향군 vs 거주지 (Welch t-test)</a:t>
+              <a:t>잔차 관리도로 거짓경보 96% 감소</a:t>
             </a:r>
             <a:endParaRPr lang="en-US" sz="1300" dirty="0"/>
           </a:p>
@@ -3120,7 +3101,7 @@
       </p:sp>
       <p:pic>
         <p:nvPicPr>
-          <p:cNvPr id="6" name="Image 0" descr="/Users/t2025-m0190/workspace/chungbuk-air-quality-monitor/build/deck/img/group_box.png">    </p:cNvPr>
+          <p:cNvPr id="6" name="Image 0" descr="/Users/t2025-m0190/workspace/chungbuk-air-quality-monitor/build/deck/img/residual_ba.png">    </p:cNvPr>
           <p:cNvPicPr>
             <a:picLocks noChangeAspect="1"/>
           </p:cNvPicPr>
@@ -3134,110 +3115,58 @@
         </p:blipFill>
         <p:spPr>
           <a:xfrm>
-            <a:off x="640080" y="1600200"/>
-            <a:ext cx="6400800" cy="3584448"/>
+            <a:off x="640080" y="1554480"/>
+            <a:ext cx="7589520" cy="2750743"/>
           </a:xfrm>
           <a:prstGeom prst="rect">
             <a:avLst/>
           </a:prstGeom>
         </p:spPr>
       </p:pic>
-      <p:pic>
-        <p:nvPicPr>
-          <p:cNvPr id="7" name="Image 1" descr="preencoded.png">    </p:cNvPr>
-          <p:cNvPicPr>
-            <a:picLocks noChangeAspect="1"/>
-          </p:cNvPicPr>
-          <p:nvPr/>
-        </p:nvPicPr>
-        <p:blipFill>
-          <a:blip r:embed="rId2"/>
-          <a:stretch>
-            <a:fillRect/>
-          </a:stretch>
-        </p:blipFill>
-        <p:spPr>
-          <a:xfrm>
-            <a:off x="7589520" y="1783080"/>
-            <a:ext cx="411480" cy="411480"/>
-          </a:xfrm>
-          <a:prstGeom prst="rect">
-            <a:avLst/>
-          </a:prstGeom>
-        </p:spPr>
-      </p:pic>
-      <p:sp>
-        <p:nvSpPr>
-          <p:cNvPr id="8" name="Text 4"/>
-          <p:cNvSpPr/>
-          <p:nvPr/>
-        </p:nvSpPr>
-        <p:spPr>
-          <a:xfrm>
-            <a:off x="8092440" y="1783080"/>
-            <a:ext cx="3657600" cy="411480"/>
-          </a:xfrm>
-          <a:prstGeom prst="rect">
-            <a:avLst/>
-          </a:prstGeom>
-          <a:noFill/>
-          <a:ln/>
-        </p:spPr>
-        <p:txBody>
-          <a:bodyPr wrap="square" lIns="0" tIns="0" rIns="0" bIns="0" rtlCol="0" anchor="ctr"/>
-          <a:lstStyle/>
-          <a:p>
-            <a:pPr indent="0" marL="0">
-              <a:buNone/>
-            </a:pPr>
-            <a:r>
-              <a:rPr lang="en-US" sz="1700" b="1" dirty="0">
-                <a:solidFill>
-                  <a:srgbClr val="1F40E6"/>
-                </a:solidFill>
-                <a:latin typeface="Pretendard" pitchFamily="34" charset="0"/>
-                <a:ea typeface="Pretendard" pitchFamily="34" charset="-122"/>
-                <a:cs typeface="Pretendard" pitchFamily="34" charset="-120"/>
-              </a:rPr>
-              <a:t>검증 결과</a:t>
-            </a:r>
-            <a:endParaRPr lang="en-US" sz="1700" dirty="0"/>
-          </a:p>
-        </p:txBody>
-      </p:sp>
-      <p:sp>
-        <p:nvSpPr>
-          <p:cNvPr id="9" name="Shape 5"/>
-          <p:cNvSpPr/>
-          <p:nvPr/>
-        </p:nvSpPr>
-        <p:spPr>
-          <a:xfrm>
-            <a:off x="7589520" y="2377440"/>
-            <a:ext cx="4114800" cy="0"/>
-          </a:xfrm>
-          <a:prstGeom prst="line">
-            <a:avLst/>
-          </a:prstGeom>
-          <a:noFill/>
+      <p:sp>
+        <p:nvSpPr>
+          <p:cNvPr id="7" name="Shape 4"/>
+          <p:cNvSpPr/>
+          <p:nvPr/>
+        </p:nvSpPr>
+        <p:spPr>
+          <a:xfrm>
+            <a:off x="8549640" y="1737360"/>
+            <a:ext cx="3154680" cy="1554480"/>
+          </a:xfrm>
+          <a:prstGeom prst="roundRect">
+            <a:avLst>
+              <a:gd name="adj" fmla="val 4706"/>
+            </a:avLst>
+          </a:prstGeom>
+          <a:solidFill>
+            <a:srgbClr val="FFFFFF"/>
+          </a:solidFill>
           <a:ln w="12700">
             <a:solidFill>
               <a:srgbClr val="DCE3F2"/>
             </a:solidFill>
             <a:prstDash val="solid"/>
           </a:ln>
-        </p:spPr>
-      </p:sp>
-      <p:sp>
-        <p:nvSpPr>
-          <p:cNvPr id="10" name="Text 6"/>
-          <p:cNvSpPr/>
-          <p:nvPr/>
-        </p:nvSpPr>
-        <p:spPr>
-          <a:xfrm>
-            <a:off x="7589520" y="2560320"/>
-            <a:ext cx="4114800" cy="320040"/>
+          <a:effectLst>
+            <a:outerShdw sx="100000" sy="100000" kx="0" ky="0" algn="bl" rotWithShape="0" blurRad="101600" dist="25400" dir="5400000">
+              <a:srgbClr val="8794B5">
+                <a:alpha val="22000"/>
+              </a:srgbClr>
+            </a:outerShdw>
+          </a:effectLst>
+        </p:spPr>
+      </p:sp>
+      <p:sp>
+        <p:nvSpPr>
+          <p:cNvPr id="8" name="Text 5"/>
+          <p:cNvSpPr/>
+          <p:nvPr/>
+        </p:nvSpPr>
+        <p:spPr>
+          <a:xfrm>
+            <a:off x="8549640" y="1901952"/>
+            <a:ext cx="3154680" cy="292608"/>
           </a:xfrm>
           <a:prstGeom prst="rect">
             <a:avLst/>
@@ -3249,11 +3178,11 @@
           <a:bodyPr wrap="square" lIns="0" tIns="0" rIns="0" bIns="0" rtlCol="0" anchor="ctr"/>
           <a:lstStyle/>
           <a:p>
-            <a:pPr indent="0" marL="0">
-              <a:buNone/>
-            </a:pPr>
-            <a:r>
-              <a:rPr lang="en-US" sz="1200" b="1" dirty="0">
+            <a:pPr algn="ctr" indent="0" marL="0">
+              <a:buNone/>
+            </a:pPr>
+            <a:r>
+              <a:rPr lang="en-US" sz="1200" b="1" spc="100" kern="0" dirty="0">
                 <a:solidFill>
                   <a:srgbClr val="8A94A6"/>
                 </a:solidFill>
@@ -3261,7 +3190,7 @@
                 <a:ea typeface="Pretendard" pitchFamily="34" charset="-122"/>
                 <a:cs typeface="Pretendard" pitchFamily="34" charset="-120"/>
               </a:rPr>
-              <a:t>가설</a:t>
+              <a:t>BEFORE</a:t>
             </a:r>
             <a:endParaRPr lang="en-US" sz="1200" dirty="0"/>
           </a:p>
@@ -3269,92 +3198,69 @@
       </p:sp>
       <p:sp>
         <p:nvSpPr>
-          <p:cNvPr id="11" name="Text 7"/>
-          <p:cNvSpPr/>
-          <p:nvPr/>
-        </p:nvSpPr>
-        <p:spPr>
-          <a:xfrm>
-            <a:off x="7589520" y="2880360"/>
-            <a:ext cx="4160520" cy="731520"/>
-          </a:xfrm>
-          <a:prstGeom prst="rect">
-            <a:avLst/>
-          </a:prstGeom>
-          <a:noFill/>
-          <a:ln/>
-        </p:spPr>
-        <p:txBody>
-          <a:bodyPr wrap="square" lIns="0" tIns="0" rIns="0" bIns="0" rtlCol="0" anchor="t"/>
-          <a:lstStyle/>
-          <a:p>
-            <a:pPr indent="0" marL="0">
-              <a:lnSpc>
-                <a:spcPct val="125000"/>
-              </a:lnSpc>
-              <a:buNone/>
-            </a:pPr>
-            <a:r>
-              <a:rPr lang="en-US" sz="1400" b="1" dirty="0">
-                <a:solidFill>
-                  <a:srgbClr val="151B2E"/>
-                </a:solidFill>
-                <a:latin typeface="Pretendard" pitchFamily="34" charset="0"/>
-                <a:ea typeface="Pretendard" pitchFamily="34" charset="-122"/>
-                <a:cs typeface="Pretendard" pitchFamily="34" charset="-120"/>
-              </a:rPr>
-              <a:t>“산단 영향군의 PM2.5 평균이 거주지보다 높을 것이다”</a:t>
-            </a:r>
-            <a:endParaRPr lang="en-US" sz="1400" dirty="0"/>
-          </a:p>
-        </p:txBody>
-      </p:sp>
-      <p:sp>
-        <p:nvSpPr>
-          <p:cNvPr id="12" name="Text 8"/>
-          <p:cNvSpPr/>
-          <p:nvPr/>
-        </p:nvSpPr>
-        <p:spPr>
-          <a:xfrm>
-            <a:off x="7589520" y="3703320"/>
-            <a:ext cx="4160520" cy="1188720"/>
-          </a:xfrm>
-          <a:prstGeom prst="rect">
-            <a:avLst/>
-          </a:prstGeom>
-          <a:noFill/>
-          <a:ln/>
-        </p:spPr>
-        <p:txBody>
-          <a:bodyPr wrap="square" lIns="0" tIns="0" rIns="0" bIns="0" rtlCol="0" anchor="t"/>
-          <a:lstStyle/>
-          <a:p>
-            <a:pPr indent="0" marL="0">
-              <a:lnSpc>
-                <a:spcPct val="130000"/>
-              </a:lnSpc>
-              <a:buNone/>
-            </a:pPr>
-            <a:r>
-              <a:rPr lang="en-US" sz="1250" b="1" dirty="0">
-                <a:solidFill>
-                  <a:srgbClr val="1F40E6"/>
-                </a:solidFill>
-                <a:latin typeface="Pretendard" pitchFamily="34" charset="0"/>
-                <a:ea typeface="Pretendard" pitchFamily="34" charset="-122"/>
-                <a:cs typeface="Pretendard" pitchFamily="34" charset="-120"/>
-              </a:rPr>
-              <a:t>Welch t-test</a:t>
-            </a:r>
-            <a:pPr indent="0" marL="0">
-              <a:lnSpc>
-                <a:spcPct val="130000"/>
-              </a:lnSpc>
-              <a:buNone/>
-            </a:pPr>
-            <a:r>
-              <a:rPr lang="en-US" sz="1250" dirty="0">
+          <p:cNvPr id="9" name="Text 6"/>
+          <p:cNvSpPr/>
+          <p:nvPr/>
+        </p:nvSpPr>
+        <p:spPr>
+          <a:xfrm>
+            <a:off x="8549640" y="2148840"/>
+            <a:ext cx="3154680" cy="777240"/>
+          </a:xfrm>
+          <a:prstGeom prst="rect">
+            <a:avLst/>
+          </a:prstGeom>
+          <a:noFill/>
+          <a:ln/>
+        </p:spPr>
+        <p:txBody>
+          <a:bodyPr wrap="square" lIns="0" tIns="0" rIns="0" bIns="0" rtlCol="0" anchor="ctr"/>
+          <a:lstStyle/>
+          <a:p>
+            <a:pPr algn="ctr" indent="0" marL="0">
+              <a:buNone/>
+            </a:pPr>
+            <a:r>
+              <a:rPr lang="en-US" sz="5000" b="1" dirty="0">
+                <a:solidFill>
+                  <a:srgbClr val="E04646"/>
+                </a:solidFill>
+                <a:latin typeface="Pretendard" pitchFamily="34" charset="0"/>
+                <a:ea typeface="Pretendard" pitchFamily="34" charset="-122"/>
+                <a:cs typeface="Pretendard" pitchFamily="34" charset="-120"/>
+              </a:rPr>
+              <a:t>46%</a:t>
+            </a:r>
+            <a:endParaRPr lang="en-US" sz="5000" dirty="0"/>
+          </a:p>
+        </p:txBody>
+      </p:sp>
+      <p:sp>
+        <p:nvSpPr>
+          <p:cNvPr id="10" name="Text 7"/>
+          <p:cNvSpPr/>
+          <p:nvPr/>
+        </p:nvSpPr>
+        <p:spPr>
+          <a:xfrm>
+            <a:off x="8549640" y="2926080"/>
+            <a:ext cx="3154680" cy="292608"/>
+          </a:xfrm>
+          <a:prstGeom prst="rect">
+            <a:avLst/>
+          </a:prstGeom>
+          <a:noFill/>
+          <a:ln/>
+        </p:spPr>
+        <p:txBody>
+          <a:bodyPr wrap="square" lIns="0" tIns="0" rIns="0" bIns="0" rtlCol="0" anchor="ctr"/>
+          <a:lstStyle/>
+          <a:p>
+            <a:pPr algn="ctr" indent="0" marL="0">
+              <a:buNone/>
+            </a:pPr>
+            <a:r>
+              <a:rPr lang="en-US" sz="1150" dirty="0">
                 <a:solidFill>
                   <a:srgbClr val="44506A"/>
                 </a:solidFill>
@@ -3362,26 +3268,204 @@
                 <a:ea typeface="Pretendard" pitchFamily="34" charset="-122"/>
                 <a:cs typeface="Pretendard" pitchFamily="34" charset="-120"/>
               </a:rPr>
-              <a:t>로 두 군 평균차의 통계적 유의성을 검정. Cohen’s d로 효과크기를 함께 산출해 실질적 차이를 확인.</a:t>
-            </a:r>
-            <a:endParaRPr lang="en-US" sz="1250" dirty="0"/>
-          </a:p>
-        </p:txBody>
-      </p:sp>
-      <p:sp>
-        <p:nvSpPr>
-          <p:cNvPr id="13" name="Shape 9"/>
-          <p:cNvSpPr/>
-          <p:nvPr/>
-        </p:nvSpPr>
-        <p:spPr>
-          <a:xfrm>
-            <a:off x="7589520" y="5074920"/>
-            <a:ext cx="1828800" cy="457200"/>
+              <a:t>전통 I-Chart 거짓경보율</a:t>
+            </a:r>
+            <a:endParaRPr lang="en-US" sz="1150" dirty="0"/>
+          </a:p>
+        </p:txBody>
+      </p:sp>
+      <p:sp>
+        <p:nvSpPr>
+          <p:cNvPr id="11" name="Text 8"/>
+          <p:cNvSpPr/>
+          <p:nvPr/>
+        </p:nvSpPr>
+        <p:spPr>
+          <a:xfrm>
+            <a:off x="8549640" y="3346704"/>
+            <a:ext cx="3154680" cy="292608"/>
+          </a:xfrm>
+          <a:prstGeom prst="rect">
+            <a:avLst/>
+          </a:prstGeom>
+          <a:noFill/>
+          <a:ln/>
+        </p:spPr>
+        <p:txBody>
+          <a:bodyPr wrap="square" lIns="0" tIns="0" rIns="0" bIns="0" rtlCol="0" anchor="ctr"/>
+          <a:lstStyle/>
+          <a:p>
+            <a:pPr algn="ctr" indent="0" marL="0">
+              <a:buNone/>
+            </a:pPr>
+            <a:r>
+              <a:rPr lang="en-US" sz="1600" b="1" dirty="0">
+                <a:solidFill>
+                  <a:srgbClr val="0E9488"/>
+                </a:solidFill>
+                <a:latin typeface="Pretendard" pitchFamily="34" charset="0"/>
+                <a:ea typeface="Pretendard" pitchFamily="34" charset="-122"/>
+                <a:cs typeface="Pretendard" pitchFamily="34" charset="-120"/>
+              </a:rPr>
+              <a:t>▼</a:t>
+            </a:r>
+            <a:endParaRPr lang="en-US" sz="1600" dirty="0"/>
+          </a:p>
+        </p:txBody>
+      </p:sp>
+      <p:sp>
+        <p:nvSpPr>
+          <p:cNvPr id="12" name="Shape 9"/>
+          <p:cNvSpPr/>
+          <p:nvPr/>
+        </p:nvSpPr>
+        <p:spPr>
+          <a:xfrm>
+            <a:off x="8549640" y="3703320"/>
+            <a:ext cx="3154680" cy="1554480"/>
           </a:xfrm>
           <a:prstGeom prst="roundRect">
             <a:avLst>
-              <a:gd name="adj" fmla="val 50000"/>
+              <a:gd name="adj" fmla="val 4706"/>
+            </a:avLst>
+          </a:prstGeom>
+          <a:solidFill>
+            <a:srgbClr val="F0F8F6"/>
+          </a:solidFill>
+          <a:ln/>
+        </p:spPr>
+      </p:sp>
+      <p:sp>
+        <p:nvSpPr>
+          <p:cNvPr id="13" name="Text 10"/>
+          <p:cNvSpPr/>
+          <p:nvPr/>
+        </p:nvSpPr>
+        <p:spPr>
+          <a:xfrm>
+            <a:off x="8549640" y="3867912"/>
+            <a:ext cx="3154680" cy="292608"/>
+          </a:xfrm>
+          <a:prstGeom prst="rect">
+            <a:avLst/>
+          </a:prstGeom>
+          <a:noFill/>
+          <a:ln/>
+        </p:spPr>
+        <p:txBody>
+          <a:bodyPr wrap="square" lIns="0" tIns="0" rIns="0" bIns="0" rtlCol="0" anchor="ctr"/>
+          <a:lstStyle/>
+          <a:p>
+            <a:pPr algn="ctr" indent="0" marL="0">
+              <a:buNone/>
+            </a:pPr>
+            <a:r>
+              <a:rPr lang="en-US" sz="1200" b="1" spc="100" kern="0" dirty="0">
+                <a:solidFill>
+                  <a:srgbClr val="0B6B61"/>
+                </a:solidFill>
+                <a:latin typeface="Pretendard" pitchFamily="34" charset="0"/>
+                <a:ea typeface="Pretendard" pitchFamily="34" charset="-122"/>
+                <a:cs typeface="Pretendard" pitchFamily="34" charset="-120"/>
+              </a:rPr>
+              <a:t>AFTER</a:t>
+            </a:r>
+            <a:endParaRPr lang="en-US" sz="1200" dirty="0"/>
+          </a:p>
+        </p:txBody>
+      </p:sp>
+      <p:sp>
+        <p:nvSpPr>
+          <p:cNvPr id="14" name="Text 11"/>
+          <p:cNvSpPr/>
+          <p:nvPr/>
+        </p:nvSpPr>
+        <p:spPr>
+          <a:xfrm>
+            <a:off x="8549640" y="4114800"/>
+            <a:ext cx="3154680" cy="777240"/>
+          </a:xfrm>
+          <a:prstGeom prst="rect">
+            <a:avLst/>
+          </a:prstGeom>
+          <a:noFill/>
+          <a:ln/>
+        </p:spPr>
+        <p:txBody>
+          <a:bodyPr wrap="square" lIns="0" tIns="0" rIns="0" bIns="0" rtlCol="0" anchor="ctr"/>
+          <a:lstStyle/>
+          <a:p>
+            <a:pPr algn="ctr" indent="0" marL="0">
+              <a:buNone/>
+            </a:pPr>
+            <a:r>
+              <a:rPr lang="en-US" sz="5000" b="1" dirty="0">
+                <a:solidFill>
+                  <a:srgbClr val="0E9488"/>
+                </a:solidFill>
+                <a:latin typeface="Pretendard" pitchFamily="34" charset="0"/>
+                <a:ea typeface="Pretendard" pitchFamily="34" charset="-122"/>
+                <a:cs typeface="Pretendard" pitchFamily="34" charset="-120"/>
+              </a:rPr>
+              <a:t>2%</a:t>
+            </a:r>
+            <a:endParaRPr lang="en-US" sz="5000" dirty="0"/>
+          </a:p>
+        </p:txBody>
+      </p:sp>
+      <p:sp>
+        <p:nvSpPr>
+          <p:cNvPr id="15" name="Text 12"/>
+          <p:cNvSpPr/>
+          <p:nvPr/>
+        </p:nvSpPr>
+        <p:spPr>
+          <a:xfrm>
+            <a:off x="8549640" y="4892040"/>
+            <a:ext cx="3154680" cy="292608"/>
+          </a:xfrm>
+          <a:prstGeom prst="rect">
+            <a:avLst/>
+          </a:prstGeom>
+          <a:noFill/>
+          <a:ln/>
+        </p:spPr>
+        <p:txBody>
+          <a:bodyPr wrap="square" lIns="0" tIns="0" rIns="0" bIns="0" rtlCol="0" anchor="ctr"/>
+          <a:lstStyle/>
+          <a:p>
+            <a:pPr algn="ctr" indent="0" marL="0">
+              <a:buNone/>
+            </a:pPr>
+            <a:r>
+              <a:rPr lang="en-US" sz="1150" dirty="0">
+                <a:solidFill>
+                  <a:srgbClr val="0B6B61"/>
+                </a:solidFill>
+                <a:latin typeface="Pretendard" pitchFamily="34" charset="0"/>
+                <a:ea typeface="Pretendard" pitchFamily="34" charset="-122"/>
+                <a:cs typeface="Pretendard" pitchFamily="34" charset="-120"/>
+              </a:rPr>
+              <a:t>잔차 관리도 거짓경보율</a:t>
+            </a:r>
+            <a:endParaRPr lang="en-US" sz="1150" dirty="0"/>
+          </a:p>
+        </p:txBody>
+      </p:sp>
+      <p:sp>
+        <p:nvSpPr>
+          <p:cNvPr id="16" name="Shape 13"/>
+          <p:cNvSpPr/>
+          <p:nvPr/>
+        </p:nvSpPr>
+        <p:spPr>
+          <a:xfrm>
+            <a:off x="640080" y="5852160"/>
+            <a:ext cx="11064240" cy="749808"/>
+          </a:xfrm>
+          <a:prstGeom prst="roundRect">
+            <a:avLst>
+              <a:gd name="adj" fmla="val 9756"/>
             </a:avLst>
           </a:prstGeom>
           <a:solidFill>
@@ -3392,14 +3476,14 @@
       </p:sp>
       <p:sp>
         <p:nvSpPr>
-          <p:cNvPr id="14" name="Text 10"/>
-          <p:cNvSpPr/>
-          <p:nvPr/>
-        </p:nvSpPr>
-        <p:spPr>
-          <a:xfrm>
-            <a:off x="7589520" y="5074920"/>
-            <a:ext cx="1828800" cy="457200"/>
+          <p:cNvPr id="17" name="Text 14"/>
+          <p:cNvSpPr/>
+          <p:nvPr/>
+        </p:nvSpPr>
+        <p:spPr>
+          <a:xfrm>
+            <a:off x="960120" y="5852160"/>
+            <a:ext cx="10607040" cy="749808"/>
           </a:xfrm>
           <a:prstGeom prst="rect">
             <a:avLst/>
@@ -3411,11 +3495,25 @@
           <a:bodyPr wrap="square" lIns="0" tIns="0" rIns="0" bIns="0" rtlCol="0" anchor="ctr"/>
           <a:lstStyle/>
           <a:p>
-            <a:pPr algn="ctr" indent="0" marL="0">
-              <a:buNone/>
-            </a:pPr>
-            <a:r>
-              <a:rPr lang="en-US" sz="1250" b="1" dirty="0">
+            <a:pPr indent="0" marL="0">
+              <a:buNone/>
+            </a:pPr>
+            <a:r>
+              <a:rPr lang="en-US" sz="1350" b="1" dirty="0">
+                <a:solidFill>
+                  <a:srgbClr val="C9D4FF"/>
+                </a:solidFill>
+                <a:latin typeface="Pretendard" pitchFamily="34" charset="0"/>
+                <a:ea typeface="Pretendard" pitchFamily="34" charset="-122"/>
+                <a:cs typeface="Pretendard" pitchFamily="34" charset="-120"/>
+              </a:rPr>
+              <a:t>핵심 성과   </a:t>
+            </a:r>
+            <a:pPr indent="0" marL="0">
+              <a:buNone/>
+            </a:pPr>
+            <a:r>
+              <a:rPr lang="en-US" sz="1350" b="1" dirty="0">
                 <a:solidFill>
                   <a:srgbClr val="FFFFFF"/>
                 </a:solidFill>
@@ -3423,87 +3521,9 @@
                 <a:ea typeface="Pretendard" pitchFamily="34" charset="-122"/>
                 <a:cs typeface="Pretendard" pitchFamily="34" charset="-120"/>
               </a:rPr>
-              <a:t>가설 검정 자동화</a:t>
-            </a:r>
-            <a:endParaRPr lang="en-US" sz="1250" dirty="0"/>
-          </a:p>
-        </p:txBody>
-      </p:sp>
-      <p:sp>
-        <p:nvSpPr>
-          <p:cNvPr id="15" name="Text 11"/>
-          <p:cNvSpPr/>
-          <p:nvPr/>
-        </p:nvSpPr>
-        <p:spPr>
-          <a:xfrm>
-            <a:off x="7589520" y="5596128"/>
-            <a:ext cx="4160520" cy="365760"/>
-          </a:xfrm>
-          <a:prstGeom prst="rect">
-            <a:avLst/>
-          </a:prstGeom>
-          <a:noFill/>
-          <a:ln/>
-        </p:spPr>
-        <p:txBody>
-          <a:bodyPr wrap="square" lIns="0" tIns="0" rIns="0" bIns="0" rtlCol="0" anchor="ctr"/>
-          <a:lstStyle/>
-          <a:p>
-            <a:pPr indent="0" marL="0">
-              <a:buNone/>
-            </a:pPr>
-            <a:r>
-              <a:rPr lang="en-US" sz="1100" i="1" dirty="0">
-                <a:solidFill>
-                  <a:srgbClr val="8A94A6"/>
-                </a:solidFill>
-                <a:latin typeface="Pretendard" pitchFamily="34" charset="0"/>
-                <a:ea typeface="Pretendard" pitchFamily="34" charset="-122"/>
-                <a:cs typeface="Pretendard" pitchFamily="34" charset="-120"/>
-              </a:rPr>
-              <a:t>daily 루프가 MD·Word 리포트 자동 생성</a:t>
-            </a:r>
-            <a:endParaRPr lang="en-US" sz="1100" dirty="0"/>
-          </a:p>
-        </p:txBody>
-      </p:sp>
-      <p:sp>
-        <p:nvSpPr>
-          <p:cNvPr id="16" name="Text 12"/>
-          <p:cNvSpPr/>
-          <p:nvPr/>
-        </p:nvSpPr>
-        <p:spPr>
-          <a:xfrm>
-            <a:off x="11320272" y="6437376"/>
-            <a:ext cx="548640" cy="274320"/>
-          </a:xfrm>
-          <a:prstGeom prst="rect">
-            <a:avLst/>
-          </a:prstGeom>
-          <a:noFill/>
-          <a:ln/>
-        </p:spPr>
-        <p:txBody>
-          <a:bodyPr wrap="square" rtlCol="0" anchor="ctr"/>
-          <a:lstStyle/>
-          <a:p>
-            <a:pPr algn="r" indent="0" marL="0">
-              <a:buNone/>
-            </a:pPr>
-            <a:r>
-              <a:rPr lang="en-US" sz="1000" dirty="0">
-                <a:solidFill>
-                  <a:srgbClr val="8A94A6"/>
-                </a:solidFill>
-                <a:latin typeface="Pretendard" pitchFamily="34" charset="0"/>
-                <a:ea typeface="Pretendard" pitchFamily="34" charset="-122"/>
-                <a:cs typeface="Pretendard" pitchFamily="34" charset="-120"/>
-              </a:rPr>
-              <a:t>11</a:t>
-            </a:r>
-            <a:endParaRPr lang="en-US" sz="1000" dirty="0"/>
+              <a:t>|   원시 관리도의 이탈은 대부분 자기상관에 의한 거짓경보 — 잔차에 남는 이탈만이 진짜 특수원인 후보</a:t>
+            </a:r>
+            <a:endParaRPr lang="en-US" sz="1350" dirty="0"/>
           </a:p>
         </p:txBody>
       </p:sp>
@@ -3592,6 +3612,545 @@
                 <a:ea typeface="Pretendard" pitchFamily="34" charset="-122"/>
                 <a:cs typeface="Pretendard" pitchFamily="34" charset="-120"/>
               </a:rPr>
+              <a:t>통계 분석 — 단지 비교 검정</a:t>
+            </a:r>
+            <a:endParaRPr lang="en-US" sz="2700" dirty="0"/>
+          </a:p>
+        </p:txBody>
+      </p:sp>
+      <p:sp>
+        <p:nvSpPr>
+          <p:cNvPr id="4" name="Shape 2"/>
+          <p:cNvSpPr/>
+          <p:nvPr/>
+        </p:nvSpPr>
+        <p:spPr>
+          <a:xfrm>
+            <a:off x="530352" y="950976"/>
+            <a:ext cx="64008" cy="237744"/>
+          </a:xfrm>
+          <a:prstGeom prst="rect">
+            <a:avLst/>
+          </a:prstGeom>
+          <a:solidFill>
+            <a:srgbClr val="1F40E6"/>
+          </a:solidFill>
+          <a:ln/>
+        </p:spPr>
+      </p:sp>
+      <p:sp>
+        <p:nvSpPr>
+          <p:cNvPr id="5" name="Text 3"/>
+          <p:cNvSpPr/>
+          <p:nvPr/>
+        </p:nvSpPr>
+        <p:spPr>
+          <a:xfrm>
+            <a:off x="685800" y="914400"/>
+            <a:ext cx="10058400" cy="310896"/>
+          </a:xfrm>
+          <a:prstGeom prst="rect">
+            <a:avLst/>
+          </a:prstGeom>
+          <a:noFill/>
+          <a:ln/>
+        </p:spPr>
+        <p:txBody>
+          <a:bodyPr wrap="square" lIns="0" tIns="0" rIns="0" bIns="0" rtlCol="0" anchor="ctr"/>
+          <a:lstStyle/>
+          <a:p>
+            <a:pPr indent="0" marL="0">
+              <a:buNone/>
+            </a:pPr>
+            <a:r>
+              <a:rPr lang="en-US" sz="1300" dirty="0">
+                <a:solidFill>
+                  <a:srgbClr val="8A94A6"/>
+                </a:solidFill>
+                <a:latin typeface="Pretendard" pitchFamily="34" charset="0"/>
+                <a:ea typeface="Pretendard" pitchFamily="34" charset="-122"/>
+                <a:cs typeface="Pretendard" pitchFamily="34" charset="-120"/>
+              </a:rPr>
+              <a:t>산단 영향군 vs 거주지 (Welch t-test)</a:t>
+            </a:r>
+            <a:endParaRPr lang="en-US" sz="1300" dirty="0"/>
+          </a:p>
+        </p:txBody>
+      </p:sp>
+      <p:pic>
+        <p:nvPicPr>
+          <p:cNvPr id="6" name="Image 0" descr="/Users/t2025-m0190/workspace/chungbuk-air-quality-monitor/build/deck/img/group_box.png">    </p:cNvPr>
+          <p:cNvPicPr>
+            <a:picLocks noChangeAspect="1"/>
+          </p:cNvPicPr>
+          <p:nvPr/>
+        </p:nvPicPr>
+        <p:blipFill>
+          <a:blip r:embed="rId1"/>
+          <a:stretch>
+            <a:fillRect/>
+          </a:stretch>
+        </p:blipFill>
+        <p:spPr>
+          <a:xfrm>
+            <a:off x="640080" y="1600200"/>
+            <a:ext cx="6400800" cy="3584448"/>
+          </a:xfrm>
+          <a:prstGeom prst="rect">
+            <a:avLst/>
+          </a:prstGeom>
+        </p:spPr>
+      </p:pic>
+      <p:pic>
+        <p:nvPicPr>
+          <p:cNvPr id="7" name="Image 1" descr="preencoded.png">    </p:cNvPr>
+          <p:cNvPicPr>
+            <a:picLocks noChangeAspect="1"/>
+          </p:cNvPicPr>
+          <p:nvPr/>
+        </p:nvPicPr>
+        <p:blipFill>
+          <a:blip r:embed="rId2"/>
+          <a:stretch>
+            <a:fillRect/>
+          </a:stretch>
+        </p:blipFill>
+        <p:spPr>
+          <a:xfrm>
+            <a:off x="7589520" y="1783080"/>
+            <a:ext cx="411480" cy="411480"/>
+          </a:xfrm>
+          <a:prstGeom prst="rect">
+            <a:avLst/>
+          </a:prstGeom>
+        </p:spPr>
+      </p:pic>
+      <p:sp>
+        <p:nvSpPr>
+          <p:cNvPr id="8" name="Text 4"/>
+          <p:cNvSpPr/>
+          <p:nvPr/>
+        </p:nvSpPr>
+        <p:spPr>
+          <a:xfrm>
+            <a:off x="8092440" y="1783080"/>
+            <a:ext cx="3657600" cy="411480"/>
+          </a:xfrm>
+          <a:prstGeom prst="rect">
+            <a:avLst/>
+          </a:prstGeom>
+          <a:noFill/>
+          <a:ln/>
+        </p:spPr>
+        <p:txBody>
+          <a:bodyPr wrap="square" lIns="0" tIns="0" rIns="0" bIns="0" rtlCol="0" anchor="ctr"/>
+          <a:lstStyle/>
+          <a:p>
+            <a:pPr indent="0" marL="0">
+              <a:buNone/>
+            </a:pPr>
+            <a:r>
+              <a:rPr lang="en-US" sz="1700" b="1" dirty="0">
+                <a:solidFill>
+                  <a:srgbClr val="1F40E6"/>
+                </a:solidFill>
+                <a:latin typeface="Pretendard" pitchFamily="34" charset="0"/>
+                <a:ea typeface="Pretendard" pitchFamily="34" charset="-122"/>
+                <a:cs typeface="Pretendard" pitchFamily="34" charset="-120"/>
+              </a:rPr>
+              <a:t>검증 결과</a:t>
+            </a:r>
+            <a:endParaRPr lang="en-US" sz="1700" dirty="0"/>
+          </a:p>
+        </p:txBody>
+      </p:sp>
+      <p:sp>
+        <p:nvSpPr>
+          <p:cNvPr id="9" name="Shape 5"/>
+          <p:cNvSpPr/>
+          <p:nvPr/>
+        </p:nvSpPr>
+        <p:spPr>
+          <a:xfrm>
+            <a:off x="7589520" y="2377440"/>
+            <a:ext cx="4114800" cy="0"/>
+          </a:xfrm>
+          <a:prstGeom prst="line">
+            <a:avLst/>
+          </a:prstGeom>
+          <a:noFill/>
+          <a:ln w="12700">
+            <a:solidFill>
+              <a:srgbClr val="DCE3F2"/>
+            </a:solidFill>
+            <a:prstDash val="solid"/>
+          </a:ln>
+        </p:spPr>
+      </p:sp>
+      <p:sp>
+        <p:nvSpPr>
+          <p:cNvPr id="10" name="Text 6"/>
+          <p:cNvSpPr/>
+          <p:nvPr/>
+        </p:nvSpPr>
+        <p:spPr>
+          <a:xfrm>
+            <a:off x="7589520" y="2560320"/>
+            <a:ext cx="4114800" cy="320040"/>
+          </a:xfrm>
+          <a:prstGeom prst="rect">
+            <a:avLst/>
+          </a:prstGeom>
+          <a:noFill/>
+          <a:ln/>
+        </p:spPr>
+        <p:txBody>
+          <a:bodyPr wrap="square" lIns="0" tIns="0" rIns="0" bIns="0" rtlCol="0" anchor="ctr"/>
+          <a:lstStyle/>
+          <a:p>
+            <a:pPr indent="0" marL="0">
+              <a:buNone/>
+            </a:pPr>
+            <a:r>
+              <a:rPr lang="en-US" sz="1200" b="1" dirty="0">
+                <a:solidFill>
+                  <a:srgbClr val="8A94A6"/>
+                </a:solidFill>
+                <a:latin typeface="Pretendard" pitchFamily="34" charset="0"/>
+                <a:ea typeface="Pretendard" pitchFamily="34" charset="-122"/>
+                <a:cs typeface="Pretendard" pitchFamily="34" charset="-120"/>
+              </a:rPr>
+              <a:t>가설</a:t>
+            </a:r>
+            <a:endParaRPr lang="en-US" sz="1200" dirty="0"/>
+          </a:p>
+        </p:txBody>
+      </p:sp>
+      <p:sp>
+        <p:nvSpPr>
+          <p:cNvPr id="11" name="Text 7"/>
+          <p:cNvSpPr/>
+          <p:nvPr/>
+        </p:nvSpPr>
+        <p:spPr>
+          <a:xfrm>
+            <a:off x="7589520" y="2880360"/>
+            <a:ext cx="4160520" cy="731520"/>
+          </a:xfrm>
+          <a:prstGeom prst="rect">
+            <a:avLst/>
+          </a:prstGeom>
+          <a:noFill/>
+          <a:ln/>
+        </p:spPr>
+        <p:txBody>
+          <a:bodyPr wrap="square" lIns="0" tIns="0" rIns="0" bIns="0" rtlCol="0" anchor="t"/>
+          <a:lstStyle/>
+          <a:p>
+            <a:pPr indent="0" marL="0">
+              <a:lnSpc>
+                <a:spcPct val="125000"/>
+              </a:lnSpc>
+              <a:buNone/>
+            </a:pPr>
+            <a:r>
+              <a:rPr lang="en-US" sz="1400" b="1" dirty="0">
+                <a:solidFill>
+                  <a:srgbClr val="151B2E"/>
+                </a:solidFill>
+                <a:latin typeface="Pretendard" pitchFamily="34" charset="0"/>
+                <a:ea typeface="Pretendard" pitchFamily="34" charset="-122"/>
+                <a:cs typeface="Pretendard" pitchFamily="34" charset="-120"/>
+              </a:rPr>
+              <a:t>“산단 영향군의 PM2.5 평균이 거주지보다 높을 것이다”</a:t>
+            </a:r>
+            <a:endParaRPr lang="en-US" sz="1400" dirty="0"/>
+          </a:p>
+        </p:txBody>
+      </p:sp>
+      <p:sp>
+        <p:nvSpPr>
+          <p:cNvPr id="12" name="Text 8"/>
+          <p:cNvSpPr/>
+          <p:nvPr/>
+        </p:nvSpPr>
+        <p:spPr>
+          <a:xfrm>
+            <a:off x="7589520" y="3703320"/>
+            <a:ext cx="4160520" cy="1188720"/>
+          </a:xfrm>
+          <a:prstGeom prst="rect">
+            <a:avLst/>
+          </a:prstGeom>
+          <a:noFill/>
+          <a:ln/>
+        </p:spPr>
+        <p:txBody>
+          <a:bodyPr wrap="square" lIns="0" tIns="0" rIns="0" bIns="0" rtlCol="0" anchor="t"/>
+          <a:lstStyle/>
+          <a:p>
+            <a:pPr indent="0" marL="0">
+              <a:lnSpc>
+                <a:spcPct val="130000"/>
+              </a:lnSpc>
+              <a:buNone/>
+            </a:pPr>
+            <a:r>
+              <a:rPr lang="en-US" sz="1250" b="1" dirty="0">
+                <a:solidFill>
+                  <a:srgbClr val="1F40E6"/>
+                </a:solidFill>
+                <a:latin typeface="Pretendard" pitchFamily="34" charset="0"/>
+                <a:ea typeface="Pretendard" pitchFamily="34" charset="-122"/>
+                <a:cs typeface="Pretendard" pitchFamily="34" charset="-120"/>
+              </a:rPr>
+              <a:t>Welch t-test</a:t>
+            </a:r>
+            <a:pPr indent="0" marL="0">
+              <a:lnSpc>
+                <a:spcPct val="130000"/>
+              </a:lnSpc>
+              <a:buNone/>
+            </a:pPr>
+            <a:r>
+              <a:rPr lang="en-US" sz="1250" dirty="0">
+                <a:solidFill>
+                  <a:srgbClr val="44506A"/>
+                </a:solidFill>
+                <a:latin typeface="Pretendard" pitchFamily="34" charset="0"/>
+                <a:ea typeface="Pretendard" pitchFamily="34" charset="-122"/>
+                <a:cs typeface="Pretendard" pitchFamily="34" charset="-120"/>
+              </a:rPr>
+              <a:t>로 두 군 평균차의 통계적 유의성을 검정. Cohen’s d로 효과크기를 함께 산출해 실질적 차이를 확인.</a:t>
+            </a:r>
+            <a:endParaRPr lang="en-US" sz="1250" dirty="0"/>
+          </a:p>
+        </p:txBody>
+      </p:sp>
+      <p:sp>
+        <p:nvSpPr>
+          <p:cNvPr id="13" name="Shape 9"/>
+          <p:cNvSpPr/>
+          <p:nvPr/>
+        </p:nvSpPr>
+        <p:spPr>
+          <a:xfrm>
+            <a:off x="7589520" y="5074920"/>
+            <a:ext cx="1828800" cy="457200"/>
+          </a:xfrm>
+          <a:prstGeom prst="roundRect">
+            <a:avLst>
+              <a:gd name="adj" fmla="val 50000"/>
+            </a:avLst>
+          </a:prstGeom>
+          <a:solidFill>
+            <a:srgbClr val="1F40E6"/>
+          </a:solidFill>
+          <a:ln/>
+        </p:spPr>
+      </p:sp>
+      <p:sp>
+        <p:nvSpPr>
+          <p:cNvPr id="14" name="Text 10"/>
+          <p:cNvSpPr/>
+          <p:nvPr/>
+        </p:nvSpPr>
+        <p:spPr>
+          <a:xfrm>
+            <a:off x="7589520" y="5074920"/>
+            <a:ext cx="1828800" cy="457200"/>
+          </a:xfrm>
+          <a:prstGeom prst="rect">
+            <a:avLst/>
+          </a:prstGeom>
+          <a:noFill/>
+          <a:ln/>
+        </p:spPr>
+        <p:txBody>
+          <a:bodyPr wrap="square" lIns="0" tIns="0" rIns="0" bIns="0" rtlCol="0" anchor="ctr"/>
+          <a:lstStyle/>
+          <a:p>
+            <a:pPr algn="ctr" indent="0" marL="0">
+              <a:buNone/>
+            </a:pPr>
+            <a:r>
+              <a:rPr lang="en-US" sz="1250" b="1" dirty="0">
+                <a:solidFill>
+                  <a:srgbClr val="FFFFFF"/>
+                </a:solidFill>
+                <a:latin typeface="Pretendard" pitchFamily="34" charset="0"/>
+                <a:ea typeface="Pretendard" pitchFamily="34" charset="-122"/>
+                <a:cs typeface="Pretendard" pitchFamily="34" charset="-120"/>
+              </a:rPr>
+              <a:t>가설 검정 자동화</a:t>
+            </a:r>
+            <a:endParaRPr lang="en-US" sz="1250" dirty="0"/>
+          </a:p>
+        </p:txBody>
+      </p:sp>
+      <p:sp>
+        <p:nvSpPr>
+          <p:cNvPr id="15" name="Text 11"/>
+          <p:cNvSpPr/>
+          <p:nvPr/>
+        </p:nvSpPr>
+        <p:spPr>
+          <a:xfrm>
+            <a:off x="7589520" y="5596128"/>
+            <a:ext cx="4160520" cy="365760"/>
+          </a:xfrm>
+          <a:prstGeom prst="rect">
+            <a:avLst/>
+          </a:prstGeom>
+          <a:noFill/>
+          <a:ln/>
+        </p:spPr>
+        <p:txBody>
+          <a:bodyPr wrap="square" lIns="0" tIns="0" rIns="0" bIns="0" rtlCol="0" anchor="ctr"/>
+          <a:lstStyle/>
+          <a:p>
+            <a:pPr indent="0" marL="0">
+              <a:buNone/>
+            </a:pPr>
+            <a:r>
+              <a:rPr lang="en-US" sz="1100" i="1" dirty="0">
+                <a:solidFill>
+                  <a:srgbClr val="8A94A6"/>
+                </a:solidFill>
+                <a:latin typeface="Pretendard" pitchFamily="34" charset="0"/>
+                <a:ea typeface="Pretendard" pitchFamily="34" charset="-122"/>
+                <a:cs typeface="Pretendard" pitchFamily="34" charset="-120"/>
+              </a:rPr>
+              <a:t>daily 루프가 MD·Word 리포트 자동 생성</a:t>
+            </a:r>
+            <a:endParaRPr lang="en-US" sz="1100" dirty="0"/>
+          </a:p>
+        </p:txBody>
+      </p:sp>
+      <p:sp>
+        <p:nvSpPr>
+          <p:cNvPr id="16" name="Text 12"/>
+          <p:cNvSpPr/>
+          <p:nvPr/>
+        </p:nvSpPr>
+        <p:spPr>
+          <a:xfrm>
+            <a:off x="11320272" y="6437376"/>
+            <a:ext cx="548640" cy="274320"/>
+          </a:xfrm>
+          <a:prstGeom prst="rect">
+            <a:avLst/>
+          </a:prstGeom>
+          <a:noFill/>
+          <a:ln/>
+        </p:spPr>
+        <p:txBody>
+          <a:bodyPr wrap="square" rtlCol="0" anchor="ctr"/>
+          <a:lstStyle/>
+          <a:p>
+            <a:pPr algn="r" indent="0" marL="0">
+              <a:buNone/>
+            </a:pPr>
+            <a:r>
+              <a:rPr lang="en-US" sz="1000" dirty="0">
+                <a:solidFill>
+                  <a:srgbClr val="8A94A6"/>
+                </a:solidFill>
+                <a:latin typeface="Pretendard" pitchFamily="34" charset="0"/>
+                <a:ea typeface="Pretendard" pitchFamily="34" charset="-122"/>
+                <a:cs typeface="Pretendard" pitchFamily="34" charset="-120"/>
+              </a:rPr>
+              <a:t>12</a:t>
+            </a:r>
+            <a:endParaRPr lang="en-US" sz="1000" dirty="0"/>
+          </a:p>
+        </p:txBody>
+      </p:sp>
+    </p:spTree>
+  </p:cSld>
+  <p:clrMapOvr>
+    <a:masterClrMapping/>
+  </p:clrMapOvr>
+</p:sld>
+</file>
+
+<file path=ppt/slides/slide13.xml><?xml version="1.0" encoding="utf-8"?>
+<p:sld xmlns:a="http://schemas.openxmlformats.org/drawingml/2006/main" xmlns:r="http://schemas.openxmlformats.org/officeDocument/2006/relationships" xmlns:p="http://schemas.openxmlformats.org/presentationml/2006/main">
+  <p:cSld name="Slide 13">
+    <p:bg>
+      <p:bgPr>
+        <a:solidFill>
+          <a:srgbClr val="FFFFFF"/>
+        </a:solidFill>
+      </p:bgPr>
+    </p:bg>
+    <p:spTree>
+      <p:nvGrpSpPr>
+        <p:cNvPr id="1" name=""/>
+        <p:cNvGrpSpPr/>
+        <p:nvPr/>
+      </p:nvGrpSpPr>
+      <p:grpSpPr>
+        <a:xfrm>
+          <a:off x="0" y="0"/>
+          <a:ext cx="0" cy="0"/>
+          <a:chOff x="0" y="0"/>
+          <a:chExt cx="0" cy="0"/>
+        </a:xfrm>
+      </p:grpSpPr>
+      <p:sp>
+        <p:nvSpPr>
+          <p:cNvPr id="2" name="Shape 0"/>
+          <p:cNvSpPr/>
+          <p:nvPr/>
+        </p:nvSpPr>
+        <p:spPr>
+          <a:xfrm>
+            <a:off x="0" y="0"/>
+            <a:ext cx="146304" cy="6858000"/>
+          </a:xfrm>
+          <a:prstGeom prst="rect">
+            <a:avLst/>
+          </a:prstGeom>
+          <a:solidFill>
+            <a:srgbClr val="1F40E6"/>
+          </a:solidFill>
+          <a:ln/>
+        </p:spPr>
+      </p:sp>
+      <p:sp>
+        <p:nvSpPr>
+          <p:cNvPr id="3" name="Text 1"/>
+          <p:cNvSpPr/>
+          <p:nvPr/>
+        </p:nvSpPr>
+        <p:spPr>
+          <a:xfrm>
+            <a:off x="502920" y="274320"/>
+            <a:ext cx="10515600" cy="566928"/>
+          </a:xfrm>
+          <a:prstGeom prst="rect">
+            <a:avLst/>
+          </a:prstGeom>
+          <a:noFill/>
+          <a:ln/>
+        </p:spPr>
+        <p:txBody>
+          <a:bodyPr wrap="square" lIns="0" tIns="0" rIns="0" bIns="0" rtlCol="0" anchor="ctr"/>
+          <a:lstStyle/>
+          <a:p>
+            <a:pPr indent="0" marL="0">
+              <a:buNone/>
+            </a:pPr>
+            <a:r>
+              <a:rPr lang="en-US" sz="2700" b="1" dirty="0">
+                <a:solidFill>
+                  <a:srgbClr val="151B2E"/>
+                </a:solidFill>
+                <a:latin typeface="Pretendard" pitchFamily="34" charset="0"/>
+                <a:ea typeface="Pretendard" pitchFamily="34" charset="-122"/>
+                <a:cs typeface="Pretendard" pitchFamily="34" charset="-120"/>
+              </a:rPr>
               <a:t>이상 탐지 자동화 &amp; 실시간 알림</a:t>
             </a:r>
             <a:endParaRPr lang="en-US" sz="2700" dirty="0"/>
@@ -4475,7 +5034,7 @@
                 <a:ea typeface="Pretendard" pitchFamily="34" charset="-122"/>
                 <a:cs typeface="Pretendard" pitchFamily="34" charset="-120"/>
               </a:rPr>
-              <a:t>12</a:t>
+              <a:t>13</a:t>
             </a:r>
             <a:endParaRPr lang="en-US" sz="1000" dirty="0"/>
           </a:p>
@@ -4489,9 +5048,9 @@
 </p:sld>
 </file>
 
-<file path=ppt/slides/slide13.xml><?xml version="1.0" encoding="utf-8"?>
+<file path=ppt/slides/slide14.xml><?xml version="1.0" encoding="utf-8"?>
 <p:sld xmlns:a="http://schemas.openxmlformats.org/drawingml/2006/main" xmlns:r="http://schemas.openxmlformats.org/officeDocument/2006/relationships" xmlns:p="http://schemas.openxmlformats.org/presentationml/2006/main">
-  <p:cSld name="Slide 13">
+  <p:cSld name="Slide 14">
     <p:bg>
       <p:bgPr>
         <a:solidFill>
@@ -6825,7 +7384,7 @@
                 <a:ea typeface="Pretendard" pitchFamily="34" charset="-122"/>
                 <a:cs typeface="Pretendard" pitchFamily="34" charset="-120"/>
               </a:rPr>
-              <a:t>문제 정의</a:t>
+              <a:t>분석 배경 &amp; 동기</a:t>
             </a:r>
             <a:endParaRPr lang="en-US" sz="2700" dirty="0"/>
           </a:p>
@@ -6884,7 +7443,7 @@
                 <a:ea typeface="Pretendard" pitchFamily="34" charset="-122"/>
                 <a:cs typeface="Pretendard" pitchFamily="34" charset="-120"/>
               </a:rPr>
-              <a:t>주제 · 분석 배경 · 분석 목표</a:t>
+              <a:t>왜 이 분석을 시작했는가</a:t>
             </a:r>
             <a:endParaRPr lang="en-US" sz="1300" dirty="0"/>
           </a:p>
@@ -7006,7 +7565,7 @@
                 <a:ea typeface="Pretendard" pitchFamily="34" charset="-122"/>
                 <a:cs typeface="Pretendard" pitchFamily="34" charset="-120"/>
               </a:rPr>
-              <a:t>대기질을 제조 공정에 빗대어 SPC로 상시 감시 — 산단 인근이 거주지보다 나쁜가?</a:t>
+              <a:t>공개 대기질 데이터를 ‘제조 공정’에 빗대어, QC·생산관리 직무 역량을 실데이터로 증명하기 위해 시작했다</a:t>
             </a:r>
             <a:endParaRPr lang="en-US" sz="1350" dirty="0"/>
           </a:p>
@@ -7020,12 +7579,12 @@
         </p:nvSpPr>
         <p:spPr>
           <a:xfrm>
-            <a:off x="640080" y="2240280"/>
-            <a:ext cx="3566160" cy="1874520"/>
+            <a:off x="640080" y="2194560"/>
+            <a:ext cx="5440680" cy="1755648"/>
           </a:xfrm>
           <a:prstGeom prst="roundRect">
             <a:avLst>
-              <a:gd name="adj" fmla="val 3902"/>
+              <a:gd name="adj" fmla="val 4167"/>
             </a:avLst>
           </a:prstGeom>
           <a:solidFill>
@@ -7054,8 +7613,8 @@
         </p:nvSpPr>
         <p:spPr>
           <a:xfrm>
-            <a:off x="804672" y="2386584"/>
-            <a:ext cx="3236976" cy="64008"/>
+            <a:off x="804672" y="2340864"/>
+            <a:ext cx="5111496" cy="64008"/>
           </a:xfrm>
           <a:prstGeom prst="rect">
             <a:avLst/>
@@ -7066,9 +7625,29 @@
           <a:ln/>
         </p:spPr>
       </p:sp>
+      <p:sp>
+        <p:nvSpPr>
+          <p:cNvPr id="12" name="Shape 10"/>
+          <p:cNvSpPr/>
+          <p:nvPr/>
+        </p:nvSpPr>
+        <p:spPr>
+          <a:xfrm>
+            <a:off x="960120" y="2697480"/>
+            <a:ext cx="868680" cy="868680"/>
+          </a:xfrm>
+          <a:prstGeom prst="ellipse">
+            <a:avLst/>
+          </a:prstGeom>
+          <a:solidFill>
+            <a:srgbClr val="EEF1FB"/>
+          </a:solidFill>
+          <a:ln/>
+        </p:spPr>
+      </p:sp>
       <p:pic>
         <p:nvPicPr>
-          <p:cNvPr id="12" name="Image 0" descr="preencoded.png">    </p:cNvPr>
+          <p:cNvPr id="13" name="Image 0" descr="preencoded.png">    </p:cNvPr>
           <p:cNvPicPr>
             <a:picLocks noChangeAspect="1"/>
           </p:cNvPicPr>
@@ -7082,8 +7661,8 @@
         </p:blipFill>
         <p:spPr>
           <a:xfrm>
-            <a:off x="932688" y="2542032"/>
-            <a:ext cx="566928" cy="566928"/>
+            <a:off x="1179576" y="2916936"/>
+            <a:ext cx="429768" cy="429768"/>
           </a:xfrm>
           <a:prstGeom prst="rect">
             <a:avLst/>
@@ -7092,14 +7671,14 @@
       </p:pic>
       <p:sp>
         <p:nvSpPr>
-          <p:cNvPr id="13" name="Text 10"/>
-          <p:cNvSpPr/>
-          <p:nvPr/>
-        </p:nvSpPr>
-        <p:spPr>
-          <a:xfrm>
-            <a:off x="1645920" y="2578608"/>
-            <a:ext cx="2377440" cy="457200"/>
+          <p:cNvPr id="14" name="Text 11"/>
+          <p:cNvSpPr/>
+          <p:nvPr/>
+        </p:nvSpPr>
+        <p:spPr>
+          <a:xfrm>
+            <a:off x="2057400" y="2578608"/>
+            <a:ext cx="3794760" cy="411480"/>
           </a:xfrm>
           <a:prstGeom prst="rect">
             <a:avLst/>
@@ -7115,7 +7694,7 @@
               <a:buNone/>
             </a:pPr>
             <a:r>
-              <a:rPr lang="en-US" sz="1700" b="1" dirty="0">
+              <a:rPr lang="en-US" sz="1650" b="1" dirty="0">
                 <a:solidFill>
                   <a:srgbClr val="151B2E"/>
                 </a:solidFill>
@@ -7123,22 +7702,22 @@
                 <a:ea typeface="Pretendard" pitchFamily="34" charset="-122"/>
                 <a:cs typeface="Pretendard" pitchFamily="34" charset="-120"/>
               </a:rPr>
-              <a:t>분석 주제</a:t>
-            </a:r>
-            <a:endParaRPr lang="en-US" sz="1700" dirty="0"/>
-          </a:p>
-        </p:txBody>
-      </p:sp>
-      <p:sp>
-        <p:nvSpPr>
-          <p:cNvPr id="14" name="Text 11"/>
-          <p:cNvSpPr/>
-          <p:nvPr/>
-        </p:nvSpPr>
-        <p:spPr>
-          <a:xfrm>
-            <a:off x="950976" y="3246120"/>
-            <a:ext cx="2971800" cy="777240"/>
+              <a:t>직무 역량 입증</a:t>
+            </a:r>
+            <a:endParaRPr lang="en-US" sz="1650" dirty="0"/>
+          </a:p>
+        </p:txBody>
+      </p:sp>
+      <p:sp>
+        <p:nvSpPr>
+          <p:cNvPr id="15" name="Text 12"/>
+          <p:cNvSpPr/>
+          <p:nvPr/>
+        </p:nvSpPr>
+        <p:spPr>
+          <a:xfrm>
+            <a:off x="2057400" y="3035808"/>
+            <a:ext cx="3794760" cy="777240"/>
           </a:xfrm>
           <a:prstGeom prst="rect">
             <a:avLst/>
@@ -7152,12 +7731,12 @@
           <a:p>
             <a:pPr indent="0" marL="0">
               <a:lnSpc>
-                <a:spcPct val="125000"/>
+                <a:spcPct val="128000"/>
               </a:lnSpc>
               <a:buNone/>
             </a:pPr>
             <a:r>
-              <a:rPr lang="en-US" sz="1250" dirty="0">
+              <a:rPr lang="en-US" sz="1200" dirty="0">
                 <a:solidFill>
                   <a:srgbClr val="44506A"/>
                 </a:solidFill>
@@ -7165,26 +7744,26 @@
                 <a:ea typeface="Pretendard" pitchFamily="34" charset="-122"/>
                 <a:cs typeface="Pretendard" pitchFamily="34" charset="-120"/>
               </a:rPr>
-              <a:t>측정소=공정 라인, 오염물질=품질특성(CQA), 환경기준=규격(USL)으로 매핑한 메타포 프로젝트</a:t>
-            </a:r>
-            <a:endParaRPr lang="en-US" sz="1250" dirty="0"/>
-          </a:p>
-        </p:txBody>
-      </p:sp>
-      <p:sp>
-        <p:nvSpPr>
-          <p:cNvPr id="15" name="Shape 12"/>
-          <p:cNvSpPr/>
-          <p:nvPr/>
-        </p:nvSpPr>
-        <p:spPr>
-          <a:xfrm>
-            <a:off x="4343400" y="2240280"/>
-            <a:ext cx="3566160" cy="1874520"/>
+              <a:t>QC/API 생산관리 직무 지원 — SPC·6시그마·데이터 자동화 역량을 ‘말’이 아닌 실데이터·실코드로 증명</a:t>
+            </a:r>
+            <a:endParaRPr lang="en-US" sz="1200" dirty="0"/>
+          </a:p>
+        </p:txBody>
+      </p:sp>
+      <p:sp>
+        <p:nvSpPr>
+          <p:cNvPr id="16" name="Shape 13"/>
+          <p:cNvSpPr/>
+          <p:nvPr/>
+        </p:nvSpPr>
+        <p:spPr>
+          <a:xfrm>
+            <a:off x="6263640" y="2194560"/>
+            <a:ext cx="5440680" cy="1755648"/>
           </a:xfrm>
           <a:prstGeom prst="roundRect">
             <a:avLst>
-              <a:gd name="adj" fmla="val 3902"/>
+              <a:gd name="adj" fmla="val 4167"/>
             </a:avLst>
           </a:prstGeom>
           <a:solidFill>
@@ -7207,14 +7786,14 @@
       </p:sp>
       <p:sp>
         <p:nvSpPr>
-          <p:cNvPr id="16" name="Shape 13"/>
-          <p:cNvSpPr/>
-          <p:nvPr/>
-        </p:nvSpPr>
-        <p:spPr>
-          <a:xfrm>
-            <a:off x="4507992" y="2386584"/>
-            <a:ext cx="3236976" cy="64008"/>
+          <p:cNvPr id="17" name="Shape 14"/>
+          <p:cNvSpPr/>
+          <p:nvPr/>
+        </p:nvSpPr>
+        <p:spPr>
+          <a:xfrm>
+            <a:off x="6428232" y="2340864"/>
+            <a:ext cx="5111496" cy="64008"/>
           </a:xfrm>
           <a:prstGeom prst="rect">
             <a:avLst/>
@@ -7225,9 +7804,29 @@
           <a:ln/>
         </p:spPr>
       </p:sp>
+      <p:sp>
+        <p:nvSpPr>
+          <p:cNvPr id="18" name="Shape 15"/>
+          <p:cNvSpPr/>
+          <p:nvPr/>
+        </p:nvSpPr>
+        <p:spPr>
+          <a:xfrm>
+            <a:off x="6583680" y="2697480"/>
+            <a:ext cx="868680" cy="868680"/>
+          </a:xfrm>
+          <a:prstGeom prst="ellipse">
+            <a:avLst/>
+          </a:prstGeom>
+          <a:solidFill>
+            <a:srgbClr val="EEF1FB"/>
+          </a:solidFill>
+          <a:ln/>
+        </p:spPr>
+      </p:sp>
       <p:pic>
         <p:nvPicPr>
-          <p:cNvPr id="17" name="Image 1" descr="preencoded.png">    </p:cNvPr>
+          <p:cNvPr id="19" name="Image 1" descr="preencoded.png">    </p:cNvPr>
           <p:cNvPicPr>
             <a:picLocks noChangeAspect="1"/>
           </p:cNvPicPr>
@@ -7241,8 +7840,8 @@
         </p:blipFill>
         <p:spPr>
           <a:xfrm>
-            <a:off x="4636008" y="2542032"/>
-            <a:ext cx="566928" cy="566928"/>
+            <a:off x="6803136" y="2916936"/>
+            <a:ext cx="429768" cy="429768"/>
           </a:xfrm>
           <a:prstGeom prst="rect">
             <a:avLst/>
@@ -7251,14 +7850,14 @@
       </p:pic>
       <p:sp>
         <p:nvSpPr>
-          <p:cNvPr id="18" name="Text 14"/>
-          <p:cNvSpPr/>
-          <p:nvPr/>
-        </p:nvSpPr>
-        <p:spPr>
-          <a:xfrm>
-            <a:off x="5349240" y="2578608"/>
-            <a:ext cx="2377440" cy="457200"/>
+          <p:cNvPr id="20" name="Text 16"/>
+          <p:cNvSpPr/>
+          <p:nvPr/>
+        </p:nvSpPr>
+        <p:spPr>
+          <a:xfrm>
+            <a:off x="7680960" y="2578608"/>
+            <a:ext cx="3794760" cy="411480"/>
           </a:xfrm>
           <a:prstGeom prst="rect">
             <a:avLst/>
@@ -7274,7 +7873,7 @@
               <a:buNone/>
             </a:pPr>
             <a:r>
-              <a:rPr lang="en-US" sz="1700" b="1" dirty="0">
+              <a:rPr lang="en-US" sz="1650" b="1" dirty="0">
                 <a:solidFill>
                   <a:srgbClr val="151B2E"/>
                 </a:solidFill>
@@ -7282,22 +7881,22 @@
                 <a:ea typeface="Pretendard" pitchFamily="34" charset="-122"/>
                 <a:cs typeface="Pretendard" pitchFamily="34" charset="-120"/>
               </a:rPr>
-              <a:t>분석 목표</a:t>
-            </a:r>
-            <a:endParaRPr lang="en-US" sz="1700" dirty="0"/>
-          </a:p>
-        </p:txBody>
-      </p:sp>
-      <p:sp>
-        <p:nvSpPr>
-          <p:cNvPr id="19" name="Text 15"/>
-          <p:cNvSpPr/>
-          <p:nvPr/>
-        </p:nvSpPr>
-        <p:spPr>
-          <a:xfrm>
-            <a:off x="4654296" y="3246120"/>
-            <a:ext cx="2971800" cy="777240"/>
+              <a:t>메타포로 끝까지 구현</a:t>
+            </a:r>
+            <a:endParaRPr lang="en-US" sz="1650" dirty="0"/>
+          </a:p>
+        </p:txBody>
+      </p:sp>
+      <p:sp>
+        <p:nvSpPr>
+          <p:cNvPr id="21" name="Text 17"/>
+          <p:cNvSpPr/>
+          <p:nvPr/>
+        </p:nvSpPr>
+        <p:spPr>
+          <a:xfrm>
+            <a:off x="7680960" y="3035808"/>
+            <a:ext cx="3794760" cy="777240"/>
           </a:xfrm>
           <a:prstGeom prst="rect">
             <a:avLst/>
@@ -7311,12 +7910,12 @@
           <a:p>
             <a:pPr indent="0" marL="0">
               <a:lnSpc>
-                <a:spcPct val="125000"/>
+                <a:spcPct val="128000"/>
               </a:lnSpc>
               <a:buNone/>
             </a:pPr>
             <a:r>
-              <a:rPr lang="en-US" sz="1250" dirty="0">
+              <a:rPr lang="en-US" sz="1200" dirty="0">
                 <a:solidFill>
                   <a:srgbClr val="44506A"/>
                 </a:solidFill>
@@ -7324,26 +7923,26 @@
                 <a:ea typeface="Pretendard" pitchFamily="34" charset="-122"/>
                 <a:cs typeface="Pretendard" pitchFamily="34" charset="-120"/>
               </a:rPr>
-              <a:t>산단 영향군 vs 거주지 평균차 통계 검정, 공정능력(Cpk) 산출, 우선 관리 지표 도출</a:t>
-            </a:r>
-            <a:endParaRPr lang="en-US" sz="1250" dirty="0"/>
-          </a:p>
-        </p:txBody>
-      </p:sp>
-      <p:sp>
-        <p:nvSpPr>
-          <p:cNvPr id="20" name="Shape 16"/>
-          <p:cNvSpPr/>
-          <p:nvPr/>
-        </p:nvSpPr>
-        <p:spPr>
-          <a:xfrm>
-            <a:off x="8046720" y="2240280"/>
-            <a:ext cx="3566160" cy="1874520"/>
+              <a:t>사내 생산 데이터가 없어도, 공개 대기질 API를 공정·품질특성·규격에 매핑해 공정관리 기법을 완주</a:t>
+            </a:r>
+            <a:endParaRPr lang="en-US" sz="1200" dirty="0"/>
+          </a:p>
+        </p:txBody>
+      </p:sp>
+      <p:sp>
+        <p:nvSpPr>
+          <p:cNvPr id="22" name="Shape 18"/>
+          <p:cNvSpPr/>
+          <p:nvPr/>
+        </p:nvSpPr>
+        <p:spPr>
+          <a:xfrm>
+            <a:off x="640080" y="4114800"/>
+            <a:ext cx="5440680" cy="1755648"/>
           </a:xfrm>
           <a:prstGeom prst="roundRect">
             <a:avLst>
-              <a:gd name="adj" fmla="val 3902"/>
+              <a:gd name="adj" fmla="val 4167"/>
             </a:avLst>
           </a:prstGeom>
           <a:solidFill>
@@ -7366,14 +7965,14 @@
       </p:sp>
       <p:sp>
         <p:nvSpPr>
-          <p:cNvPr id="21" name="Shape 17"/>
-          <p:cNvSpPr/>
-          <p:nvPr/>
-        </p:nvSpPr>
-        <p:spPr>
-          <a:xfrm>
-            <a:off x="8211312" y="2386584"/>
-            <a:ext cx="3236976" cy="64008"/>
+          <p:cNvPr id="23" name="Shape 19"/>
+          <p:cNvSpPr/>
+          <p:nvPr/>
+        </p:nvSpPr>
+        <p:spPr>
+          <a:xfrm>
+            <a:off x="804672" y="4261104"/>
+            <a:ext cx="5111496" cy="64008"/>
           </a:xfrm>
           <a:prstGeom prst="rect">
             <a:avLst/>
@@ -7384,9 +7983,29 @@
           <a:ln/>
         </p:spPr>
       </p:sp>
+      <p:sp>
+        <p:nvSpPr>
+          <p:cNvPr id="24" name="Shape 20"/>
+          <p:cNvSpPr/>
+          <p:nvPr/>
+        </p:nvSpPr>
+        <p:spPr>
+          <a:xfrm>
+            <a:off x="960120" y="4617720"/>
+            <a:ext cx="868680" cy="868680"/>
+          </a:xfrm>
+          <a:prstGeom prst="ellipse">
+            <a:avLst/>
+          </a:prstGeom>
+          <a:solidFill>
+            <a:srgbClr val="EEF1FB"/>
+          </a:solidFill>
+          <a:ln/>
+        </p:spPr>
+      </p:sp>
       <p:pic>
         <p:nvPicPr>
-          <p:cNvPr id="22" name="Image 2" descr="preencoded.png">    </p:cNvPr>
+          <p:cNvPr id="25" name="Image 2" descr="preencoded.png">    </p:cNvPr>
           <p:cNvPicPr>
             <a:picLocks noChangeAspect="1"/>
           </p:cNvPicPr>
@@ -7400,8 +8019,8 @@
         </p:blipFill>
         <p:spPr>
           <a:xfrm>
-            <a:off x="8339328" y="2542032"/>
-            <a:ext cx="566928" cy="566928"/>
+            <a:off x="1179576" y="4837176"/>
+            <a:ext cx="429768" cy="429768"/>
           </a:xfrm>
           <a:prstGeom prst="rect">
             <a:avLst/>
@@ -7410,14 +8029,14 @@
       </p:pic>
       <p:sp>
         <p:nvSpPr>
-          <p:cNvPr id="23" name="Text 18"/>
-          <p:cNvSpPr/>
-          <p:nvPr/>
-        </p:nvSpPr>
-        <p:spPr>
-          <a:xfrm>
-            <a:off x="9052560" y="2578608"/>
-            <a:ext cx="2377440" cy="457200"/>
+          <p:cNvPr id="26" name="Text 21"/>
+          <p:cNvSpPr/>
+          <p:nvPr/>
+        </p:nvSpPr>
+        <p:spPr>
+          <a:xfrm>
+            <a:off x="2057400" y="4498848"/>
+            <a:ext cx="3794760" cy="411480"/>
           </a:xfrm>
           <a:prstGeom prst="rect">
             <a:avLst/>
@@ -7433,7 +8052,7 @@
               <a:buNone/>
             </a:pPr>
             <a:r>
-              <a:rPr lang="en-US" sz="1700" b="1" dirty="0">
+              <a:rPr lang="en-US" sz="1650" b="1" dirty="0">
                 <a:solidFill>
                   <a:srgbClr val="151B2E"/>
                 </a:solidFill>
@@ -7441,22 +8060,22 @@
                 <a:ea typeface="Pretendard" pitchFamily="34" charset="-122"/>
                 <a:cs typeface="Pretendard" pitchFamily="34" charset="-120"/>
               </a:rPr>
-              <a:t>분석 배경</a:t>
-            </a:r>
-            <a:endParaRPr lang="en-US" sz="1700" dirty="0"/>
-          </a:p>
-        </p:txBody>
-      </p:sp>
-      <p:sp>
-        <p:nvSpPr>
-          <p:cNvPr id="24" name="Text 19"/>
-          <p:cNvSpPr/>
-          <p:nvPr/>
-        </p:nvSpPr>
-        <p:spPr>
-          <a:xfrm>
-            <a:off x="8357616" y="3246120"/>
-            <a:ext cx="2971800" cy="777240"/>
+              <a:t>지역 문제의식</a:t>
+            </a:r>
+            <a:endParaRPr lang="en-US" sz="1650" dirty="0"/>
+          </a:p>
+        </p:txBody>
+      </p:sp>
+      <p:sp>
+        <p:nvSpPr>
+          <p:cNvPr id="27" name="Text 22"/>
+          <p:cNvSpPr/>
+          <p:nvPr/>
+        </p:nvSpPr>
+        <p:spPr>
+          <a:xfrm>
+            <a:off x="2057400" y="4956048"/>
+            <a:ext cx="3794760" cy="777240"/>
           </a:xfrm>
           <a:prstGeom prst="rect">
             <a:avLst/>
@@ -7470,12 +8089,12 @@
           <a:p>
             <a:pPr indent="0" marL="0">
               <a:lnSpc>
-                <a:spcPct val="125000"/>
+                <a:spcPct val="128000"/>
               </a:lnSpc>
               <a:buNone/>
             </a:pPr>
             <a:r>
-              <a:rPr lang="en-US" sz="1250" dirty="0">
+              <a:rPr lang="en-US" sz="1200" dirty="0">
                 <a:solidFill>
                   <a:srgbClr val="44506A"/>
                 </a:solidFill>
@@ -7483,26 +8102,26 @@
                 <a:ea typeface="Pretendard" pitchFamily="34" charset="-122"/>
                 <a:cs typeface="Pretendard" pitchFamily="34" charset="-120"/>
               </a:rPr>
-              <a:t>산단 대기질 상시 감시 필요. 단순 농도 비교만으로는 ‘관리 우선순위’ 판단이 어려움</a:t>
-            </a:r>
-            <a:endParaRPr lang="en-US" sz="1250" dirty="0"/>
-          </a:p>
-        </p:txBody>
-      </p:sp>
-      <p:sp>
-        <p:nvSpPr>
-          <p:cNvPr id="25" name="Shape 20"/>
-          <p:cNvSpPr/>
-          <p:nvPr/>
-        </p:nvSpPr>
-        <p:spPr>
-          <a:xfrm>
-            <a:off x="640080" y="4343400"/>
-            <a:ext cx="5440680" cy="1600200"/>
+              <a:t>충북 청주 산단(오창·오송 등) 인근 대기질이 거주지보다 실제로 나쁜지, 데이터로 직접 검증하고 싶었다</a:t>
+            </a:r>
+            <a:endParaRPr lang="en-US" sz="1200" dirty="0"/>
+          </a:p>
+        </p:txBody>
+      </p:sp>
+      <p:sp>
+        <p:nvSpPr>
+          <p:cNvPr id="28" name="Shape 23"/>
+          <p:cNvSpPr/>
+          <p:nvPr/>
+        </p:nvSpPr>
+        <p:spPr>
+          <a:xfrm>
+            <a:off x="6263640" y="4114800"/>
+            <a:ext cx="5440680" cy="1755648"/>
           </a:xfrm>
           <a:prstGeom prst="roundRect">
             <a:avLst>
-              <a:gd name="adj" fmla="val 4571"/>
+              <a:gd name="adj" fmla="val 4167"/>
             </a:avLst>
           </a:prstGeom>
           <a:solidFill>
@@ -7523,9 +8142,49 @@
           </a:effectLst>
         </p:spPr>
       </p:sp>
+      <p:sp>
+        <p:nvSpPr>
+          <p:cNvPr id="29" name="Shape 24"/>
+          <p:cNvSpPr/>
+          <p:nvPr/>
+        </p:nvSpPr>
+        <p:spPr>
+          <a:xfrm>
+            <a:off x="6428232" y="4261104"/>
+            <a:ext cx="5111496" cy="64008"/>
+          </a:xfrm>
+          <a:prstGeom prst="rect">
+            <a:avLst/>
+          </a:prstGeom>
+          <a:solidFill>
+            <a:srgbClr val="6D4AE0"/>
+          </a:solidFill>
+          <a:ln/>
+        </p:spPr>
+      </p:sp>
+      <p:sp>
+        <p:nvSpPr>
+          <p:cNvPr id="30" name="Shape 25"/>
+          <p:cNvSpPr/>
+          <p:nvPr/>
+        </p:nvSpPr>
+        <p:spPr>
+          <a:xfrm>
+            <a:off x="6583680" y="4617720"/>
+            <a:ext cx="868680" cy="868680"/>
+          </a:xfrm>
+          <a:prstGeom prst="ellipse">
+            <a:avLst/>
+          </a:prstGeom>
+          <a:solidFill>
+            <a:srgbClr val="EEF1FB"/>
+          </a:solidFill>
+          <a:ln/>
+        </p:spPr>
+      </p:sp>
       <p:pic>
         <p:nvPicPr>
-          <p:cNvPr id="26" name="Image 3" descr="preencoded.png">    </p:cNvPr>
+          <p:cNvPr id="31" name="Image 3" descr="preencoded.png">    </p:cNvPr>
           <p:cNvPicPr>
             <a:picLocks noChangeAspect="1"/>
           </p:cNvPicPr>
@@ -7539,8 +8198,8 @@
         </p:blipFill>
         <p:spPr>
           <a:xfrm>
-            <a:off x="914400" y="4617720"/>
-            <a:ext cx="457200" cy="457200"/>
+            <a:off x="6803136" y="4837176"/>
+            <a:ext cx="429768" cy="429768"/>
           </a:xfrm>
           <a:prstGeom prst="rect">
             <a:avLst/>
@@ -7549,14 +8208,14 @@
       </p:pic>
       <p:sp>
         <p:nvSpPr>
-          <p:cNvPr id="27" name="Text 21"/>
-          <p:cNvSpPr/>
-          <p:nvPr/>
-        </p:nvSpPr>
-        <p:spPr>
-          <a:xfrm>
-            <a:off x="1481328" y="4617720"/>
-            <a:ext cx="4114800" cy="457200"/>
+          <p:cNvPr id="32" name="Text 26"/>
+          <p:cNvSpPr/>
+          <p:nvPr/>
+        </p:nvSpPr>
+        <p:spPr>
+          <a:xfrm>
+            <a:off x="7680960" y="4498848"/>
+            <a:ext cx="3794760" cy="411480"/>
           </a:xfrm>
           <a:prstGeom prst="rect">
             <a:avLst/>
@@ -7572,30 +8231,30 @@
               <a:buNone/>
             </a:pPr>
             <a:r>
-              <a:rPr lang="en-US" sz="1500" b="1" dirty="0">
-                <a:solidFill>
-                  <a:srgbClr val="1F40E6"/>
-                </a:solidFill>
-                <a:latin typeface="Pretendard" pitchFamily="34" charset="0"/>
-                <a:ea typeface="Pretendard" pitchFamily="34" charset="-122"/>
-                <a:cs typeface="Pretendard" pitchFamily="34" charset="-120"/>
-              </a:rPr>
-              <a:t>문제 정의</a:t>
-            </a:r>
-            <a:endParaRPr lang="en-US" sz="1500" dirty="0"/>
-          </a:p>
-        </p:txBody>
-      </p:sp>
-      <p:sp>
-        <p:nvSpPr>
-          <p:cNvPr id="28" name="Text 22"/>
-          <p:cNvSpPr/>
-          <p:nvPr/>
-        </p:nvSpPr>
-        <p:spPr>
-          <a:xfrm>
-            <a:off x="914400" y="5120640"/>
-            <a:ext cx="4937760" cy="777240"/>
+              <a:rPr lang="en-US" sz="1650" b="1" dirty="0">
+                <a:solidFill>
+                  <a:srgbClr val="151B2E"/>
+                </a:solidFill>
+                <a:latin typeface="Pretendard" pitchFamily="34" charset="0"/>
+                <a:ea typeface="Pretendard" pitchFamily="34" charset="-122"/>
+                <a:cs typeface="Pretendard" pitchFamily="34" charset="-120"/>
+              </a:rPr>
+              <a:t>자동화 파이프라인 경험</a:t>
+            </a:r>
+            <a:endParaRPr lang="en-US" sz="1650" dirty="0"/>
+          </a:p>
+        </p:txBody>
+      </p:sp>
+      <p:sp>
+        <p:nvSpPr>
+          <p:cNvPr id="33" name="Text 27"/>
+          <p:cNvSpPr/>
+          <p:nvPr/>
+        </p:nvSpPr>
+        <p:spPr>
+          <a:xfrm>
+            <a:off x="7680960" y="4956048"/>
+            <a:ext cx="3794760" cy="777240"/>
           </a:xfrm>
           <a:prstGeom prst="rect">
             <a:avLst/>
@@ -7609,207 +8268,28 @@
           <a:p>
             <a:pPr indent="0" marL="0">
               <a:lnSpc>
-                <a:spcPct val="125000"/>
+                <a:spcPct val="128000"/>
               </a:lnSpc>
               <a:buNone/>
             </a:pPr>
             <a:r>
-              <a:rPr lang="en-US" sz="1350" b="1" dirty="0">
-                <a:solidFill>
-                  <a:srgbClr val="151B2E"/>
-                </a:solidFill>
-                <a:latin typeface="Pretendard" pitchFamily="34" charset="0"/>
-                <a:ea typeface="Pretendard" pitchFamily="34" charset="-122"/>
-                <a:cs typeface="Pretendard" pitchFamily="34" charset="-120"/>
-              </a:rPr>
-              <a:t>산단 인근 대기질은 거주지보다 통계적으로 유의하게 나쁜가?</a:t>
-            </a:r>
-            <a:endParaRPr lang="en-US" sz="1350" dirty="0"/>
-          </a:p>
-          <a:p>
-            <a:pPr indent="0" marL="0">
-              <a:lnSpc>
-                <a:spcPct val="125000"/>
-              </a:lnSpc>
-              <a:buNone/>
-            </a:pPr>
-            <a:r>
-              <a:rPr lang="en-US" sz="1350" b="1" dirty="0">
-                <a:solidFill>
-                  <a:srgbClr val="151B2E"/>
-                </a:solidFill>
-                <a:latin typeface="Pretendard" pitchFamily="34" charset="0"/>
-                <a:ea typeface="Pretendard" pitchFamily="34" charset="-122"/>
-                <a:cs typeface="Pretendard" pitchFamily="34" charset="-120"/>
-              </a:rPr>
-              <a:t>어느 지표·어느 측정소를 우선 관리해야 하는가?</a:t>
-            </a:r>
-            <a:endParaRPr lang="en-US" sz="1350" dirty="0"/>
-          </a:p>
-        </p:txBody>
-      </p:sp>
-      <p:sp>
-        <p:nvSpPr>
-          <p:cNvPr id="29" name="Shape 23"/>
-          <p:cNvSpPr/>
-          <p:nvPr/>
-        </p:nvSpPr>
-        <p:spPr>
-          <a:xfrm>
-            <a:off x="6263640" y="4343400"/>
-            <a:ext cx="5440680" cy="1600200"/>
-          </a:xfrm>
-          <a:prstGeom prst="roundRect">
-            <a:avLst>
-              <a:gd name="adj" fmla="val 4571"/>
-            </a:avLst>
-          </a:prstGeom>
-          <a:solidFill>
-            <a:srgbClr val="FFFFFF"/>
-          </a:solidFill>
-          <a:ln w="12700">
-            <a:solidFill>
-              <a:srgbClr val="DCE3F2"/>
-            </a:solidFill>
-            <a:prstDash val="solid"/>
-          </a:ln>
-          <a:effectLst>
-            <a:outerShdw sx="100000" sy="100000" kx="0" ky="0" algn="bl" rotWithShape="0" blurRad="101600" dist="25400" dir="5400000">
-              <a:srgbClr val="8794B5">
-                <a:alpha val="22000"/>
-              </a:srgbClr>
-            </a:outerShdw>
-          </a:effectLst>
-        </p:spPr>
-      </p:sp>
-      <p:pic>
-        <p:nvPicPr>
-          <p:cNvPr id="30" name="Image 4" descr="preencoded.png">    </p:cNvPr>
-          <p:cNvPicPr>
-            <a:picLocks noChangeAspect="1"/>
-          </p:cNvPicPr>
-          <p:nvPr/>
-        </p:nvPicPr>
-        <p:blipFill>
-          <a:blip r:embed="rId5"/>
-          <a:stretch>
-            <a:fillRect/>
-          </a:stretch>
-        </p:blipFill>
-        <p:spPr>
-          <a:xfrm>
-            <a:off x="6537960" y="4617720"/>
-            <a:ext cx="457200" cy="457200"/>
-          </a:xfrm>
-          <a:prstGeom prst="rect">
-            <a:avLst/>
-          </a:prstGeom>
-        </p:spPr>
-      </p:pic>
-      <p:sp>
-        <p:nvSpPr>
-          <p:cNvPr id="31" name="Text 24"/>
-          <p:cNvSpPr/>
-          <p:nvPr/>
-        </p:nvSpPr>
-        <p:spPr>
-          <a:xfrm>
-            <a:off x="7104888" y="4617720"/>
-            <a:ext cx="4114800" cy="457200"/>
-          </a:xfrm>
-          <a:prstGeom prst="rect">
-            <a:avLst/>
-          </a:prstGeom>
-          <a:noFill/>
-          <a:ln/>
-        </p:spPr>
-        <p:txBody>
-          <a:bodyPr wrap="square" lIns="0" tIns="0" rIns="0" bIns="0" rtlCol="0" anchor="ctr"/>
-          <a:lstStyle/>
-          <a:p>
-            <a:pPr indent="0" marL="0">
-              <a:buNone/>
-            </a:pPr>
-            <a:r>
-              <a:rPr lang="en-US" sz="1500" b="1" dirty="0">
-                <a:solidFill>
-                  <a:srgbClr val="0E9488"/>
-                </a:solidFill>
-                <a:latin typeface="Pretendard" pitchFamily="34" charset="0"/>
-                <a:ea typeface="Pretendard" pitchFamily="34" charset="-122"/>
-                <a:cs typeface="Pretendard" pitchFamily="34" charset="-120"/>
-              </a:rPr>
-              <a:t>핵심 결과</a:t>
-            </a:r>
-            <a:endParaRPr lang="en-US" sz="1500" dirty="0"/>
-          </a:p>
-        </p:txBody>
-      </p:sp>
-      <p:sp>
-        <p:nvSpPr>
-          <p:cNvPr id="32" name="Text 25"/>
-          <p:cNvSpPr/>
-          <p:nvPr/>
-        </p:nvSpPr>
-        <p:spPr>
-          <a:xfrm>
-            <a:off x="6537960" y="5120640"/>
-            <a:ext cx="4937760" cy="777240"/>
-          </a:xfrm>
-          <a:prstGeom prst="rect">
-            <a:avLst/>
-          </a:prstGeom>
-          <a:noFill/>
-          <a:ln/>
-        </p:spPr>
-        <p:txBody>
-          <a:bodyPr wrap="square" lIns="0" tIns="0" rIns="0" bIns="0" rtlCol="0" anchor="t"/>
-          <a:lstStyle/>
-          <a:p>
-            <a:pPr indent="0" marL="0">
-              <a:lnSpc>
-                <a:spcPct val="125000"/>
-              </a:lnSpc>
-              <a:buNone/>
-            </a:pPr>
-            <a:r>
-              <a:rPr lang="en-US" sz="1350" b="1" dirty="0">
-                <a:solidFill>
-                  <a:srgbClr val="151B2E"/>
-                </a:solidFill>
-                <a:latin typeface="Pretendard" pitchFamily="34" charset="0"/>
-                <a:ea typeface="Pretendard" pitchFamily="34" charset="-122"/>
-                <a:cs typeface="Pretendard" pitchFamily="34" charset="-120"/>
-              </a:rPr>
-              <a:t>PM2.5·PM10 전 측정소 ‘불량 위험’ 식별</a:t>
-            </a:r>
-            <a:endParaRPr lang="en-US" sz="1350" dirty="0"/>
-          </a:p>
-          <a:p>
-            <a:pPr indent="0" marL="0">
-              <a:lnSpc>
-                <a:spcPct val="125000"/>
-              </a:lnSpc>
-              <a:buNone/>
-            </a:pPr>
-            <a:r>
-              <a:rPr lang="en-US" sz="1350" b="1" dirty="0">
-                <a:solidFill>
-                  <a:srgbClr val="151B2E"/>
-                </a:solidFill>
-                <a:latin typeface="Pretendard" pitchFamily="34" charset="0"/>
-                <a:ea typeface="Pretendard" pitchFamily="34" charset="-122"/>
-                <a:cs typeface="Pretendard" pitchFamily="34" charset="-120"/>
-              </a:rPr>
-              <a:t>잔차 관리도로 거짓경보 46% → 2% 개선</a:t>
-            </a:r>
-            <a:endParaRPr lang="en-US" sz="1350" dirty="0"/>
-          </a:p>
-        </p:txBody>
-      </p:sp>
-      <p:sp>
-        <p:nvSpPr>
-          <p:cNvPr id="33" name="Text 26"/>
+              <a:rPr lang="en-US" sz="1200" dirty="0">
+                <a:solidFill>
+                  <a:srgbClr val="44506A"/>
+                </a:solidFill>
+                <a:latin typeface="Pretendard" pitchFamily="34" charset="0"/>
+                <a:ea typeface="Pretendard" pitchFamily="34" charset="-122"/>
+                <a:cs typeface="Pretendard" pitchFamily="34" charset="-120"/>
+              </a:rPr>
+              <a:t>수집→분석→알림까지 무중단·무비용으로 돌아가는 엔드투엔드 데이터 파이프라인을 직접 설계·운영</a:t>
+            </a:r>
+            <a:endParaRPr lang="en-US" sz="1200" dirty="0"/>
+          </a:p>
+        </p:txBody>
+      </p:sp>
+      <p:sp>
+        <p:nvSpPr>
+          <p:cNvPr id="34" name="Text 28"/>
           <p:cNvSpPr/>
           <p:nvPr/>
         </p:nvSpPr>
@@ -7931,7 +8411,7 @@
                 <a:ea typeface="Pretendard" pitchFamily="34" charset="-122"/>
                 <a:cs typeface="Pretendard" pitchFamily="34" charset="-120"/>
               </a:rPr>
-              <a:t>측정 시스템 — 대상</a:t>
+              <a:t>문제 정의</a:t>
             </a:r>
             <a:endParaRPr lang="en-US" sz="2700" dirty="0"/>
           </a:p>
@@ -7990,7 +8470,7 @@
                 <a:ea typeface="Pretendard" pitchFamily="34" charset="-122"/>
                 <a:cs typeface="Pretendard" pitchFamily="34" charset="-120"/>
               </a:rPr>
-              <a:t>측정 지표 6종 · 측정소 5곳</a:t>
+              <a:t>주제 · 분석 배경 · 분석 목표</a:t>
             </a:r>
             <a:endParaRPr lang="en-US" sz="1300" dirty="0"/>
           </a:p>
@@ -7998,257 +8478,18 @@
       </p:sp>
       <p:sp>
         <p:nvSpPr>
-          <p:cNvPr id="6" name="Text 4"/>
-          <p:cNvSpPr/>
-          <p:nvPr/>
-        </p:nvSpPr>
-        <p:spPr>
-          <a:xfrm>
-            <a:off x="640080" y="1508760"/>
-            <a:ext cx="4572000" cy="365760"/>
-          </a:xfrm>
-          <a:prstGeom prst="rect">
-            <a:avLst/>
-          </a:prstGeom>
-          <a:noFill/>
-          <a:ln/>
-        </p:spPr>
-        <p:txBody>
-          <a:bodyPr wrap="square" lIns="0" tIns="0" rIns="0" bIns="0" rtlCol="0" anchor="ctr"/>
-          <a:lstStyle/>
-          <a:p>
-            <a:pPr indent="0" marL="0">
-              <a:buNone/>
-            </a:pPr>
-            <a:r>
-              <a:rPr lang="en-US" sz="1500" b="1" dirty="0">
-                <a:solidFill>
-                  <a:srgbClr val="1F40E6"/>
-                </a:solidFill>
-                <a:latin typeface="Pretendard" pitchFamily="34" charset="0"/>
-                <a:ea typeface="Pretendard" pitchFamily="34" charset="-122"/>
-                <a:cs typeface="Pretendard" pitchFamily="34" charset="-120"/>
-              </a:rPr>
-              <a:t>측정 지표 (품질특성 CQA)</a:t>
-            </a:r>
-            <a:endParaRPr lang="en-US" sz="1500" dirty="0"/>
-          </a:p>
-        </p:txBody>
-      </p:sp>
-      <p:sp>
-        <p:nvSpPr>
-          <p:cNvPr id="7" name="Shape 5"/>
-          <p:cNvSpPr/>
-          <p:nvPr/>
-        </p:nvSpPr>
-        <p:spPr>
-          <a:xfrm>
-            <a:off x="640080" y="1965960"/>
-            <a:ext cx="1783080" cy="1051560"/>
+          <p:cNvPr id="6" name="Shape 4"/>
+          <p:cNvSpPr/>
+          <p:nvPr/>
+        </p:nvSpPr>
+        <p:spPr>
+          <a:xfrm>
+            <a:off x="502920" y="1417320"/>
+            <a:ext cx="11201400" cy="566928"/>
           </a:xfrm>
           <a:prstGeom prst="roundRect">
             <a:avLst>
-              <a:gd name="adj" fmla="val 6957"/>
-            </a:avLst>
-          </a:prstGeom>
-          <a:solidFill>
-            <a:srgbClr val="FDEDED"/>
-          </a:solidFill>
-          <a:ln/>
-        </p:spPr>
-      </p:sp>
-      <p:sp>
-        <p:nvSpPr>
-          <p:cNvPr id="8" name="Text 6"/>
-          <p:cNvSpPr/>
-          <p:nvPr/>
-        </p:nvSpPr>
-        <p:spPr>
-          <a:xfrm>
-            <a:off x="640080" y="2112264"/>
-            <a:ext cx="1783080" cy="457200"/>
-          </a:xfrm>
-          <a:prstGeom prst="rect">
-            <a:avLst/>
-          </a:prstGeom>
-          <a:noFill/>
-          <a:ln/>
-        </p:spPr>
-        <p:txBody>
-          <a:bodyPr wrap="square" lIns="0" tIns="0" rIns="0" bIns="0" rtlCol="0" anchor="ctr"/>
-          <a:lstStyle/>
-          <a:p>
-            <a:pPr algn="ctr" indent="0" marL="0">
-              <a:buNone/>
-            </a:pPr>
-            <a:r>
-              <a:rPr lang="en-US" sz="2000" b="1" dirty="0">
-                <a:solidFill>
-                  <a:srgbClr val="E04646"/>
-                </a:solidFill>
-                <a:latin typeface="Pretendard" pitchFamily="34" charset="0"/>
-                <a:ea typeface="Pretendard" pitchFamily="34" charset="-122"/>
-                <a:cs typeface="Pretendard" pitchFamily="34" charset="-120"/>
-              </a:rPr>
-              <a:t>PM2.5</a:t>
-            </a:r>
-            <a:endParaRPr lang="en-US" sz="2000" dirty="0"/>
-          </a:p>
-        </p:txBody>
-      </p:sp>
-      <p:sp>
-        <p:nvSpPr>
-          <p:cNvPr id="9" name="Text 7"/>
-          <p:cNvSpPr/>
-          <p:nvPr/>
-        </p:nvSpPr>
-        <p:spPr>
-          <a:xfrm>
-            <a:off x="731520" y="2587752"/>
-            <a:ext cx="1600200" cy="347472"/>
-          </a:xfrm>
-          <a:prstGeom prst="rect">
-            <a:avLst/>
-          </a:prstGeom>
-          <a:noFill/>
-          <a:ln/>
-        </p:spPr>
-        <p:txBody>
-          <a:bodyPr wrap="square" lIns="0" tIns="0" rIns="0" bIns="0" rtlCol="0" anchor="ctr"/>
-          <a:lstStyle/>
-          <a:p>
-            <a:pPr algn="ctr" indent="0" marL="0">
-              <a:buNone/>
-            </a:pPr>
-            <a:r>
-              <a:rPr lang="en-US" sz="1050" dirty="0">
-                <a:solidFill>
-                  <a:srgbClr val="44506A"/>
-                </a:solidFill>
-                <a:latin typeface="Pretendard" pitchFamily="34" charset="0"/>
-                <a:ea typeface="Pretendard" pitchFamily="34" charset="-122"/>
-                <a:cs typeface="Pretendard" pitchFamily="34" charset="-120"/>
-              </a:rPr>
-              <a:t>초미세먼지 · 우선관리</a:t>
-            </a:r>
-            <a:endParaRPr lang="en-US" sz="1050" dirty="0"/>
-          </a:p>
-        </p:txBody>
-      </p:sp>
-      <p:sp>
-        <p:nvSpPr>
-          <p:cNvPr id="10" name="Shape 8"/>
-          <p:cNvSpPr/>
-          <p:nvPr/>
-        </p:nvSpPr>
-        <p:spPr>
-          <a:xfrm>
-            <a:off x="2542032" y="1965960"/>
-            <a:ext cx="1783080" cy="1051560"/>
-          </a:xfrm>
-          <a:prstGeom prst="roundRect">
-            <a:avLst>
-              <a:gd name="adj" fmla="val 6957"/>
-            </a:avLst>
-          </a:prstGeom>
-          <a:solidFill>
-            <a:srgbClr val="FDEDED"/>
-          </a:solidFill>
-          <a:ln/>
-        </p:spPr>
-      </p:sp>
-      <p:sp>
-        <p:nvSpPr>
-          <p:cNvPr id="11" name="Text 9"/>
-          <p:cNvSpPr/>
-          <p:nvPr/>
-        </p:nvSpPr>
-        <p:spPr>
-          <a:xfrm>
-            <a:off x="2542032" y="2112264"/>
-            <a:ext cx="1783080" cy="457200"/>
-          </a:xfrm>
-          <a:prstGeom prst="rect">
-            <a:avLst/>
-          </a:prstGeom>
-          <a:noFill/>
-          <a:ln/>
-        </p:spPr>
-        <p:txBody>
-          <a:bodyPr wrap="square" lIns="0" tIns="0" rIns="0" bIns="0" rtlCol="0" anchor="ctr"/>
-          <a:lstStyle/>
-          <a:p>
-            <a:pPr algn="ctr" indent="0" marL="0">
-              <a:buNone/>
-            </a:pPr>
-            <a:r>
-              <a:rPr lang="en-US" sz="2000" b="1" dirty="0">
-                <a:solidFill>
-                  <a:srgbClr val="E04646"/>
-                </a:solidFill>
-                <a:latin typeface="Pretendard" pitchFamily="34" charset="0"/>
-                <a:ea typeface="Pretendard" pitchFamily="34" charset="-122"/>
-                <a:cs typeface="Pretendard" pitchFamily="34" charset="-120"/>
-              </a:rPr>
-              <a:t>PM10</a:t>
-            </a:r>
-            <a:endParaRPr lang="en-US" sz="2000" dirty="0"/>
-          </a:p>
-        </p:txBody>
-      </p:sp>
-      <p:sp>
-        <p:nvSpPr>
-          <p:cNvPr id="12" name="Text 10"/>
-          <p:cNvSpPr/>
-          <p:nvPr/>
-        </p:nvSpPr>
-        <p:spPr>
-          <a:xfrm>
-            <a:off x="2633472" y="2587752"/>
-            <a:ext cx="1600200" cy="347472"/>
-          </a:xfrm>
-          <a:prstGeom prst="rect">
-            <a:avLst/>
-          </a:prstGeom>
-          <a:noFill/>
-          <a:ln/>
-        </p:spPr>
-        <p:txBody>
-          <a:bodyPr wrap="square" lIns="0" tIns="0" rIns="0" bIns="0" rtlCol="0" anchor="ctr"/>
-          <a:lstStyle/>
-          <a:p>
-            <a:pPr algn="ctr" indent="0" marL="0">
-              <a:buNone/>
-            </a:pPr>
-            <a:r>
-              <a:rPr lang="en-US" sz="1050" dirty="0">
-                <a:solidFill>
-                  <a:srgbClr val="44506A"/>
-                </a:solidFill>
-                <a:latin typeface="Pretendard" pitchFamily="34" charset="0"/>
-                <a:ea typeface="Pretendard" pitchFamily="34" charset="-122"/>
-                <a:cs typeface="Pretendard" pitchFamily="34" charset="-120"/>
-              </a:rPr>
-              <a:t>미세먼지 · 우선관리</a:t>
-            </a:r>
-            <a:endParaRPr lang="en-US" sz="1050" dirty="0"/>
-          </a:p>
-        </p:txBody>
-      </p:sp>
-      <p:sp>
-        <p:nvSpPr>
-          <p:cNvPr id="13" name="Shape 11"/>
-          <p:cNvSpPr/>
-          <p:nvPr/>
-        </p:nvSpPr>
-        <p:spPr>
-          <a:xfrm>
-            <a:off x="4443984" y="1965960"/>
-            <a:ext cx="1783080" cy="1051560"/>
-          </a:xfrm>
-          <a:prstGeom prst="roundRect">
-            <a:avLst>
-              <a:gd name="adj" fmla="val 6957"/>
+              <a:gd name="adj" fmla="val 9677"/>
             </a:avLst>
           </a:prstGeom>
           <a:solidFill>
@@ -8259,114 +8500,36 @@
       </p:sp>
       <p:sp>
         <p:nvSpPr>
-          <p:cNvPr id="14" name="Text 12"/>
-          <p:cNvSpPr/>
-          <p:nvPr/>
-        </p:nvSpPr>
-        <p:spPr>
-          <a:xfrm>
-            <a:off x="4443984" y="2112264"/>
-            <a:ext cx="1783080" cy="457200"/>
-          </a:xfrm>
-          <a:prstGeom prst="rect">
-            <a:avLst/>
-          </a:prstGeom>
-          <a:noFill/>
-          <a:ln/>
-        </p:spPr>
-        <p:txBody>
-          <a:bodyPr wrap="square" lIns="0" tIns="0" rIns="0" bIns="0" rtlCol="0" anchor="ctr"/>
-          <a:lstStyle/>
-          <a:p>
-            <a:pPr algn="ctr" indent="0" marL="0">
-              <a:buNone/>
-            </a:pPr>
-            <a:r>
-              <a:rPr lang="en-US" sz="2000" b="1" dirty="0">
-                <a:solidFill>
-                  <a:srgbClr val="1F40E6"/>
-                </a:solidFill>
-                <a:latin typeface="Pretendard" pitchFamily="34" charset="0"/>
-                <a:ea typeface="Pretendard" pitchFamily="34" charset="-122"/>
-                <a:cs typeface="Pretendard" pitchFamily="34" charset="-120"/>
-              </a:rPr>
-              <a:t>NO₂</a:t>
-            </a:r>
-            <a:endParaRPr lang="en-US" sz="2000" dirty="0"/>
-          </a:p>
-        </p:txBody>
-      </p:sp>
-      <p:sp>
-        <p:nvSpPr>
-          <p:cNvPr id="15" name="Text 13"/>
-          <p:cNvSpPr/>
-          <p:nvPr/>
-        </p:nvSpPr>
-        <p:spPr>
-          <a:xfrm>
-            <a:off x="4535424" y="2587752"/>
-            <a:ext cx="1600200" cy="347472"/>
-          </a:xfrm>
-          <a:prstGeom prst="rect">
-            <a:avLst/>
-          </a:prstGeom>
-          <a:noFill/>
-          <a:ln/>
-        </p:spPr>
-        <p:txBody>
-          <a:bodyPr wrap="square" lIns="0" tIns="0" rIns="0" bIns="0" rtlCol="0" anchor="ctr"/>
-          <a:lstStyle/>
-          <a:p>
-            <a:pPr algn="ctr" indent="0" marL="0">
-              <a:buNone/>
-            </a:pPr>
-            <a:r>
-              <a:rPr lang="en-US" sz="1050" dirty="0">
-                <a:solidFill>
-                  <a:srgbClr val="44506A"/>
-                </a:solidFill>
-                <a:latin typeface="Pretendard" pitchFamily="34" charset="0"/>
-                <a:ea typeface="Pretendard" pitchFamily="34" charset="-122"/>
-                <a:cs typeface="Pretendard" pitchFamily="34" charset="-120"/>
-              </a:rPr>
-              <a:t>이산화질소</a:t>
-            </a:r>
-            <a:endParaRPr lang="en-US" sz="1050" dirty="0"/>
-          </a:p>
-        </p:txBody>
-      </p:sp>
-      <p:sp>
-        <p:nvSpPr>
-          <p:cNvPr id="16" name="Shape 14"/>
-          <p:cNvSpPr/>
-          <p:nvPr/>
-        </p:nvSpPr>
-        <p:spPr>
-          <a:xfrm>
-            <a:off x="640080" y="3273552"/>
-            <a:ext cx="1783080" cy="1051560"/>
+          <p:cNvPr id="7" name="Shape 5"/>
+          <p:cNvSpPr/>
+          <p:nvPr/>
+        </p:nvSpPr>
+        <p:spPr>
+          <a:xfrm>
+            <a:off x="658368" y="1536192"/>
+            <a:ext cx="1874520" cy="329184"/>
           </a:xfrm>
           <a:prstGeom prst="roundRect">
             <a:avLst>
-              <a:gd name="adj" fmla="val 6957"/>
+              <a:gd name="adj" fmla="val 50000"/>
             </a:avLst>
           </a:prstGeom>
           <a:solidFill>
-            <a:srgbClr val="EEF1FB"/>
+            <a:srgbClr val="1F40E6"/>
           </a:solidFill>
           <a:ln/>
         </p:spPr>
       </p:sp>
       <p:sp>
         <p:nvSpPr>
-          <p:cNvPr id="17" name="Text 15"/>
-          <p:cNvSpPr/>
-          <p:nvPr/>
-        </p:nvSpPr>
-        <p:spPr>
-          <a:xfrm>
-            <a:off x="640080" y="3419856"/>
-            <a:ext cx="1783080" cy="457200"/>
+          <p:cNvPr id="8" name="Text 6"/>
+          <p:cNvSpPr/>
+          <p:nvPr/>
+        </p:nvSpPr>
+        <p:spPr>
+          <a:xfrm>
+            <a:off x="658368" y="1536192"/>
+            <a:ext cx="1874520" cy="329184"/>
           </a:xfrm>
           <a:prstGeom prst="rect">
             <a:avLst/>
@@ -8382,30 +8545,30 @@
               <a:buNone/>
             </a:pPr>
             <a:r>
-              <a:rPr lang="en-US" sz="2000" b="1" dirty="0">
-                <a:solidFill>
-                  <a:srgbClr val="1F40E6"/>
-                </a:solidFill>
-                <a:latin typeface="Pretendard" pitchFamily="34" charset="0"/>
-                <a:ea typeface="Pretendard" pitchFamily="34" charset="-122"/>
-                <a:cs typeface="Pretendard" pitchFamily="34" charset="-120"/>
-              </a:rPr>
-              <a:t>O₃</a:t>
-            </a:r>
-            <a:endParaRPr lang="en-US" sz="2000" dirty="0"/>
-          </a:p>
-        </p:txBody>
-      </p:sp>
-      <p:sp>
-        <p:nvSpPr>
-          <p:cNvPr id="18" name="Text 16"/>
-          <p:cNvSpPr/>
-          <p:nvPr/>
-        </p:nvSpPr>
-        <p:spPr>
-          <a:xfrm>
-            <a:off x="731520" y="3895344"/>
-            <a:ext cx="1600200" cy="347472"/>
+              <a:rPr lang="en-US" sz="1100" b="1" dirty="0">
+                <a:solidFill>
+                  <a:srgbClr val="FFFFFF"/>
+                </a:solidFill>
+                <a:latin typeface="Pretendard" pitchFamily="34" charset="0"/>
+                <a:ea typeface="Pretendard" pitchFamily="34" charset="-122"/>
+                <a:cs typeface="Pretendard" pitchFamily="34" charset="-120"/>
+              </a:rPr>
+              <a:t>Governing Message</a:t>
+            </a:r>
+            <a:endParaRPr lang="en-US" sz="1100" dirty="0"/>
+          </a:p>
+        </p:txBody>
+      </p:sp>
+      <p:sp>
+        <p:nvSpPr>
+          <p:cNvPr id="9" name="Text 7"/>
+          <p:cNvSpPr/>
+          <p:nvPr/>
+        </p:nvSpPr>
+        <p:spPr>
+          <a:xfrm>
+            <a:off x="2697480" y="1417320"/>
+            <a:ext cx="8869680" cy="566928"/>
           </a:xfrm>
           <a:prstGeom prst="rect">
             <a:avLst/>
@@ -8417,316 +8580,38 @@
           <a:bodyPr wrap="square" lIns="0" tIns="0" rIns="0" bIns="0" rtlCol="0" anchor="ctr"/>
           <a:lstStyle/>
           <a:p>
-            <a:pPr algn="ctr" indent="0" marL="0">
-              <a:buNone/>
-            </a:pPr>
-            <a:r>
-              <a:rPr lang="en-US" sz="1050" dirty="0">
-                <a:solidFill>
-                  <a:srgbClr val="44506A"/>
-                </a:solidFill>
-                <a:latin typeface="Pretendard" pitchFamily="34" charset="0"/>
-                <a:ea typeface="Pretendard" pitchFamily="34" charset="-122"/>
-                <a:cs typeface="Pretendard" pitchFamily="34" charset="-120"/>
-              </a:rPr>
-              <a:t>오존</a:t>
-            </a:r>
-            <a:endParaRPr lang="en-US" sz="1050" dirty="0"/>
-          </a:p>
-        </p:txBody>
-      </p:sp>
-      <p:sp>
-        <p:nvSpPr>
-          <p:cNvPr id="19" name="Shape 17"/>
-          <p:cNvSpPr/>
-          <p:nvPr/>
-        </p:nvSpPr>
-        <p:spPr>
-          <a:xfrm>
-            <a:off x="2542032" y="3273552"/>
-            <a:ext cx="1783080" cy="1051560"/>
+            <a:pPr indent="0" marL="0">
+              <a:buNone/>
+            </a:pPr>
+            <a:r>
+              <a:rPr lang="en-US" sz="1350" b="1" dirty="0">
+                <a:solidFill>
+                  <a:srgbClr val="151B2E"/>
+                </a:solidFill>
+                <a:latin typeface="Pretendard" pitchFamily="34" charset="0"/>
+                <a:ea typeface="Pretendard" pitchFamily="34" charset="-122"/>
+                <a:cs typeface="Pretendard" pitchFamily="34" charset="-120"/>
+              </a:rPr>
+              <a:t>대기질을 제조 공정에 빗대어 SPC로 상시 감시 — 산단 인근이 거주지보다 나쁜가?</a:t>
+            </a:r>
+            <a:endParaRPr lang="en-US" sz="1350" dirty="0"/>
+          </a:p>
+        </p:txBody>
+      </p:sp>
+      <p:sp>
+        <p:nvSpPr>
+          <p:cNvPr id="10" name="Shape 8"/>
+          <p:cNvSpPr/>
+          <p:nvPr/>
+        </p:nvSpPr>
+        <p:spPr>
+          <a:xfrm>
+            <a:off x="640080" y="2240280"/>
+            <a:ext cx="3566160" cy="1874520"/>
           </a:xfrm>
           <a:prstGeom prst="roundRect">
             <a:avLst>
-              <a:gd name="adj" fmla="val 6957"/>
-            </a:avLst>
-          </a:prstGeom>
-          <a:solidFill>
-            <a:srgbClr val="EEF1FB"/>
-          </a:solidFill>
-          <a:ln/>
-        </p:spPr>
-      </p:sp>
-      <p:sp>
-        <p:nvSpPr>
-          <p:cNvPr id="20" name="Text 18"/>
-          <p:cNvSpPr/>
-          <p:nvPr/>
-        </p:nvSpPr>
-        <p:spPr>
-          <a:xfrm>
-            <a:off x="2542032" y="3419856"/>
-            <a:ext cx="1783080" cy="457200"/>
-          </a:xfrm>
-          <a:prstGeom prst="rect">
-            <a:avLst/>
-          </a:prstGeom>
-          <a:noFill/>
-          <a:ln/>
-        </p:spPr>
-        <p:txBody>
-          <a:bodyPr wrap="square" lIns="0" tIns="0" rIns="0" bIns="0" rtlCol="0" anchor="ctr"/>
-          <a:lstStyle/>
-          <a:p>
-            <a:pPr algn="ctr" indent="0" marL="0">
-              <a:buNone/>
-            </a:pPr>
-            <a:r>
-              <a:rPr lang="en-US" sz="2000" b="1" dirty="0">
-                <a:solidFill>
-                  <a:srgbClr val="1F40E6"/>
-                </a:solidFill>
-                <a:latin typeface="Pretendard" pitchFamily="34" charset="0"/>
-                <a:ea typeface="Pretendard" pitchFamily="34" charset="-122"/>
-                <a:cs typeface="Pretendard" pitchFamily="34" charset="-120"/>
-              </a:rPr>
-              <a:t>SO₂</a:t>
-            </a:r>
-            <a:endParaRPr lang="en-US" sz="2000" dirty="0"/>
-          </a:p>
-        </p:txBody>
-      </p:sp>
-      <p:sp>
-        <p:nvSpPr>
-          <p:cNvPr id="21" name="Text 19"/>
-          <p:cNvSpPr/>
-          <p:nvPr/>
-        </p:nvSpPr>
-        <p:spPr>
-          <a:xfrm>
-            <a:off x="2633472" y="3895344"/>
-            <a:ext cx="1600200" cy="347472"/>
-          </a:xfrm>
-          <a:prstGeom prst="rect">
-            <a:avLst/>
-          </a:prstGeom>
-          <a:noFill/>
-          <a:ln/>
-        </p:spPr>
-        <p:txBody>
-          <a:bodyPr wrap="square" lIns="0" tIns="0" rIns="0" bIns="0" rtlCol="0" anchor="ctr"/>
-          <a:lstStyle/>
-          <a:p>
-            <a:pPr algn="ctr" indent="0" marL="0">
-              <a:buNone/>
-            </a:pPr>
-            <a:r>
-              <a:rPr lang="en-US" sz="1050" dirty="0">
-                <a:solidFill>
-                  <a:srgbClr val="44506A"/>
-                </a:solidFill>
-                <a:latin typeface="Pretendard" pitchFamily="34" charset="0"/>
-                <a:ea typeface="Pretendard" pitchFamily="34" charset="-122"/>
-                <a:cs typeface="Pretendard" pitchFamily="34" charset="-120"/>
-              </a:rPr>
-              <a:t>아황산가스</a:t>
-            </a:r>
-            <a:endParaRPr lang="en-US" sz="1050" dirty="0"/>
-          </a:p>
-        </p:txBody>
-      </p:sp>
-      <p:sp>
-        <p:nvSpPr>
-          <p:cNvPr id="22" name="Shape 20"/>
-          <p:cNvSpPr/>
-          <p:nvPr/>
-        </p:nvSpPr>
-        <p:spPr>
-          <a:xfrm>
-            <a:off x="4443984" y="3273552"/>
-            <a:ext cx="1783080" cy="1051560"/>
-          </a:xfrm>
-          <a:prstGeom prst="roundRect">
-            <a:avLst>
-              <a:gd name="adj" fmla="val 6957"/>
-            </a:avLst>
-          </a:prstGeom>
-          <a:solidFill>
-            <a:srgbClr val="EEF1FB"/>
-          </a:solidFill>
-          <a:ln/>
-        </p:spPr>
-      </p:sp>
-      <p:sp>
-        <p:nvSpPr>
-          <p:cNvPr id="23" name="Text 21"/>
-          <p:cNvSpPr/>
-          <p:nvPr/>
-        </p:nvSpPr>
-        <p:spPr>
-          <a:xfrm>
-            <a:off x="4443984" y="3419856"/>
-            <a:ext cx="1783080" cy="457200"/>
-          </a:xfrm>
-          <a:prstGeom prst="rect">
-            <a:avLst/>
-          </a:prstGeom>
-          <a:noFill/>
-          <a:ln/>
-        </p:spPr>
-        <p:txBody>
-          <a:bodyPr wrap="square" lIns="0" tIns="0" rIns="0" bIns="0" rtlCol="0" anchor="ctr"/>
-          <a:lstStyle/>
-          <a:p>
-            <a:pPr algn="ctr" indent="0" marL="0">
-              <a:buNone/>
-            </a:pPr>
-            <a:r>
-              <a:rPr lang="en-US" sz="2000" b="1" dirty="0">
-                <a:solidFill>
-                  <a:srgbClr val="1F40E6"/>
-                </a:solidFill>
-                <a:latin typeface="Pretendard" pitchFamily="34" charset="0"/>
-                <a:ea typeface="Pretendard" pitchFamily="34" charset="-122"/>
-                <a:cs typeface="Pretendard" pitchFamily="34" charset="-120"/>
-              </a:rPr>
-              <a:t>CO</a:t>
-            </a:r>
-            <a:endParaRPr lang="en-US" sz="2000" dirty="0"/>
-          </a:p>
-        </p:txBody>
-      </p:sp>
-      <p:sp>
-        <p:nvSpPr>
-          <p:cNvPr id="24" name="Text 22"/>
-          <p:cNvSpPr/>
-          <p:nvPr/>
-        </p:nvSpPr>
-        <p:spPr>
-          <a:xfrm>
-            <a:off x="4535424" y="3895344"/>
-            <a:ext cx="1600200" cy="347472"/>
-          </a:xfrm>
-          <a:prstGeom prst="rect">
-            <a:avLst/>
-          </a:prstGeom>
-          <a:noFill/>
-          <a:ln/>
-        </p:spPr>
-        <p:txBody>
-          <a:bodyPr wrap="square" lIns="0" tIns="0" rIns="0" bIns="0" rtlCol="0" anchor="ctr"/>
-          <a:lstStyle/>
-          <a:p>
-            <a:pPr algn="ctr" indent="0" marL="0">
-              <a:buNone/>
-            </a:pPr>
-            <a:r>
-              <a:rPr lang="en-US" sz="1050" dirty="0">
-                <a:solidFill>
-                  <a:srgbClr val="44506A"/>
-                </a:solidFill>
-                <a:latin typeface="Pretendard" pitchFamily="34" charset="0"/>
-                <a:ea typeface="Pretendard" pitchFamily="34" charset="-122"/>
-                <a:cs typeface="Pretendard" pitchFamily="34" charset="-120"/>
-              </a:rPr>
-              <a:t>일산화탄소</a:t>
-            </a:r>
-            <a:endParaRPr lang="en-US" sz="1050" dirty="0"/>
-          </a:p>
-        </p:txBody>
-      </p:sp>
-      <p:sp>
-        <p:nvSpPr>
-          <p:cNvPr id="25" name="Text 23"/>
-          <p:cNvSpPr/>
-          <p:nvPr/>
-        </p:nvSpPr>
-        <p:spPr>
-          <a:xfrm>
-            <a:off x="640080" y="4526280"/>
-            <a:ext cx="5669280" cy="320040"/>
-          </a:xfrm>
-          <a:prstGeom prst="rect">
-            <a:avLst/>
-          </a:prstGeom>
-          <a:noFill/>
-          <a:ln/>
-        </p:spPr>
-        <p:txBody>
-          <a:bodyPr wrap="square" lIns="0" tIns="0" rIns="0" bIns="0" rtlCol="0" anchor="ctr"/>
-          <a:lstStyle/>
-          <a:p>
-            <a:pPr indent="0" marL="0">
-              <a:buNone/>
-            </a:pPr>
-            <a:r>
-              <a:rPr lang="en-US" sz="1100" i="1" dirty="0">
-                <a:solidFill>
-                  <a:srgbClr val="8A94A6"/>
-                </a:solidFill>
-                <a:latin typeface="Pretendard" pitchFamily="34" charset="0"/>
-                <a:ea typeface="Pretendard" pitchFamily="34" charset="-122"/>
-                <a:cs typeface="Pretendard" pitchFamily="34" charset="-120"/>
-              </a:rPr>
-              <a:t>USL = 대기환경보전법 환경기준 · LSL = 0 (낮을수록 좋음)</a:t>
-            </a:r>
-            <a:endParaRPr lang="en-US" sz="1100" dirty="0"/>
-          </a:p>
-        </p:txBody>
-      </p:sp>
-      <p:sp>
-        <p:nvSpPr>
-          <p:cNvPr id="26" name="Text 24"/>
-          <p:cNvSpPr/>
-          <p:nvPr/>
-        </p:nvSpPr>
-        <p:spPr>
-          <a:xfrm>
-            <a:off x="6537960" y="1508760"/>
-            <a:ext cx="4572000" cy="365760"/>
-          </a:xfrm>
-          <a:prstGeom prst="rect">
-            <a:avLst/>
-          </a:prstGeom>
-          <a:noFill/>
-          <a:ln/>
-        </p:spPr>
-        <p:txBody>
-          <a:bodyPr wrap="square" lIns="0" tIns="0" rIns="0" bIns="0" rtlCol="0" anchor="ctr"/>
-          <a:lstStyle/>
-          <a:p>
-            <a:pPr indent="0" marL="0">
-              <a:buNone/>
-            </a:pPr>
-            <a:r>
-              <a:rPr lang="en-US" sz="1500" b="1" dirty="0">
-                <a:solidFill>
-                  <a:srgbClr val="1F40E6"/>
-                </a:solidFill>
-                <a:latin typeface="Pretendard" pitchFamily="34" charset="0"/>
-                <a:ea typeface="Pretendard" pitchFamily="34" charset="-122"/>
-                <a:cs typeface="Pretendard" pitchFamily="34" charset="-120"/>
-              </a:rPr>
-              <a:t>측정소 (공정 라인)</a:t>
-            </a:r>
-            <a:endParaRPr lang="en-US" sz="1500" dirty="0"/>
-          </a:p>
-        </p:txBody>
-      </p:sp>
-      <p:sp>
-        <p:nvSpPr>
-          <p:cNvPr id="27" name="Shape 25"/>
-          <p:cNvSpPr/>
-          <p:nvPr/>
-        </p:nvSpPr>
-        <p:spPr>
-          <a:xfrm>
-            <a:off x="6537960" y="1965960"/>
-            <a:ext cx="5166360" cy="1371600"/>
-          </a:xfrm>
-          <a:prstGeom prst="roundRect">
-            <a:avLst>
-              <a:gd name="adj" fmla="val 5333"/>
+              <a:gd name="adj" fmla="val 3902"/>
             </a:avLst>
           </a:prstGeom>
           <a:solidFill>
@@ -8749,14 +8634,14 @@
       </p:sp>
       <p:sp>
         <p:nvSpPr>
-          <p:cNvPr id="28" name="Shape 26"/>
-          <p:cNvSpPr/>
-          <p:nvPr/>
-        </p:nvSpPr>
-        <p:spPr>
-          <a:xfrm>
-            <a:off x="6702552" y="2112264"/>
-            <a:ext cx="4837176" cy="64008"/>
+          <p:cNvPr id="11" name="Shape 9"/>
+          <p:cNvSpPr/>
+          <p:nvPr/>
+        </p:nvSpPr>
+        <p:spPr>
+          <a:xfrm>
+            <a:off x="804672" y="2386584"/>
+            <a:ext cx="3236976" cy="64008"/>
           </a:xfrm>
           <a:prstGeom prst="rect">
             <a:avLst/>
@@ -8767,16 +8652,40 @@
           <a:ln/>
         </p:spPr>
       </p:sp>
-      <p:sp>
-        <p:nvSpPr>
-          <p:cNvPr id="29" name="Text 27"/>
-          <p:cNvSpPr/>
-          <p:nvPr/>
-        </p:nvSpPr>
-        <p:spPr>
-          <a:xfrm>
-            <a:off x="6812280" y="2212848"/>
-            <a:ext cx="4572000" cy="365760"/>
+      <p:pic>
+        <p:nvPicPr>
+          <p:cNvPr id="12" name="Image 0" descr="preencoded.png">    </p:cNvPr>
+          <p:cNvPicPr>
+            <a:picLocks noChangeAspect="1"/>
+          </p:cNvPicPr>
+          <p:nvPr/>
+        </p:nvPicPr>
+        <p:blipFill>
+          <a:blip r:embed="rId1"/>
+          <a:stretch>
+            <a:fillRect/>
+          </a:stretch>
+        </p:blipFill>
+        <p:spPr>
+          <a:xfrm>
+            <a:off x="932688" y="2542032"/>
+            <a:ext cx="566928" cy="566928"/>
+          </a:xfrm>
+          <a:prstGeom prst="rect">
+            <a:avLst/>
+          </a:prstGeom>
+        </p:spPr>
+      </p:pic>
+      <p:sp>
+        <p:nvSpPr>
+          <p:cNvPr id="13" name="Text 10"/>
+          <p:cNvSpPr/>
+          <p:nvPr/>
+        </p:nvSpPr>
+        <p:spPr>
+          <a:xfrm>
+            <a:off x="1645920" y="2578608"/>
+            <a:ext cx="2377440" cy="457200"/>
           </a:xfrm>
           <a:prstGeom prst="rect">
             <a:avLst/>
@@ -8792,7 +8701,7 @@
               <a:buNone/>
             </a:pPr>
             <a:r>
-              <a:rPr lang="en-US" sz="1500" b="1" dirty="0">
+              <a:rPr lang="en-US" sz="1700" b="1" dirty="0">
                 <a:solidFill>
                   <a:srgbClr val="151B2E"/>
                 </a:solidFill>
@@ -8800,22 +8709,22 @@
                 <a:ea typeface="Pretendard" pitchFamily="34" charset="-122"/>
                 <a:cs typeface="Pretendard" pitchFamily="34" charset="-120"/>
               </a:rPr>
-              <a:t>산단 영향군 · 4곳</a:t>
-            </a:r>
-            <a:endParaRPr lang="en-US" sz="1500" dirty="0"/>
-          </a:p>
-        </p:txBody>
-      </p:sp>
-      <p:sp>
-        <p:nvSpPr>
-          <p:cNvPr id="30" name="Text 28"/>
-          <p:cNvSpPr/>
-          <p:nvPr/>
-        </p:nvSpPr>
-        <p:spPr>
-          <a:xfrm>
-            <a:off x="6812280" y="2606040"/>
-            <a:ext cx="4663440" cy="640080"/>
+              <a:t>분석 주제</a:t>
+            </a:r>
+            <a:endParaRPr lang="en-US" sz="1700" dirty="0"/>
+          </a:p>
+        </p:txBody>
+      </p:sp>
+      <p:sp>
+        <p:nvSpPr>
+          <p:cNvPr id="14" name="Text 11"/>
+          <p:cNvSpPr/>
+          <p:nvPr/>
+        </p:nvSpPr>
+        <p:spPr>
+          <a:xfrm>
+            <a:off x="950976" y="3246120"/>
+            <a:ext cx="2971800" cy="777240"/>
           </a:xfrm>
           <a:prstGeom prst="rect">
             <a:avLst/>
@@ -8829,7 +8738,7 @@
           <a:p>
             <a:pPr indent="0" marL="0">
               <a:lnSpc>
-                <a:spcPct val="120000"/>
+                <a:spcPct val="125000"/>
               </a:lnSpc>
               <a:buNone/>
             </a:pPr>
@@ -8842,7 +8751,7 @@
                 <a:ea typeface="Pretendard" pitchFamily="34" charset="-122"/>
                 <a:cs typeface="Pretendard" pitchFamily="34" charset="-120"/>
               </a:rPr>
-              <a:t>오창(반도체) · 복대 · 봉명(SK하이닉스 청주캠퍼스 권역) · 오송(바이오)</a:t>
+              <a:t>측정소=공정 라인, 오염물질=품질특성(CQA), 환경기준=규격(USL)으로 매핑한 메타포 프로젝트</a:t>
             </a:r>
             <a:endParaRPr lang="en-US" sz="1250" dirty="0"/>
           </a:p>
@@ -8850,18 +8759,18 @@
       </p:sp>
       <p:sp>
         <p:nvSpPr>
-          <p:cNvPr id="31" name="Shape 29"/>
-          <p:cNvSpPr/>
-          <p:nvPr/>
-        </p:nvSpPr>
-        <p:spPr>
-          <a:xfrm>
-            <a:off x="6537960" y="3474720"/>
-            <a:ext cx="5166360" cy="1371600"/>
+          <p:cNvPr id="15" name="Shape 12"/>
+          <p:cNvSpPr/>
+          <p:nvPr/>
+        </p:nvSpPr>
+        <p:spPr>
+          <a:xfrm>
+            <a:off x="4343400" y="2240280"/>
+            <a:ext cx="3566160" cy="1874520"/>
           </a:xfrm>
           <a:prstGeom prst="roundRect">
             <a:avLst>
-              <a:gd name="adj" fmla="val 5333"/>
+              <a:gd name="adj" fmla="val 3902"/>
             </a:avLst>
           </a:prstGeom>
           <a:solidFill>
@@ -8884,34 +8793,58 @@
       </p:sp>
       <p:sp>
         <p:nvSpPr>
-          <p:cNvPr id="32" name="Shape 30"/>
-          <p:cNvSpPr/>
-          <p:nvPr/>
-        </p:nvSpPr>
-        <p:spPr>
-          <a:xfrm>
-            <a:off x="6702552" y="3621024"/>
-            <a:ext cx="4837176" cy="64008"/>
+          <p:cNvPr id="16" name="Shape 13"/>
+          <p:cNvSpPr/>
+          <p:nvPr/>
+        </p:nvSpPr>
+        <p:spPr>
+          <a:xfrm>
+            <a:off x="4507992" y="2386584"/>
+            <a:ext cx="3236976" cy="64008"/>
           </a:xfrm>
           <a:prstGeom prst="rect">
             <a:avLst/>
           </a:prstGeom>
           <a:solidFill>
-            <a:srgbClr val="9AA5B1"/>
+            <a:srgbClr val="0E9488"/>
           </a:solidFill>
           <a:ln/>
         </p:spPr>
       </p:sp>
-      <p:sp>
-        <p:nvSpPr>
-          <p:cNvPr id="33" name="Text 31"/>
-          <p:cNvSpPr/>
-          <p:nvPr/>
-        </p:nvSpPr>
-        <p:spPr>
-          <a:xfrm>
-            <a:off x="6812280" y="3721608"/>
-            <a:ext cx="4572000" cy="365760"/>
+      <p:pic>
+        <p:nvPicPr>
+          <p:cNvPr id="17" name="Image 1" descr="preencoded.png">    </p:cNvPr>
+          <p:cNvPicPr>
+            <a:picLocks noChangeAspect="1"/>
+          </p:cNvPicPr>
+          <p:nvPr/>
+        </p:nvPicPr>
+        <p:blipFill>
+          <a:blip r:embed="rId2"/>
+          <a:stretch>
+            <a:fillRect/>
+          </a:stretch>
+        </p:blipFill>
+        <p:spPr>
+          <a:xfrm>
+            <a:off x="4636008" y="2542032"/>
+            <a:ext cx="566928" cy="566928"/>
+          </a:xfrm>
+          <a:prstGeom prst="rect">
+            <a:avLst/>
+          </a:prstGeom>
+        </p:spPr>
+      </p:pic>
+      <p:sp>
+        <p:nvSpPr>
+          <p:cNvPr id="18" name="Text 14"/>
+          <p:cNvSpPr/>
+          <p:nvPr/>
+        </p:nvSpPr>
+        <p:spPr>
+          <a:xfrm>
+            <a:off x="5349240" y="2578608"/>
+            <a:ext cx="2377440" cy="457200"/>
           </a:xfrm>
           <a:prstGeom prst="rect">
             <a:avLst/>
@@ -8927,7 +8860,7 @@
               <a:buNone/>
             </a:pPr>
             <a:r>
-              <a:rPr lang="en-US" sz="1500" b="1" dirty="0">
+              <a:rPr lang="en-US" sz="1700" b="1" dirty="0">
                 <a:solidFill>
                   <a:srgbClr val="151B2E"/>
                 </a:solidFill>
@@ -8935,22 +8868,22 @@
                 <a:ea typeface="Pretendard" pitchFamily="34" charset="-122"/>
                 <a:cs typeface="Pretendard" pitchFamily="34" charset="-120"/>
               </a:rPr>
-              <a:t>베이스라인 · 1곳 (대조군)</a:t>
-            </a:r>
-            <a:endParaRPr lang="en-US" sz="1500" dirty="0"/>
-          </a:p>
-        </p:txBody>
-      </p:sp>
-      <p:sp>
-        <p:nvSpPr>
-          <p:cNvPr id="34" name="Text 32"/>
-          <p:cNvSpPr/>
-          <p:nvPr/>
-        </p:nvSpPr>
-        <p:spPr>
-          <a:xfrm>
-            <a:off x="6812280" y="4114800"/>
-            <a:ext cx="4663440" cy="640080"/>
+              <a:t>분석 목표</a:t>
+            </a:r>
+            <a:endParaRPr lang="en-US" sz="1700" dirty="0"/>
+          </a:p>
+        </p:txBody>
+      </p:sp>
+      <p:sp>
+        <p:nvSpPr>
+          <p:cNvPr id="19" name="Text 15"/>
+          <p:cNvSpPr/>
+          <p:nvPr/>
+        </p:nvSpPr>
+        <p:spPr>
+          <a:xfrm>
+            <a:off x="4654296" y="3246120"/>
+            <a:ext cx="2971800" cy="777240"/>
           </a:xfrm>
           <a:prstGeom prst="rect">
             <a:avLst/>
@@ -8964,7 +8897,7 @@
           <a:p>
             <a:pPr indent="0" marL="0">
               <a:lnSpc>
-                <a:spcPct val="120000"/>
+                <a:spcPct val="125000"/>
               </a:lnSpc>
               <a:buNone/>
             </a:pPr>
@@ -8977,7 +8910,7 @@
                 <a:ea typeface="Pretendard" pitchFamily="34" charset="-122"/>
                 <a:cs typeface="Pretendard" pitchFamily="34" charset="-120"/>
               </a:rPr>
-              <a:t>용암동 — 거주지 기준선. 산단 영향군과의 평균차를 Welch t-test로 검정</a:t>
+              <a:t>산단 영향군 vs 거주지 평균차 통계 검정, 공정능력(Cpk) 산출, 우선 관리 지표 도출</a:t>
             </a:r>
             <a:endParaRPr lang="en-US" sz="1250" dirty="0"/>
           </a:p>
@@ -8985,58 +8918,231 @@
       </p:sp>
       <p:sp>
         <p:nvSpPr>
-          <p:cNvPr id="35" name="Shape 33"/>
-          <p:cNvSpPr/>
-          <p:nvPr/>
-        </p:nvSpPr>
-        <p:spPr>
-          <a:xfrm>
-            <a:off x="640080" y="5120640"/>
-            <a:ext cx="11064240" cy="868680"/>
+          <p:cNvPr id="20" name="Shape 16"/>
+          <p:cNvSpPr/>
+          <p:nvPr/>
+        </p:nvSpPr>
+        <p:spPr>
+          <a:xfrm>
+            <a:off x="8046720" y="2240280"/>
+            <a:ext cx="3566160" cy="1874520"/>
           </a:xfrm>
           <a:prstGeom prst="roundRect">
             <a:avLst>
-              <a:gd name="adj" fmla="val 8421"/>
+              <a:gd name="adj" fmla="val 3902"/>
             </a:avLst>
           </a:prstGeom>
           <a:solidFill>
-            <a:srgbClr val="EEF1FB"/>
+            <a:srgbClr val="FFFFFF"/>
           </a:solidFill>
-          <a:ln/>
-        </p:spPr>
-      </p:sp>
-      <p:sp>
-        <p:nvSpPr>
-          <p:cNvPr id="36" name="Shape 34"/>
-          <p:cNvSpPr/>
-          <p:nvPr/>
-        </p:nvSpPr>
-        <p:spPr>
-          <a:xfrm>
-            <a:off x="868680" y="5330952"/>
-            <a:ext cx="1371600" cy="438912"/>
+          <a:ln w="12700">
+            <a:solidFill>
+              <a:srgbClr val="DCE3F2"/>
+            </a:solidFill>
+            <a:prstDash val="solid"/>
+          </a:ln>
+          <a:effectLst>
+            <a:outerShdw sx="100000" sy="100000" kx="0" ky="0" algn="bl" rotWithShape="0" blurRad="101600" dist="25400" dir="5400000">
+              <a:srgbClr val="8794B5">
+                <a:alpha val="22000"/>
+              </a:srgbClr>
+            </a:outerShdw>
+          </a:effectLst>
+        </p:spPr>
+      </p:sp>
+      <p:sp>
+        <p:nvSpPr>
+          <p:cNvPr id="21" name="Shape 17"/>
+          <p:cNvSpPr/>
+          <p:nvPr/>
+        </p:nvSpPr>
+        <p:spPr>
+          <a:xfrm>
+            <a:off x="8211312" y="2386584"/>
+            <a:ext cx="3236976" cy="64008"/>
+          </a:xfrm>
+          <a:prstGeom prst="rect">
+            <a:avLst/>
+          </a:prstGeom>
+          <a:solidFill>
+            <a:srgbClr val="C77B16"/>
+          </a:solidFill>
+          <a:ln/>
+        </p:spPr>
+      </p:sp>
+      <p:pic>
+        <p:nvPicPr>
+          <p:cNvPr id="22" name="Image 2" descr="preencoded.png">    </p:cNvPr>
+          <p:cNvPicPr>
+            <a:picLocks noChangeAspect="1"/>
+          </p:cNvPicPr>
+          <p:nvPr/>
+        </p:nvPicPr>
+        <p:blipFill>
+          <a:blip r:embed="rId3"/>
+          <a:stretch>
+            <a:fillRect/>
+          </a:stretch>
+        </p:blipFill>
+        <p:spPr>
+          <a:xfrm>
+            <a:off x="8339328" y="2542032"/>
+            <a:ext cx="566928" cy="566928"/>
+          </a:xfrm>
+          <a:prstGeom prst="rect">
+            <a:avLst/>
+          </a:prstGeom>
+        </p:spPr>
+      </p:pic>
+      <p:sp>
+        <p:nvSpPr>
+          <p:cNvPr id="23" name="Text 18"/>
+          <p:cNvSpPr/>
+          <p:nvPr/>
+        </p:nvSpPr>
+        <p:spPr>
+          <a:xfrm>
+            <a:off x="9052560" y="2578608"/>
+            <a:ext cx="2377440" cy="457200"/>
+          </a:xfrm>
+          <a:prstGeom prst="rect">
+            <a:avLst/>
+          </a:prstGeom>
+          <a:noFill/>
+          <a:ln/>
+        </p:spPr>
+        <p:txBody>
+          <a:bodyPr wrap="square" lIns="0" tIns="0" rIns="0" bIns="0" rtlCol="0" anchor="ctr"/>
+          <a:lstStyle/>
+          <a:p>
+            <a:pPr indent="0" marL="0">
+              <a:buNone/>
+            </a:pPr>
+            <a:r>
+              <a:rPr lang="en-US" sz="1700" b="1" dirty="0">
+                <a:solidFill>
+                  <a:srgbClr val="151B2E"/>
+                </a:solidFill>
+                <a:latin typeface="Pretendard" pitchFamily="34" charset="0"/>
+                <a:ea typeface="Pretendard" pitchFamily="34" charset="-122"/>
+                <a:cs typeface="Pretendard" pitchFamily="34" charset="-120"/>
+              </a:rPr>
+              <a:t>분석 배경</a:t>
+            </a:r>
+            <a:endParaRPr lang="en-US" sz="1700" dirty="0"/>
+          </a:p>
+        </p:txBody>
+      </p:sp>
+      <p:sp>
+        <p:nvSpPr>
+          <p:cNvPr id="24" name="Text 19"/>
+          <p:cNvSpPr/>
+          <p:nvPr/>
+        </p:nvSpPr>
+        <p:spPr>
+          <a:xfrm>
+            <a:off x="8357616" y="3246120"/>
+            <a:ext cx="2971800" cy="777240"/>
+          </a:xfrm>
+          <a:prstGeom prst="rect">
+            <a:avLst/>
+          </a:prstGeom>
+          <a:noFill/>
+          <a:ln/>
+        </p:spPr>
+        <p:txBody>
+          <a:bodyPr wrap="square" lIns="0" tIns="0" rIns="0" bIns="0" rtlCol="0" anchor="t"/>
+          <a:lstStyle/>
+          <a:p>
+            <a:pPr indent="0" marL="0">
+              <a:lnSpc>
+                <a:spcPct val="125000"/>
+              </a:lnSpc>
+              <a:buNone/>
+            </a:pPr>
+            <a:r>
+              <a:rPr lang="en-US" sz="1250" dirty="0">
+                <a:solidFill>
+                  <a:srgbClr val="44506A"/>
+                </a:solidFill>
+                <a:latin typeface="Pretendard" pitchFamily="34" charset="0"/>
+                <a:ea typeface="Pretendard" pitchFamily="34" charset="-122"/>
+                <a:cs typeface="Pretendard" pitchFamily="34" charset="-120"/>
+              </a:rPr>
+              <a:t>산단 대기질 상시 감시 필요. 단순 농도 비교만으로는 ‘관리 우선순위’ 판단이 어려움</a:t>
+            </a:r>
+            <a:endParaRPr lang="en-US" sz="1250" dirty="0"/>
+          </a:p>
+        </p:txBody>
+      </p:sp>
+      <p:sp>
+        <p:nvSpPr>
+          <p:cNvPr id="25" name="Shape 20"/>
+          <p:cNvSpPr/>
+          <p:nvPr/>
+        </p:nvSpPr>
+        <p:spPr>
+          <a:xfrm>
+            <a:off x="640080" y="4343400"/>
+            <a:ext cx="5440680" cy="1600200"/>
           </a:xfrm>
           <a:prstGeom prst="roundRect">
             <a:avLst>
-              <a:gd name="adj" fmla="val 50000"/>
+              <a:gd name="adj" fmla="val 4571"/>
             </a:avLst>
           </a:prstGeom>
           <a:solidFill>
-            <a:srgbClr val="1F40E6"/>
+            <a:srgbClr val="FFFFFF"/>
           </a:solidFill>
-          <a:ln/>
-        </p:spPr>
-      </p:sp>
-      <p:sp>
-        <p:nvSpPr>
-          <p:cNvPr id="37" name="Text 35"/>
-          <p:cNvSpPr/>
-          <p:nvPr/>
-        </p:nvSpPr>
-        <p:spPr>
-          <a:xfrm>
-            <a:off x="868680" y="5330952"/>
-            <a:ext cx="1371600" cy="438912"/>
+          <a:ln w="12700">
+            <a:solidFill>
+              <a:srgbClr val="DCE3F2"/>
+            </a:solidFill>
+            <a:prstDash val="solid"/>
+          </a:ln>
+          <a:effectLst>
+            <a:outerShdw sx="100000" sy="100000" kx="0" ky="0" algn="bl" rotWithShape="0" blurRad="101600" dist="25400" dir="5400000">
+              <a:srgbClr val="8794B5">
+                <a:alpha val="22000"/>
+              </a:srgbClr>
+            </a:outerShdw>
+          </a:effectLst>
+        </p:spPr>
+      </p:sp>
+      <p:pic>
+        <p:nvPicPr>
+          <p:cNvPr id="26" name="Image 3" descr="preencoded.png">    </p:cNvPr>
+          <p:cNvPicPr>
+            <a:picLocks noChangeAspect="1"/>
+          </p:cNvPicPr>
+          <p:nvPr/>
+        </p:nvPicPr>
+        <p:blipFill>
+          <a:blip r:embed="rId4"/>
+          <a:stretch>
+            <a:fillRect/>
+          </a:stretch>
+        </p:blipFill>
+        <p:spPr>
+          <a:xfrm>
+            <a:off x="914400" y="4617720"/>
+            <a:ext cx="457200" cy="457200"/>
+          </a:xfrm>
+          <a:prstGeom prst="rect">
+            <a:avLst/>
+          </a:prstGeom>
+        </p:spPr>
+      </p:pic>
+      <p:sp>
+        <p:nvSpPr>
+          <p:cNvPr id="27" name="Text 21"/>
+          <p:cNvSpPr/>
+          <p:nvPr/>
+        </p:nvSpPr>
+        <p:spPr>
+          <a:xfrm>
+            <a:off x="1481328" y="4617720"/>
+            <a:ext cx="4114800" cy="457200"/>
           </a:xfrm>
           <a:prstGeom prst="rect">
             <a:avLst/>
@@ -9048,34 +9154,154 @@
           <a:bodyPr wrap="square" lIns="0" tIns="0" rIns="0" bIns="0" rtlCol="0" anchor="ctr"/>
           <a:lstStyle/>
           <a:p>
-            <a:pPr algn="ctr" indent="0" marL="0">
-              <a:buNone/>
-            </a:pPr>
-            <a:r>
-              <a:rPr lang="en-US" sz="1200" b="1" dirty="0">
-                <a:solidFill>
-                  <a:srgbClr val="FFFFFF"/>
-                </a:solidFill>
-                <a:latin typeface="Pretendard" pitchFamily="34" charset="0"/>
-                <a:ea typeface="Pretendard" pitchFamily="34" charset="-122"/>
-                <a:cs typeface="Pretendard" pitchFamily="34" charset="-120"/>
-              </a:rPr>
-              <a:t>인사이트</a:t>
-            </a:r>
-            <a:endParaRPr lang="en-US" sz="1200" dirty="0"/>
-          </a:p>
-        </p:txBody>
-      </p:sp>
-      <p:sp>
-        <p:nvSpPr>
-          <p:cNvPr id="38" name="Text 36"/>
-          <p:cNvSpPr/>
-          <p:nvPr/>
-        </p:nvSpPr>
-        <p:spPr>
-          <a:xfrm>
-            <a:off x="2423160" y="5120640"/>
-            <a:ext cx="9144000" cy="868680"/>
+            <a:pPr indent="0" marL="0">
+              <a:buNone/>
+            </a:pPr>
+            <a:r>
+              <a:rPr lang="en-US" sz="1500" b="1" dirty="0">
+                <a:solidFill>
+                  <a:srgbClr val="1F40E6"/>
+                </a:solidFill>
+                <a:latin typeface="Pretendard" pitchFamily="34" charset="0"/>
+                <a:ea typeface="Pretendard" pitchFamily="34" charset="-122"/>
+                <a:cs typeface="Pretendard" pitchFamily="34" charset="-120"/>
+              </a:rPr>
+              <a:t>문제 정의</a:t>
+            </a:r>
+            <a:endParaRPr lang="en-US" sz="1500" dirty="0"/>
+          </a:p>
+        </p:txBody>
+      </p:sp>
+      <p:sp>
+        <p:nvSpPr>
+          <p:cNvPr id="28" name="Text 22"/>
+          <p:cNvSpPr/>
+          <p:nvPr/>
+        </p:nvSpPr>
+        <p:spPr>
+          <a:xfrm>
+            <a:off x="914400" y="5120640"/>
+            <a:ext cx="4937760" cy="777240"/>
+          </a:xfrm>
+          <a:prstGeom prst="rect">
+            <a:avLst/>
+          </a:prstGeom>
+          <a:noFill/>
+          <a:ln/>
+        </p:spPr>
+        <p:txBody>
+          <a:bodyPr wrap="square" lIns="0" tIns="0" rIns="0" bIns="0" rtlCol="0" anchor="t"/>
+          <a:lstStyle/>
+          <a:p>
+            <a:pPr indent="0" marL="0">
+              <a:lnSpc>
+                <a:spcPct val="125000"/>
+              </a:lnSpc>
+              <a:buNone/>
+            </a:pPr>
+            <a:r>
+              <a:rPr lang="en-US" sz="1350" b="1" dirty="0">
+                <a:solidFill>
+                  <a:srgbClr val="151B2E"/>
+                </a:solidFill>
+                <a:latin typeface="Pretendard" pitchFamily="34" charset="0"/>
+                <a:ea typeface="Pretendard" pitchFamily="34" charset="-122"/>
+                <a:cs typeface="Pretendard" pitchFamily="34" charset="-120"/>
+              </a:rPr>
+              <a:t>산단 인근 대기질은 거주지보다 통계적으로 유의하게 나쁜가?</a:t>
+            </a:r>
+            <a:endParaRPr lang="en-US" sz="1350" dirty="0"/>
+          </a:p>
+          <a:p>
+            <a:pPr indent="0" marL="0">
+              <a:lnSpc>
+                <a:spcPct val="125000"/>
+              </a:lnSpc>
+              <a:buNone/>
+            </a:pPr>
+            <a:r>
+              <a:rPr lang="en-US" sz="1350" b="1" dirty="0">
+                <a:solidFill>
+                  <a:srgbClr val="151B2E"/>
+                </a:solidFill>
+                <a:latin typeface="Pretendard" pitchFamily="34" charset="0"/>
+                <a:ea typeface="Pretendard" pitchFamily="34" charset="-122"/>
+                <a:cs typeface="Pretendard" pitchFamily="34" charset="-120"/>
+              </a:rPr>
+              <a:t>어느 지표·어느 측정소를 우선 관리해야 하는가?</a:t>
+            </a:r>
+            <a:endParaRPr lang="en-US" sz="1350" dirty="0"/>
+          </a:p>
+        </p:txBody>
+      </p:sp>
+      <p:sp>
+        <p:nvSpPr>
+          <p:cNvPr id="29" name="Shape 23"/>
+          <p:cNvSpPr/>
+          <p:nvPr/>
+        </p:nvSpPr>
+        <p:spPr>
+          <a:xfrm>
+            <a:off x="6263640" y="4343400"/>
+            <a:ext cx="5440680" cy="1600200"/>
+          </a:xfrm>
+          <a:prstGeom prst="roundRect">
+            <a:avLst>
+              <a:gd name="adj" fmla="val 4571"/>
+            </a:avLst>
+          </a:prstGeom>
+          <a:solidFill>
+            <a:srgbClr val="FFFFFF"/>
+          </a:solidFill>
+          <a:ln w="12700">
+            <a:solidFill>
+              <a:srgbClr val="DCE3F2"/>
+            </a:solidFill>
+            <a:prstDash val="solid"/>
+          </a:ln>
+          <a:effectLst>
+            <a:outerShdw sx="100000" sy="100000" kx="0" ky="0" algn="bl" rotWithShape="0" blurRad="101600" dist="25400" dir="5400000">
+              <a:srgbClr val="8794B5">
+                <a:alpha val="22000"/>
+              </a:srgbClr>
+            </a:outerShdw>
+          </a:effectLst>
+        </p:spPr>
+      </p:sp>
+      <p:pic>
+        <p:nvPicPr>
+          <p:cNvPr id="30" name="Image 4" descr="preencoded.png">    </p:cNvPr>
+          <p:cNvPicPr>
+            <a:picLocks noChangeAspect="1"/>
+          </p:cNvPicPr>
+          <p:nvPr/>
+        </p:nvPicPr>
+        <p:blipFill>
+          <a:blip r:embed="rId5"/>
+          <a:stretch>
+            <a:fillRect/>
+          </a:stretch>
+        </p:blipFill>
+        <p:spPr>
+          <a:xfrm>
+            <a:off x="6537960" y="4617720"/>
+            <a:ext cx="457200" cy="457200"/>
+          </a:xfrm>
+          <a:prstGeom prst="rect">
+            <a:avLst/>
+          </a:prstGeom>
+        </p:spPr>
+      </p:pic>
+      <p:sp>
+        <p:nvSpPr>
+          <p:cNvPr id="31" name="Text 24"/>
+          <p:cNvSpPr/>
+          <p:nvPr/>
+        </p:nvSpPr>
+        <p:spPr>
+          <a:xfrm>
+            <a:off x="7104888" y="4617720"/>
+            <a:ext cx="4114800" cy="457200"/>
           </a:xfrm>
           <a:prstGeom prst="rect">
             <a:avLst/>
@@ -9091,6 +9317,48 @@
               <a:buNone/>
             </a:pPr>
             <a:r>
+              <a:rPr lang="en-US" sz="1500" b="1" dirty="0">
+                <a:solidFill>
+                  <a:srgbClr val="0E9488"/>
+                </a:solidFill>
+                <a:latin typeface="Pretendard" pitchFamily="34" charset="0"/>
+                <a:ea typeface="Pretendard" pitchFamily="34" charset="-122"/>
+                <a:cs typeface="Pretendard" pitchFamily="34" charset="-120"/>
+              </a:rPr>
+              <a:t>핵심 결과</a:t>
+            </a:r>
+            <a:endParaRPr lang="en-US" sz="1500" dirty="0"/>
+          </a:p>
+        </p:txBody>
+      </p:sp>
+      <p:sp>
+        <p:nvSpPr>
+          <p:cNvPr id="32" name="Text 25"/>
+          <p:cNvSpPr/>
+          <p:nvPr/>
+        </p:nvSpPr>
+        <p:spPr>
+          <a:xfrm>
+            <a:off x="6537960" y="5120640"/>
+            <a:ext cx="4937760" cy="777240"/>
+          </a:xfrm>
+          <a:prstGeom prst="rect">
+            <a:avLst/>
+          </a:prstGeom>
+          <a:noFill/>
+          <a:ln/>
+        </p:spPr>
+        <p:txBody>
+          <a:bodyPr wrap="square" lIns="0" tIns="0" rIns="0" bIns="0" rtlCol="0" anchor="t"/>
+          <a:lstStyle/>
+          <a:p>
+            <a:pPr indent="0" marL="0">
+              <a:lnSpc>
+                <a:spcPct val="125000"/>
+              </a:lnSpc>
+              <a:buNone/>
+            </a:pPr>
+            <a:r>
               <a:rPr lang="en-US" sz="1350" b="1" dirty="0">
                 <a:solidFill>
                   <a:srgbClr val="151B2E"/>
@@ -9099,15 +9367,35 @@
                 <a:ea typeface="Pretendard" pitchFamily="34" charset="-122"/>
                 <a:cs typeface="Pretendard" pitchFamily="34" charset="-120"/>
               </a:rPr>
-              <a:t>6종 × 5측정소 = 30개 ‘공정-품질특성’ 조합을 1시간 해상도로 상시 모니터링</a:t>
+              <a:t>PM2.5·PM10 전 측정소 ‘불량 위험’ 식별</a:t>
             </a:r>
             <a:endParaRPr lang="en-US" sz="1350" dirty="0"/>
           </a:p>
-        </p:txBody>
-      </p:sp>
-      <p:sp>
-        <p:nvSpPr>
-          <p:cNvPr id="39" name="Text 37"/>
+          <a:p>
+            <a:pPr indent="0" marL="0">
+              <a:lnSpc>
+                <a:spcPct val="125000"/>
+              </a:lnSpc>
+              <a:buNone/>
+            </a:pPr>
+            <a:r>
+              <a:rPr lang="en-US" sz="1350" b="1" dirty="0">
+                <a:solidFill>
+                  <a:srgbClr val="151B2E"/>
+                </a:solidFill>
+                <a:latin typeface="Pretendard" pitchFamily="34" charset="0"/>
+                <a:ea typeface="Pretendard" pitchFamily="34" charset="-122"/>
+                <a:cs typeface="Pretendard" pitchFamily="34" charset="-120"/>
+              </a:rPr>
+              <a:t>잔차 관리도로 거짓경보 46% → 2% 개선</a:t>
+            </a:r>
+            <a:endParaRPr lang="en-US" sz="1350" dirty="0"/>
+          </a:p>
+        </p:txBody>
+      </p:sp>
+      <p:sp>
+        <p:nvSpPr>
+          <p:cNvPr id="33" name="Text 26"/>
           <p:cNvSpPr/>
           <p:nvPr/>
         </p:nvSpPr>
@@ -9229,6 +9517,1304 @@
                 <a:ea typeface="Pretendard" pitchFamily="34" charset="-122"/>
                 <a:cs typeface="Pretendard" pitchFamily="34" charset="-120"/>
               </a:rPr>
+              <a:t>측정 시스템 — 대상</a:t>
+            </a:r>
+            <a:endParaRPr lang="en-US" sz="2700" dirty="0"/>
+          </a:p>
+        </p:txBody>
+      </p:sp>
+      <p:sp>
+        <p:nvSpPr>
+          <p:cNvPr id="4" name="Shape 2"/>
+          <p:cNvSpPr/>
+          <p:nvPr/>
+        </p:nvSpPr>
+        <p:spPr>
+          <a:xfrm>
+            <a:off x="530352" y="950976"/>
+            <a:ext cx="64008" cy="237744"/>
+          </a:xfrm>
+          <a:prstGeom prst="rect">
+            <a:avLst/>
+          </a:prstGeom>
+          <a:solidFill>
+            <a:srgbClr val="1F40E6"/>
+          </a:solidFill>
+          <a:ln/>
+        </p:spPr>
+      </p:sp>
+      <p:sp>
+        <p:nvSpPr>
+          <p:cNvPr id="5" name="Text 3"/>
+          <p:cNvSpPr/>
+          <p:nvPr/>
+        </p:nvSpPr>
+        <p:spPr>
+          <a:xfrm>
+            <a:off x="685800" y="914400"/>
+            <a:ext cx="10058400" cy="310896"/>
+          </a:xfrm>
+          <a:prstGeom prst="rect">
+            <a:avLst/>
+          </a:prstGeom>
+          <a:noFill/>
+          <a:ln/>
+        </p:spPr>
+        <p:txBody>
+          <a:bodyPr wrap="square" lIns="0" tIns="0" rIns="0" bIns="0" rtlCol="0" anchor="ctr"/>
+          <a:lstStyle/>
+          <a:p>
+            <a:pPr indent="0" marL="0">
+              <a:buNone/>
+            </a:pPr>
+            <a:r>
+              <a:rPr lang="en-US" sz="1300" dirty="0">
+                <a:solidFill>
+                  <a:srgbClr val="8A94A6"/>
+                </a:solidFill>
+                <a:latin typeface="Pretendard" pitchFamily="34" charset="0"/>
+                <a:ea typeface="Pretendard" pitchFamily="34" charset="-122"/>
+                <a:cs typeface="Pretendard" pitchFamily="34" charset="-120"/>
+              </a:rPr>
+              <a:t>측정 지표 6종 · 측정소 5곳</a:t>
+            </a:r>
+            <a:endParaRPr lang="en-US" sz="1300" dirty="0"/>
+          </a:p>
+        </p:txBody>
+      </p:sp>
+      <p:sp>
+        <p:nvSpPr>
+          <p:cNvPr id="6" name="Text 4"/>
+          <p:cNvSpPr/>
+          <p:nvPr/>
+        </p:nvSpPr>
+        <p:spPr>
+          <a:xfrm>
+            <a:off x="640080" y="1508760"/>
+            <a:ext cx="4572000" cy="365760"/>
+          </a:xfrm>
+          <a:prstGeom prst="rect">
+            <a:avLst/>
+          </a:prstGeom>
+          <a:noFill/>
+          <a:ln/>
+        </p:spPr>
+        <p:txBody>
+          <a:bodyPr wrap="square" lIns="0" tIns="0" rIns="0" bIns="0" rtlCol="0" anchor="ctr"/>
+          <a:lstStyle/>
+          <a:p>
+            <a:pPr indent="0" marL="0">
+              <a:buNone/>
+            </a:pPr>
+            <a:r>
+              <a:rPr lang="en-US" sz="1500" b="1" dirty="0">
+                <a:solidFill>
+                  <a:srgbClr val="1F40E6"/>
+                </a:solidFill>
+                <a:latin typeface="Pretendard" pitchFamily="34" charset="0"/>
+                <a:ea typeface="Pretendard" pitchFamily="34" charset="-122"/>
+                <a:cs typeface="Pretendard" pitchFamily="34" charset="-120"/>
+              </a:rPr>
+              <a:t>측정 지표 (품질특성 CQA)</a:t>
+            </a:r>
+            <a:endParaRPr lang="en-US" sz="1500" dirty="0"/>
+          </a:p>
+        </p:txBody>
+      </p:sp>
+      <p:sp>
+        <p:nvSpPr>
+          <p:cNvPr id="7" name="Shape 5"/>
+          <p:cNvSpPr/>
+          <p:nvPr/>
+        </p:nvSpPr>
+        <p:spPr>
+          <a:xfrm>
+            <a:off x="640080" y="1965960"/>
+            <a:ext cx="1783080" cy="1051560"/>
+          </a:xfrm>
+          <a:prstGeom prst="roundRect">
+            <a:avLst>
+              <a:gd name="adj" fmla="val 6957"/>
+            </a:avLst>
+          </a:prstGeom>
+          <a:solidFill>
+            <a:srgbClr val="FDEDED"/>
+          </a:solidFill>
+          <a:ln/>
+        </p:spPr>
+      </p:sp>
+      <p:sp>
+        <p:nvSpPr>
+          <p:cNvPr id="8" name="Text 6"/>
+          <p:cNvSpPr/>
+          <p:nvPr/>
+        </p:nvSpPr>
+        <p:spPr>
+          <a:xfrm>
+            <a:off x="640080" y="2112264"/>
+            <a:ext cx="1783080" cy="457200"/>
+          </a:xfrm>
+          <a:prstGeom prst="rect">
+            <a:avLst/>
+          </a:prstGeom>
+          <a:noFill/>
+          <a:ln/>
+        </p:spPr>
+        <p:txBody>
+          <a:bodyPr wrap="square" lIns="0" tIns="0" rIns="0" bIns="0" rtlCol="0" anchor="ctr"/>
+          <a:lstStyle/>
+          <a:p>
+            <a:pPr algn="ctr" indent="0" marL="0">
+              <a:buNone/>
+            </a:pPr>
+            <a:r>
+              <a:rPr lang="en-US" sz="2000" b="1" dirty="0">
+                <a:solidFill>
+                  <a:srgbClr val="E04646"/>
+                </a:solidFill>
+                <a:latin typeface="Pretendard" pitchFamily="34" charset="0"/>
+                <a:ea typeface="Pretendard" pitchFamily="34" charset="-122"/>
+                <a:cs typeface="Pretendard" pitchFamily="34" charset="-120"/>
+              </a:rPr>
+              <a:t>PM2.5</a:t>
+            </a:r>
+            <a:endParaRPr lang="en-US" sz="2000" dirty="0"/>
+          </a:p>
+        </p:txBody>
+      </p:sp>
+      <p:sp>
+        <p:nvSpPr>
+          <p:cNvPr id="9" name="Text 7"/>
+          <p:cNvSpPr/>
+          <p:nvPr/>
+        </p:nvSpPr>
+        <p:spPr>
+          <a:xfrm>
+            <a:off x="731520" y="2587752"/>
+            <a:ext cx="1600200" cy="347472"/>
+          </a:xfrm>
+          <a:prstGeom prst="rect">
+            <a:avLst/>
+          </a:prstGeom>
+          <a:noFill/>
+          <a:ln/>
+        </p:spPr>
+        <p:txBody>
+          <a:bodyPr wrap="square" lIns="0" tIns="0" rIns="0" bIns="0" rtlCol="0" anchor="ctr"/>
+          <a:lstStyle/>
+          <a:p>
+            <a:pPr algn="ctr" indent="0" marL="0">
+              <a:buNone/>
+            </a:pPr>
+            <a:r>
+              <a:rPr lang="en-US" sz="1050" dirty="0">
+                <a:solidFill>
+                  <a:srgbClr val="44506A"/>
+                </a:solidFill>
+                <a:latin typeface="Pretendard" pitchFamily="34" charset="0"/>
+                <a:ea typeface="Pretendard" pitchFamily="34" charset="-122"/>
+                <a:cs typeface="Pretendard" pitchFamily="34" charset="-120"/>
+              </a:rPr>
+              <a:t>초미세먼지 · 우선관리</a:t>
+            </a:r>
+            <a:endParaRPr lang="en-US" sz="1050" dirty="0"/>
+          </a:p>
+        </p:txBody>
+      </p:sp>
+      <p:sp>
+        <p:nvSpPr>
+          <p:cNvPr id="10" name="Shape 8"/>
+          <p:cNvSpPr/>
+          <p:nvPr/>
+        </p:nvSpPr>
+        <p:spPr>
+          <a:xfrm>
+            <a:off x="2542032" y="1965960"/>
+            <a:ext cx="1783080" cy="1051560"/>
+          </a:xfrm>
+          <a:prstGeom prst="roundRect">
+            <a:avLst>
+              <a:gd name="adj" fmla="val 6957"/>
+            </a:avLst>
+          </a:prstGeom>
+          <a:solidFill>
+            <a:srgbClr val="FDEDED"/>
+          </a:solidFill>
+          <a:ln/>
+        </p:spPr>
+      </p:sp>
+      <p:sp>
+        <p:nvSpPr>
+          <p:cNvPr id="11" name="Text 9"/>
+          <p:cNvSpPr/>
+          <p:nvPr/>
+        </p:nvSpPr>
+        <p:spPr>
+          <a:xfrm>
+            <a:off x="2542032" y="2112264"/>
+            <a:ext cx="1783080" cy="457200"/>
+          </a:xfrm>
+          <a:prstGeom prst="rect">
+            <a:avLst/>
+          </a:prstGeom>
+          <a:noFill/>
+          <a:ln/>
+        </p:spPr>
+        <p:txBody>
+          <a:bodyPr wrap="square" lIns="0" tIns="0" rIns="0" bIns="0" rtlCol="0" anchor="ctr"/>
+          <a:lstStyle/>
+          <a:p>
+            <a:pPr algn="ctr" indent="0" marL="0">
+              <a:buNone/>
+            </a:pPr>
+            <a:r>
+              <a:rPr lang="en-US" sz="2000" b="1" dirty="0">
+                <a:solidFill>
+                  <a:srgbClr val="E04646"/>
+                </a:solidFill>
+                <a:latin typeface="Pretendard" pitchFamily="34" charset="0"/>
+                <a:ea typeface="Pretendard" pitchFamily="34" charset="-122"/>
+                <a:cs typeface="Pretendard" pitchFamily="34" charset="-120"/>
+              </a:rPr>
+              <a:t>PM10</a:t>
+            </a:r>
+            <a:endParaRPr lang="en-US" sz="2000" dirty="0"/>
+          </a:p>
+        </p:txBody>
+      </p:sp>
+      <p:sp>
+        <p:nvSpPr>
+          <p:cNvPr id="12" name="Text 10"/>
+          <p:cNvSpPr/>
+          <p:nvPr/>
+        </p:nvSpPr>
+        <p:spPr>
+          <a:xfrm>
+            <a:off x="2633472" y="2587752"/>
+            <a:ext cx="1600200" cy="347472"/>
+          </a:xfrm>
+          <a:prstGeom prst="rect">
+            <a:avLst/>
+          </a:prstGeom>
+          <a:noFill/>
+          <a:ln/>
+        </p:spPr>
+        <p:txBody>
+          <a:bodyPr wrap="square" lIns="0" tIns="0" rIns="0" bIns="0" rtlCol="0" anchor="ctr"/>
+          <a:lstStyle/>
+          <a:p>
+            <a:pPr algn="ctr" indent="0" marL="0">
+              <a:buNone/>
+            </a:pPr>
+            <a:r>
+              <a:rPr lang="en-US" sz="1050" dirty="0">
+                <a:solidFill>
+                  <a:srgbClr val="44506A"/>
+                </a:solidFill>
+                <a:latin typeface="Pretendard" pitchFamily="34" charset="0"/>
+                <a:ea typeface="Pretendard" pitchFamily="34" charset="-122"/>
+                <a:cs typeface="Pretendard" pitchFamily="34" charset="-120"/>
+              </a:rPr>
+              <a:t>미세먼지 · 우선관리</a:t>
+            </a:r>
+            <a:endParaRPr lang="en-US" sz="1050" dirty="0"/>
+          </a:p>
+        </p:txBody>
+      </p:sp>
+      <p:sp>
+        <p:nvSpPr>
+          <p:cNvPr id="13" name="Shape 11"/>
+          <p:cNvSpPr/>
+          <p:nvPr/>
+        </p:nvSpPr>
+        <p:spPr>
+          <a:xfrm>
+            <a:off x="4443984" y="1965960"/>
+            <a:ext cx="1783080" cy="1051560"/>
+          </a:xfrm>
+          <a:prstGeom prst="roundRect">
+            <a:avLst>
+              <a:gd name="adj" fmla="val 6957"/>
+            </a:avLst>
+          </a:prstGeom>
+          <a:solidFill>
+            <a:srgbClr val="EEF1FB"/>
+          </a:solidFill>
+          <a:ln/>
+        </p:spPr>
+      </p:sp>
+      <p:sp>
+        <p:nvSpPr>
+          <p:cNvPr id="14" name="Text 12"/>
+          <p:cNvSpPr/>
+          <p:nvPr/>
+        </p:nvSpPr>
+        <p:spPr>
+          <a:xfrm>
+            <a:off x="4443984" y="2112264"/>
+            <a:ext cx="1783080" cy="457200"/>
+          </a:xfrm>
+          <a:prstGeom prst="rect">
+            <a:avLst/>
+          </a:prstGeom>
+          <a:noFill/>
+          <a:ln/>
+        </p:spPr>
+        <p:txBody>
+          <a:bodyPr wrap="square" lIns="0" tIns="0" rIns="0" bIns="0" rtlCol="0" anchor="ctr"/>
+          <a:lstStyle/>
+          <a:p>
+            <a:pPr algn="ctr" indent="0" marL="0">
+              <a:buNone/>
+            </a:pPr>
+            <a:r>
+              <a:rPr lang="en-US" sz="2000" b="1" dirty="0">
+                <a:solidFill>
+                  <a:srgbClr val="1F40E6"/>
+                </a:solidFill>
+                <a:latin typeface="Pretendard" pitchFamily="34" charset="0"/>
+                <a:ea typeface="Pretendard" pitchFamily="34" charset="-122"/>
+                <a:cs typeface="Pretendard" pitchFamily="34" charset="-120"/>
+              </a:rPr>
+              <a:t>NO₂</a:t>
+            </a:r>
+            <a:endParaRPr lang="en-US" sz="2000" dirty="0"/>
+          </a:p>
+        </p:txBody>
+      </p:sp>
+      <p:sp>
+        <p:nvSpPr>
+          <p:cNvPr id="15" name="Text 13"/>
+          <p:cNvSpPr/>
+          <p:nvPr/>
+        </p:nvSpPr>
+        <p:spPr>
+          <a:xfrm>
+            <a:off x="4535424" y="2587752"/>
+            <a:ext cx="1600200" cy="347472"/>
+          </a:xfrm>
+          <a:prstGeom prst="rect">
+            <a:avLst/>
+          </a:prstGeom>
+          <a:noFill/>
+          <a:ln/>
+        </p:spPr>
+        <p:txBody>
+          <a:bodyPr wrap="square" lIns="0" tIns="0" rIns="0" bIns="0" rtlCol="0" anchor="ctr"/>
+          <a:lstStyle/>
+          <a:p>
+            <a:pPr algn="ctr" indent="0" marL="0">
+              <a:buNone/>
+            </a:pPr>
+            <a:r>
+              <a:rPr lang="en-US" sz="1050" dirty="0">
+                <a:solidFill>
+                  <a:srgbClr val="44506A"/>
+                </a:solidFill>
+                <a:latin typeface="Pretendard" pitchFamily="34" charset="0"/>
+                <a:ea typeface="Pretendard" pitchFamily="34" charset="-122"/>
+                <a:cs typeface="Pretendard" pitchFamily="34" charset="-120"/>
+              </a:rPr>
+              <a:t>이산화질소</a:t>
+            </a:r>
+            <a:endParaRPr lang="en-US" sz="1050" dirty="0"/>
+          </a:p>
+        </p:txBody>
+      </p:sp>
+      <p:sp>
+        <p:nvSpPr>
+          <p:cNvPr id="16" name="Shape 14"/>
+          <p:cNvSpPr/>
+          <p:nvPr/>
+        </p:nvSpPr>
+        <p:spPr>
+          <a:xfrm>
+            <a:off x="640080" y="3273552"/>
+            <a:ext cx="1783080" cy="1051560"/>
+          </a:xfrm>
+          <a:prstGeom prst="roundRect">
+            <a:avLst>
+              <a:gd name="adj" fmla="val 6957"/>
+            </a:avLst>
+          </a:prstGeom>
+          <a:solidFill>
+            <a:srgbClr val="EEF1FB"/>
+          </a:solidFill>
+          <a:ln/>
+        </p:spPr>
+      </p:sp>
+      <p:sp>
+        <p:nvSpPr>
+          <p:cNvPr id="17" name="Text 15"/>
+          <p:cNvSpPr/>
+          <p:nvPr/>
+        </p:nvSpPr>
+        <p:spPr>
+          <a:xfrm>
+            <a:off x="640080" y="3419856"/>
+            <a:ext cx="1783080" cy="457200"/>
+          </a:xfrm>
+          <a:prstGeom prst="rect">
+            <a:avLst/>
+          </a:prstGeom>
+          <a:noFill/>
+          <a:ln/>
+        </p:spPr>
+        <p:txBody>
+          <a:bodyPr wrap="square" lIns="0" tIns="0" rIns="0" bIns="0" rtlCol="0" anchor="ctr"/>
+          <a:lstStyle/>
+          <a:p>
+            <a:pPr algn="ctr" indent="0" marL="0">
+              <a:buNone/>
+            </a:pPr>
+            <a:r>
+              <a:rPr lang="en-US" sz="2000" b="1" dirty="0">
+                <a:solidFill>
+                  <a:srgbClr val="1F40E6"/>
+                </a:solidFill>
+                <a:latin typeface="Pretendard" pitchFamily="34" charset="0"/>
+                <a:ea typeface="Pretendard" pitchFamily="34" charset="-122"/>
+                <a:cs typeface="Pretendard" pitchFamily="34" charset="-120"/>
+              </a:rPr>
+              <a:t>O₃</a:t>
+            </a:r>
+            <a:endParaRPr lang="en-US" sz="2000" dirty="0"/>
+          </a:p>
+        </p:txBody>
+      </p:sp>
+      <p:sp>
+        <p:nvSpPr>
+          <p:cNvPr id="18" name="Text 16"/>
+          <p:cNvSpPr/>
+          <p:nvPr/>
+        </p:nvSpPr>
+        <p:spPr>
+          <a:xfrm>
+            <a:off x="731520" y="3895344"/>
+            <a:ext cx="1600200" cy="347472"/>
+          </a:xfrm>
+          <a:prstGeom prst="rect">
+            <a:avLst/>
+          </a:prstGeom>
+          <a:noFill/>
+          <a:ln/>
+        </p:spPr>
+        <p:txBody>
+          <a:bodyPr wrap="square" lIns="0" tIns="0" rIns="0" bIns="0" rtlCol="0" anchor="ctr"/>
+          <a:lstStyle/>
+          <a:p>
+            <a:pPr algn="ctr" indent="0" marL="0">
+              <a:buNone/>
+            </a:pPr>
+            <a:r>
+              <a:rPr lang="en-US" sz="1050" dirty="0">
+                <a:solidFill>
+                  <a:srgbClr val="44506A"/>
+                </a:solidFill>
+                <a:latin typeface="Pretendard" pitchFamily="34" charset="0"/>
+                <a:ea typeface="Pretendard" pitchFamily="34" charset="-122"/>
+                <a:cs typeface="Pretendard" pitchFamily="34" charset="-120"/>
+              </a:rPr>
+              <a:t>오존</a:t>
+            </a:r>
+            <a:endParaRPr lang="en-US" sz="1050" dirty="0"/>
+          </a:p>
+        </p:txBody>
+      </p:sp>
+      <p:sp>
+        <p:nvSpPr>
+          <p:cNvPr id="19" name="Shape 17"/>
+          <p:cNvSpPr/>
+          <p:nvPr/>
+        </p:nvSpPr>
+        <p:spPr>
+          <a:xfrm>
+            <a:off x="2542032" y="3273552"/>
+            <a:ext cx="1783080" cy="1051560"/>
+          </a:xfrm>
+          <a:prstGeom prst="roundRect">
+            <a:avLst>
+              <a:gd name="adj" fmla="val 6957"/>
+            </a:avLst>
+          </a:prstGeom>
+          <a:solidFill>
+            <a:srgbClr val="EEF1FB"/>
+          </a:solidFill>
+          <a:ln/>
+        </p:spPr>
+      </p:sp>
+      <p:sp>
+        <p:nvSpPr>
+          <p:cNvPr id="20" name="Text 18"/>
+          <p:cNvSpPr/>
+          <p:nvPr/>
+        </p:nvSpPr>
+        <p:spPr>
+          <a:xfrm>
+            <a:off x="2542032" y="3419856"/>
+            <a:ext cx="1783080" cy="457200"/>
+          </a:xfrm>
+          <a:prstGeom prst="rect">
+            <a:avLst/>
+          </a:prstGeom>
+          <a:noFill/>
+          <a:ln/>
+        </p:spPr>
+        <p:txBody>
+          <a:bodyPr wrap="square" lIns="0" tIns="0" rIns="0" bIns="0" rtlCol="0" anchor="ctr"/>
+          <a:lstStyle/>
+          <a:p>
+            <a:pPr algn="ctr" indent="0" marL="0">
+              <a:buNone/>
+            </a:pPr>
+            <a:r>
+              <a:rPr lang="en-US" sz="2000" b="1" dirty="0">
+                <a:solidFill>
+                  <a:srgbClr val="1F40E6"/>
+                </a:solidFill>
+                <a:latin typeface="Pretendard" pitchFamily="34" charset="0"/>
+                <a:ea typeface="Pretendard" pitchFamily="34" charset="-122"/>
+                <a:cs typeface="Pretendard" pitchFamily="34" charset="-120"/>
+              </a:rPr>
+              <a:t>SO₂</a:t>
+            </a:r>
+            <a:endParaRPr lang="en-US" sz="2000" dirty="0"/>
+          </a:p>
+        </p:txBody>
+      </p:sp>
+      <p:sp>
+        <p:nvSpPr>
+          <p:cNvPr id="21" name="Text 19"/>
+          <p:cNvSpPr/>
+          <p:nvPr/>
+        </p:nvSpPr>
+        <p:spPr>
+          <a:xfrm>
+            <a:off x="2633472" y="3895344"/>
+            <a:ext cx="1600200" cy="347472"/>
+          </a:xfrm>
+          <a:prstGeom prst="rect">
+            <a:avLst/>
+          </a:prstGeom>
+          <a:noFill/>
+          <a:ln/>
+        </p:spPr>
+        <p:txBody>
+          <a:bodyPr wrap="square" lIns="0" tIns="0" rIns="0" bIns="0" rtlCol="0" anchor="ctr"/>
+          <a:lstStyle/>
+          <a:p>
+            <a:pPr algn="ctr" indent="0" marL="0">
+              <a:buNone/>
+            </a:pPr>
+            <a:r>
+              <a:rPr lang="en-US" sz="1050" dirty="0">
+                <a:solidFill>
+                  <a:srgbClr val="44506A"/>
+                </a:solidFill>
+                <a:latin typeface="Pretendard" pitchFamily="34" charset="0"/>
+                <a:ea typeface="Pretendard" pitchFamily="34" charset="-122"/>
+                <a:cs typeface="Pretendard" pitchFamily="34" charset="-120"/>
+              </a:rPr>
+              <a:t>아황산가스</a:t>
+            </a:r>
+            <a:endParaRPr lang="en-US" sz="1050" dirty="0"/>
+          </a:p>
+        </p:txBody>
+      </p:sp>
+      <p:sp>
+        <p:nvSpPr>
+          <p:cNvPr id="22" name="Shape 20"/>
+          <p:cNvSpPr/>
+          <p:nvPr/>
+        </p:nvSpPr>
+        <p:spPr>
+          <a:xfrm>
+            <a:off x="4443984" y="3273552"/>
+            <a:ext cx="1783080" cy="1051560"/>
+          </a:xfrm>
+          <a:prstGeom prst="roundRect">
+            <a:avLst>
+              <a:gd name="adj" fmla="val 6957"/>
+            </a:avLst>
+          </a:prstGeom>
+          <a:solidFill>
+            <a:srgbClr val="EEF1FB"/>
+          </a:solidFill>
+          <a:ln/>
+        </p:spPr>
+      </p:sp>
+      <p:sp>
+        <p:nvSpPr>
+          <p:cNvPr id="23" name="Text 21"/>
+          <p:cNvSpPr/>
+          <p:nvPr/>
+        </p:nvSpPr>
+        <p:spPr>
+          <a:xfrm>
+            <a:off x="4443984" y="3419856"/>
+            <a:ext cx="1783080" cy="457200"/>
+          </a:xfrm>
+          <a:prstGeom prst="rect">
+            <a:avLst/>
+          </a:prstGeom>
+          <a:noFill/>
+          <a:ln/>
+        </p:spPr>
+        <p:txBody>
+          <a:bodyPr wrap="square" lIns="0" tIns="0" rIns="0" bIns="0" rtlCol="0" anchor="ctr"/>
+          <a:lstStyle/>
+          <a:p>
+            <a:pPr algn="ctr" indent="0" marL="0">
+              <a:buNone/>
+            </a:pPr>
+            <a:r>
+              <a:rPr lang="en-US" sz="2000" b="1" dirty="0">
+                <a:solidFill>
+                  <a:srgbClr val="1F40E6"/>
+                </a:solidFill>
+                <a:latin typeface="Pretendard" pitchFamily="34" charset="0"/>
+                <a:ea typeface="Pretendard" pitchFamily="34" charset="-122"/>
+                <a:cs typeface="Pretendard" pitchFamily="34" charset="-120"/>
+              </a:rPr>
+              <a:t>CO</a:t>
+            </a:r>
+            <a:endParaRPr lang="en-US" sz="2000" dirty="0"/>
+          </a:p>
+        </p:txBody>
+      </p:sp>
+      <p:sp>
+        <p:nvSpPr>
+          <p:cNvPr id="24" name="Text 22"/>
+          <p:cNvSpPr/>
+          <p:nvPr/>
+        </p:nvSpPr>
+        <p:spPr>
+          <a:xfrm>
+            <a:off x="4535424" y="3895344"/>
+            <a:ext cx="1600200" cy="347472"/>
+          </a:xfrm>
+          <a:prstGeom prst="rect">
+            <a:avLst/>
+          </a:prstGeom>
+          <a:noFill/>
+          <a:ln/>
+        </p:spPr>
+        <p:txBody>
+          <a:bodyPr wrap="square" lIns="0" tIns="0" rIns="0" bIns="0" rtlCol="0" anchor="ctr"/>
+          <a:lstStyle/>
+          <a:p>
+            <a:pPr algn="ctr" indent="0" marL="0">
+              <a:buNone/>
+            </a:pPr>
+            <a:r>
+              <a:rPr lang="en-US" sz="1050" dirty="0">
+                <a:solidFill>
+                  <a:srgbClr val="44506A"/>
+                </a:solidFill>
+                <a:latin typeface="Pretendard" pitchFamily="34" charset="0"/>
+                <a:ea typeface="Pretendard" pitchFamily="34" charset="-122"/>
+                <a:cs typeface="Pretendard" pitchFamily="34" charset="-120"/>
+              </a:rPr>
+              <a:t>일산화탄소</a:t>
+            </a:r>
+            <a:endParaRPr lang="en-US" sz="1050" dirty="0"/>
+          </a:p>
+        </p:txBody>
+      </p:sp>
+      <p:sp>
+        <p:nvSpPr>
+          <p:cNvPr id="25" name="Text 23"/>
+          <p:cNvSpPr/>
+          <p:nvPr/>
+        </p:nvSpPr>
+        <p:spPr>
+          <a:xfrm>
+            <a:off x="640080" y="4526280"/>
+            <a:ext cx="5669280" cy="320040"/>
+          </a:xfrm>
+          <a:prstGeom prst="rect">
+            <a:avLst/>
+          </a:prstGeom>
+          <a:noFill/>
+          <a:ln/>
+        </p:spPr>
+        <p:txBody>
+          <a:bodyPr wrap="square" lIns="0" tIns="0" rIns="0" bIns="0" rtlCol="0" anchor="ctr"/>
+          <a:lstStyle/>
+          <a:p>
+            <a:pPr indent="0" marL="0">
+              <a:buNone/>
+            </a:pPr>
+            <a:r>
+              <a:rPr lang="en-US" sz="1100" i="1" dirty="0">
+                <a:solidFill>
+                  <a:srgbClr val="8A94A6"/>
+                </a:solidFill>
+                <a:latin typeface="Pretendard" pitchFamily="34" charset="0"/>
+                <a:ea typeface="Pretendard" pitchFamily="34" charset="-122"/>
+                <a:cs typeface="Pretendard" pitchFamily="34" charset="-120"/>
+              </a:rPr>
+              <a:t>USL = 대기환경보전법 환경기준 · LSL = 0 (낮을수록 좋음)</a:t>
+            </a:r>
+            <a:endParaRPr lang="en-US" sz="1100" dirty="0"/>
+          </a:p>
+        </p:txBody>
+      </p:sp>
+      <p:sp>
+        <p:nvSpPr>
+          <p:cNvPr id="26" name="Text 24"/>
+          <p:cNvSpPr/>
+          <p:nvPr/>
+        </p:nvSpPr>
+        <p:spPr>
+          <a:xfrm>
+            <a:off x="6537960" y="1508760"/>
+            <a:ext cx="4572000" cy="365760"/>
+          </a:xfrm>
+          <a:prstGeom prst="rect">
+            <a:avLst/>
+          </a:prstGeom>
+          <a:noFill/>
+          <a:ln/>
+        </p:spPr>
+        <p:txBody>
+          <a:bodyPr wrap="square" lIns="0" tIns="0" rIns="0" bIns="0" rtlCol="0" anchor="ctr"/>
+          <a:lstStyle/>
+          <a:p>
+            <a:pPr indent="0" marL="0">
+              <a:buNone/>
+            </a:pPr>
+            <a:r>
+              <a:rPr lang="en-US" sz="1500" b="1" dirty="0">
+                <a:solidFill>
+                  <a:srgbClr val="1F40E6"/>
+                </a:solidFill>
+                <a:latin typeface="Pretendard" pitchFamily="34" charset="0"/>
+                <a:ea typeface="Pretendard" pitchFamily="34" charset="-122"/>
+                <a:cs typeface="Pretendard" pitchFamily="34" charset="-120"/>
+              </a:rPr>
+              <a:t>측정소 (공정 라인)</a:t>
+            </a:r>
+            <a:endParaRPr lang="en-US" sz="1500" dirty="0"/>
+          </a:p>
+        </p:txBody>
+      </p:sp>
+      <p:sp>
+        <p:nvSpPr>
+          <p:cNvPr id="27" name="Shape 25"/>
+          <p:cNvSpPr/>
+          <p:nvPr/>
+        </p:nvSpPr>
+        <p:spPr>
+          <a:xfrm>
+            <a:off x="6537960" y="1965960"/>
+            <a:ext cx="5166360" cy="1371600"/>
+          </a:xfrm>
+          <a:prstGeom prst="roundRect">
+            <a:avLst>
+              <a:gd name="adj" fmla="val 5333"/>
+            </a:avLst>
+          </a:prstGeom>
+          <a:solidFill>
+            <a:srgbClr val="FFFFFF"/>
+          </a:solidFill>
+          <a:ln w="12700">
+            <a:solidFill>
+              <a:srgbClr val="DCE3F2"/>
+            </a:solidFill>
+            <a:prstDash val="solid"/>
+          </a:ln>
+          <a:effectLst>
+            <a:outerShdw sx="100000" sy="100000" kx="0" ky="0" algn="bl" rotWithShape="0" blurRad="101600" dist="25400" dir="5400000">
+              <a:srgbClr val="8794B5">
+                <a:alpha val="22000"/>
+              </a:srgbClr>
+            </a:outerShdw>
+          </a:effectLst>
+        </p:spPr>
+      </p:sp>
+      <p:sp>
+        <p:nvSpPr>
+          <p:cNvPr id="28" name="Shape 26"/>
+          <p:cNvSpPr/>
+          <p:nvPr/>
+        </p:nvSpPr>
+        <p:spPr>
+          <a:xfrm>
+            <a:off x="6702552" y="2112264"/>
+            <a:ext cx="4837176" cy="64008"/>
+          </a:xfrm>
+          <a:prstGeom prst="rect">
+            <a:avLst/>
+          </a:prstGeom>
+          <a:solidFill>
+            <a:srgbClr val="1F40E6"/>
+          </a:solidFill>
+          <a:ln/>
+        </p:spPr>
+      </p:sp>
+      <p:sp>
+        <p:nvSpPr>
+          <p:cNvPr id="29" name="Text 27"/>
+          <p:cNvSpPr/>
+          <p:nvPr/>
+        </p:nvSpPr>
+        <p:spPr>
+          <a:xfrm>
+            <a:off x="6812280" y="2212848"/>
+            <a:ext cx="4572000" cy="365760"/>
+          </a:xfrm>
+          <a:prstGeom prst="rect">
+            <a:avLst/>
+          </a:prstGeom>
+          <a:noFill/>
+          <a:ln/>
+        </p:spPr>
+        <p:txBody>
+          <a:bodyPr wrap="square" lIns="0" tIns="0" rIns="0" bIns="0" rtlCol="0" anchor="ctr"/>
+          <a:lstStyle/>
+          <a:p>
+            <a:pPr indent="0" marL="0">
+              <a:buNone/>
+            </a:pPr>
+            <a:r>
+              <a:rPr lang="en-US" sz="1500" b="1" dirty="0">
+                <a:solidFill>
+                  <a:srgbClr val="151B2E"/>
+                </a:solidFill>
+                <a:latin typeface="Pretendard" pitchFamily="34" charset="0"/>
+                <a:ea typeface="Pretendard" pitchFamily="34" charset="-122"/>
+                <a:cs typeface="Pretendard" pitchFamily="34" charset="-120"/>
+              </a:rPr>
+              <a:t>산단 영향군 · 4곳</a:t>
+            </a:r>
+            <a:endParaRPr lang="en-US" sz="1500" dirty="0"/>
+          </a:p>
+        </p:txBody>
+      </p:sp>
+      <p:sp>
+        <p:nvSpPr>
+          <p:cNvPr id="30" name="Text 28"/>
+          <p:cNvSpPr/>
+          <p:nvPr/>
+        </p:nvSpPr>
+        <p:spPr>
+          <a:xfrm>
+            <a:off x="6812280" y="2606040"/>
+            <a:ext cx="4663440" cy="640080"/>
+          </a:xfrm>
+          <a:prstGeom prst="rect">
+            <a:avLst/>
+          </a:prstGeom>
+          <a:noFill/>
+          <a:ln/>
+        </p:spPr>
+        <p:txBody>
+          <a:bodyPr wrap="square" lIns="0" tIns="0" rIns="0" bIns="0" rtlCol="0" anchor="t"/>
+          <a:lstStyle/>
+          <a:p>
+            <a:pPr indent="0" marL="0">
+              <a:lnSpc>
+                <a:spcPct val="120000"/>
+              </a:lnSpc>
+              <a:buNone/>
+            </a:pPr>
+            <a:r>
+              <a:rPr lang="en-US" sz="1250" dirty="0">
+                <a:solidFill>
+                  <a:srgbClr val="44506A"/>
+                </a:solidFill>
+                <a:latin typeface="Pretendard" pitchFamily="34" charset="0"/>
+                <a:ea typeface="Pretendard" pitchFamily="34" charset="-122"/>
+                <a:cs typeface="Pretendard" pitchFamily="34" charset="-120"/>
+              </a:rPr>
+              <a:t>오창(반도체) · 복대 · 봉명(SK하이닉스 청주캠퍼스 권역) · 오송(바이오)</a:t>
+            </a:r>
+            <a:endParaRPr lang="en-US" sz="1250" dirty="0"/>
+          </a:p>
+        </p:txBody>
+      </p:sp>
+      <p:sp>
+        <p:nvSpPr>
+          <p:cNvPr id="31" name="Shape 29"/>
+          <p:cNvSpPr/>
+          <p:nvPr/>
+        </p:nvSpPr>
+        <p:spPr>
+          <a:xfrm>
+            <a:off x="6537960" y="3474720"/>
+            <a:ext cx="5166360" cy="1371600"/>
+          </a:xfrm>
+          <a:prstGeom prst="roundRect">
+            <a:avLst>
+              <a:gd name="adj" fmla="val 5333"/>
+            </a:avLst>
+          </a:prstGeom>
+          <a:solidFill>
+            <a:srgbClr val="FFFFFF"/>
+          </a:solidFill>
+          <a:ln w="12700">
+            <a:solidFill>
+              <a:srgbClr val="DCE3F2"/>
+            </a:solidFill>
+            <a:prstDash val="solid"/>
+          </a:ln>
+          <a:effectLst>
+            <a:outerShdw sx="100000" sy="100000" kx="0" ky="0" algn="bl" rotWithShape="0" blurRad="101600" dist="25400" dir="5400000">
+              <a:srgbClr val="8794B5">
+                <a:alpha val="22000"/>
+              </a:srgbClr>
+            </a:outerShdw>
+          </a:effectLst>
+        </p:spPr>
+      </p:sp>
+      <p:sp>
+        <p:nvSpPr>
+          <p:cNvPr id="32" name="Shape 30"/>
+          <p:cNvSpPr/>
+          <p:nvPr/>
+        </p:nvSpPr>
+        <p:spPr>
+          <a:xfrm>
+            <a:off x="6702552" y="3621024"/>
+            <a:ext cx="4837176" cy="64008"/>
+          </a:xfrm>
+          <a:prstGeom prst="rect">
+            <a:avLst/>
+          </a:prstGeom>
+          <a:solidFill>
+            <a:srgbClr val="9AA5B1"/>
+          </a:solidFill>
+          <a:ln/>
+        </p:spPr>
+      </p:sp>
+      <p:sp>
+        <p:nvSpPr>
+          <p:cNvPr id="33" name="Text 31"/>
+          <p:cNvSpPr/>
+          <p:nvPr/>
+        </p:nvSpPr>
+        <p:spPr>
+          <a:xfrm>
+            <a:off x="6812280" y="3721608"/>
+            <a:ext cx="4572000" cy="365760"/>
+          </a:xfrm>
+          <a:prstGeom prst="rect">
+            <a:avLst/>
+          </a:prstGeom>
+          <a:noFill/>
+          <a:ln/>
+        </p:spPr>
+        <p:txBody>
+          <a:bodyPr wrap="square" lIns="0" tIns="0" rIns="0" bIns="0" rtlCol="0" anchor="ctr"/>
+          <a:lstStyle/>
+          <a:p>
+            <a:pPr indent="0" marL="0">
+              <a:buNone/>
+            </a:pPr>
+            <a:r>
+              <a:rPr lang="en-US" sz="1500" b="1" dirty="0">
+                <a:solidFill>
+                  <a:srgbClr val="151B2E"/>
+                </a:solidFill>
+                <a:latin typeface="Pretendard" pitchFamily="34" charset="0"/>
+                <a:ea typeface="Pretendard" pitchFamily="34" charset="-122"/>
+                <a:cs typeface="Pretendard" pitchFamily="34" charset="-120"/>
+              </a:rPr>
+              <a:t>베이스라인 · 1곳 (대조군)</a:t>
+            </a:r>
+            <a:endParaRPr lang="en-US" sz="1500" dirty="0"/>
+          </a:p>
+        </p:txBody>
+      </p:sp>
+      <p:sp>
+        <p:nvSpPr>
+          <p:cNvPr id="34" name="Text 32"/>
+          <p:cNvSpPr/>
+          <p:nvPr/>
+        </p:nvSpPr>
+        <p:spPr>
+          <a:xfrm>
+            <a:off x="6812280" y="4114800"/>
+            <a:ext cx="4663440" cy="640080"/>
+          </a:xfrm>
+          <a:prstGeom prst="rect">
+            <a:avLst/>
+          </a:prstGeom>
+          <a:noFill/>
+          <a:ln/>
+        </p:spPr>
+        <p:txBody>
+          <a:bodyPr wrap="square" lIns="0" tIns="0" rIns="0" bIns="0" rtlCol="0" anchor="t"/>
+          <a:lstStyle/>
+          <a:p>
+            <a:pPr indent="0" marL="0">
+              <a:lnSpc>
+                <a:spcPct val="120000"/>
+              </a:lnSpc>
+              <a:buNone/>
+            </a:pPr>
+            <a:r>
+              <a:rPr lang="en-US" sz="1250" dirty="0">
+                <a:solidFill>
+                  <a:srgbClr val="44506A"/>
+                </a:solidFill>
+                <a:latin typeface="Pretendard" pitchFamily="34" charset="0"/>
+                <a:ea typeface="Pretendard" pitchFamily="34" charset="-122"/>
+                <a:cs typeface="Pretendard" pitchFamily="34" charset="-120"/>
+              </a:rPr>
+              <a:t>용암동 — 거주지 기준선. 산단 영향군과의 평균차를 Welch t-test로 검정</a:t>
+            </a:r>
+            <a:endParaRPr lang="en-US" sz="1250" dirty="0"/>
+          </a:p>
+        </p:txBody>
+      </p:sp>
+      <p:sp>
+        <p:nvSpPr>
+          <p:cNvPr id="35" name="Shape 33"/>
+          <p:cNvSpPr/>
+          <p:nvPr/>
+        </p:nvSpPr>
+        <p:spPr>
+          <a:xfrm>
+            <a:off x="640080" y="5120640"/>
+            <a:ext cx="11064240" cy="868680"/>
+          </a:xfrm>
+          <a:prstGeom prst="roundRect">
+            <a:avLst>
+              <a:gd name="adj" fmla="val 8421"/>
+            </a:avLst>
+          </a:prstGeom>
+          <a:solidFill>
+            <a:srgbClr val="EEF1FB"/>
+          </a:solidFill>
+          <a:ln/>
+        </p:spPr>
+      </p:sp>
+      <p:sp>
+        <p:nvSpPr>
+          <p:cNvPr id="36" name="Shape 34"/>
+          <p:cNvSpPr/>
+          <p:nvPr/>
+        </p:nvSpPr>
+        <p:spPr>
+          <a:xfrm>
+            <a:off x="868680" y="5330952"/>
+            <a:ext cx="1371600" cy="438912"/>
+          </a:xfrm>
+          <a:prstGeom prst="roundRect">
+            <a:avLst>
+              <a:gd name="adj" fmla="val 50000"/>
+            </a:avLst>
+          </a:prstGeom>
+          <a:solidFill>
+            <a:srgbClr val="1F40E6"/>
+          </a:solidFill>
+          <a:ln/>
+        </p:spPr>
+      </p:sp>
+      <p:sp>
+        <p:nvSpPr>
+          <p:cNvPr id="37" name="Text 35"/>
+          <p:cNvSpPr/>
+          <p:nvPr/>
+        </p:nvSpPr>
+        <p:spPr>
+          <a:xfrm>
+            <a:off x="868680" y="5330952"/>
+            <a:ext cx="1371600" cy="438912"/>
+          </a:xfrm>
+          <a:prstGeom prst="rect">
+            <a:avLst/>
+          </a:prstGeom>
+          <a:noFill/>
+          <a:ln/>
+        </p:spPr>
+        <p:txBody>
+          <a:bodyPr wrap="square" lIns="0" tIns="0" rIns="0" bIns="0" rtlCol="0" anchor="ctr"/>
+          <a:lstStyle/>
+          <a:p>
+            <a:pPr algn="ctr" indent="0" marL="0">
+              <a:buNone/>
+            </a:pPr>
+            <a:r>
+              <a:rPr lang="en-US" sz="1200" b="1" dirty="0">
+                <a:solidFill>
+                  <a:srgbClr val="FFFFFF"/>
+                </a:solidFill>
+                <a:latin typeface="Pretendard" pitchFamily="34" charset="0"/>
+                <a:ea typeface="Pretendard" pitchFamily="34" charset="-122"/>
+                <a:cs typeface="Pretendard" pitchFamily="34" charset="-120"/>
+              </a:rPr>
+              <a:t>인사이트</a:t>
+            </a:r>
+            <a:endParaRPr lang="en-US" sz="1200" dirty="0"/>
+          </a:p>
+        </p:txBody>
+      </p:sp>
+      <p:sp>
+        <p:nvSpPr>
+          <p:cNvPr id="38" name="Text 36"/>
+          <p:cNvSpPr/>
+          <p:nvPr/>
+        </p:nvSpPr>
+        <p:spPr>
+          <a:xfrm>
+            <a:off x="2423160" y="5120640"/>
+            <a:ext cx="9144000" cy="868680"/>
+          </a:xfrm>
+          <a:prstGeom prst="rect">
+            <a:avLst/>
+          </a:prstGeom>
+          <a:noFill/>
+          <a:ln/>
+        </p:spPr>
+        <p:txBody>
+          <a:bodyPr wrap="square" lIns="0" tIns="0" rIns="0" bIns="0" rtlCol="0" anchor="ctr"/>
+          <a:lstStyle/>
+          <a:p>
+            <a:pPr indent="0" marL="0">
+              <a:buNone/>
+            </a:pPr>
+            <a:r>
+              <a:rPr lang="en-US" sz="1350" b="1" dirty="0">
+                <a:solidFill>
+                  <a:srgbClr val="151B2E"/>
+                </a:solidFill>
+                <a:latin typeface="Pretendard" pitchFamily="34" charset="0"/>
+                <a:ea typeface="Pretendard" pitchFamily="34" charset="-122"/>
+                <a:cs typeface="Pretendard" pitchFamily="34" charset="-120"/>
+              </a:rPr>
+              <a:t>6종 × 5측정소 = 30개 ‘공정-품질특성’ 조합을 1시간 해상도로 상시 모니터링</a:t>
+            </a:r>
+            <a:endParaRPr lang="en-US" sz="1350" dirty="0"/>
+          </a:p>
+        </p:txBody>
+      </p:sp>
+      <p:sp>
+        <p:nvSpPr>
+          <p:cNvPr id="39" name="Text 37"/>
+          <p:cNvSpPr/>
+          <p:nvPr/>
+        </p:nvSpPr>
+        <p:spPr>
+          <a:xfrm>
+            <a:off x="11320272" y="6437376"/>
+            <a:ext cx="548640" cy="274320"/>
+          </a:xfrm>
+          <a:prstGeom prst="rect">
+            <a:avLst/>
+          </a:prstGeom>
+          <a:noFill/>
+          <a:ln/>
+        </p:spPr>
+        <p:txBody>
+          <a:bodyPr wrap="square" rtlCol="0" anchor="ctr"/>
+          <a:lstStyle/>
+          <a:p>
+            <a:pPr algn="r" indent="0" marL="0">
+              <a:buNone/>
+            </a:pPr>
+            <a:r>
+              <a:rPr lang="en-US" sz="1000" dirty="0">
+                <a:solidFill>
+                  <a:srgbClr val="8A94A6"/>
+                </a:solidFill>
+                <a:latin typeface="Pretendard" pitchFamily="34" charset="0"/>
+                <a:ea typeface="Pretendard" pitchFamily="34" charset="-122"/>
+                <a:cs typeface="Pretendard" pitchFamily="34" charset="-120"/>
+              </a:rPr>
+              <a:t>05</a:t>
+            </a:r>
+            <a:endParaRPr lang="en-US" sz="1000" dirty="0"/>
+          </a:p>
+        </p:txBody>
+      </p:sp>
+    </p:spTree>
+  </p:cSld>
+  <p:clrMapOvr>
+    <a:masterClrMapping/>
+  </p:clrMapOvr>
+</p:sld>
+</file>
+
+<file path=ppt/slides/slide6.xml><?xml version="1.0" encoding="utf-8"?>
+<p:sld xmlns:a="http://schemas.openxmlformats.org/drawingml/2006/main" xmlns:r="http://schemas.openxmlformats.org/officeDocument/2006/relationships" xmlns:p="http://schemas.openxmlformats.org/presentationml/2006/main">
+  <p:cSld name="Slide 6">
+    <p:bg>
+      <p:bgPr>
+        <a:solidFill>
+          <a:srgbClr val="FFFFFF"/>
+        </a:solidFill>
+      </p:bgPr>
+    </p:bg>
+    <p:spTree>
+      <p:nvGrpSpPr>
+        <p:cNvPr id="1" name=""/>
+        <p:cNvGrpSpPr/>
+        <p:nvPr/>
+      </p:nvGrpSpPr>
+      <p:grpSpPr>
+        <a:xfrm>
+          <a:off x="0" y="0"/>
+          <a:ext cx="0" cy="0"/>
+          <a:chOff x="0" y="0"/>
+          <a:chExt cx="0" cy="0"/>
+        </a:xfrm>
+      </p:grpSpPr>
+      <p:sp>
+        <p:nvSpPr>
+          <p:cNvPr id="2" name="Shape 0"/>
+          <p:cNvSpPr/>
+          <p:nvPr/>
+        </p:nvSpPr>
+        <p:spPr>
+          <a:xfrm>
+            <a:off x="0" y="0"/>
+            <a:ext cx="146304" cy="6858000"/>
+          </a:xfrm>
+          <a:prstGeom prst="rect">
+            <a:avLst/>
+          </a:prstGeom>
+          <a:solidFill>
+            <a:srgbClr val="1F40E6"/>
+          </a:solidFill>
+          <a:ln/>
+        </p:spPr>
+      </p:sp>
+      <p:sp>
+        <p:nvSpPr>
+          <p:cNvPr id="3" name="Text 1"/>
+          <p:cNvSpPr/>
+          <p:nvPr/>
+        </p:nvSpPr>
+        <p:spPr>
+          <a:xfrm>
+            <a:off x="502920" y="274320"/>
+            <a:ext cx="10515600" cy="566928"/>
+          </a:xfrm>
+          <a:prstGeom prst="rect">
+            <a:avLst/>
+          </a:prstGeom>
+          <a:noFill/>
+          <a:ln/>
+        </p:spPr>
+        <p:txBody>
+          <a:bodyPr wrap="square" lIns="0" tIns="0" rIns="0" bIns="0" rtlCol="0" anchor="ctr"/>
+          <a:lstStyle/>
+          <a:p>
+            <a:pPr indent="0" marL="0">
+              <a:buNone/>
+            </a:pPr>
+            <a:r>
+              <a:rPr lang="en-US" sz="2700" b="1" dirty="0">
+                <a:solidFill>
+                  <a:srgbClr val="151B2E"/>
+                </a:solidFill>
+                <a:latin typeface="Pretendard" pitchFamily="34" charset="0"/>
+                <a:ea typeface="Pretendard" pitchFamily="34" charset="-122"/>
+                <a:cs typeface="Pretendard" pitchFamily="34" charset="-120"/>
+              </a:rPr>
               <a:t>측정 시스템 — 아키텍처</a:t>
             </a:r>
             <a:endParaRPr lang="en-US" sz="2700" dirty="0"/>
@@ -10233,7 +11819,7 @@
       </p:sp>
       <p:graphicFrame>
         <p:nvGraphicFramePr>
-          <p:cNvPr id="6" name="Table 0"/>
+          <p:cNvPr id="7" name="Table 0"/>
           <p:cNvGraphicFramePr>
             <a:graphicFrameLocks noGrp="1"/>
           </p:cNvGraphicFramePr>
@@ -10960,810 +12546,6 @@
                 <a:ea typeface="Pretendard" pitchFamily="34" charset="-122"/>
                 <a:cs typeface="Pretendard" pitchFamily="34" charset="-120"/>
               </a:rPr>
-              <a:t>05</a:t>
-            </a:r>
-            <a:endParaRPr lang="en-US" sz="1000" dirty="0"/>
-          </a:p>
-        </p:txBody>
-      </p:sp>
-    </p:spTree>
-  </p:cSld>
-  <p:clrMapOvr>
-    <a:masterClrMapping/>
-  </p:clrMapOvr>
-</p:sld>
-</file>
-
-<file path=ppt/slides/slide6.xml><?xml version="1.0" encoding="utf-8"?>
-<p:sld xmlns:a="http://schemas.openxmlformats.org/drawingml/2006/main" xmlns:r="http://schemas.openxmlformats.org/officeDocument/2006/relationships" xmlns:p="http://schemas.openxmlformats.org/presentationml/2006/main">
-  <p:cSld name="Slide 6">
-    <p:bg>
-      <p:bgPr>
-        <a:solidFill>
-          <a:srgbClr val="FFFFFF"/>
-        </a:solidFill>
-      </p:bgPr>
-    </p:bg>
-    <p:spTree>
-      <p:nvGrpSpPr>
-        <p:cNvPr id="1" name=""/>
-        <p:cNvGrpSpPr/>
-        <p:nvPr/>
-      </p:nvGrpSpPr>
-      <p:grpSpPr>
-        <a:xfrm>
-          <a:off x="0" y="0"/>
-          <a:ext cx="0" cy="0"/>
-          <a:chOff x="0" y="0"/>
-          <a:chExt cx="0" cy="0"/>
-        </a:xfrm>
-      </p:grpSpPr>
-      <p:sp>
-        <p:nvSpPr>
-          <p:cNvPr id="2" name="Shape 0"/>
-          <p:cNvSpPr/>
-          <p:nvPr/>
-        </p:nvSpPr>
-        <p:spPr>
-          <a:xfrm>
-            <a:off x="0" y="0"/>
-            <a:ext cx="146304" cy="6858000"/>
-          </a:xfrm>
-          <a:prstGeom prst="rect">
-            <a:avLst/>
-          </a:prstGeom>
-          <a:solidFill>
-            <a:srgbClr val="1F40E6"/>
-          </a:solidFill>
-          <a:ln/>
-        </p:spPr>
-      </p:sp>
-      <p:sp>
-        <p:nvSpPr>
-          <p:cNvPr id="3" name="Text 1"/>
-          <p:cNvSpPr/>
-          <p:nvPr/>
-        </p:nvSpPr>
-        <p:spPr>
-          <a:xfrm>
-            <a:off x="502920" y="274320"/>
-            <a:ext cx="10515600" cy="566928"/>
-          </a:xfrm>
-          <a:prstGeom prst="rect">
-            <a:avLst/>
-          </a:prstGeom>
-          <a:noFill/>
-          <a:ln/>
-        </p:spPr>
-        <p:txBody>
-          <a:bodyPr wrap="square" lIns="0" tIns="0" rIns="0" bIns="0" rtlCol="0" anchor="ctr"/>
-          <a:lstStyle/>
-          <a:p>
-            <a:pPr indent="0" marL="0">
-              <a:buNone/>
-            </a:pPr>
-            <a:r>
-              <a:rPr lang="en-US" sz="2700" b="1" dirty="0">
-                <a:solidFill>
-                  <a:srgbClr val="151B2E"/>
-                </a:solidFill>
-                <a:latin typeface="Pretendard" pitchFamily="34" charset="0"/>
-                <a:ea typeface="Pretendard" pitchFamily="34" charset="-122"/>
-                <a:cs typeface="Pretendard" pitchFamily="34" charset="-120"/>
-              </a:rPr>
-              <a:t>데이터 수집 성과</a:t>
-            </a:r>
-            <a:endParaRPr lang="en-US" sz="2700" dirty="0"/>
-          </a:p>
-        </p:txBody>
-      </p:sp>
-      <p:sp>
-        <p:nvSpPr>
-          <p:cNvPr id="4" name="Shape 2"/>
-          <p:cNvSpPr/>
-          <p:nvPr/>
-        </p:nvSpPr>
-        <p:spPr>
-          <a:xfrm>
-            <a:off x="530352" y="950976"/>
-            <a:ext cx="64008" cy="237744"/>
-          </a:xfrm>
-          <a:prstGeom prst="rect">
-            <a:avLst/>
-          </a:prstGeom>
-          <a:solidFill>
-            <a:srgbClr val="1F40E6"/>
-          </a:solidFill>
-          <a:ln/>
-        </p:spPr>
-      </p:sp>
-      <p:sp>
-        <p:nvSpPr>
-          <p:cNvPr id="5" name="Text 3"/>
-          <p:cNvSpPr/>
-          <p:nvPr/>
-        </p:nvSpPr>
-        <p:spPr>
-          <a:xfrm>
-            <a:off x="685800" y="914400"/>
-            <a:ext cx="10058400" cy="310896"/>
-          </a:xfrm>
-          <a:prstGeom prst="rect">
-            <a:avLst/>
-          </a:prstGeom>
-          <a:noFill/>
-          <a:ln/>
-        </p:spPr>
-        <p:txBody>
-          <a:bodyPr wrap="square" lIns="0" tIns="0" rIns="0" bIns="0" rtlCol="0" anchor="ctr"/>
-          <a:lstStyle/>
-          <a:p>
-            <a:pPr indent="0" marL="0">
-              <a:buNone/>
-            </a:pPr>
-            <a:r>
-              <a:rPr lang="en-US" sz="1300" dirty="0">
-                <a:solidFill>
-                  <a:srgbClr val="8A94A6"/>
-                </a:solidFill>
-                <a:latin typeface="Pretendard" pitchFamily="34" charset="0"/>
-                <a:ea typeface="Pretendard" pitchFamily="34" charset="-122"/>
-                <a:cs typeface="Pretendard" pitchFamily="34" charset="-120"/>
-              </a:rPr>
-              <a:t>11주 무중단 · 측정소당 2,500+ 시각 누적</a:t>
-            </a:r>
-            <a:endParaRPr lang="en-US" sz="1300" dirty="0"/>
-          </a:p>
-        </p:txBody>
-      </p:sp>
-      <p:sp>
-        <p:nvSpPr>
-          <p:cNvPr id="6" name="Shape 4"/>
-          <p:cNvSpPr/>
-          <p:nvPr/>
-        </p:nvSpPr>
-        <p:spPr>
-          <a:xfrm>
-            <a:off x="640080" y="1463040"/>
-            <a:ext cx="2651760" cy="1234440"/>
-          </a:xfrm>
-          <a:prstGeom prst="roundRect">
-            <a:avLst>
-              <a:gd name="adj" fmla="val 5926"/>
-            </a:avLst>
-          </a:prstGeom>
-          <a:solidFill>
-            <a:srgbClr val="EEF1FB"/>
-          </a:solidFill>
-          <a:ln/>
-        </p:spPr>
-      </p:sp>
-      <p:sp>
-        <p:nvSpPr>
-          <p:cNvPr id="7" name="Text 5"/>
-          <p:cNvSpPr/>
-          <p:nvPr/>
-        </p:nvSpPr>
-        <p:spPr>
-          <a:xfrm>
-            <a:off x="640080" y="1591056"/>
-            <a:ext cx="2651760" cy="731520"/>
-          </a:xfrm>
-          <a:prstGeom prst="rect">
-            <a:avLst/>
-          </a:prstGeom>
-          <a:noFill/>
-          <a:ln/>
-        </p:spPr>
-        <p:txBody>
-          <a:bodyPr wrap="square" lIns="0" tIns="0" rIns="0" bIns="0" rtlCol="0" anchor="ctr"/>
-          <a:lstStyle/>
-          <a:p>
-            <a:pPr algn="ctr" indent="0" marL="0">
-              <a:buNone/>
-            </a:pPr>
-            <a:r>
-              <a:rPr lang="en-US" sz="3800" b="1" dirty="0">
-                <a:solidFill>
-                  <a:srgbClr val="1F40E6"/>
-                </a:solidFill>
-                <a:latin typeface="Pretendard" pitchFamily="34" charset="0"/>
-                <a:ea typeface="Pretendard" pitchFamily="34" charset="-122"/>
-                <a:cs typeface="Pretendard" pitchFamily="34" charset="-120"/>
-              </a:rPr>
-              <a:t>12,835</a:t>
-            </a:r>
-            <a:endParaRPr lang="en-US" sz="3800" dirty="0"/>
-          </a:p>
-        </p:txBody>
-      </p:sp>
-      <p:sp>
-        <p:nvSpPr>
-          <p:cNvPr id="8" name="Text 6"/>
-          <p:cNvSpPr/>
-          <p:nvPr/>
-        </p:nvSpPr>
-        <p:spPr>
-          <a:xfrm>
-            <a:off x="640080" y="2331720"/>
-            <a:ext cx="2651760" cy="320040"/>
-          </a:xfrm>
-          <a:prstGeom prst="rect">
-            <a:avLst/>
-          </a:prstGeom>
-          <a:noFill/>
-          <a:ln/>
-        </p:spPr>
-        <p:txBody>
-          <a:bodyPr wrap="square" lIns="0" tIns="0" rIns="0" bIns="0" rtlCol="0" anchor="ctr"/>
-          <a:lstStyle/>
-          <a:p>
-            <a:pPr algn="ctr" indent="0" marL="0">
-              <a:buNone/>
-            </a:pPr>
-            <a:r>
-              <a:rPr lang="en-US" sz="1250" dirty="0">
-                <a:solidFill>
-                  <a:srgbClr val="44506A"/>
-                </a:solidFill>
-                <a:latin typeface="Pretendard" pitchFamily="34" charset="0"/>
-                <a:ea typeface="Pretendard" pitchFamily="34" charset="-122"/>
-                <a:cs typeface="Pretendard" pitchFamily="34" charset="-120"/>
-              </a:rPr>
-              <a:t>총 누적 건수</a:t>
-            </a:r>
-            <a:endParaRPr lang="en-US" sz="1250" dirty="0"/>
-          </a:p>
-        </p:txBody>
-      </p:sp>
-      <p:sp>
-        <p:nvSpPr>
-          <p:cNvPr id="9" name="Shape 7"/>
-          <p:cNvSpPr/>
-          <p:nvPr/>
-        </p:nvSpPr>
-        <p:spPr>
-          <a:xfrm>
-            <a:off x="3419856" y="1463040"/>
-            <a:ext cx="2651760" cy="1234440"/>
-          </a:xfrm>
-          <a:prstGeom prst="roundRect">
-            <a:avLst>
-              <a:gd name="adj" fmla="val 5926"/>
-            </a:avLst>
-          </a:prstGeom>
-          <a:solidFill>
-            <a:srgbClr val="EEF1FB"/>
-          </a:solidFill>
-          <a:ln/>
-        </p:spPr>
-      </p:sp>
-      <p:sp>
-        <p:nvSpPr>
-          <p:cNvPr id="10" name="Text 8"/>
-          <p:cNvSpPr/>
-          <p:nvPr/>
-        </p:nvSpPr>
-        <p:spPr>
-          <a:xfrm>
-            <a:off x="3419856" y="1591056"/>
-            <a:ext cx="2651760" cy="731520"/>
-          </a:xfrm>
-          <a:prstGeom prst="rect">
-            <a:avLst/>
-          </a:prstGeom>
-          <a:noFill/>
-          <a:ln/>
-        </p:spPr>
-        <p:txBody>
-          <a:bodyPr wrap="square" lIns="0" tIns="0" rIns="0" bIns="0" rtlCol="0" anchor="ctr"/>
-          <a:lstStyle/>
-          <a:p>
-            <a:pPr algn="ctr" indent="0" marL="0">
-              <a:buNone/>
-            </a:pPr>
-            <a:r>
-              <a:rPr lang="en-US" sz="3800" b="1" dirty="0">
-                <a:solidFill>
-                  <a:srgbClr val="1F40E6"/>
-                </a:solidFill>
-                <a:latin typeface="Pretendard" pitchFamily="34" charset="0"/>
-                <a:ea typeface="Pretendard" pitchFamily="34" charset="-122"/>
-                <a:cs typeface="Pretendard" pitchFamily="34" charset="-120"/>
-              </a:rPr>
-              <a:t>5</a:t>
-            </a:r>
-            <a:endParaRPr lang="en-US" sz="3800" dirty="0"/>
-          </a:p>
-        </p:txBody>
-      </p:sp>
-      <p:sp>
-        <p:nvSpPr>
-          <p:cNvPr id="11" name="Text 9"/>
-          <p:cNvSpPr/>
-          <p:nvPr/>
-        </p:nvSpPr>
-        <p:spPr>
-          <a:xfrm>
-            <a:off x="3419856" y="2331720"/>
-            <a:ext cx="2651760" cy="320040"/>
-          </a:xfrm>
-          <a:prstGeom prst="rect">
-            <a:avLst/>
-          </a:prstGeom>
-          <a:noFill/>
-          <a:ln/>
-        </p:spPr>
-        <p:txBody>
-          <a:bodyPr wrap="square" lIns="0" tIns="0" rIns="0" bIns="0" rtlCol="0" anchor="ctr"/>
-          <a:lstStyle/>
-          <a:p>
-            <a:pPr algn="ctr" indent="0" marL="0">
-              <a:buNone/>
-            </a:pPr>
-            <a:r>
-              <a:rPr lang="en-US" sz="1250" dirty="0">
-                <a:solidFill>
-                  <a:srgbClr val="44506A"/>
-                </a:solidFill>
-                <a:latin typeface="Pretendard" pitchFamily="34" charset="0"/>
-                <a:ea typeface="Pretendard" pitchFamily="34" charset="-122"/>
-                <a:cs typeface="Pretendard" pitchFamily="34" charset="-120"/>
-              </a:rPr>
-              <a:t>측정소</a:t>
-            </a:r>
-            <a:endParaRPr lang="en-US" sz="1250" dirty="0"/>
-          </a:p>
-        </p:txBody>
-      </p:sp>
-      <p:sp>
-        <p:nvSpPr>
-          <p:cNvPr id="12" name="Shape 10"/>
-          <p:cNvSpPr/>
-          <p:nvPr/>
-        </p:nvSpPr>
-        <p:spPr>
-          <a:xfrm>
-            <a:off x="6199632" y="1463040"/>
-            <a:ext cx="2651760" cy="1234440"/>
-          </a:xfrm>
-          <a:prstGeom prst="roundRect">
-            <a:avLst>
-              <a:gd name="adj" fmla="val 5926"/>
-            </a:avLst>
-          </a:prstGeom>
-          <a:solidFill>
-            <a:srgbClr val="EEF1FB"/>
-          </a:solidFill>
-          <a:ln/>
-        </p:spPr>
-      </p:sp>
-      <p:sp>
-        <p:nvSpPr>
-          <p:cNvPr id="13" name="Text 11"/>
-          <p:cNvSpPr/>
-          <p:nvPr/>
-        </p:nvSpPr>
-        <p:spPr>
-          <a:xfrm>
-            <a:off x="6199632" y="1591056"/>
-            <a:ext cx="2651760" cy="731520"/>
-          </a:xfrm>
-          <a:prstGeom prst="rect">
-            <a:avLst/>
-          </a:prstGeom>
-          <a:noFill/>
-          <a:ln/>
-        </p:spPr>
-        <p:txBody>
-          <a:bodyPr wrap="square" lIns="0" tIns="0" rIns="0" bIns="0" rtlCol="0" anchor="ctr"/>
-          <a:lstStyle/>
-          <a:p>
-            <a:pPr algn="ctr" indent="0" marL="0">
-              <a:buNone/>
-            </a:pPr>
-            <a:r>
-              <a:rPr lang="en-US" sz="3800" b="1" dirty="0">
-                <a:solidFill>
-                  <a:srgbClr val="1F40E6"/>
-                </a:solidFill>
-                <a:latin typeface="Pretendard" pitchFamily="34" charset="0"/>
-                <a:ea typeface="Pretendard" pitchFamily="34" charset="-122"/>
-                <a:cs typeface="Pretendard" pitchFamily="34" charset="-120"/>
-              </a:rPr>
-              <a:t>100%</a:t>
-            </a:r>
-            <a:endParaRPr lang="en-US" sz="3800" dirty="0"/>
-          </a:p>
-        </p:txBody>
-      </p:sp>
-      <p:sp>
-        <p:nvSpPr>
-          <p:cNvPr id="14" name="Text 12"/>
-          <p:cNvSpPr/>
-          <p:nvPr/>
-        </p:nvSpPr>
-        <p:spPr>
-          <a:xfrm>
-            <a:off x="6199632" y="2331720"/>
-            <a:ext cx="2651760" cy="320040"/>
-          </a:xfrm>
-          <a:prstGeom prst="rect">
-            <a:avLst/>
-          </a:prstGeom>
-          <a:noFill/>
-          <a:ln/>
-        </p:spPr>
-        <p:txBody>
-          <a:bodyPr wrap="square" lIns="0" tIns="0" rIns="0" bIns="0" rtlCol="0" anchor="ctr"/>
-          <a:lstStyle/>
-          <a:p>
-            <a:pPr algn="ctr" indent="0" marL="0">
-              <a:buNone/>
-            </a:pPr>
-            <a:r>
-              <a:rPr lang="en-US" sz="1250" dirty="0">
-                <a:solidFill>
-                  <a:srgbClr val="44506A"/>
-                </a:solidFill>
-                <a:latin typeface="Pretendard" pitchFamily="34" charset="0"/>
-                <a:ea typeface="Pretendard" pitchFamily="34" charset="-122"/>
-                <a:cs typeface="Pretendard" pitchFamily="34" charset="-120"/>
-              </a:rPr>
-              <a:t>평시 24h 성공률</a:t>
-            </a:r>
-            <a:endParaRPr lang="en-US" sz="1250" dirty="0"/>
-          </a:p>
-        </p:txBody>
-      </p:sp>
-      <p:sp>
-        <p:nvSpPr>
-          <p:cNvPr id="15" name="Shape 13"/>
-          <p:cNvSpPr/>
-          <p:nvPr/>
-        </p:nvSpPr>
-        <p:spPr>
-          <a:xfrm>
-            <a:off x="8979408" y="1463040"/>
-            <a:ext cx="2651760" cy="1234440"/>
-          </a:xfrm>
-          <a:prstGeom prst="roundRect">
-            <a:avLst>
-              <a:gd name="adj" fmla="val 5926"/>
-            </a:avLst>
-          </a:prstGeom>
-          <a:solidFill>
-            <a:srgbClr val="EEF1FB"/>
-          </a:solidFill>
-          <a:ln/>
-        </p:spPr>
-      </p:sp>
-      <p:sp>
-        <p:nvSpPr>
-          <p:cNvPr id="16" name="Text 14"/>
-          <p:cNvSpPr/>
-          <p:nvPr/>
-        </p:nvSpPr>
-        <p:spPr>
-          <a:xfrm>
-            <a:off x="8979408" y="1591056"/>
-            <a:ext cx="2651760" cy="731520"/>
-          </a:xfrm>
-          <a:prstGeom prst="rect">
-            <a:avLst/>
-          </a:prstGeom>
-          <a:noFill/>
-          <a:ln/>
-        </p:spPr>
-        <p:txBody>
-          <a:bodyPr wrap="square" lIns="0" tIns="0" rIns="0" bIns="0" rtlCol="0" anchor="ctr"/>
-          <a:lstStyle/>
-          <a:p>
-            <a:pPr algn="ctr" indent="0" marL="0">
-              <a:buNone/>
-            </a:pPr>
-            <a:r>
-              <a:rPr lang="en-US" sz="3800" b="1" dirty="0">
-                <a:solidFill>
-                  <a:srgbClr val="1F40E6"/>
-                </a:solidFill>
-                <a:latin typeface="Pretendard" pitchFamily="34" charset="0"/>
-                <a:ea typeface="Pretendard" pitchFamily="34" charset="-122"/>
-                <a:cs typeface="Pretendard" pitchFamily="34" charset="-120"/>
-              </a:rPr>
-              <a:t>220</a:t>
-            </a:r>
-            <a:endParaRPr lang="en-US" sz="3800" dirty="0"/>
-          </a:p>
-        </p:txBody>
-      </p:sp>
-      <p:sp>
-        <p:nvSpPr>
-          <p:cNvPr id="17" name="Text 15"/>
-          <p:cNvSpPr/>
-          <p:nvPr/>
-        </p:nvSpPr>
-        <p:spPr>
-          <a:xfrm>
-            <a:off x="8979408" y="2331720"/>
-            <a:ext cx="2651760" cy="320040"/>
-          </a:xfrm>
-          <a:prstGeom prst="rect">
-            <a:avLst/>
-          </a:prstGeom>
-          <a:noFill/>
-          <a:ln/>
-        </p:spPr>
-        <p:txBody>
-          <a:bodyPr wrap="square" lIns="0" tIns="0" rIns="0" bIns="0" rtlCol="0" anchor="ctr"/>
-          <a:lstStyle/>
-          <a:p>
-            <a:pPr algn="ctr" indent="0" marL="0">
-              <a:buNone/>
-            </a:pPr>
-            <a:r>
-              <a:rPr lang="en-US" sz="1250" dirty="0">
-                <a:solidFill>
-                  <a:srgbClr val="44506A"/>
-                </a:solidFill>
-                <a:latin typeface="Pretendard" pitchFamily="34" charset="0"/>
-                <a:ea typeface="Pretendard" pitchFamily="34" charset="-122"/>
-                <a:cs typeface="Pretendard" pitchFamily="34" charset="-120"/>
-              </a:rPr>
-              <a:t>회귀 테스트</a:t>
-            </a:r>
-            <a:endParaRPr lang="en-US" sz="1250" dirty="0"/>
-          </a:p>
-        </p:txBody>
-      </p:sp>
-      <p:pic>
-        <p:nvPicPr>
-          <p:cNvPr id="18" name="Image 0" descr="/Users/t2025-m0190/workspace/chungbuk-air-quality-monitor/build/deck/img/accumulation.png">    </p:cNvPr>
-          <p:cNvPicPr>
-            <a:picLocks noChangeAspect="1"/>
-          </p:cNvPicPr>
-          <p:nvPr/>
-        </p:nvPicPr>
-        <p:blipFill>
-          <a:blip r:embed="rId1"/>
-          <a:stretch>
-            <a:fillRect/>
-          </a:stretch>
-        </p:blipFill>
-        <p:spPr>
-          <a:xfrm>
-            <a:off x="640080" y="2926080"/>
-            <a:ext cx="6858000" cy="3224376"/>
-          </a:xfrm>
-          <a:prstGeom prst="rect">
-            <a:avLst/>
-          </a:prstGeom>
-        </p:spPr>
-      </p:pic>
-      <p:sp>
-        <p:nvSpPr>
-          <p:cNvPr id="19" name="Shape 16"/>
-          <p:cNvSpPr/>
-          <p:nvPr/>
-        </p:nvSpPr>
-        <p:spPr>
-          <a:xfrm>
-            <a:off x="7772400" y="2926080"/>
-            <a:ext cx="3931920" cy="2743200"/>
-          </a:xfrm>
-          <a:prstGeom prst="roundRect">
-            <a:avLst>
-              <a:gd name="adj" fmla="val 2667"/>
-            </a:avLst>
-          </a:prstGeom>
-          <a:solidFill>
-            <a:srgbClr val="FFFFFF"/>
-          </a:solidFill>
-          <a:ln w="12700">
-            <a:solidFill>
-              <a:srgbClr val="DCE3F2"/>
-            </a:solidFill>
-            <a:prstDash val="solid"/>
-          </a:ln>
-          <a:effectLst>
-            <a:outerShdw sx="100000" sy="100000" kx="0" ky="0" algn="bl" rotWithShape="0" blurRad="101600" dist="25400" dir="5400000">
-              <a:srgbClr val="8794B5">
-                <a:alpha val="22000"/>
-              </a:srgbClr>
-            </a:outerShdw>
-          </a:effectLst>
-        </p:spPr>
-      </p:sp>
-      <p:sp>
-        <p:nvSpPr>
-          <p:cNvPr id="20" name="Text 17"/>
-          <p:cNvSpPr/>
-          <p:nvPr/>
-        </p:nvSpPr>
-        <p:spPr>
-          <a:xfrm>
-            <a:off x="8046720" y="3154680"/>
-            <a:ext cx="3474720" cy="365760"/>
-          </a:xfrm>
-          <a:prstGeom prst="rect">
-            <a:avLst/>
-          </a:prstGeom>
-          <a:noFill/>
-          <a:ln/>
-        </p:spPr>
-        <p:txBody>
-          <a:bodyPr wrap="square" lIns="0" tIns="0" rIns="0" bIns="0" rtlCol="0" anchor="ctr"/>
-          <a:lstStyle/>
-          <a:p>
-            <a:pPr indent="0" marL="0">
-              <a:buNone/>
-            </a:pPr>
-            <a:r>
-              <a:rPr lang="en-US" sz="1500" b="1" dirty="0">
-                <a:solidFill>
-                  <a:srgbClr val="1F40E6"/>
-                </a:solidFill>
-                <a:latin typeface="Pretendard" pitchFamily="34" charset="0"/>
-                <a:ea typeface="Pretendard" pitchFamily="34" charset="-122"/>
-                <a:cs typeface="Pretendard" pitchFamily="34" charset="-120"/>
-              </a:rPr>
-              <a:t>무누락 운영의 증거</a:t>
-            </a:r>
-            <a:endParaRPr lang="en-US" sz="1500" dirty="0"/>
-          </a:p>
-        </p:txBody>
-      </p:sp>
-      <p:sp>
-        <p:nvSpPr>
-          <p:cNvPr id="21" name="Text 18"/>
-          <p:cNvSpPr/>
-          <p:nvPr/>
-        </p:nvSpPr>
-        <p:spPr>
-          <a:xfrm>
-            <a:off x="8046720" y="3611880"/>
-            <a:ext cx="3429000" cy="914400"/>
-          </a:xfrm>
-          <a:prstGeom prst="rect">
-            <a:avLst/>
-          </a:prstGeom>
-          <a:noFill/>
-          <a:ln/>
-        </p:spPr>
-        <p:txBody>
-          <a:bodyPr wrap="square" lIns="0" tIns="0" rIns="0" bIns="0" rtlCol="0" anchor="t"/>
-          <a:lstStyle/>
-          <a:p>
-            <a:pPr indent="0" marL="0">
-              <a:lnSpc>
-                <a:spcPct val="130000"/>
-              </a:lnSpc>
-              <a:buNone/>
-            </a:pPr>
-            <a:r>
-              <a:rPr lang="en-US" sz="1250" b="1" dirty="0">
-                <a:solidFill>
-                  <a:srgbClr val="151B2E"/>
-                </a:solidFill>
-                <a:latin typeface="Pretendard" pitchFamily="34" charset="0"/>
-                <a:ea typeface="Pretendard" pitchFamily="34" charset="-122"/>
-                <a:cs typeface="Pretendard" pitchFamily="34" charset="-120"/>
-              </a:rPr>
-              <a:t>선형 누적</a:t>
-            </a:r>
-            <a:pPr indent="0" marL="0">
-              <a:lnSpc>
-                <a:spcPct val="130000"/>
-              </a:lnSpc>
-              <a:buNone/>
-            </a:pPr>
-            <a:r>
-              <a:rPr lang="en-US" sz="1250" dirty="0">
-                <a:solidFill>
-                  <a:srgbClr val="44506A"/>
-                </a:solidFill>
-                <a:latin typeface="Pretendard" pitchFamily="34" charset="0"/>
-                <a:ea typeface="Pretendard" pitchFamily="34" charset="-122"/>
-                <a:cs typeface="Pretendard" pitchFamily="34" charset="-120"/>
-              </a:rPr>
-              <a:t> — 측정소별 그래프가 끊김 없이 직선으로 증가. 매시 자동 수집이 안정적으로 동작.</a:t>
-            </a:r>
-            <a:endParaRPr lang="en-US" sz="1250" dirty="0"/>
-          </a:p>
-        </p:txBody>
-      </p:sp>
-      <p:sp>
-        <p:nvSpPr>
-          <p:cNvPr id="22" name="Text 19"/>
-          <p:cNvSpPr/>
-          <p:nvPr/>
-        </p:nvSpPr>
-        <p:spPr>
-          <a:xfrm>
-            <a:off x="8046720" y="4617720"/>
-            <a:ext cx="3429000" cy="914400"/>
-          </a:xfrm>
-          <a:prstGeom prst="rect">
-            <a:avLst/>
-          </a:prstGeom>
-          <a:noFill/>
-          <a:ln/>
-        </p:spPr>
-        <p:txBody>
-          <a:bodyPr wrap="square" lIns="0" tIns="0" rIns="0" bIns="0" rtlCol="0" anchor="t"/>
-          <a:lstStyle/>
-          <a:p>
-            <a:pPr indent="0" marL="0">
-              <a:lnSpc>
-                <a:spcPct val="130000"/>
-              </a:lnSpc>
-              <a:buNone/>
-            </a:pPr>
-            <a:r>
-              <a:rPr lang="en-US" sz="1250" b="1" dirty="0">
-                <a:solidFill>
-                  <a:srgbClr val="151B2E"/>
-                </a:solidFill>
-                <a:latin typeface="Pretendard" pitchFamily="34" charset="0"/>
-                <a:ea typeface="Pretendard" pitchFamily="34" charset="-122"/>
-                <a:cs typeface="Pretendard" pitchFamily="34" charset="-120"/>
-              </a:rPr>
-              <a:t>self-healing</a:t>
-            </a:r>
-            <a:pPr indent="0" marL="0">
-              <a:lnSpc>
-                <a:spcPct val="130000"/>
-              </a:lnSpc>
-              <a:buNone/>
-            </a:pPr>
-            <a:r>
-              <a:rPr lang="en-US" sz="1250" dirty="0">
-                <a:solidFill>
-                  <a:srgbClr val="44506A"/>
-                </a:solidFill>
-                <a:latin typeface="Pretendard" pitchFamily="34" charset="0"/>
-                <a:ea typeface="Pretendard" pitchFamily="34" charset="-122"/>
-                <a:cs typeface="Pretendard" pitchFamily="34" charset="-120"/>
-              </a:rPr>
-              <a:t> — cron 드롭 시 다음 실행이 직전 24h 갭을 멱등 복구해 결측을 메움.</a:t>
-            </a:r>
-            <a:endParaRPr lang="en-US" sz="1250" dirty="0"/>
-          </a:p>
-        </p:txBody>
-      </p:sp>
-      <p:sp>
-        <p:nvSpPr>
-          <p:cNvPr id="23" name="Text 20"/>
-          <p:cNvSpPr/>
-          <p:nvPr/>
-        </p:nvSpPr>
-        <p:spPr>
-          <a:xfrm>
-            <a:off x="11320272" y="6437376"/>
-            <a:ext cx="548640" cy="274320"/>
-          </a:xfrm>
-          <a:prstGeom prst="rect">
-            <a:avLst/>
-          </a:prstGeom>
-          <a:noFill/>
-          <a:ln/>
-        </p:spPr>
-        <p:txBody>
-          <a:bodyPr wrap="square" rtlCol="0" anchor="ctr"/>
-          <a:lstStyle/>
-          <a:p>
-            <a:pPr algn="r" indent="0" marL="0">
-              <a:buNone/>
-            </a:pPr>
-            <a:r>
-              <a:rPr lang="en-US" sz="1000" dirty="0">
-                <a:solidFill>
-                  <a:srgbClr val="8A94A6"/>
-                </a:solidFill>
-                <a:latin typeface="Pretendard" pitchFamily="34" charset="0"/>
-                <a:ea typeface="Pretendard" pitchFamily="34" charset="-122"/>
-                <a:cs typeface="Pretendard" pitchFamily="34" charset="-120"/>
-              </a:rPr>
               <a:t>06</a:t>
             </a:r>
             <a:endParaRPr lang="en-US" sz="1000" dirty="0"/>
@@ -11855,7 +12637,7 @@
                 <a:ea typeface="Pretendard" pitchFamily="34" charset="-122"/>
                 <a:cs typeface="Pretendard" pitchFamily="34" charset="-120"/>
               </a:rPr>
-              <a:t>데이터 점검 — 전처리</a:t>
+              <a:t>데이터 수집 성과</a:t>
             </a:r>
             <a:endParaRPr lang="en-US" sz="2700" dirty="0"/>
           </a:p>
@@ -11914,15 +12696,415 @@
                 <a:ea typeface="Pretendard" pitchFamily="34" charset="-122"/>
                 <a:cs typeface="Pretendard" pitchFamily="34" charset="-120"/>
               </a:rPr>
-              <a:t>6종 오염물질 분포 · 결측/이상치 확인</a:t>
+              <a:t>11주 무중단 · 측정소당 2,500+ 시각 누적</a:t>
             </a:r>
             <a:endParaRPr lang="en-US" sz="1300" dirty="0"/>
+          </a:p>
+        </p:txBody>
+      </p:sp>
+      <p:sp>
+        <p:nvSpPr>
+          <p:cNvPr id="6" name="Shape 4"/>
+          <p:cNvSpPr/>
+          <p:nvPr/>
+        </p:nvSpPr>
+        <p:spPr>
+          <a:xfrm>
+            <a:off x="640080" y="1463040"/>
+            <a:ext cx="2651760" cy="1234440"/>
+          </a:xfrm>
+          <a:prstGeom prst="roundRect">
+            <a:avLst>
+              <a:gd name="adj" fmla="val 5926"/>
+            </a:avLst>
+          </a:prstGeom>
+          <a:solidFill>
+            <a:srgbClr val="EEF1FB"/>
+          </a:solidFill>
+          <a:ln/>
+        </p:spPr>
+      </p:sp>
+      <p:sp>
+        <p:nvSpPr>
+          <p:cNvPr id="7" name="Text 5"/>
+          <p:cNvSpPr/>
+          <p:nvPr/>
+        </p:nvSpPr>
+        <p:spPr>
+          <a:xfrm>
+            <a:off x="640080" y="1591056"/>
+            <a:ext cx="2651760" cy="731520"/>
+          </a:xfrm>
+          <a:prstGeom prst="rect">
+            <a:avLst/>
+          </a:prstGeom>
+          <a:noFill/>
+          <a:ln/>
+        </p:spPr>
+        <p:txBody>
+          <a:bodyPr wrap="square" lIns="0" tIns="0" rIns="0" bIns="0" rtlCol="0" anchor="ctr"/>
+          <a:lstStyle/>
+          <a:p>
+            <a:pPr algn="ctr" indent="0" marL="0">
+              <a:buNone/>
+            </a:pPr>
+            <a:r>
+              <a:rPr lang="en-US" sz="3800" b="1" dirty="0">
+                <a:solidFill>
+                  <a:srgbClr val="1F40E6"/>
+                </a:solidFill>
+                <a:latin typeface="Pretendard" pitchFamily="34" charset="0"/>
+                <a:ea typeface="Pretendard" pitchFamily="34" charset="-122"/>
+                <a:cs typeface="Pretendard" pitchFamily="34" charset="-120"/>
+              </a:rPr>
+              <a:t>12,835</a:t>
+            </a:r>
+            <a:endParaRPr lang="en-US" sz="3800" dirty="0"/>
+          </a:p>
+        </p:txBody>
+      </p:sp>
+      <p:sp>
+        <p:nvSpPr>
+          <p:cNvPr id="8" name="Text 6"/>
+          <p:cNvSpPr/>
+          <p:nvPr/>
+        </p:nvSpPr>
+        <p:spPr>
+          <a:xfrm>
+            <a:off x="640080" y="2331720"/>
+            <a:ext cx="2651760" cy="320040"/>
+          </a:xfrm>
+          <a:prstGeom prst="rect">
+            <a:avLst/>
+          </a:prstGeom>
+          <a:noFill/>
+          <a:ln/>
+        </p:spPr>
+        <p:txBody>
+          <a:bodyPr wrap="square" lIns="0" tIns="0" rIns="0" bIns="0" rtlCol="0" anchor="ctr"/>
+          <a:lstStyle/>
+          <a:p>
+            <a:pPr algn="ctr" indent="0" marL="0">
+              <a:buNone/>
+            </a:pPr>
+            <a:r>
+              <a:rPr lang="en-US" sz="1250" dirty="0">
+                <a:solidFill>
+                  <a:srgbClr val="44506A"/>
+                </a:solidFill>
+                <a:latin typeface="Pretendard" pitchFamily="34" charset="0"/>
+                <a:ea typeface="Pretendard" pitchFamily="34" charset="-122"/>
+                <a:cs typeface="Pretendard" pitchFamily="34" charset="-120"/>
+              </a:rPr>
+              <a:t>총 누적 건수</a:t>
+            </a:r>
+            <a:endParaRPr lang="en-US" sz="1250" dirty="0"/>
+          </a:p>
+        </p:txBody>
+      </p:sp>
+      <p:sp>
+        <p:nvSpPr>
+          <p:cNvPr id="9" name="Shape 7"/>
+          <p:cNvSpPr/>
+          <p:nvPr/>
+        </p:nvSpPr>
+        <p:spPr>
+          <a:xfrm>
+            <a:off x="3419856" y="1463040"/>
+            <a:ext cx="2651760" cy="1234440"/>
+          </a:xfrm>
+          <a:prstGeom prst="roundRect">
+            <a:avLst>
+              <a:gd name="adj" fmla="val 5926"/>
+            </a:avLst>
+          </a:prstGeom>
+          <a:solidFill>
+            <a:srgbClr val="EEF1FB"/>
+          </a:solidFill>
+          <a:ln/>
+        </p:spPr>
+      </p:sp>
+      <p:sp>
+        <p:nvSpPr>
+          <p:cNvPr id="10" name="Text 8"/>
+          <p:cNvSpPr/>
+          <p:nvPr/>
+        </p:nvSpPr>
+        <p:spPr>
+          <a:xfrm>
+            <a:off x="3419856" y="1591056"/>
+            <a:ext cx="2651760" cy="731520"/>
+          </a:xfrm>
+          <a:prstGeom prst="rect">
+            <a:avLst/>
+          </a:prstGeom>
+          <a:noFill/>
+          <a:ln/>
+        </p:spPr>
+        <p:txBody>
+          <a:bodyPr wrap="square" lIns="0" tIns="0" rIns="0" bIns="0" rtlCol="0" anchor="ctr"/>
+          <a:lstStyle/>
+          <a:p>
+            <a:pPr algn="ctr" indent="0" marL="0">
+              <a:buNone/>
+            </a:pPr>
+            <a:r>
+              <a:rPr lang="en-US" sz="3800" b="1" dirty="0">
+                <a:solidFill>
+                  <a:srgbClr val="1F40E6"/>
+                </a:solidFill>
+                <a:latin typeface="Pretendard" pitchFamily="34" charset="0"/>
+                <a:ea typeface="Pretendard" pitchFamily="34" charset="-122"/>
+                <a:cs typeface="Pretendard" pitchFamily="34" charset="-120"/>
+              </a:rPr>
+              <a:t>5</a:t>
+            </a:r>
+            <a:endParaRPr lang="en-US" sz="3800" dirty="0"/>
+          </a:p>
+        </p:txBody>
+      </p:sp>
+      <p:sp>
+        <p:nvSpPr>
+          <p:cNvPr id="11" name="Text 9"/>
+          <p:cNvSpPr/>
+          <p:nvPr/>
+        </p:nvSpPr>
+        <p:spPr>
+          <a:xfrm>
+            <a:off x="3419856" y="2331720"/>
+            <a:ext cx="2651760" cy="320040"/>
+          </a:xfrm>
+          <a:prstGeom prst="rect">
+            <a:avLst/>
+          </a:prstGeom>
+          <a:noFill/>
+          <a:ln/>
+        </p:spPr>
+        <p:txBody>
+          <a:bodyPr wrap="square" lIns="0" tIns="0" rIns="0" bIns="0" rtlCol="0" anchor="ctr"/>
+          <a:lstStyle/>
+          <a:p>
+            <a:pPr algn="ctr" indent="0" marL="0">
+              <a:buNone/>
+            </a:pPr>
+            <a:r>
+              <a:rPr lang="en-US" sz="1250" dirty="0">
+                <a:solidFill>
+                  <a:srgbClr val="44506A"/>
+                </a:solidFill>
+                <a:latin typeface="Pretendard" pitchFamily="34" charset="0"/>
+                <a:ea typeface="Pretendard" pitchFamily="34" charset="-122"/>
+                <a:cs typeface="Pretendard" pitchFamily="34" charset="-120"/>
+              </a:rPr>
+              <a:t>측정소</a:t>
+            </a:r>
+            <a:endParaRPr lang="en-US" sz="1250" dirty="0"/>
+          </a:p>
+        </p:txBody>
+      </p:sp>
+      <p:sp>
+        <p:nvSpPr>
+          <p:cNvPr id="12" name="Shape 10"/>
+          <p:cNvSpPr/>
+          <p:nvPr/>
+        </p:nvSpPr>
+        <p:spPr>
+          <a:xfrm>
+            <a:off x="6199632" y="1463040"/>
+            <a:ext cx="2651760" cy="1234440"/>
+          </a:xfrm>
+          <a:prstGeom prst="roundRect">
+            <a:avLst>
+              <a:gd name="adj" fmla="val 5926"/>
+            </a:avLst>
+          </a:prstGeom>
+          <a:solidFill>
+            <a:srgbClr val="EEF1FB"/>
+          </a:solidFill>
+          <a:ln/>
+        </p:spPr>
+      </p:sp>
+      <p:sp>
+        <p:nvSpPr>
+          <p:cNvPr id="13" name="Text 11"/>
+          <p:cNvSpPr/>
+          <p:nvPr/>
+        </p:nvSpPr>
+        <p:spPr>
+          <a:xfrm>
+            <a:off x="6199632" y="1591056"/>
+            <a:ext cx="2651760" cy="731520"/>
+          </a:xfrm>
+          <a:prstGeom prst="rect">
+            <a:avLst/>
+          </a:prstGeom>
+          <a:noFill/>
+          <a:ln/>
+        </p:spPr>
+        <p:txBody>
+          <a:bodyPr wrap="square" lIns="0" tIns="0" rIns="0" bIns="0" rtlCol="0" anchor="ctr"/>
+          <a:lstStyle/>
+          <a:p>
+            <a:pPr algn="ctr" indent="0" marL="0">
+              <a:buNone/>
+            </a:pPr>
+            <a:r>
+              <a:rPr lang="en-US" sz="3800" b="1" dirty="0">
+                <a:solidFill>
+                  <a:srgbClr val="1F40E6"/>
+                </a:solidFill>
+                <a:latin typeface="Pretendard" pitchFamily="34" charset="0"/>
+                <a:ea typeface="Pretendard" pitchFamily="34" charset="-122"/>
+                <a:cs typeface="Pretendard" pitchFamily="34" charset="-120"/>
+              </a:rPr>
+              <a:t>100%</a:t>
+            </a:r>
+            <a:endParaRPr lang="en-US" sz="3800" dirty="0"/>
+          </a:p>
+        </p:txBody>
+      </p:sp>
+      <p:sp>
+        <p:nvSpPr>
+          <p:cNvPr id="14" name="Text 12"/>
+          <p:cNvSpPr/>
+          <p:nvPr/>
+        </p:nvSpPr>
+        <p:spPr>
+          <a:xfrm>
+            <a:off x="6199632" y="2331720"/>
+            <a:ext cx="2651760" cy="320040"/>
+          </a:xfrm>
+          <a:prstGeom prst="rect">
+            <a:avLst/>
+          </a:prstGeom>
+          <a:noFill/>
+          <a:ln/>
+        </p:spPr>
+        <p:txBody>
+          <a:bodyPr wrap="square" lIns="0" tIns="0" rIns="0" bIns="0" rtlCol="0" anchor="ctr"/>
+          <a:lstStyle/>
+          <a:p>
+            <a:pPr algn="ctr" indent="0" marL="0">
+              <a:buNone/>
+            </a:pPr>
+            <a:r>
+              <a:rPr lang="en-US" sz="1250" dirty="0">
+                <a:solidFill>
+                  <a:srgbClr val="44506A"/>
+                </a:solidFill>
+                <a:latin typeface="Pretendard" pitchFamily="34" charset="0"/>
+                <a:ea typeface="Pretendard" pitchFamily="34" charset="-122"/>
+                <a:cs typeface="Pretendard" pitchFamily="34" charset="-120"/>
+              </a:rPr>
+              <a:t>평시 24h 성공률</a:t>
+            </a:r>
+            <a:endParaRPr lang="en-US" sz="1250" dirty="0"/>
+          </a:p>
+        </p:txBody>
+      </p:sp>
+      <p:sp>
+        <p:nvSpPr>
+          <p:cNvPr id="15" name="Shape 13"/>
+          <p:cNvSpPr/>
+          <p:nvPr/>
+        </p:nvSpPr>
+        <p:spPr>
+          <a:xfrm>
+            <a:off x="8979408" y="1463040"/>
+            <a:ext cx="2651760" cy="1234440"/>
+          </a:xfrm>
+          <a:prstGeom prst="roundRect">
+            <a:avLst>
+              <a:gd name="adj" fmla="val 5926"/>
+            </a:avLst>
+          </a:prstGeom>
+          <a:solidFill>
+            <a:srgbClr val="EEF1FB"/>
+          </a:solidFill>
+          <a:ln/>
+        </p:spPr>
+      </p:sp>
+      <p:sp>
+        <p:nvSpPr>
+          <p:cNvPr id="16" name="Text 14"/>
+          <p:cNvSpPr/>
+          <p:nvPr/>
+        </p:nvSpPr>
+        <p:spPr>
+          <a:xfrm>
+            <a:off x="8979408" y="1591056"/>
+            <a:ext cx="2651760" cy="731520"/>
+          </a:xfrm>
+          <a:prstGeom prst="rect">
+            <a:avLst/>
+          </a:prstGeom>
+          <a:noFill/>
+          <a:ln/>
+        </p:spPr>
+        <p:txBody>
+          <a:bodyPr wrap="square" lIns="0" tIns="0" rIns="0" bIns="0" rtlCol="0" anchor="ctr"/>
+          <a:lstStyle/>
+          <a:p>
+            <a:pPr algn="ctr" indent="0" marL="0">
+              <a:buNone/>
+            </a:pPr>
+            <a:r>
+              <a:rPr lang="en-US" sz="3800" b="1" dirty="0">
+                <a:solidFill>
+                  <a:srgbClr val="1F40E6"/>
+                </a:solidFill>
+                <a:latin typeface="Pretendard" pitchFamily="34" charset="0"/>
+                <a:ea typeface="Pretendard" pitchFamily="34" charset="-122"/>
+                <a:cs typeface="Pretendard" pitchFamily="34" charset="-120"/>
+              </a:rPr>
+              <a:t>220</a:t>
+            </a:r>
+            <a:endParaRPr lang="en-US" sz="3800" dirty="0"/>
+          </a:p>
+        </p:txBody>
+      </p:sp>
+      <p:sp>
+        <p:nvSpPr>
+          <p:cNvPr id="17" name="Text 15"/>
+          <p:cNvSpPr/>
+          <p:nvPr/>
+        </p:nvSpPr>
+        <p:spPr>
+          <a:xfrm>
+            <a:off x="8979408" y="2331720"/>
+            <a:ext cx="2651760" cy="320040"/>
+          </a:xfrm>
+          <a:prstGeom prst="rect">
+            <a:avLst/>
+          </a:prstGeom>
+          <a:noFill/>
+          <a:ln/>
+        </p:spPr>
+        <p:txBody>
+          <a:bodyPr wrap="square" lIns="0" tIns="0" rIns="0" bIns="0" rtlCol="0" anchor="ctr"/>
+          <a:lstStyle/>
+          <a:p>
+            <a:pPr algn="ctr" indent="0" marL="0">
+              <a:buNone/>
+            </a:pPr>
+            <a:r>
+              <a:rPr lang="en-US" sz="1250" dirty="0">
+                <a:solidFill>
+                  <a:srgbClr val="44506A"/>
+                </a:solidFill>
+                <a:latin typeface="Pretendard" pitchFamily="34" charset="0"/>
+                <a:ea typeface="Pretendard" pitchFamily="34" charset="-122"/>
+                <a:cs typeface="Pretendard" pitchFamily="34" charset="-120"/>
+              </a:rPr>
+              <a:t>회귀 테스트</a:t>
+            </a:r>
+            <a:endParaRPr lang="en-US" sz="1250" dirty="0"/>
           </a:p>
         </p:txBody>
       </p:sp>
       <p:pic>
         <p:nvPicPr>
-          <p:cNvPr id="6" name="Image 0" descr="/Users/t2025-m0190/workspace/chungbuk-air-quality-monitor/build/deck/img/box_grid.png">    </p:cNvPr>
+          <p:cNvPr id="18" name="Image 0" descr="/Users/t2025-m0190/workspace/chungbuk-air-quality-monitor/build/deck/img/accumulation.png">    </p:cNvPr>
           <p:cNvPicPr>
             <a:picLocks noChangeAspect="1"/>
           </p:cNvPicPr>
@@ -11936,8 +13118,8 @@
         </p:blipFill>
         <p:spPr>
           <a:xfrm>
-            <a:off x="1234440" y="1508760"/>
-            <a:ext cx="9692640" cy="4489313"/>
+            <a:off x="640080" y="2926080"/>
+            <a:ext cx="6858000" cy="3224376"/>
           </a:xfrm>
           <a:prstGeom prst="rect">
             <a:avLst/>
@@ -11946,58 +13128,48 @@
       </p:pic>
       <p:sp>
         <p:nvSpPr>
-          <p:cNvPr id="7" name="Shape 4"/>
-          <p:cNvSpPr/>
-          <p:nvPr/>
-        </p:nvSpPr>
-        <p:spPr>
-          <a:xfrm>
-            <a:off x="640080" y="5943600"/>
-            <a:ext cx="11064240" cy="658368"/>
+          <p:cNvPr id="19" name="Shape 16"/>
+          <p:cNvSpPr/>
+          <p:nvPr/>
+        </p:nvSpPr>
+        <p:spPr>
+          <a:xfrm>
+            <a:off x="7772400" y="2926080"/>
+            <a:ext cx="3931920" cy="2743200"/>
           </a:xfrm>
           <a:prstGeom prst="roundRect">
             <a:avLst>
-              <a:gd name="adj" fmla="val 11111"/>
+              <a:gd name="adj" fmla="val 2667"/>
             </a:avLst>
           </a:prstGeom>
           <a:solidFill>
-            <a:srgbClr val="EEF1FB"/>
+            <a:srgbClr val="FFFFFF"/>
           </a:solidFill>
-          <a:ln/>
-        </p:spPr>
-      </p:sp>
-      <p:sp>
-        <p:nvSpPr>
-          <p:cNvPr id="8" name="Shape 5"/>
-          <p:cNvSpPr/>
-          <p:nvPr/>
-        </p:nvSpPr>
-        <p:spPr>
-          <a:xfrm>
-            <a:off x="841248" y="6071616"/>
-            <a:ext cx="1371600" cy="402336"/>
-          </a:xfrm>
-          <a:prstGeom prst="roundRect">
-            <a:avLst>
-              <a:gd name="adj" fmla="val 50000"/>
-            </a:avLst>
-          </a:prstGeom>
-          <a:solidFill>
-            <a:srgbClr val="1F40E6"/>
-          </a:solidFill>
-          <a:ln/>
-        </p:spPr>
-      </p:sp>
-      <p:sp>
-        <p:nvSpPr>
-          <p:cNvPr id="9" name="Text 6"/>
-          <p:cNvSpPr/>
-          <p:nvPr/>
-        </p:nvSpPr>
-        <p:spPr>
-          <a:xfrm>
-            <a:off x="841248" y="6071616"/>
-            <a:ext cx="1371600" cy="402336"/>
+          <a:ln w="12700">
+            <a:solidFill>
+              <a:srgbClr val="DCE3F2"/>
+            </a:solidFill>
+            <a:prstDash val="solid"/>
+          </a:ln>
+          <a:effectLst>
+            <a:outerShdw sx="100000" sy="100000" kx="0" ky="0" algn="bl" rotWithShape="0" blurRad="101600" dist="25400" dir="5400000">
+              <a:srgbClr val="8794B5">
+                <a:alpha val="22000"/>
+              </a:srgbClr>
+            </a:outerShdw>
+          </a:effectLst>
+        </p:spPr>
+      </p:sp>
+      <p:sp>
+        <p:nvSpPr>
+          <p:cNvPr id="20" name="Text 17"/>
+          <p:cNvSpPr/>
+          <p:nvPr/>
+        </p:nvSpPr>
+        <p:spPr>
+          <a:xfrm>
+            <a:off x="8046720" y="3154680"/>
+            <a:ext cx="3474720" cy="365760"/>
           </a:xfrm>
           <a:prstGeom prst="rect">
             <a:avLst/>
@@ -12009,50 +13181,53 @@
           <a:bodyPr wrap="square" lIns="0" tIns="0" rIns="0" bIns="0" rtlCol="0" anchor="ctr"/>
           <a:lstStyle/>
           <a:p>
-            <a:pPr algn="ctr" indent="0" marL="0">
-              <a:buNone/>
-            </a:pPr>
-            <a:r>
-              <a:rPr lang="en-US" sz="1200" b="1" dirty="0">
-                <a:solidFill>
-                  <a:srgbClr val="FFFFFF"/>
-                </a:solidFill>
-                <a:latin typeface="Pretendard" pitchFamily="34" charset="0"/>
-                <a:ea typeface="Pretendard" pitchFamily="34" charset="-122"/>
-                <a:cs typeface="Pretendard" pitchFamily="34" charset="-120"/>
-              </a:rPr>
-              <a:t>전처리 결과</a:t>
-            </a:r>
-            <a:endParaRPr lang="en-US" sz="1200" dirty="0"/>
-          </a:p>
-        </p:txBody>
-      </p:sp>
-      <p:sp>
-        <p:nvSpPr>
-          <p:cNvPr id="10" name="Text 7"/>
-          <p:cNvSpPr/>
-          <p:nvPr/>
-        </p:nvSpPr>
-        <p:spPr>
-          <a:xfrm>
-            <a:off x="2377440" y="5943600"/>
-            <a:ext cx="9144000" cy="658368"/>
-          </a:xfrm>
-          <a:prstGeom prst="rect">
-            <a:avLst/>
-          </a:prstGeom>
-          <a:noFill/>
-          <a:ln/>
-        </p:spPr>
-        <p:txBody>
-          <a:bodyPr wrap="square" lIns="0" tIns="0" rIns="0" bIns="0" rtlCol="0" anchor="ctr"/>
-          <a:lstStyle/>
-          <a:p>
             <a:pPr indent="0" marL="0">
               <a:buNone/>
             </a:pPr>
             <a:r>
-              <a:rPr lang="en-US" sz="1300" b="1" dirty="0">
+              <a:rPr lang="en-US" sz="1500" b="1" dirty="0">
+                <a:solidFill>
+                  <a:srgbClr val="1F40E6"/>
+                </a:solidFill>
+                <a:latin typeface="Pretendard" pitchFamily="34" charset="0"/>
+                <a:ea typeface="Pretendard" pitchFamily="34" charset="-122"/>
+                <a:cs typeface="Pretendard" pitchFamily="34" charset="-120"/>
+              </a:rPr>
+              <a:t>무누락 운영의 증거</a:t>
+            </a:r>
+            <a:endParaRPr lang="en-US" sz="1500" dirty="0"/>
+          </a:p>
+        </p:txBody>
+      </p:sp>
+      <p:sp>
+        <p:nvSpPr>
+          <p:cNvPr id="21" name="Text 18"/>
+          <p:cNvSpPr/>
+          <p:nvPr/>
+        </p:nvSpPr>
+        <p:spPr>
+          <a:xfrm>
+            <a:off x="8046720" y="3611880"/>
+            <a:ext cx="3429000" cy="914400"/>
+          </a:xfrm>
+          <a:prstGeom prst="rect">
+            <a:avLst/>
+          </a:prstGeom>
+          <a:noFill/>
+          <a:ln/>
+        </p:spPr>
+        <p:txBody>
+          <a:bodyPr wrap="square" lIns="0" tIns="0" rIns="0" bIns="0" rtlCol="0" anchor="t"/>
+          <a:lstStyle/>
+          <a:p>
+            <a:pPr indent="0" marL="0">
+              <a:lnSpc>
+                <a:spcPct val="130000"/>
+              </a:lnSpc>
+              <a:buNone/>
+            </a:pPr>
+            <a:r>
+              <a:rPr lang="en-US" sz="1250" b="1" dirty="0">
                 <a:solidFill>
                   <a:srgbClr val="151B2E"/>
                 </a:solidFill>
@@ -12060,9 +13235,124 @@
                 <a:ea typeface="Pretendard" pitchFamily="34" charset="-122"/>
                 <a:cs typeface="Pretendard" pitchFamily="34" charset="-120"/>
               </a:rPr>
-              <a:t>결측 0건 · 측정값 범위 정상 — 별도 제거/대체 없이 분석 진행 (data_time/created_at 분리 기록)</a:t>
-            </a:r>
-            <a:endParaRPr lang="en-US" sz="1300" dirty="0"/>
+              <a:t>선형 누적</a:t>
+            </a:r>
+            <a:pPr indent="0" marL="0">
+              <a:lnSpc>
+                <a:spcPct val="130000"/>
+              </a:lnSpc>
+              <a:buNone/>
+            </a:pPr>
+            <a:r>
+              <a:rPr lang="en-US" sz="1250" dirty="0">
+                <a:solidFill>
+                  <a:srgbClr val="44506A"/>
+                </a:solidFill>
+                <a:latin typeface="Pretendard" pitchFamily="34" charset="0"/>
+                <a:ea typeface="Pretendard" pitchFamily="34" charset="-122"/>
+                <a:cs typeface="Pretendard" pitchFamily="34" charset="-120"/>
+              </a:rPr>
+              <a:t> — 측정소별 그래프가 끊김 없이 직선으로 증가. 매시 자동 수집이 안정적으로 동작.</a:t>
+            </a:r>
+            <a:endParaRPr lang="en-US" sz="1250" dirty="0"/>
+          </a:p>
+        </p:txBody>
+      </p:sp>
+      <p:sp>
+        <p:nvSpPr>
+          <p:cNvPr id="22" name="Text 19"/>
+          <p:cNvSpPr/>
+          <p:nvPr/>
+        </p:nvSpPr>
+        <p:spPr>
+          <a:xfrm>
+            <a:off x="8046720" y="4617720"/>
+            <a:ext cx="3429000" cy="914400"/>
+          </a:xfrm>
+          <a:prstGeom prst="rect">
+            <a:avLst/>
+          </a:prstGeom>
+          <a:noFill/>
+          <a:ln/>
+        </p:spPr>
+        <p:txBody>
+          <a:bodyPr wrap="square" lIns="0" tIns="0" rIns="0" bIns="0" rtlCol="0" anchor="t"/>
+          <a:lstStyle/>
+          <a:p>
+            <a:pPr indent="0" marL="0">
+              <a:lnSpc>
+                <a:spcPct val="130000"/>
+              </a:lnSpc>
+              <a:buNone/>
+            </a:pPr>
+            <a:r>
+              <a:rPr lang="en-US" sz="1250" b="1" dirty="0">
+                <a:solidFill>
+                  <a:srgbClr val="151B2E"/>
+                </a:solidFill>
+                <a:latin typeface="Pretendard" pitchFamily="34" charset="0"/>
+                <a:ea typeface="Pretendard" pitchFamily="34" charset="-122"/>
+                <a:cs typeface="Pretendard" pitchFamily="34" charset="-120"/>
+              </a:rPr>
+              <a:t>self-healing</a:t>
+            </a:r>
+            <a:pPr indent="0" marL="0">
+              <a:lnSpc>
+                <a:spcPct val="130000"/>
+              </a:lnSpc>
+              <a:buNone/>
+            </a:pPr>
+            <a:r>
+              <a:rPr lang="en-US" sz="1250" dirty="0">
+                <a:solidFill>
+                  <a:srgbClr val="44506A"/>
+                </a:solidFill>
+                <a:latin typeface="Pretendard" pitchFamily="34" charset="0"/>
+                <a:ea typeface="Pretendard" pitchFamily="34" charset="-122"/>
+                <a:cs typeface="Pretendard" pitchFamily="34" charset="-120"/>
+              </a:rPr>
+              <a:t> — cron 드롭 시 다음 실행이 직전 24h 갭을 멱등 복구해 결측을 메움.</a:t>
+            </a:r>
+            <a:endParaRPr lang="en-US" sz="1250" dirty="0"/>
+          </a:p>
+        </p:txBody>
+      </p:sp>
+      <p:sp>
+        <p:nvSpPr>
+          <p:cNvPr id="23" name="Text 20"/>
+          <p:cNvSpPr/>
+          <p:nvPr/>
+        </p:nvSpPr>
+        <p:spPr>
+          <a:xfrm>
+            <a:off x="11320272" y="6437376"/>
+            <a:ext cx="548640" cy="274320"/>
+          </a:xfrm>
+          <a:prstGeom prst="rect">
+            <a:avLst/>
+          </a:prstGeom>
+          <a:noFill/>
+          <a:ln/>
+        </p:spPr>
+        <p:txBody>
+          <a:bodyPr wrap="square" rtlCol="0" anchor="ctr"/>
+          <a:lstStyle/>
+          <a:p>
+            <a:pPr algn="r" indent="0" marL="0">
+              <a:buNone/>
+            </a:pPr>
+            <a:r>
+              <a:rPr lang="en-US" sz="1000" dirty="0">
+                <a:solidFill>
+                  <a:srgbClr val="8A94A6"/>
+                </a:solidFill>
+                <a:latin typeface="Pretendard" pitchFamily="34" charset="0"/>
+                <a:ea typeface="Pretendard" pitchFamily="34" charset="-122"/>
+                <a:cs typeface="Pretendard" pitchFamily="34" charset="-120"/>
+              </a:rPr>
+              <a:t>07</a:t>
+            </a:r>
+            <a:endParaRPr lang="en-US" sz="1000" dirty="0"/>
           </a:p>
         </p:txBody>
       </p:sp>
@@ -12151,7 +13441,7 @@
                 <a:ea typeface="Pretendard" pitchFamily="34" charset="-122"/>
                 <a:cs typeface="Pretendard" pitchFamily="34" charset="-120"/>
               </a:rPr>
-              <a:t>관리 기준 설정</a:t>
+              <a:t>데이터 점검 — 전처리</a:t>
             </a:r>
             <a:endParaRPr lang="en-US" sz="2700" dirty="0"/>
           </a:p>
@@ -12210,653 +13500,7 @@
                 <a:ea typeface="Pretendard" pitchFamily="34" charset="-122"/>
                 <a:cs typeface="Pretendard" pitchFamily="34" charset="-120"/>
               </a:rPr>
-              <a:t>전통 관리도 vs 자기상관 보정 잔차 관리도</a:t>
-            </a:r>
-            <a:endParaRPr lang="en-US" sz="1300" dirty="0"/>
-          </a:p>
-        </p:txBody>
-      </p:sp>
-      <p:sp>
-        <p:nvSpPr>
-          <p:cNvPr id="6" name="Shape 4"/>
-          <p:cNvSpPr/>
-          <p:nvPr/>
-        </p:nvSpPr>
-        <p:spPr>
-          <a:xfrm>
-            <a:off x="640080" y="1554480"/>
-            <a:ext cx="5440680" cy="4206240"/>
-          </a:xfrm>
-          <a:prstGeom prst="roundRect">
-            <a:avLst>
-              <a:gd name="adj" fmla="val 1739"/>
-            </a:avLst>
-          </a:prstGeom>
-          <a:solidFill>
-            <a:srgbClr val="FFFFFF"/>
-          </a:solidFill>
-          <a:ln w="12700">
-            <a:solidFill>
-              <a:srgbClr val="DCE3F2"/>
-            </a:solidFill>
-            <a:prstDash val="solid"/>
-          </a:ln>
-          <a:effectLst>
-            <a:outerShdw sx="100000" sy="100000" kx="0" ky="0" algn="bl" rotWithShape="0" blurRad="101600" dist="25400" dir="5400000">
-              <a:srgbClr val="8794B5">
-                <a:alpha val="22000"/>
-              </a:srgbClr>
-            </a:outerShdw>
-          </a:effectLst>
-        </p:spPr>
-      </p:sp>
-      <p:sp>
-        <p:nvSpPr>
-          <p:cNvPr id="7" name="Text 5"/>
-          <p:cNvSpPr/>
-          <p:nvPr/>
-        </p:nvSpPr>
-        <p:spPr>
-          <a:xfrm>
-            <a:off x="914400" y="1828800"/>
-            <a:ext cx="3657600" cy="457200"/>
-          </a:xfrm>
-          <a:prstGeom prst="rect">
-            <a:avLst/>
-          </a:prstGeom>
-          <a:noFill/>
-          <a:ln/>
-        </p:spPr>
-        <p:txBody>
-          <a:bodyPr wrap="square" lIns="0" tIns="0" rIns="0" bIns="0" rtlCol="0" anchor="ctr"/>
-          <a:lstStyle/>
-          <a:p>
-            <a:pPr indent="0" marL="0">
-              <a:buNone/>
-            </a:pPr>
-            <a:r>
-              <a:rPr lang="en-US" sz="1800" b="1" dirty="0">
-                <a:solidFill>
-                  <a:srgbClr val="151B2E"/>
-                </a:solidFill>
-                <a:latin typeface="Pretendard" pitchFamily="34" charset="0"/>
-                <a:ea typeface="Pretendard" pitchFamily="34" charset="-122"/>
-                <a:cs typeface="Pretendard" pitchFamily="34" charset="-120"/>
-              </a:rPr>
-              <a:t>전통 I-Chart (i.i.d. 가정)</a:t>
-            </a:r>
-            <a:endParaRPr lang="en-US" sz="1800" dirty="0"/>
-          </a:p>
-        </p:txBody>
-      </p:sp>
-      <p:sp>
-        <p:nvSpPr>
-          <p:cNvPr id="8" name="Shape 6"/>
-          <p:cNvSpPr/>
-          <p:nvPr/>
-        </p:nvSpPr>
-        <p:spPr>
-          <a:xfrm>
-            <a:off x="4800600" y="1874520"/>
-            <a:ext cx="1051560" cy="384048"/>
-          </a:xfrm>
-          <a:prstGeom prst="roundRect">
-            <a:avLst>
-              <a:gd name="adj" fmla="val 50000"/>
-            </a:avLst>
-          </a:prstGeom>
-          <a:solidFill>
-            <a:srgbClr val="9AA5B1"/>
-          </a:solidFill>
-          <a:ln/>
-        </p:spPr>
-      </p:sp>
-      <p:sp>
-        <p:nvSpPr>
-          <p:cNvPr id="9" name="Text 7"/>
-          <p:cNvSpPr/>
-          <p:nvPr/>
-        </p:nvSpPr>
-        <p:spPr>
-          <a:xfrm>
-            <a:off x="4800600" y="1874520"/>
-            <a:ext cx="1051560" cy="384048"/>
-          </a:xfrm>
-          <a:prstGeom prst="rect">
-            <a:avLst/>
-          </a:prstGeom>
-          <a:noFill/>
-          <a:ln/>
-        </p:spPr>
-        <p:txBody>
-          <a:bodyPr wrap="square" lIns="0" tIns="0" rIns="0" bIns="0" rtlCol="0" anchor="ctr"/>
-          <a:lstStyle/>
-          <a:p>
-            <a:pPr algn="ctr" indent="0" marL="0">
-              <a:buNone/>
-            </a:pPr>
-            <a:r>
-              <a:rPr lang="en-US" sz="1200" b="1" dirty="0">
-                <a:solidFill>
-                  <a:srgbClr val="FFFFFF"/>
-                </a:solidFill>
-                <a:latin typeface="Pretendard" pitchFamily="34" charset="0"/>
-                <a:ea typeface="Pretendard" pitchFamily="34" charset="-122"/>
-                <a:cs typeface="Pretendard" pitchFamily="34" charset="-120"/>
-              </a:rPr>
-              <a:t>부적합</a:t>
-            </a:r>
-            <a:endParaRPr lang="en-US" sz="1200" dirty="0"/>
-          </a:p>
-        </p:txBody>
-      </p:sp>
-      <p:sp>
-        <p:nvSpPr>
-          <p:cNvPr id="10" name="Text 8"/>
-          <p:cNvSpPr/>
-          <p:nvPr/>
-        </p:nvSpPr>
-        <p:spPr>
-          <a:xfrm>
-            <a:off x="914400" y="2468880"/>
-            <a:ext cx="4892040" cy="822960"/>
-          </a:xfrm>
-          <a:prstGeom prst="rect">
-            <a:avLst/>
-          </a:prstGeom>
-          <a:noFill/>
-          <a:ln/>
-        </p:spPr>
-        <p:txBody>
-          <a:bodyPr wrap="square" lIns="0" tIns="0" rIns="0" bIns="0" rtlCol="0" anchor="t"/>
-          <a:lstStyle/>
-          <a:p>
-            <a:pPr indent="0" marL="0">
-              <a:lnSpc>
-                <a:spcPct val="130000"/>
-              </a:lnSpc>
-              <a:buNone/>
-            </a:pPr>
-            <a:r>
-              <a:rPr lang="en-US" sz="1300" dirty="0">
-                <a:solidFill>
-                  <a:srgbClr val="44506A"/>
-                </a:solidFill>
-                <a:latin typeface="Pretendard" pitchFamily="34" charset="0"/>
-                <a:ea typeface="Pretendard" pitchFamily="34" charset="-122"/>
-                <a:cs typeface="Pretendard" pitchFamily="34" charset="-120"/>
-              </a:rPr>
-              <a:t>대기질은 강한 시계열 자기상관(PM2.5 lag-1 ACF ≈ 0.93)을 가진다.</a:t>
-            </a:r>
-            <a:endParaRPr lang="en-US" sz="1300" dirty="0"/>
-          </a:p>
-        </p:txBody>
-      </p:sp>
-      <p:sp>
-        <p:nvSpPr>
-          <p:cNvPr id="11" name="Shape 9"/>
-          <p:cNvSpPr/>
-          <p:nvPr/>
-        </p:nvSpPr>
-        <p:spPr>
-          <a:xfrm>
-            <a:off x="914400" y="3337560"/>
-            <a:ext cx="146304" cy="146304"/>
-          </a:xfrm>
-          <a:prstGeom prst="ellipse">
-            <a:avLst/>
-          </a:prstGeom>
-          <a:solidFill>
-            <a:srgbClr val="E04646"/>
-          </a:solidFill>
-          <a:ln/>
-        </p:spPr>
-      </p:sp>
-      <p:sp>
-        <p:nvSpPr>
-          <p:cNvPr id="12" name="Text 10"/>
-          <p:cNvSpPr/>
-          <p:nvPr/>
-        </p:nvSpPr>
-        <p:spPr>
-          <a:xfrm>
-            <a:off x="1188720" y="3291840"/>
-            <a:ext cx="4572000" cy="274320"/>
-          </a:xfrm>
-          <a:prstGeom prst="rect">
-            <a:avLst/>
-          </a:prstGeom>
-          <a:noFill/>
-          <a:ln/>
-        </p:spPr>
-        <p:txBody>
-          <a:bodyPr wrap="square" lIns="0" tIns="0" rIns="0" bIns="0" rtlCol="0" anchor="ctr"/>
-          <a:lstStyle/>
-          <a:p>
-            <a:pPr indent="0" marL="0">
-              <a:buNone/>
-            </a:pPr>
-            <a:r>
-              <a:rPr lang="en-US" sz="1300" b="1" dirty="0">
-                <a:solidFill>
-                  <a:srgbClr val="151B2E"/>
-                </a:solidFill>
-                <a:latin typeface="Pretendard" pitchFamily="34" charset="0"/>
-                <a:ea typeface="Pretendard" pitchFamily="34" charset="-122"/>
-                <a:cs typeface="Pretendard" pitchFamily="34" charset="-120"/>
-              </a:rPr>
-              <a:t>독립 가정 붕괴</a:t>
-            </a:r>
-            <a:endParaRPr lang="en-US" sz="1300" dirty="0"/>
-          </a:p>
-        </p:txBody>
-      </p:sp>
-      <p:sp>
-        <p:nvSpPr>
-          <p:cNvPr id="13" name="Text 11"/>
-          <p:cNvSpPr/>
-          <p:nvPr/>
-        </p:nvSpPr>
-        <p:spPr>
-          <a:xfrm>
-            <a:off x="1188720" y="3566160"/>
-            <a:ext cx="4663440" cy="411480"/>
-          </a:xfrm>
-          <a:prstGeom prst="rect">
-            <a:avLst/>
-          </a:prstGeom>
-          <a:noFill/>
-          <a:ln/>
-        </p:spPr>
-        <p:txBody>
-          <a:bodyPr wrap="square" lIns="0" tIns="0" rIns="0" bIns="0" rtlCol="0" anchor="t"/>
-          <a:lstStyle/>
-          <a:p>
-            <a:pPr indent="0" marL="0">
-              <a:buNone/>
-            </a:pPr>
-            <a:r>
-              <a:rPr lang="en-US" sz="1150" dirty="0">
-                <a:solidFill>
-                  <a:srgbClr val="44506A"/>
-                </a:solidFill>
-                <a:latin typeface="Pretendard" pitchFamily="34" charset="0"/>
-                <a:ea typeface="Pretendard" pitchFamily="34" charset="-122"/>
-                <a:cs typeface="Pretendard" pitchFamily="34" charset="-120"/>
-              </a:rPr>
-              <a:t>인접 관측치가 강하게 상관 → MR 기반 σ 과소추정</a:t>
-            </a:r>
-            <a:endParaRPr lang="en-US" sz="1150" dirty="0"/>
-          </a:p>
-        </p:txBody>
-      </p:sp>
-      <p:sp>
-        <p:nvSpPr>
-          <p:cNvPr id="14" name="Shape 12"/>
-          <p:cNvSpPr/>
-          <p:nvPr/>
-        </p:nvSpPr>
-        <p:spPr>
-          <a:xfrm>
-            <a:off x="914400" y="4114800"/>
-            <a:ext cx="146304" cy="146304"/>
-          </a:xfrm>
-          <a:prstGeom prst="ellipse">
-            <a:avLst/>
-          </a:prstGeom>
-          <a:solidFill>
-            <a:srgbClr val="E04646"/>
-          </a:solidFill>
-          <a:ln/>
-        </p:spPr>
-      </p:sp>
-      <p:sp>
-        <p:nvSpPr>
-          <p:cNvPr id="15" name="Text 13"/>
-          <p:cNvSpPr/>
-          <p:nvPr/>
-        </p:nvSpPr>
-        <p:spPr>
-          <a:xfrm>
-            <a:off x="1188720" y="4069080"/>
-            <a:ext cx="4572000" cy="274320"/>
-          </a:xfrm>
-          <a:prstGeom prst="rect">
-            <a:avLst/>
-          </a:prstGeom>
-          <a:noFill/>
-          <a:ln/>
-        </p:spPr>
-        <p:txBody>
-          <a:bodyPr wrap="square" lIns="0" tIns="0" rIns="0" bIns="0" rtlCol="0" anchor="ctr"/>
-          <a:lstStyle/>
-          <a:p>
-            <a:pPr indent="0" marL="0">
-              <a:buNone/>
-            </a:pPr>
-            <a:r>
-              <a:rPr lang="en-US" sz="1300" b="1" dirty="0">
-                <a:solidFill>
-                  <a:srgbClr val="151B2E"/>
-                </a:solidFill>
-                <a:latin typeface="Pretendard" pitchFamily="34" charset="0"/>
-                <a:ea typeface="Pretendard" pitchFamily="34" charset="-122"/>
-                <a:cs typeface="Pretendard" pitchFamily="34" charset="-120"/>
-              </a:rPr>
-              <a:t>관리한계 협소</a:t>
-            </a:r>
-            <a:endParaRPr lang="en-US" sz="1300" dirty="0"/>
-          </a:p>
-        </p:txBody>
-      </p:sp>
-      <p:sp>
-        <p:nvSpPr>
-          <p:cNvPr id="16" name="Text 14"/>
-          <p:cNvSpPr/>
-          <p:nvPr/>
-        </p:nvSpPr>
-        <p:spPr>
-          <a:xfrm>
-            <a:off x="1188720" y="4343400"/>
-            <a:ext cx="4663440" cy="411480"/>
-          </a:xfrm>
-          <a:prstGeom prst="rect">
-            <a:avLst/>
-          </a:prstGeom>
-          <a:noFill/>
-          <a:ln/>
-        </p:spPr>
-        <p:txBody>
-          <a:bodyPr wrap="square" lIns="0" tIns="0" rIns="0" bIns="0" rtlCol="0" anchor="t"/>
-          <a:lstStyle/>
-          <a:p>
-            <a:pPr indent="0" marL="0">
-              <a:buNone/>
-            </a:pPr>
-            <a:r>
-              <a:rPr lang="en-US" sz="1150" dirty="0">
-                <a:solidFill>
-                  <a:srgbClr val="44506A"/>
-                </a:solidFill>
-                <a:latin typeface="Pretendard" pitchFamily="34" charset="0"/>
-                <a:ea typeface="Pretendard" pitchFamily="34" charset="-122"/>
-                <a:cs typeface="Pretendard" pitchFamily="34" charset="-120"/>
-              </a:rPr>
-              <a:t>한계선이 좁아져 정상 변동도 이탈로 오판</a:t>
-            </a:r>
-            <a:endParaRPr lang="en-US" sz="1150" dirty="0"/>
-          </a:p>
-        </p:txBody>
-      </p:sp>
-      <p:sp>
-        <p:nvSpPr>
-          <p:cNvPr id="17" name="Shape 15"/>
-          <p:cNvSpPr/>
-          <p:nvPr/>
-        </p:nvSpPr>
-        <p:spPr>
-          <a:xfrm>
-            <a:off x="914400" y="4892040"/>
-            <a:ext cx="146304" cy="146304"/>
-          </a:xfrm>
-          <a:prstGeom prst="ellipse">
-            <a:avLst/>
-          </a:prstGeom>
-          <a:solidFill>
-            <a:srgbClr val="E04646"/>
-          </a:solidFill>
-          <a:ln/>
-        </p:spPr>
-      </p:sp>
-      <p:sp>
-        <p:nvSpPr>
-          <p:cNvPr id="18" name="Text 16"/>
-          <p:cNvSpPr/>
-          <p:nvPr/>
-        </p:nvSpPr>
-        <p:spPr>
-          <a:xfrm>
-            <a:off x="1188720" y="4846320"/>
-            <a:ext cx="4572000" cy="274320"/>
-          </a:xfrm>
-          <a:prstGeom prst="rect">
-            <a:avLst/>
-          </a:prstGeom>
-          <a:noFill/>
-          <a:ln/>
-        </p:spPr>
-        <p:txBody>
-          <a:bodyPr wrap="square" lIns="0" tIns="0" rIns="0" bIns="0" rtlCol="0" anchor="ctr"/>
-          <a:lstStyle/>
-          <a:p>
-            <a:pPr indent="0" marL="0">
-              <a:buNone/>
-            </a:pPr>
-            <a:r>
-              <a:rPr lang="en-US" sz="1300" b="1" dirty="0">
-                <a:solidFill>
-                  <a:srgbClr val="151B2E"/>
-                </a:solidFill>
-                <a:latin typeface="Pretendard" pitchFamily="34" charset="0"/>
-                <a:ea typeface="Pretendard" pitchFamily="34" charset="-122"/>
-                <a:cs typeface="Pretendard" pitchFamily="34" charset="-120"/>
-              </a:rPr>
-              <a:t>거짓경보 폭증</a:t>
-            </a:r>
-            <a:endParaRPr lang="en-US" sz="1300" dirty="0"/>
-          </a:p>
-        </p:txBody>
-      </p:sp>
-      <p:sp>
-        <p:nvSpPr>
-          <p:cNvPr id="19" name="Text 17"/>
-          <p:cNvSpPr/>
-          <p:nvPr/>
-        </p:nvSpPr>
-        <p:spPr>
-          <a:xfrm>
-            <a:off x="1188720" y="5120640"/>
-            <a:ext cx="4663440" cy="411480"/>
-          </a:xfrm>
-          <a:prstGeom prst="rect">
-            <a:avLst/>
-          </a:prstGeom>
-          <a:noFill/>
-          <a:ln/>
-        </p:spPr>
-        <p:txBody>
-          <a:bodyPr wrap="square" lIns="0" tIns="0" rIns="0" bIns="0" rtlCol="0" anchor="t"/>
-          <a:lstStyle/>
-          <a:p>
-            <a:pPr indent="0" marL="0">
-              <a:buNone/>
-            </a:pPr>
-            <a:r>
-              <a:rPr lang="en-US" sz="1150" dirty="0">
-                <a:solidFill>
-                  <a:srgbClr val="44506A"/>
-                </a:solidFill>
-                <a:latin typeface="Pretendard" pitchFamily="34" charset="0"/>
-                <a:ea typeface="Pretendard" pitchFamily="34" charset="-122"/>
-                <a:cs typeface="Pretendard" pitchFamily="34" charset="-120"/>
-              </a:rPr>
-              <a:t>실측 이탈률 46% — 특수원인 식별 불가</a:t>
-            </a:r>
-            <a:endParaRPr lang="en-US" sz="1150" dirty="0"/>
-          </a:p>
-        </p:txBody>
-      </p:sp>
-      <p:sp>
-        <p:nvSpPr>
-          <p:cNvPr id="20" name="Shape 18"/>
-          <p:cNvSpPr/>
-          <p:nvPr/>
-        </p:nvSpPr>
-        <p:spPr>
-          <a:xfrm>
-            <a:off x="6263640" y="1554480"/>
-            <a:ext cx="5440680" cy="4206240"/>
-          </a:xfrm>
-          <a:prstGeom prst="roundRect">
-            <a:avLst>
-              <a:gd name="adj" fmla="val 1739"/>
-            </a:avLst>
-          </a:prstGeom>
-          <a:solidFill>
-            <a:srgbClr val="F0F8F6"/>
-          </a:solidFill>
-          <a:ln w="12700">
-            <a:solidFill>
-              <a:srgbClr val="B9E0D8"/>
-            </a:solidFill>
-            <a:prstDash val="solid"/>
-          </a:ln>
-          <a:effectLst>
-            <a:outerShdw sx="100000" sy="100000" kx="0" ky="0" algn="bl" rotWithShape="0" blurRad="101600" dist="25400" dir="5400000">
-              <a:srgbClr val="8794B5">
-                <a:alpha val="22000"/>
-              </a:srgbClr>
-            </a:outerShdw>
-          </a:effectLst>
-        </p:spPr>
-      </p:sp>
-      <p:sp>
-        <p:nvSpPr>
-          <p:cNvPr id="21" name="Text 19"/>
-          <p:cNvSpPr/>
-          <p:nvPr/>
-        </p:nvSpPr>
-        <p:spPr>
-          <a:xfrm>
-            <a:off x="6537960" y="1828800"/>
-            <a:ext cx="3657600" cy="457200"/>
-          </a:xfrm>
-          <a:prstGeom prst="rect">
-            <a:avLst/>
-          </a:prstGeom>
-          <a:noFill/>
-          <a:ln/>
-        </p:spPr>
-        <p:txBody>
-          <a:bodyPr wrap="square" lIns="0" tIns="0" rIns="0" bIns="0" rtlCol="0" anchor="ctr"/>
-          <a:lstStyle/>
-          <a:p>
-            <a:pPr indent="0" marL="0">
-              <a:buNone/>
-            </a:pPr>
-            <a:r>
-              <a:rPr lang="en-US" sz="1800" b="1" dirty="0">
-                <a:solidFill>
-                  <a:srgbClr val="0B6B61"/>
-                </a:solidFill>
-                <a:latin typeface="Pretendard" pitchFamily="34" charset="0"/>
-                <a:ea typeface="Pretendard" pitchFamily="34" charset="-122"/>
-                <a:cs typeface="Pretendard" pitchFamily="34" charset="-120"/>
-              </a:rPr>
-              <a:t>잔차 관리도 (자기상관 보정)</a:t>
-            </a:r>
-            <a:endParaRPr lang="en-US" sz="1800" dirty="0"/>
-          </a:p>
-        </p:txBody>
-      </p:sp>
-      <p:sp>
-        <p:nvSpPr>
-          <p:cNvPr id="22" name="Shape 20"/>
-          <p:cNvSpPr/>
-          <p:nvPr/>
-        </p:nvSpPr>
-        <p:spPr>
-          <a:xfrm>
-            <a:off x="10424160" y="1874520"/>
-            <a:ext cx="1051560" cy="384048"/>
-          </a:xfrm>
-          <a:prstGeom prst="roundRect">
-            <a:avLst>
-              <a:gd name="adj" fmla="val 50000"/>
-            </a:avLst>
-          </a:prstGeom>
-          <a:solidFill>
-            <a:srgbClr val="0E9488"/>
-          </a:solidFill>
-          <a:ln/>
-        </p:spPr>
-      </p:sp>
-      <p:sp>
-        <p:nvSpPr>
-          <p:cNvPr id="23" name="Text 21"/>
-          <p:cNvSpPr/>
-          <p:nvPr/>
-        </p:nvSpPr>
-        <p:spPr>
-          <a:xfrm>
-            <a:off x="10424160" y="1874520"/>
-            <a:ext cx="1051560" cy="384048"/>
-          </a:xfrm>
-          <a:prstGeom prst="rect">
-            <a:avLst/>
-          </a:prstGeom>
-          <a:noFill/>
-          <a:ln/>
-        </p:spPr>
-        <p:txBody>
-          <a:bodyPr wrap="square" lIns="0" tIns="0" rIns="0" bIns="0" rtlCol="0" anchor="ctr"/>
-          <a:lstStyle/>
-          <a:p>
-            <a:pPr algn="ctr" indent="0" marL="0">
-              <a:buNone/>
-            </a:pPr>
-            <a:r>
-              <a:rPr lang="en-US" sz="1200" b="1" dirty="0">
-                <a:solidFill>
-                  <a:srgbClr val="FFFFFF"/>
-                </a:solidFill>
-                <a:latin typeface="Pretendard" pitchFamily="34" charset="0"/>
-                <a:ea typeface="Pretendard" pitchFamily="34" charset="-122"/>
-                <a:cs typeface="Pretendard" pitchFamily="34" charset="-120"/>
-              </a:rPr>
-              <a:t>채택</a:t>
-            </a:r>
-            <a:endParaRPr lang="en-US" sz="1200" dirty="0"/>
-          </a:p>
-        </p:txBody>
-      </p:sp>
-      <p:sp>
-        <p:nvSpPr>
-          <p:cNvPr id="24" name="Text 22"/>
-          <p:cNvSpPr/>
-          <p:nvPr/>
-        </p:nvSpPr>
-        <p:spPr>
-          <a:xfrm>
-            <a:off x="6537960" y="2468880"/>
-            <a:ext cx="4892040" cy="822960"/>
-          </a:xfrm>
-          <a:prstGeom prst="rect">
-            <a:avLst/>
-          </a:prstGeom>
-          <a:noFill/>
-          <a:ln/>
-        </p:spPr>
-        <p:txBody>
-          <a:bodyPr wrap="square" lIns="0" tIns="0" rIns="0" bIns="0" rtlCol="0" anchor="t"/>
-          <a:lstStyle/>
-          <a:p>
-            <a:pPr indent="0" marL="0">
-              <a:lnSpc>
-                <a:spcPct val="130000"/>
-              </a:lnSpc>
-              <a:buNone/>
-            </a:pPr>
-            <a:r>
-              <a:rPr lang="en-US" sz="1300" dirty="0">
-                <a:solidFill>
-                  <a:srgbClr val="44506A"/>
-                </a:solidFill>
-                <a:latin typeface="Pretendard" pitchFamily="34" charset="0"/>
-                <a:ea typeface="Pretendard" pitchFamily="34" charset="-122"/>
-                <a:cs typeface="Pretendard" pitchFamily="34" charset="-120"/>
-              </a:rPr>
-              <a:t>일주기(시간대) 효과 제거 + AR(1) 잔차에 관리도를 적용해 독립성을 회복.</a:t>
+              <a:t>6종 오염물질 분포 · 결측/이상치 확인</a:t>
             </a:r>
             <a:endParaRPr lang="en-US" sz="1300" dirty="0"/>
           </a:p>
@@ -12864,7 +13508,7 @@
       </p:sp>
       <p:pic>
         <p:nvPicPr>
-          <p:cNvPr id="25" name="Image 0" descr="preencoded.png">    </p:cNvPr>
+          <p:cNvPr id="6" name="Image 0" descr="/Users/t2025-m0190/workspace/chungbuk-air-quality-monitor/build/deck/img/box_grid.png">    </p:cNvPr>
           <p:cNvPicPr>
             <a:picLocks noChangeAspect="1"/>
           </p:cNvPicPr>
@@ -12878,8 +13522,8 @@
         </p:blipFill>
         <p:spPr>
           <a:xfrm>
-            <a:off x="6537960" y="3291840"/>
-            <a:ext cx="201168" cy="201168"/>
+            <a:off x="1234440" y="1508760"/>
+            <a:ext cx="9692640" cy="4489313"/>
           </a:xfrm>
           <a:prstGeom prst="rect">
             <a:avLst/>
@@ -12888,14 +13532,58 @@
       </p:pic>
       <p:sp>
         <p:nvSpPr>
-          <p:cNvPr id="26" name="Text 23"/>
-          <p:cNvSpPr/>
-          <p:nvPr/>
-        </p:nvSpPr>
-        <p:spPr>
-          <a:xfrm>
-            <a:off x="6858000" y="3291840"/>
-            <a:ext cx="4572000" cy="274320"/>
+          <p:cNvPr id="7" name="Shape 4"/>
+          <p:cNvSpPr/>
+          <p:nvPr/>
+        </p:nvSpPr>
+        <p:spPr>
+          <a:xfrm>
+            <a:off x="640080" y="5943600"/>
+            <a:ext cx="11064240" cy="658368"/>
+          </a:xfrm>
+          <a:prstGeom prst="roundRect">
+            <a:avLst>
+              <a:gd name="adj" fmla="val 11111"/>
+            </a:avLst>
+          </a:prstGeom>
+          <a:solidFill>
+            <a:srgbClr val="EEF1FB"/>
+          </a:solidFill>
+          <a:ln/>
+        </p:spPr>
+      </p:sp>
+      <p:sp>
+        <p:nvSpPr>
+          <p:cNvPr id="8" name="Shape 5"/>
+          <p:cNvSpPr/>
+          <p:nvPr/>
+        </p:nvSpPr>
+        <p:spPr>
+          <a:xfrm>
+            <a:off x="841248" y="6071616"/>
+            <a:ext cx="1371600" cy="402336"/>
+          </a:xfrm>
+          <a:prstGeom prst="roundRect">
+            <a:avLst>
+              <a:gd name="adj" fmla="val 50000"/>
+            </a:avLst>
+          </a:prstGeom>
+          <a:solidFill>
+            <a:srgbClr val="1F40E6"/>
+          </a:solidFill>
+          <a:ln/>
+        </p:spPr>
+      </p:sp>
+      <p:sp>
+        <p:nvSpPr>
+          <p:cNvPr id="9" name="Text 6"/>
+          <p:cNvSpPr/>
+          <p:nvPr/>
+        </p:nvSpPr>
+        <p:spPr>
+          <a:xfrm>
+            <a:off x="841248" y="6071616"/>
+            <a:ext cx="1371600" cy="402336"/>
           </a:xfrm>
           <a:prstGeom prst="rect">
             <a:avLst/>
@@ -12907,6 +13595,45 @@
           <a:bodyPr wrap="square" lIns="0" tIns="0" rIns="0" bIns="0" rtlCol="0" anchor="ctr"/>
           <a:lstStyle/>
           <a:p>
+            <a:pPr algn="ctr" indent="0" marL="0">
+              <a:buNone/>
+            </a:pPr>
+            <a:r>
+              <a:rPr lang="en-US" sz="1200" b="1" dirty="0">
+                <a:solidFill>
+                  <a:srgbClr val="FFFFFF"/>
+                </a:solidFill>
+                <a:latin typeface="Pretendard" pitchFamily="34" charset="0"/>
+                <a:ea typeface="Pretendard" pitchFamily="34" charset="-122"/>
+                <a:cs typeface="Pretendard" pitchFamily="34" charset="-120"/>
+              </a:rPr>
+              <a:t>전처리 결과</a:t>
+            </a:r>
+            <a:endParaRPr lang="en-US" sz="1200" dirty="0"/>
+          </a:p>
+        </p:txBody>
+      </p:sp>
+      <p:sp>
+        <p:nvSpPr>
+          <p:cNvPr id="10" name="Text 7"/>
+          <p:cNvSpPr/>
+          <p:nvPr/>
+        </p:nvSpPr>
+        <p:spPr>
+          <a:xfrm>
+            <a:off x="2377440" y="5943600"/>
+            <a:ext cx="9144000" cy="658368"/>
+          </a:xfrm>
+          <a:prstGeom prst="rect">
+            <a:avLst/>
+          </a:prstGeom>
+          <a:noFill/>
+          <a:ln/>
+        </p:spPr>
+        <p:txBody>
+          <a:bodyPr wrap="square" lIns="0" tIns="0" rIns="0" bIns="0" rtlCol="0" anchor="ctr"/>
+          <a:lstStyle/>
+          <a:p>
             <a:pPr indent="0" marL="0">
               <a:buNone/>
             </a:pPr>
@@ -12919,291 +13646,9 @@
                 <a:ea typeface="Pretendard" pitchFamily="34" charset="-122"/>
                 <a:cs typeface="Pretendard" pitchFamily="34" charset="-120"/>
               </a:rPr>
-              <a:t>백색화 성공</a:t>
+              <a:t>결측 0건 · 측정값 범위 정상 — 별도 제거/대체 없이 분석 진행 (data_time/created_at 분리 기록)</a:t>
             </a:r>
             <a:endParaRPr lang="en-US" sz="1300" dirty="0"/>
-          </a:p>
-        </p:txBody>
-      </p:sp>
-      <p:sp>
-        <p:nvSpPr>
-          <p:cNvPr id="27" name="Text 24"/>
-          <p:cNvSpPr/>
-          <p:nvPr/>
-        </p:nvSpPr>
-        <p:spPr>
-          <a:xfrm>
-            <a:off x="6858000" y="3566160"/>
-            <a:ext cx="4663440" cy="411480"/>
-          </a:xfrm>
-          <a:prstGeom prst="rect">
-            <a:avLst/>
-          </a:prstGeom>
-          <a:noFill/>
-          <a:ln/>
-        </p:spPr>
-        <p:txBody>
-          <a:bodyPr wrap="square" lIns="0" tIns="0" rIns="0" bIns="0" rtlCol="0" anchor="t"/>
-          <a:lstStyle/>
-          <a:p>
-            <a:pPr indent="0" marL="0">
-              <a:buNone/>
-            </a:pPr>
-            <a:r>
-              <a:rPr lang="en-US" sz="1150" dirty="0">
-                <a:solidFill>
-                  <a:srgbClr val="44506A"/>
-                </a:solidFill>
-                <a:latin typeface="Pretendard" pitchFamily="34" charset="0"/>
-                <a:ea typeface="Pretendard" pitchFamily="34" charset="-122"/>
-                <a:cs typeface="Pretendard" pitchFamily="34" charset="-120"/>
-              </a:rPr>
-              <a:t>ACF 0.93 → ≈ 0, 잔차가 독립에 근접</a:t>
-            </a:r>
-            <a:endParaRPr lang="en-US" sz="1150" dirty="0"/>
-          </a:p>
-        </p:txBody>
-      </p:sp>
-      <p:pic>
-        <p:nvPicPr>
-          <p:cNvPr id="28" name="Image 1" descr="preencoded.png">    </p:cNvPr>
-          <p:cNvPicPr>
-            <a:picLocks noChangeAspect="1"/>
-          </p:cNvPicPr>
-          <p:nvPr/>
-        </p:nvPicPr>
-        <p:blipFill>
-          <a:blip r:embed="rId2"/>
-          <a:stretch>
-            <a:fillRect/>
-          </a:stretch>
-        </p:blipFill>
-        <p:spPr>
-          <a:xfrm>
-            <a:off x="6537960" y="4069080"/>
-            <a:ext cx="201168" cy="201168"/>
-          </a:xfrm>
-          <a:prstGeom prst="rect">
-            <a:avLst/>
-          </a:prstGeom>
-        </p:spPr>
-      </p:pic>
-      <p:sp>
-        <p:nvSpPr>
-          <p:cNvPr id="29" name="Text 25"/>
-          <p:cNvSpPr/>
-          <p:nvPr/>
-        </p:nvSpPr>
-        <p:spPr>
-          <a:xfrm>
-            <a:off x="6858000" y="4069080"/>
-            <a:ext cx="4572000" cy="274320"/>
-          </a:xfrm>
-          <a:prstGeom prst="rect">
-            <a:avLst/>
-          </a:prstGeom>
-          <a:noFill/>
-          <a:ln/>
-        </p:spPr>
-        <p:txBody>
-          <a:bodyPr wrap="square" lIns="0" tIns="0" rIns="0" bIns="0" rtlCol="0" anchor="ctr"/>
-          <a:lstStyle/>
-          <a:p>
-            <a:pPr indent="0" marL="0">
-              <a:buNone/>
-            </a:pPr>
-            <a:r>
-              <a:rPr lang="en-US" sz="1300" b="1" dirty="0">
-                <a:solidFill>
-                  <a:srgbClr val="151B2E"/>
-                </a:solidFill>
-                <a:latin typeface="Pretendard" pitchFamily="34" charset="0"/>
-                <a:ea typeface="Pretendard" pitchFamily="34" charset="-122"/>
-                <a:cs typeface="Pretendard" pitchFamily="34" charset="-120"/>
-              </a:rPr>
-              <a:t>관리한계 정상화</a:t>
-            </a:r>
-            <a:endParaRPr lang="en-US" sz="1300" dirty="0"/>
-          </a:p>
-        </p:txBody>
-      </p:sp>
-      <p:sp>
-        <p:nvSpPr>
-          <p:cNvPr id="30" name="Text 26"/>
-          <p:cNvSpPr/>
-          <p:nvPr/>
-        </p:nvSpPr>
-        <p:spPr>
-          <a:xfrm>
-            <a:off x="6858000" y="4343400"/>
-            <a:ext cx="4663440" cy="411480"/>
-          </a:xfrm>
-          <a:prstGeom prst="rect">
-            <a:avLst/>
-          </a:prstGeom>
-          <a:noFill/>
-          <a:ln/>
-        </p:spPr>
-        <p:txBody>
-          <a:bodyPr wrap="square" lIns="0" tIns="0" rIns="0" bIns="0" rtlCol="0" anchor="t"/>
-          <a:lstStyle/>
-          <a:p>
-            <a:pPr indent="0" marL="0">
-              <a:buNone/>
-            </a:pPr>
-            <a:r>
-              <a:rPr lang="en-US" sz="1150" dirty="0">
-                <a:solidFill>
-                  <a:srgbClr val="44506A"/>
-                </a:solidFill>
-                <a:latin typeface="Pretendard" pitchFamily="34" charset="0"/>
-                <a:ea typeface="Pretendard" pitchFamily="34" charset="-122"/>
-                <a:cs typeface="Pretendard" pitchFamily="34" charset="-120"/>
-              </a:rPr>
-              <a:t>명목 거짓경보율(0.27%) 수준으로 복원</a:t>
-            </a:r>
-            <a:endParaRPr lang="en-US" sz="1150" dirty="0"/>
-          </a:p>
-        </p:txBody>
-      </p:sp>
-      <p:pic>
-        <p:nvPicPr>
-          <p:cNvPr id="31" name="Image 2" descr="preencoded.png">    </p:cNvPr>
-          <p:cNvPicPr>
-            <a:picLocks noChangeAspect="1"/>
-          </p:cNvPicPr>
-          <p:nvPr/>
-        </p:nvPicPr>
-        <p:blipFill>
-          <a:blip r:embed="rId3"/>
-          <a:stretch>
-            <a:fillRect/>
-          </a:stretch>
-        </p:blipFill>
-        <p:spPr>
-          <a:xfrm>
-            <a:off x="6537960" y="4846320"/>
-            <a:ext cx="201168" cy="201168"/>
-          </a:xfrm>
-          <a:prstGeom prst="rect">
-            <a:avLst/>
-          </a:prstGeom>
-        </p:spPr>
-      </p:pic>
-      <p:sp>
-        <p:nvSpPr>
-          <p:cNvPr id="32" name="Text 27"/>
-          <p:cNvSpPr/>
-          <p:nvPr/>
-        </p:nvSpPr>
-        <p:spPr>
-          <a:xfrm>
-            <a:off x="6858000" y="4846320"/>
-            <a:ext cx="4572000" cy="274320"/>
-          </a:xfrm>
-          <a:prstGeom prst="rect">
-            <a:avLst/>
-          </a:prstGeom>
-          <a:noFill/>
-          <a:ln/>
-        </p:spPr>
-        <p:txBody>
-          <a:bodyPr wrap="square" lIns="0" tIns="0" rIns="0" bIns="0" rtlCol="0" anchor="ctr"/>
-          <a:lstStyle/>
-          <a:p>
-            <a:pPr indent="0" marL="0">
-              <a:buNone/>
-            </a:pPr>
-            <a:r>
-              <a:rPr lang="en-US" sz="1300" b="1" dirty="0">
-                <a:solidFill>
-                  <a:srgbClr val="151B2E"/>
-                </a:solidFill>
-                <a:latin typeface="Pretendard" pitchFamily="34" charset="0"/>
-                <a:ea typeface="Pretendard" pitchFamily="34" charset="-122"/>
-                <a:cs typeface="Pretendard" pitchFamily="34" charset="-120"/>
-              </a:rPr>
-              <a:t>진짜 신호만 탐지</a:t>
-            </a:r>
-            <a:endParaRPr lang="en-US" sz="1300" dirty="0"/>
-          </a:p>
-        </p:txBody>
-      </p:sp>
-      <p:sp>
-        <p:nvSpPr>
-          <p:cNvPr id="33" name="Text 28"/>
-          <p:cNvSpPr/>
-          <p:nvPr/>
-        </p:nvSpPr>
-        <p:spPr>
-          <a:xfrm>
-            <a:off x="6858000" y="5120640"/>
-            <a:ext cx="4663440" cy="411480"/>
-          </a:xfrm>
-          <a:prstGeom prst="rect">
-            <a:avLst/>
-          </a:prstGeom>
-          <a:noFill/>
-          <a:ln/>
-        </p:spPr>
-        <p:txBody>
-          <a:bodyPr wrap="square" lIns="0" tIns="0" rIns="0" bIns="0" rtlCol="0" anchor="t"/>
-          <a:lstStyle/>
-          <a:p>
-            <a:pPr indent="0" marL="0">
-              <a:buNone/>
-            </a:pPr>
-            <a:r>
-              <a:rPr lang="en-US" sz="1150" dirty="0">
-                <a:solidFill>
-                  <a:srgbClr val="44506A"/>
-                </a:solidFill>
-                <a:latin typeface="Pretendard" pitchFamily="34" charset="0"/>
-                <a:ea typeface="Pretendard" pitchFamily="34" charset="-122"/>
-                <a:cs typeface="Pretendard" pitchFamily="34" charset="-120"/>
-              </a:rPr>
-              <a:t>실측 이탈률 46% → 2%, 특수원인 후보만 남김</a:t>
-            </a:r>
-            <a:endParaRPr lang="en-US" sz="1150" dirty="0"/>
-          </a:p>
-        </p:txBody>
-      </p:sp>
-      <p:sp>
-        <p:nvSpPr>
-          <p:cNvPr id="34" name="Text 29"/>
-          <p:cNvSpPr/>
-          <p:nvPr/>
-        </p:nvSpPr>
-        <p:spPr>
-          <a:xfrm>
-            <a:off x="11320272" y="6437376"/>
-            <a:ext cx="548640" cy="274320"/>
-          </a:xfrm>
-          <a:prstGeom prst="rect">
-            <a:avLst/>
-          </a:prstGeom>
-          <a:noFill/>
-          <a:ln/>
-        </p:spPr>
-        <p:txBody>
-          <a:bodyPr wrap="square" rtlCol="0" anchor="ctr"/>
-          <a:lstStyle/>
-          <a:p>
-            <a:pPr algn="r" indent="0" marL="0">
-              <a:buNone/>
-            </a:pPr>
-            <a:r>
-              <a:rPr lang="en-US" sz="1000" dirty="0">
-                <a:solidFill>
-                  <a:srgbClr val="8A94A6"/>
-                </a:solidFill>
-                <a:latin typeface="Pretendard" pitchFamily="34" charset="0"/>
-                <a:ea typeface="Pretendard" pitchFamily="34" charset="-122"/>
-                <a:cs typeface="Pretendard" pitchFamily="34" charset="-120"/>
-              </a:rPr>
-              <a:t>08</a:t>
-            </a:r>
-            <a:endParaRPr lang="en-US" sz="1000" dirty="0"/>
           </a:p>
         </p:txBody>
       </p:sp>
@@ -13292,7 +13737,7 @@
                 <a:ea typeface="Pretendard" pitchFamily="34" charset="-122"/>
                 <a:cs typeface="Pretendard" pitchFamily="34" charset="-120"/>
               </a:rPr>
-              <a:t>통계 분석 — 공정능력지수 Cpk</a:t>
+              <a:t>관리 기준 설정</a:t>
             </a:r>
             <a:endParaRPr lang="en-US" sz="2700" dirty="0"/>
           </a:p>
@@ -13351,192 +13796,26 @@
                 <a:ea typeface="Pretendard" pitchFamily="34" charset="-122"/>
                 <a:cs typeface="Pretendard" pitchFamily="34" charset="-120"/>
               </a:rPr>
-              <a:t>측정소 × 오염물질 30개 조합 진단</a:t>
+              <a:t>전통 관리도 vs 자기상관 보정 잔차 관리도</a:t>
             </a:r>
             <a:endParaRPr lang="en-US" sz="1300" dirty="0"/>
           </a:p>
         </p:txBody>
       </p:sp>
-      <p:pic>
-        <p:nvPicPr>
-          <p:cNvPr id="6" name="Image 0" descr="/Users/t2025-m0190/workspace/chungbuk-air-quality-monitor/build/deck/img/cpk_heatmap.png">    </p:cNvPr>
-          <p:cNvPicPr>
-            <a:picLocks noChangeAspect="1"/>
-          </p:cNvPicPr>
-          <p:nvPr/>
-        </p:nvPicPr>
-        <p:blipFill>
-          <a:blip r:embed="rId1"/>
-          <a:stretch>
-            <a:fillRect/>
-          </a:stretch>
-        </p:blipFill>
-        <p:spPr>
-          <a:xfrm>
-            <a:off x="548640" y="2148840"/>
-            <a:ext cx="7315200" cy="3292870"/>
-          </a:xfrm>
-          <a:prstGeom prst="rect">
-            <a:avLst/>
-          </a:prstGeom>
-        </p:spPr>
-      </p:pic>
-      <p:sp>
-        <p:nvSpPr>
-          <p:cNvPr id="7" name="Text 4"/>
-          <p:cNvSpPr/>
-          <p:nvPr/>
-        </p:nvSpPr>
-        <p:spPr>
-          <a:xfrm>
-            <a:off x="640080" y="5532120"/>
-            <a:ext cx="7315200" cy="320040"/>
-          </a:xfrm>
-          <a:prstGeom prst="rect">
-            <a:avLst/>
-          </a:prstGeom>
-          <a:noFill/>
-          <a:ln/>
-        </p:spPr>
-        <p:txBody>
-          <a:bodyPr wrap="square" lIns="0" tIns="0" rIns="0" bIns="0" rtlCol="0" anchor="ctr"/>
-          <a:lstStyle/>
-          <a:p>
-            <a:pPr indent="0" marL="0">
-              <a:buNone/>
-            </a:pPr>
-            <a:r>
-              <a:rPr lang="en-US" sz="1100" i="1" dirty="0">
-                <a:solidFill>
-                  <a:srgbClr val="8A94A6"/>
-                </a:solidFill>
-                <a:latin typeface="Pretendard" pitchFamily="34" charset="0"/>
-                <a:ea typeface="Pretendard" pitchFamily="34" charset="-122"/>
-                <a:cs typeface="Pretendard" pitchFamily="34" charset="-120"/>
-              </a:rPr>
-              <a:t>USL=대기환경보전법 환경기준 · Cpk&lt;1.0=불량 위험 · Cpk≥1.33=양호</a:t>
-            </a:r>
-            <a:endParaRPr lang="en-US" sz="1100" dirty="0"/>
-          </a:p>
-        </p:txBody>
-      </p:sp>
-      <p:sp>
-        <p:nvSpPr>
-          <p:cNvPr id="8" name="Shape 5"/>
-          <p:cNvSpPr/>
-          <p:nvPr/>
-        </p:nvSpPr>
-        <p:spPr>
-          <a:xfrm>
-            <a:off x="8092440" y="1783080"/>
-            <a:ext cx="3611880" cy="2057400"/>
+      <p:sp>
+        <p:nvSpPr>
+          <p:cNvPr id="6" name="Shape 4"/>
+          <p:cNvSpPr/>
+          <p:nvPr/>
+        </p:nvSpPr>
+        <p:spPr>
+          <a:xfrm>
+            <a:off x="640080" y="1554480"/>
+            <a:ext cx="5440680" cy="4206240"/>
           </a:xfrm>
           <a:prstGeom prst="roundRect">
             <a:avLst>
-              <a:gd name="adj" fmla="val 3556"/>
-            </a:avLst>
-          </a:prstGeom>
-          <a:solidFill>
-            <a:srgbClr val="FDEDED"/>
-          </a:solidFill>
-          <a:ln/>
-        </p:spPr>
-      </p:sp>
-      <p:sp>
-        <p:nvSpPr>
-          <p:cNvPr id="9" name="Text 6"/>
-          <p:cNvSpPr/>
-          <p:nvPr/>
-        </p:nvSpPr>
-        <p:spPr>
-          <a:xfrm>
-            <a:off x="8321040" y="2011680"/>
-            <a:ext cx="3200400" cy="365760"/>
-          </a:xfrm>
-          <a:prstGeom prst="rect">
-            <a:avLst/>
-          </a:prstGeom>
-          <a:noFill/>
-          <a:ln/>
-        </p:spPr>
-        <p:txBody>
-          <a:bodyPr wrap="square" lIns="0" tIns="0" rIns="0" bIns="0" rtlCol="0" anchor="ctr"/>
-          <a:lstStyle/>
-          <a:p>
-            <a:pPr indent="0" marL="0">
-              <a:buNone/>
-            </a:pPr>
-            <a:r>
-              <a:rPr lang="en-US" sz="1450" b="1" dirty="0">
-                <a:solidFill>
-                  <a:srgbClr val="E04646"/>
-                </a:solidFill>
-                <a:latin typeface="Pretendard" pitchFamily="34" charset="0"/>
-                <a:ea typeface="Pretendard" pitchFamily="34" charset="-122"/>
-                <a:cs typeface="Pretendard" pitchFamily="34" charset="-120"/>
-              </a:rPr>
-              <a:t>우선 관리 — PM2.5 · PM10</a:t>
-            </a:r>
-            <a:endParaRPr lang="en-US" sz="1450" dirty="0"/>
-          </a:p>
-        </p:txBody>
-      </p:sp>
-      <p:sp>
-        <p:nvSpPr>
-          <p:cNvPr id="10" name="Text 7"/>
-          <p:cNvSpPr/>
-          <p:nvPr/>
-        </p:nvSpPr>
-        <p:spPr>
-          <a:xfrm>
-            <a:off x="8321040" y="2450592"/>
-            <a:ext cx="3200400" cy="1325880"/>
-          </a:xfrm>
-          <a:prstGeom prst="rect">
-            <a:avLst/>
-          </a:prstGeom>
-          <a:noFill/>
-          <a:ln/>
-        </p:spPr>
-        <p:txBody>
-          <a:bodyPr wrap="square" lIns="0" tIns="0" rIns="0" bIns="0" rtlCol="0" anchor="t"/>
-          <a:lstStyle/>
-          <a:p>
-            <a:pPr indent="0" marL="0">
-              <a:lnSpc>
-                <a:spcPct val="130000"/>
-              </a:lnSpc>
-              <a:buNone/>
-            </a:pPr>
-            <a:r>
-              <a:rPr lang="en-US" sz="1250" dirty="0">
-                <a:solidFill>
-                  <a:srgbClr val="44506A"/>
-                </a:solidFill>
-                <a:latin typeface="Pretendard" pitchFamily="34" charset="0"/>
-                <a:ea typeface="Pretendard" pitchFamily="34" charset="-122"/>
-                <a:cs typeface="Pretendard" pitchFamily="34" charset="-120"/>
-              </a:rPr>
-              <a:t>전 측정소 Cpk &lt; 1.0 ‘불량 위험’. 특히 오송읍 PM2.5 Cpk 0.28로 최저 → 1순위 관리 대상. 미세먼지가 구조적 핵심 인자.</a:t>
-            </a:r>
-            <a:endParaRPr lang="en-US" sz="1250" dirty="0"/>
-          </a:p>
-        </p:txBody>
-      </p:sp>
-      <p:sp>
-        <p:nvSpPr>
-          <p:cNvPr id="11" name="Shape 8"/>
-          <p:cNvSpPr/>
-          <p:nvPr/>
-        </p:nvSpPr>
-        <p:spPr>
-          <a:xfrm>
-            <a:off x="8092440" y="4069080"/>
-            <a:ext cx="3611880" cy="2057400"/>
-          </a:xfrm>
-          <a:prstGeom prst="roundRect">
-            <a:avLst>
-              <a:gd name="adj" fmla="val 3556"/>
+              <a:gd name="adj" fmla="val 1739"/>
             </a:avLst>
           </a:prstGeom>
           <a:solidFill>
@@ -13559,14 +13838,14 @@
       </p:sp>
       <p:sp>
         <p:nvSpPr>
-          <p:cNvPr id="12" name="Text 9"/>
-          <p:cNvSpPr/>
-          <p:nvPr/>
-        </p:nvSpPr>
-        <p:spPr>
-          <a:xfrm>
-            <a:off x="8321040" y="4315968"/>
-            <a:ext cx="3200400" cy="365760"/>
+          <p:cNvPr id="7" name="Text 5"/>
+          <p:cNvSpPr/>
+          <p:nvPr/>
+        </p:nvSpPr>
+        <p:spPr>
+          <a:xfrm>
+            <a:off x="914400" y="1828800"/>
+            <a:ext cx="3657600" cy="457200"/>
           </a:xfrm>
           <a:prstGeom prst="rect">
             <a:avLst/>
@@ -13582,30 +13861,91 @@
               <a:buNone/>
             </a:pPr>
             <a:r>
-              <a:rPr lang="en-US" sz="1450" b="1" dirty="0">
-                <a:solidFill>
-                  <a:srgbClr val="0E9488"/>
-                </a:solidFill>
-                <a:latin typeface="Pretendard" pitchFamily="34" charset="0"/>
-                <a:ea typeface="Pretendard" pitchFamily="34" charset="-122"/>
-                <a:cs typeface="Pretendard" pitchFamily="34" charset="-120"/>
-              </a:rPr>
-              <a:t>관리 양호 — SO₂ · CO</a:t>
-            </a:r>
-            <a:endParaRPr lang="en-US" sz="1450" dirty="0"/>
-          </a:p>
-        </p:txBody>
-      </p:sp>
-      <p:sp>
-        <p:nvSpPr>
-          <p:cNvPr id="13" name="Text 10"/>
-          <p:cNvSpPr/>
-          <p:nvPr/>
-        </p:nvSpPr>
-        <p:spPr>
-          <a:xfrm>
-            <a:off x="8321040" y="4754880"/>
-            <a:ext cx="3200400" cy="1280160"/>
+              <a:rPr lang="en-US" sz="1800" b="1" dirty="0">
+                <a:solidFill>
+                  <a:srgbClr val="151B2E"/>
+                </a:solidFill>
+                <a:latin typeface="Pretendard" pitchFamily="34" charset="0"/>
+                <a:ea typeface="Pretendard" pitchFamily="34" charset="-122"/>
+                <a:cs typeface="Pretendard" pitchFamily="34" charset="-120"/>
+              </a:rPr>
+              <a:t>전통 I-Chart (i.i.d. 가정)</a:t>
+            </a:r>
+            <a:endParaRPr lang="en-US" sz="1800" dirty="0"/>
+          </a:p>
+        </p:txBody>
+      </p:sp>
+      <p:sp>
+        <p:nvSpPr>
+          <p:cNvPr id="8" name="Shape 6"/>
+          <p:cNvSpPr/>
+          <p:nvPr/>
+        </p:nvSpPr>
+        <p:spPr>
+          <a:xfrm>
+            <a:off x="4800600" y="1874520"/>
+            <a:ext cx="1051560" cy="384048"/>
+          </a:xfrm>
+          <a:prstGeom prst="roundRect">
+            <a:avLst>
+              <a:gd name="adj" fmla="val 50000"/>
+            </a:avLst>
+          </a:prstGeom>
+          <a:solidFill>
+            <a:srgbClr val="9AA5B1"/>
+          </a:solidFill>
+          <a:ln/>
+        </p:spPr>
+      </p:sp>
+      <p:sp>
+        <p:nvSpPr>
+          <p:cNvPr id="9" name="Text 7"/>
+          <p:cNvSpPr/>
+          <p:nvPr/>
+        </p:nvSpPr>
+        <p:spPr>
+          <a:xfrm>
+            <a:off x="4800600" y="1874520"/>
+            <a:ext cx="1051560" cy="384048"/>
+          </a:xfrm>
+          <a:prstGeom prst="rect">
+            <a:avLst/>
+          </a:prstGeom>
+          <a:noFill/>
+          <a:ln/>
+        </p:spPr>
+        <p:txBody>
+          <a:bodyPr wrap="square" lIns="0" tIns="0" rIns="0" bIns="0" rtlCol="0" anchor="ctr"/>
+          <a:lstStyle/>
+          <a:p>
+            <a:pPr algn="ctr" indent="0" marL="0">
+              <a:buNone/>
+            </a:pPr>
+            <a:r>
+              <a:rPr lang="en-US" sz="1200" b="1" dirty="0">
+                <a:solidFill>
+                  <a:srgbClr val="FFFFFF"/>
+                </a:solidFill>
+                <a:latin typeface="Pretendard" pitchFamily="34" charset="0"/>
+                <a:ea typeface="Pretendard" pitchFamily="34" charset="-122"/>
+                <a:cs typeface="Pretendard" pitchFamily="34" charset="-120"/>
+              </a:rPr>
+              <a:t>부적합</a:t>
+            </a:r>
+            <a:endParaRPr lang="en-US" sz="1200" dirty="0"/>
+          </a:p>
+        </p:txBody>
+      </p:sp>
+      <p:sp>
+        <p:nvSpPr>
+          <p:cNvPr id="10" name="Text 8"/>
+          <p:cNvSpPr/>
+          <p:nvPr/>
+        </p:nvSpPr>
+        <p:spPr>
+          <a:xfrm>
+            <a:off x="914400" y="2468880"/>
+            <a:ext cx="4892040" cy="822960"/>
           </a:xfrm>
           <a:prstGeom prst="rect">
             <a:avLst/>
@@ -13624,7 +13964,7 @@
               <a:buNone/>
             </a:pPr>
             <a:r>
-              <a:rPr lang="en-US" sz="1250" dirty="0">
+              <a:rPr lang="en-US" sz="1300" dirty="0">
                 <a:solidFill>
                   <a:srgbClr val="44506A"/>
                 </a:solidFill>
@@ -13632,15 +13972,791 @@
                 <a:ea typeface="Pretendard" pitchFamily="34" charset="-122"/>
                 <a:cs typeface="Pretendard" pitchFamily="34" charset="-120"/>
               </a:rPr>
-              <a:t>Cpk ≥ 1.2로 규격 대비 여유. Cp/Cpk·USL은 대기환경보전법 환경기준(일·연평균) 기반으로 산출.</a:t>
-            </a:r>
-            <a:endParaRPr lang="en-US" sz="1250" dirty="0"/>
-          </a:p>
-        </p:txBody>
-      </p:sp>
-      <p:sp>
-        <p:nvSpPr>
-          <p:cNvPr id="14" name="Text 11"/>
+              <a:t>대기질은 강한 시계열 자기상관(PM2.5 lag-1 ACF ≈ 0.93)을 가진다.</a:t>
+            </a:r>
+            <a:endParaRPr lang="en-US" sz="1300" dirty="0"/>
+          </a:p>
+        </p:txBody>
+      </p:sp>
+      <p:sp>
+        <p:nvSpPr>
+          <p:cNvPr id="11" name="Shape 9"/>
+          <p:cNvSpPr/>
+          <p:nvPr/>
+        </p:nvSpPr>
+        <p:spPr>
+          <a:xfrm>
+            <a:off x="914400" y="3337560"/>
+            <a:ext cx="146304" cy="146304"/>
+          </a:xfrm>
+          <a:prstGeom prst="ellipse">
+            <a:avLst/>
+          </a:prstGeom>
+          <a:solidFill>
+            <a:srgbClr val="E04646"/>
+          </a:solidFill>
+          <a:ln/>
+        </p:spPr>
+      </p:sp>
+      <p:sp>
+        <p:nvSpPr>
+          <p:cNvPr id="12" name="Text 10"/>
+          <p:cNvSpPr/>
+          <p:nvPr/>
+        </p:nvSpPr>
+        <p:spPr>
+          <a:xfrm>
+            <a:off x="1188720" y="3291840"/>
+            <a:ext cx="4572000" cy="274320"/>
+          </a:xfrm>
+          <a:prstGeom prst="rect">
+            <a:avLst/>
+          </a:prstGeom>
+          <a:noFill/>
+          <a:ln/>
+        </p:spPr>
+        <p:txBody>
+          <a:bodyPr wrap="square" lIns="0" tIns="0" rIns="0" bIns="0" rtlCol="0" anchor="ctr"/>
+          <a:lstStyle/>
+          <a:p>
+            <a:pPr indent="0" marL="0">
+              <a:buNone/>
+            </a:pPr>
+            <a:r>
+              <a:rPr lang="en-US" sz="1300" b="1" dirty="0">
+                <a:solidFill>
+                  <a:srgbClr val="151B2E"/>
+                </a:solidFill>
+                <a:latin typeface="Pretendard" pitchFamily="34" charset="0"/>
+                <a:ea typeface="Pretendard" pitchFamily="34" charset="-122"/>
+                <a:cs typeface="Pretendard" pitchFamily="34" charset="-120"/>
+              </a:rPr>
+              <a:t>독립 가정 붕괴</a:t>
+            </a:r>
+            <a:endParaRPr lang="en-US" sz="1300" dirty="0"/>
+          </a:p>
+        </p:txBody>
+      </p:sp>
+      <p:sp>
+        <p:nvSpPr>
+          <p:cNvPr id="13" name="Text 11"/>
+          <p:cNvSpPr/>
+          <p:nvPr/>
+        </p:nvSpPr>
+        <p:spPr>
+          <a:xfrm>
+            <a:off x="1188720" y="3566160"/>
+            <a:ext cx="4663440" cy="411480"/>
+          </a:xfrm>
+          <a:prstGeom prst="rect">
+            <a:avLst/>
+          </a:prstGeom>
+          <a:noFill/>
+          <a:ln/>
+        </p:spPr>
+        <p:txBody>
+          <a:bodyPr wrap="square" lIns="0" tIns="0" rIns="0" bIns="0" rtlCol="0" anchor="t"/>
+          <a:lstStyle/>
+          <a:p>
+            <a:pPr indent="0" marL="0">
+              <a:buNone/>
+            </a:pPr>
+            <a:r>
+              <a:rPr lang="en-US" sz="1150" dirty="0">
+                <a:solidFill>
+                  <a:srgbClr val="44506A"/>
+                </a:solidFill>
+                <a:latin typeface="Pretendard" pitchFamily="34" charset="0"/>
+                <a:ea typeface="Pretendard" pitchFamily="34" charset="-122"/>
+                <a:cs typeface="Pretendard" pitchFamily="34" charset="-120"/>
+              </a:rPr>
+              <a:t>인접 관측치가 강하게 상관 → MR 기반 σ 과소추정</a:t>
+            </a:r>
+            <a:endParaRPr lang="en-US" sz="1150" dirty="0"/>
+          </a:p>
+        </p:txBody>
+      </p:sp>
+      <p:sp>
+        <p:nvSpPr>
+          <p:cNvPr id="14" name="Shape 12"/>
+          <p:cNvSpPr/>
+          <p:nvPr/>
+        </p:nvSpPr>
+        <p:spPr>
+          <a:xfrm>
+            <a:off x="914400" y="4114800"/>
+            <a:ext cx="146304" cy="146304"/>
+          </a:xfrm>
+          <a:prstGeom prst="ellipse">
+            <a:avLst/>
+          </a:prstGeom>
+          <a:solidFill>
+            <a:srgbClr val="E04646"/>
+          </a:solidFill>
+          <a:ln/>
+        </p:spPr>
+      </p:sp>
+      <p:sp>
+        <p:nvSpPr>
+          <p:cNvPr id="15" name="Text 13"/>
+          <p:cNvSpPr/>
+          <p:nvPr/>
+        </p:nvSpPr>
+        <p:spPr>
+          <a:xfrm>
+            <a:off x="1188720" y="4069080"/>
+            <a:ext cx="4572000" cy="274320"/>
+          </a:xfrm>
+          <a:prstGeom prst="rect">
+            <a:avLst/>
+          </a:prstGeom>
+          <a:noFill/>
+          <a:ln/>
+        </p:spPr>
+        <p:txBody>
+          <a:bodyPr wrap="square" lIns="0" tIns="0" rIns="0" bIns="0" rtlCol="0" anchor="ctr"/>
+          <a:lstStyle/>
+          <a:p>
+            <a:pPr indent="0" marL="0">
+              <a:buNone/>
+            </a:pPr>
+            <a:r>
+              <a:rPr lang="en-US" sz="1300" b="1" dirty="0">
+                <a:solidFill>
+                  <a:srgbClr val="151B2E"/>
+                </a:solidFill>
+                <a:latin typeface="Pretendard" pitchFamily="34" charset="0"/>
+                <a:ea typeface="Pretendard" pitchFamily="34" charset="-122"/>
+                <a:cs typeface="Pretendard" pitchFamily="34" charset="-120"/>
+              </a:rPr>
+              <a:t>관리한계 협소</a:t>
+            </a:r>
+            <a:endParaRPr lang="en-US" sz="1300" dirty="0"/>
+          </a:p>
+        </p:txBody>
+      </p:sp>
+      <p:sp>
+        <p:nvSpPr>
+          <p:cNvPr id="16" name="Text 14"/>
+          <p:cNvSpPr/>
+          <p:nvPr/>
+        </p:nvSpPr>
+        <p:spPr>
+          <a:xfrm>
+            <a:off x="1188720" y="4343400"/>
+            <a:ext cx="4663440" cy="411480"/>
+          </a:xfrm>
+          <a:prstGeom prst="rect">
+            <a:avLst/>
+          </a:prstGeom>
+          <a:noFill/>
+          <a:ln/>
+        </p:spPr>
+        <p:txBody>
+          <a:bodyPr wrap="square" lIns="0" tIns="0" rIns="0" bIns="0" rtlCol="0" anchor="t"/>
+          <a:lstStyle/>
+          <a:p>
+            <a:pPr indent="0" marL="0">
+              <a:buNone/>
+            </a:pPr>
+            <a:r>
+              <a:rPr lang="en-US" sz="1150" dirty="0">
+                <a:solidFill>
+                  <a:srgbClr val="44506A"/>
+                </a:solidFill>
+                <a:latin typeface="Pretendard" pitchFamily="34" charset="0"/>
+                <a:ea typeface="Pretendard" pitchFamily="34" charset="-122"/>
+                <a:cs typeface="Pretendard" pitchFamily="34" charset="-120"/>
+              </a:rPr>
+              <a:t>한계선이 좁아져 정상 변동도 이탈로 오판</a:t>
+            </a:r>
+            <a:endParaRPr lang="en-US" sz="1150" dirty="0"/>
+          </a:p>
+        </p:txBody>
+      </p:sp>
+      <p:sp>
+        <p:nvSpPr>
+          <p:cNvPr id="17" name="Shape 15"/>
+          <p:cNvSpPr/>
+          <p:nvPr/>
+        </p:nvSpPr>
+        <p:spPr>
+          <a:xfrm>
+            <a:off x="914400" y="4892040"/>
+            <a:ext cx="146304" cy="146304"/>
+          </a:xfrm>
+          <a:prstGeom prst="ellipse">
+            <a:avLst/>
+          </a:prstGeom>
+          <a:solidFill>
+            <a:srgbClr val="E04646"/>
+          </a:solidFill>
+          <a:ln/>
+        </p:spPr>
+      </p:sp>
+      <p:sp>
+        <p:nvSpPr>
+          <p:cNvPr id="18" name="Text 16"/>
+          <p:cNvSpPr/>
+          <p:nvPr/>
+        </p:nvSpPr>
+        <p:spPr>
+          <a:xfrm>
+            <a:off x="1188720" y="4846320"/>
+            <a:ext cx="4572000" cy="274320"/>
+          </a:xfrm>
+          <a:prstGeom prst="rect">
+            <a:avLst/>
+          </a:prstGeom>
+          <a:noFill/>
+          <a:ln/>
+        </p:spPr>
+        <p:txBody>
+          <a:bodyPr wrap="square" lIns="0" tIns="0" rIns="0" bIns="0" rtlCol="0" anchor="ctr"/>
+          <a:lstStyle/>
+          <a:p>
+            <a:pPr indent="0" marL="0">
+              <a:buNone/>
+            </a:pPr>
+            <a:r>
+              <a:rPr lang="en-US" sz="1300" b="1" dirty="0">
+                <a:solidFill>
+                  <a:srgbClr val="151B2E"/>
+                </a:solidFill>
+                <a:latin typeface="Pretendard" pitchFamily="34" charset="0"/>
+                <a:ea typeface="Pretendard" pitchFamily="34" charset="-122"/>
+                <a:cs typeface="Pretendard" pitchFamily="34" charset="-120"/>
+              </a:rPr>
+              <a:t>거짓경보 폭증</a:t>
+            </a:r>
+            <a:endParaRPr lang="en-US" sz="1300" dirty="0"/>
+          </a:p>
+        </p:txBody>
+      </p:sp>
+      <p:sp>
+        <p:nvSpPr>
+          <p:cNvPr id="19" name="Text 17"/>
+          <p:cNvSpPr/>
+          <p:nvPr/>
+        </p:nvSpPr>
+        <p:spPr>
+          <a:xfrm>
+            <a:off x="1188720" y="5120640"/>
+            <a:ext cx="4663440" cy="411480"/>
+          </a:xfrm>
+          <a:prstGeom prst="rect">
+            <a:avLst/>
+          </a:prstGeom>
+          <a:noFill/>
+          <a:ln/>
+        </p:spPr>
+        <p:txBody>
+          <a:bodyPr wrap="square" lIns="0" tIns="0" rIns="0" bIns="0" rtlCol="0" anchor="t"/>
+          <a:lstStyle/>
+          <a:p>
+            <a:pPr indent="0" marL="0">
+              <a:buNone/>
+            </a:pPr>
+            <a:r>
+              <a:rPr lang="en-US" sz="1150" dirty="0">
+                <a:solidFill>
+                  <a:srgbClr val="44506A"/>
+                </a:solidFill>
+                <a:latin typeface="Pretendard" pitchFamily="34" charset="0"/>
+                <a:ea typeface="Pretendard" pitchFamily="34" charset="-122"/>
+                <a:cs typeface="Pretendard" pitchFamily="34" charset="-120"/>
+              </a:rPr>
+              <a:t>실측 이탈률 46% — 특수원인 식별 불가</a:t>
+            </a:r>
+            <a:endParaRPr lang="en-US" sz="1150" dirty="0"/>
+          </a:p>
+        </p:txBody>
+      </p:sp>
+      <p:sp>
+        <p:nvSpPr>
+          <p:cNvPr id="20" name="Shape 18"/>
+          <p:cNvSpPr/>
+          <p:nvPr/>
+        </p:nvSpPr>
+        <p:spPr>
+          <a:xfrm>
+            <a:off x="6263640" y="1554480"/>
+            <a:ext cx="5440680" cy="4206240"/>
+          </a:xfrm>
+          <a:prstGeom prst="roundRect">
+            <a:avLst>
+              <a:gd name="adj" fmla="val 1739"/>
+            </a:avLst>
+          </a:prstGeom>
+          <a:solidFill>
+            <a:srgbClr val="F0F8F6"/>
+          </a:solidFill>
+          <a:ln w="12700">
+            <a:solidFill>
+              <a:srgbClr val="B9E0D8"/>
+            </a:solidFill>
+            <a:prstDash val="solid"/>
+          </a:ln>
+          <a:effectLst>
+            <a:outerShdw sx="100000" sy="100000" kx="0" ky="0" algn="bl" rotWithShape="0" blurRad="101600" dist="25400" dir="5400000">
+              <a:srgbClr val="8794B5">
+                <a:alpha val="22000"/>
+              </a:srgbClr>
+            </a:outerShdw>
+          </a:effectLst>
+        </p:spPr>
+      </p:sp>
+      <p:sp>
+        <p:nvSpPr>
+          <p:cNvPr id="21" name="Text 19"/>
+          <p:cNvSpPr/>
+          <p:nvPr/>
+        </p:nvSpPr>
+        <p:spPr>
+          <a:xfrm>
+            <a:off x="6537960" y="1828800"/>
+            <a:ext cx="3657600" cy="457200"/>
+          </a:xfrm>
+          <a:prstGeom prst="rect">
+            <a:avLst/>
+          </a:prstGeom>
+          <a:noFill/>
+          <a:ln/>
+        </p:spPr>
+        <p:txBody>
+          <a:bodyPr wrap="square" lIns="0" tIns="0" rIns="0" bIns="0" rtlCol="0" anchor="ctr"/>
+          <a:lstStyle/>
+          <a:p>
+            <a:pPr indent="0" marL="0">
+              <a:buNone/>
+            </a:pPr>
+            <a:r>
+              <a:rPr lang="en-US" sz="1800" b="1" dirty="0">
+                <a:solidFill>
+                  <a:srgbClr val="0B6B61"/>
+                </a:solidFill>
+                <a:latin typeface="Pretendard" pitchFamily="34" charset="0"/>
+                <a:ea typeface="Pretendard" pitchFamily="34" charset="-122"/>
+                <a:cs typeface="Pretendard" pitchFamily="34" charset="-120"/>
+              </a:rPr>
+              <a:t>잔차 관리도 (자기상관 보정)</a:t>
+            </a:r>
+            <a:endParaRPr lang="en-US" sz="1800" dirty="0"/>
+          </a:p>
+        </p:txBody>
+      </p:sp>
+      <p:sp>
+        <p:nvSpPr>
+          <p:cNvPr id="22" name="Shape 20"/>
+          <p:cNvSpPr/>
+          <p:nvPr/>
+        </p:nvSpPr>
+        <p:spPr>
+          <a:xfrm>
+            <a:off x="10424160" y="1874520"/>
+            <a:ext cx="1051560" cy="384048"/>
+          </a:xfrm>
+          <a:prstGeom prst="roundRect">
+            <a:avLst>
+              <a:gd name="adj" fmla="val 50000"/>
+            </a:avLst>
+          </a:prstGeom>
+          <a:solidFill>
+            <a:srgbClr val="0E9488"/>
+          </a:solidFill>
+          <a:ln/>
+        </p:spPr>
+      </p:sp>
+      <p:sp>
+        <p:nvSpPr>
+          <p:cNvPr id="23" name="Text 21"/>
+          <p:cNvSpPr/>
+          <p:nvPr/>
+        </p:nvSpPr>
+        <p:spPr>
+          <a:xfrm>
+            <a:off x="10424160" y="1874520"/>
+            <a:ext cx="1051560" cy="384048"/>
+          </a:xfrm>
+          <a:prstGeom prst="rect">
+            <a:avLst/>
+          </a:prstGeom>
+          <a:noFill/>
+          <a:ln/>
+        </p:spPr>
+        <p:txBody>
+          <a:bodyPr wrap="square" lIns="0" tIns="0" rIns="0" bIns="0" rtlCol="0" anchor="ctr"/>
+          <a:lstStyle/>
+          <a:p>
+            <a:pPr algn="ctr" indent="0" marL="0">
+              <a:buNone/>
+            </a:pPr>
+            <a:r>
+              <a:rPr lang="en-US" sz="1200" b="1" dirty="0">
+                <a:solidFill>
+                  <a:srgbClr val="FFFFFF"/>
+                </a:solidFill>
+                <a:latin typeface="Pretendard" pitchFamily="34" charset="0"/>
+                <a:ea typeface="Pretendard" pitchFamily="34" charset="-122"/>
+                <a:cs typeface="Pretendard" pitchFamily="34" charset="-120"/>
+              </a:rPr>
+              <a:t>채택</a:t>
+            </a:r>
+            <a:endParaRPr lang="en-US" sz="1200" dirty="0"/>
+          </a:p>
+        </p:txBody>
+      </p:sp>
+      <p:sp>
+        <p:nvSpPr>
+          <p:cNvPr id="24" name="Text 22"/>
+          <p:cNvSpPr/>
+          <p:nvPr/>
+        </p:nvSpPr>
+        <p:spPr>
+          <a:xfrm>
+            <a:off x="6537960" y="2468880"/>
+            <a:ext cx="4892040" cy="822960"/>
+          </a:xfrm>
+          <a:prstGeom prst="rect">
+            <a:avLst/>
+          </a:prstGeom>
+          <a:noFill/>
+          <a:ln/>
+        </p:spPr>
+        <p:txBody>
+          <a:bodyPr wrap="square" lIns="0" tIns="0" rIns="0" bIns="0" rtlCol="0" anchor="t"/>
+          <a:lstStyle/>
+          <a:p>
+            <a:pPr indent="0" marL="0">
+              <a:lnSpc>
+                <a:spcPct val="130000"/>
+              </a:lnSpc>
+              <a:buNone/>
+            </a:pPr>
+            <a:r>
+              <a:rPr lang="en-US" sz="1300" dirty="0">
+                <a:solidFill>
+                  <a:srgbClr val="44506A"/>
+                </a:solidFill>
+                <a:latin typeface="Pretendard" pitchFamily="34" charset="0"/>
+                <a:ea typeface="Pretendard" pitchFamily="34" charset="-122"/>
+                <a:cs typeface="Pretendard" pitchFamily="34" charset="-120"/>
+              </a:rPr>
+              <a:t>일주기(시간대) 효과 제거 + AR(1) 잔차에 관리도를 적용해 독립성을 회복.</a:t>
+            </a:r>
+            <a:endParaRPr lang="en-US" sz="1300" dirty="0"/>
+          </a:p>
+        </p:txBody>
+      </p:sp>
+      <p:pic>
+        <p:nvPicPr>
+          <p:cNvPr id="25" name="Image 0" descr="preencoded.png">    </p:cNvPr>
+          <p:cNvPicPr>
+            <a:picLocks noChangeAspect="1"/>
+          </p:cNvPicPr>
+          <p:nvPr/>
+        </p:nvPicPr>
+        <p:blipFill>
+          <a:blip r:embed="rId1"/>
+          <a:stretch>
+            <a:fillRect/>
+          </a:stretch>
+        </p:blipFill>
+        <p:spPr>
+          <a:xfrm>
+            <a:off x="6537960" y="3291840"/>
+            <a:ext cx="201168" cy="201168"/>
+          </a:xfrm>
+          <a:prstGeom prst="rect">
+            <a:avLst/>
+          </a:prstGeom>
+        </p:spPr>
+      </p:pic>
+      <p:sp>
+        <p:nvSpPr>
+          <p:cNvPr id="26" name="Text 23"/>
+          <p:cNvSpPr/>
+          <p:nvPr/>
+        </p:nvSpPr>
+        <p:spPr>
+          <a:xfrm>
+            <a:off x="6858000" y="3291840"/>
+            <a:ext cx="4572000" cy="274320"/>
+          </a:xfrm>
+          <a:prstGeom prst="rect">
+            <a:avLst/>
+          </a:prstGeom>
+          <a:noFill/>
+          <a:ln/>
+        </p:spPr>
+        <p:txBody>
+          <a:bodyPr wrap="square" lIns="0" tIns="0" rIns="0" bIns="0" rtlCol="0" anchor="ctr"/>
+          <a:lstStyle/>
+          <a:p>
+            <a:pPr indent="0" marL="0">
+              <a:buNone/>
+            </a:pPr>
+            <a:r>
+              <a:rPr lang="en-US" sz="1300" b="1" dirty="0">
+                <a:solidFill>
+                  <a:srgbClr val="151B2E"/>
+                </a:solidFill>
+                <a:latin typeface="Pretendard" pitchFamily="34" charset="0"/>
+                <a:ea typeface="Pretendard" pitchFamily="34" charset="-122"/>
+                <a:cs typeface="Pretendard" pitchFamily="34" charset="-120"/>
+              </a:rPr>
+              <a:t>백색화 성공</a:t>
+            </a:r>
+            <a:endParaRPr lang="en-US" sz="1300" dirty="0"/>
+          </a:p>
+        </p:txBody>
+      </p:sp>
+      <p:sp>
+        <p:nvSpPr>
+          <p:cNvPr id="27" name="Text 24"/>
+          <p:cNvSpPr/>
+          <p:nvPr/>
+        </p:nvSpPr>
+        <p:spPr>
+          <a:xfrm>
+            <a:off x="6858000" y="3566160"/>
+            <a:ext cx="4663440" cy="411480"/>
+          </a:xfrm>
+          <a:prstGeom prst="rect">
+            <a:avLst/>
+          </a:prstGeom>
+          <a:noFill/>
+          <a:ln/>
+        </p:spPr>
+        <p:txBody>
+          <a:bodyPr wrap="square" lIns="0" tIns="0" rIns="0" bIns="0" rtlCol="0" anchor="t"/>
+          <a:lstStyle/>
+          <a:p>
+            <a:pPr indent="0" marL="0">
+              <a:buNone/>
+            </a:pPr>
+            <a:r>
+              <a:rPr lang="en-US" sz="1150" dirty="0">
+                <a:solidFill>
+                  <a:srgbClr val="44506A"/>
+                </a:solidFill>
+                <a:latin typeface="Pretendard" pitchFamily="34" charset="0"/>
+                <a:ea typeface="Pretendard" pitchFamily="34" charset="-122"/>
+                <a:cs typeface="Pretendard" pitchFamily="34" charset="-120"/>
+              </a:rPr>
+              <a:t>ACF 0.93 → ≈ 0, 잔차가 독립에 근접</a:t>
+            </a:r>
+            <a:endParaRPr lang="en-US" sz="1150" dirty="0"/>
+          </a:p>
+        </p:txBody>
+      </p:sp>
+      <p:pic>
+        <p:nvPicPr>
+          <p:cNvPr id="28" name="Image 1" descr="preencoded.png">    </p:cNvPr>
+          <p:cNvPicPr>
+            <a:picLocks noChangeAspect="1"/>
+          </p:cNvPicPr>
+          <p:nvPr/>
+        </p:nvPicPr>
+        <p:blipFill>
+          <a:blip r:embed="rId2"/>
+          <a:stretch>
+            <a:fillRect/>
+          </a:stretch>
+        </p:blipFill>
+        <p:spPr>
+          <a:xfrm>
+            <a:off x="6537960" y="4069080"/>
+            <a:ext cx="201168" cy="201168"/>
+          </a:xfrm>
+          <a:prstGeom prst="rect">
+            <a:avLst/>
+          </a:prstGeom>
+        </p:spPr>
+      </p:pic>
+      <p:sp>
+        <p:nvSpPr>
+          <p:cNvPr id="29" name="Text 25"/>
+          <p:cNvSpPr/>
+          <p:nvPr/>
+        </p:nvSpPr>
+        <p:spPr>
+          <a:xfrm>
+            <a:off x="6858000" y="4069080"/>
+            <a:ext cx="4572000" cy="274320"/>
+          </a:xfrm>
+          <a:prstGeom prst="rect">
+            <a:avLst/>
+          </a:prstGeom>
+          <a:noFill/>
+          <a:ln/>
+        </p:spPr>
+        <p:txBody>
+          <a:bodyPr wrap="square" lIns="0" tIns="0" rIns="0" bIns="0" rtlCol="0" anchor="ctr"/>
+          <a:lstStyle/>
+          <a:p>
+            <a:pPr indent="0" marL="0">
+              <a:buNone/>
+            </a:pPr>
+            <a:r>
+              <a:rPr lang="en-US" sz="1300" b="1" dirty="0">
+                <a:solidFill>
+                  <a:srgbClr val="151B2E"/>
+                </a:solidFill>
+                <a:latin typeface="Pretendard" pitchFamily="34" charset="0"/>
+                <a:ea typeface="Pretendard" pitchFamily="34" charset="-122"/>
+                <a:cs typeface="Pretendard" pitchFamily="34" charset="-120"/>
+              </a:rPr>
+              <a:t>관리한계 정상화</a:t>
+            </a:r>
+            <a:endParaRPr lang="en-US" sz="1300" dirty="0"/>
+          </a:p>
+        </p:txBody>
+      </p:sp>
+      <p:sp>
+        <p:nvSpPr>
+          <p:cNvPr id="30" name="Text 26"/>
+          <p:cNvSpPr/>
+          <p:nvPr/>
+        </p:nvSpPr>
+        <p:spPr>
+          <a:xfrm>
+            <a:off x="6858000" y="4343400"/>
+            <a:ext cx="4663440" cy="411480"/>
+          </a:xfrm>
+          <a:prstGeom prst="rect">
+            <a:avLst/>
+          </a:prstGeom>
+          <a:noFill/>
+          <a:ln/>
+        </p:spPr>
+        <p:txBody>
+          <a:bodyPr wrap="square" lIns="0" tIns="0" rIns="0" bIns="0" rtlCol="0" anchor="t"/>
+          <a:lstStyle/>
+          <a:p>
+            <a:pPr indent="0" marL="0">
+              <a:buNone/>
+            </a:pPr>
+            <a:r>
+              <a:rPr lang="en-US" sz="1150" dirty="0">
+                <a:solidFill>
+                  <a:srgbClr val="44506A"/>
+                </a:solidFill>
+                <a:latin typeface="Pretendard" pitchFamily="34" charset="0"/>
+                <a:ea typeface="Pretendard" pitchFamily="34" charset="-122"/>
+                <a:cs typeface="Pretendard" pitchFamily="34" charset="-120"/>
+              </a:rPr>
+              <a:t>명목 거짓경보율(0.27%) 수준으로 복원</a:t>
+            </a:r>
+            <a:endParaRPr lang="en-US" sz="1150" dirty="0"/>
+          </a:p>
+        </p:txBody>
+      </p:sp>
+      <p:pic>
+        <p:nvPicPr>
+          <p:cNvPr id="31" name="Image 2" descr="preencoded.png">    </p:cNvPr>
+          <p:cNvPicPr>
+            <a:picLocks noChangeAspect="1"/>
+          </p:cNvPicPr>
+          <p:nvPr/>
+        </p:nvPicPr>
+        <p:blipFill>
+          <a:blip r:embed="rId3"/>
+          <a:stretch>
+            <a:fillRect/>
+          </a:stretch>
+        </p:blipFill>
+        <p:spPr>
+          <a:xfrm>
+            <a:off x="6537960" y="4846320"/>
+            <a:ext cx="201168" cy="201168"/>
+          </a:xfrm>
+          <a:prstGeom prst="rect">
+            <a:avLst/>
+          </a:prstGeom>
+        </p:spPr>
+      </p:pic>
+      <p:sp>
+        <p:nvSpPr>
+          <p:cNvPr id="32" name="Text 27"/>
+          <p:cNvSpPr/>
+          <p:nvPr/>
+        </p:nvSpPr>
+        <p:spPr>
+          <a:xfrm>
+            <a:off x="6858000" y="4846320"/>
+            <a:ext cx="4572000" cy="274320"/>
+          </a:xfrm>
+          <a:prstGeom prst="rect">
+            <a:avLst/>
+          </a:prstGeom>
+          <a:noFill/>
+          <a:ln/>
+        </p:spPr>
+        <p:txBody>
+          <a:bodyPr wrap="square" lIns="0" tIns="0" rIns="0" bIns="0" rtlCol="0" anchor="ctr"/>
+          <a:lstStyle/>
+          <a:p>
+            <a:pPr indent="0" marL="0">
+              <a:buNone/>
+            </a:pPr>
+            <a:r>
+              <a:rPr lang="en-US" sz="1300" b="1" dirty="0">
+                <a:solidFill>
+                  <a:srgbClr val="151B2E"/>
+                </a:solidFill>
+                <a:latin typeface="Pretendard" pitchFamily="34" charset="0"/>
+                <a:ea typeface="Pretendard" pitchFamily="34" charset="-122"/>
+                <a:cs typeface="Pretendard" pitchFamily="34" charset="-120"/>
+              </a:rPr>
+              <a:t>진짜 신호만 탐지</a:t>
+            </a:r>
+            <a:endParaRPr lang="en-US" sz="1300" dirty="0"/>
+          </a:p>
+        </p:txBody>
+      </p:sp>
+      <p:sp>
+        <p:nvSpPr>
+          <p:cNvPr id="33" name="Text 28"/>
+          <p:cNvSpPr/>
+          <p:nvPr/>
+        </p:nvSpPr>
+        <p:spPr>
+          <a:xfrm>
+            <a:off x="6858000" y="5120640"/>
+            <a:ext cx="4663440" cy="411480"/>
+          </a:xfrm>
+          <a:prstGeom prst="rect">
+            <a:avLst/>
+          </a:prstGeom>
+          <a:noFill/>
+          <a:ln/>
+        </p:spPr>
+        <p:txBody>
+          <a:bodyPr wrap="square" lIns="0" tIns="0" rIns="0" bIns="0" rtlCol="0" anchor="t"/>
+          <a:lstStyle/>
+          <a:p>
+            <a:pPr indent="0" marL="0">
+              <a:buNone/>
+            </a:pPr>
+            <a:r>
+              <a:rPr lang="en-US" sz="1150" dirty="0">
+                <a:solidFill>
+                  <a:srgbClr val="44506A"/>
+                </a:solidFill>
+                <a:latin typeface="Pretendard" pitchFamily="34" charset="0"/>
+                <a:ea typeface="Pretendard" pitchFamily="34" charset="-122"/>
+                <a:cs typeface="Pretendard" pitchFamily="34" charset="-120"/>
+              </a:rPr>
+              <a:t>실측 이탈률 46% → 2%, 특수원인 후보만 남김</a:t>
+            </a:r>
+            <a:endParaRPr lang="en-US" sz="1150" dirty="0"/>
+          </a:p>
+        </p:txBody>
+      </p:sp>
+      <p:sp>
+        <p:nvSpPr>
+          <p:cNvPr id="34" name="Text 29"/>
           <p:cNvSpPr/>
           <p:nvPr/>
         </p:nvSpPr>

--- a/reports/portfolio/포트폴리오_충북대기질_SPC.pptx
+++ b/reports/portfolio/포트폴리오_충북대기질_SPC.pptx
@@ -19,9 +19,10 @@
     <p:sldId id="267" r:id="rId13"/>
     <p:sldId id="268" r:id="rId14"/>
     <p:sldId id="269" r:id="rId15"/>
+    <p:sldId id="270" r:id="rId16"/>
   </p:sldIdLst>
   <p:notesMasterIdLst>
-    <p:notesMasterId r:id="rId16"/>
+    <p:notesMasterId r:id="rId17"/>
   </p:notesMasterIdLst>
   <p:sldSz cx="12188952" cy="6858000"/>
   <p:notesSz cx="6858000" cy="12188952"/>
@@ -979,6 +980,94 @@
             <a:fld id="{F7021451-1387-4CA6-816F-3879F97B5CBC}" type="slidenum">
               <a:rPr lang="en-US"/>
               <a:t>14</a:t>
+            </a:fld>
+            <a:endParaRPr lang="en-US"/>
+          </a:p>
+        </p:txBody>
+      </p:sp>
+    </p:spTree>
+    <p:extLst>
+      <p:ext uri="{BB962C8B-B14F-4D97-AF65-F5344CB8AC3E}">
+        <p14:creationId xmlns:p14="http://schemas.microsoft.com/office/powerpoint/2010/main" val="1024086991"/>
+      </p:ext>
+    </p:extLst>
+  </p:cSld>
+  <p:clrMapOvr>
+    <a:masterClrMapping/>
+  </p:clrMapOvr>
+</p:notes>
+</file>
+
+<file path=ppt/notesSlides/notesSlide15.xml><?xml version="1.0" encoding="utf-8"?>
+<p:notes xmlns:a="http://schemas.openxmlformats.org/drawingml/2006/main" xmlns:r="http://schemas.openxmlformats.org/officeDocument/2006/relationships" xmlns:p="http://schemas.openxmlformats.org/presentationml/2006/main">
+  <p:cSld>
+    <p:spTree>
+      <p:nvGrpSpPr>
+        <p:cNvPr id="1" name=""/>
+        <p:cNvGrpSpPr/>
+        <p:nvPr/>
+      </p:nvGrpSpPr>
+      <p:grpSpPr>
+        <a:xfrm>
+          <a:off x="0" y="0"/>
+          <a:ext cx="0" cy="0"/>
+          <a:chOff x="0" y="0"/>
+          <a:chExt cx="0" cy="0"/>
+        </a:xfrm>
+      </p:grpSpPr>
+      <p:sp>
+        <p:nvSpPr>
+          <p:cNvPr id="2" name="Slide Image Placeholder 1"/>
+          <p:cNvSpPr>
+            <a:spLocks noGrp="1" noRot="1" noChangeAspect="1"/>
+          </p:cNvSpPr>
+          <p:nvPr>
+            <p:ph type="sldImg"/>
+          </p:nvPr>
+        </p:nvSpPr>
+        <p:spPr/>
+      </p:sp>
+      <p:sp>
+        <p:nvSpPr>
+          <p:cNvPr id="3" name="Notes Placeholder 2"/>
+          <p:cNvSpPr>
+            <a:spLocks noGrp="1"/>
+          </p:cNvSpPr>
+          <p:nvPr>
+            <p:ph type="body" idx="1"/>
+          </p:nvPr>
+        </p:nvSpPr>
+        <p:spPr/>
+        <p:txBody>
+          <a:bodyPr/>
+          <a:lstStyle/>
+          <a:p>
+            <a:r>
+              <a:rPr lang="en-US" dirty="0"/>
+              <a:t/>
+            </a:r>
+            <a:endParaRPr lang="en-US" dirty="0"/>
+          </a:p>
+        </p:txBody>
+      </p:sp>
+      <p:sp>
+        <p:nvSpPr>
+          <p:cNvPr id="4" name="Slide Number Placeholder 3"/>
+          <p:cNvSpPr>
+            <a:spLocks noGrp="1"/>
+          </p:cNvSpPr>
+          <p:nvPr>
+            <p:ph type="sldNum" sz="quarter" idx="10"/>
+          </p:nvPr>
+        </p:nvSpPr>
+        <p:spPr/>
+        <p:txBody>
+          <a:bodyPr/>
+          <a:lstStyle/>
+          <a:p>
+            <a:fld id="{F7021451-1387-4CA6-816F-3879F97B5CBC}" type="slidenum">
+              <a:rPr lang="en-US"/>
+              <a:t>15</a:t>
             </a:fld>
             <a:endParaRPr lang="en-US"/>
           </a:p>
@@ -2144,7 +2233,7 @@
         <p:spPr>
           <a:xfrm>
             <a:off x="3749040" y="1417320"/>
-            <a:ext cx="7772400" cy="365760"/>
+            <a:ext cx="8046720" cy="365760"/>
           </a:xfrm>
           <a:prstGeom prst="rect">
             <a:avLst/>
@@ -2168,7 +2257,7 @@
                 <a:ea typeface="Pretendard" pitchFamily="34" charset="-122"/>
                 <a:cs typeface="Pretendard" pitchFamily="34" charset="-120"/>
               </a:rPr>
-              <a:t>DATA PORTFOLIO  |  QC · API 생산관리</a:t>
+              <a:t>DATA PORTFOLIO  |  품질데이터 · SPC 엔지니어 (QC · API 생산관리)</a:t>
             </a:r>
             <a:endParaRPr lang="en-US" sz="1300" dirty="0"/>
           </a:p>
@@ -2645,8 +2734,8 @@
         </p:blipFill>
         <p:spPr>
           <a:xfrm>
-            <a:off x="548640" y="2148840"/>
-            <a:ext cx="7315200" cy="3292870"/>
+            <a:off x="502920" y="2148840"/>
+            <a:ext cx="7040880" cy="3169388"/>
           </a:xfrm>
           <a:prstGeom prst="rect">
             <a:avLst/>
@@ -2662,7 +2751,7 @@
         <p:spPr>
           <a:xfrm>
             <a:off x="640080" y="5532120"/>
-            <a:ext cx="7315200" cy="320040"/>
+            <a:ext cx="7406640" cy="320040"/>
           </a:xfrm>
           <a:prstGeom prst="rect">
             <a:avLst/>
@@ -2678,7 +2767,7 @@
               <a:buNone/>
             </a:pPr>
             <a:r>
-              <a:rPr lang="en-US" sz="1100" i="1" dirty="0">
+              <a:rPr lang="en-US" sz="1050" i="1" dirty="0">
                 <a:solidFill>
                   <a:srgbClr val="8A94A6"/>
                 </a:solidFill>
@@ -2686,9 +2775,9 @@
                 <a:ea typeface="Pretendard" pitchFamily="34" charset="-122"/>
                 <a:cs typeface="Pretendard" pitchFamily="34" charset="-120"/>
               </a:rPr>
-              <a:t>USL=대기환경보전법 환경기준 · Cpk&lt;1.0=불량 위험 · Cpk≥1.33=양호</a:t>
-            </a:r>
-            <a:endParaRPr lang="en-US" sz="1100" dirty="0"/>
+              <a:t>USL=대기환경보전법 일평균 환경기준(PM2.5 35㎍/㎥ 등) · LSL=0 · Cpk&lt;1.0=불량 위험 · Cpk≥1.33=양호</a:t>
+            </a:r>
+            <a:endParaRPr lang="en-US" sz="1050" dirty="0"/>
           </a:p>
         </p:txBody>
       </p:sp>
@@ -3093,7 +3182,7 @@
                 <a:ea typeface="Pretendard" pitchFamily="34" charset="-122"/>
                 <a:cs typeface="Pretendard" pitchFamily="34" charset="-120"/>
               </a:rPr>
-              <a:t>잔차 관리도로 거짓경보 96% 감소</a:t>
+              <a:t>잔차 관리도로 거짓경보율 46% → 2% 정상화</a:t>
             </a:r>
             <a:endParaRPr lang="en-US" sz="1300" dirty="0"/>
           </a:p>
@@ -3701,9 +3790,51 @@
           </a:prstGeom>
         </p:spPr>
       </p:pic>
+      <p:sp>
+        <p:nvSpPr>
+          <p:cNvPr id="7" name="Text 4"/>
+          <p:cNvSpPr/>
+          <p:nvPr/>
+        </p:nvSpPr>
+        <p:spPr>
+          <a:xfrm>
+            <a:off x="640080" y="5806440"/>
+            <a:ext cx="6583680" cy="548640"/>
+          </a:xfrm>
+          <a:prstGeom prst="rect">
+            <a:avLst/>
+          </a:prstGeom>
+          <a:noFill/>
+          <a:ln/>
+        </p:spPr>
+        <p:txBody>
+          <a:bodyPr wrap="square" lIns="0" tIns="0" rIns="0" bIns="0" rtlCol="0" anchor="t"/>
+          <a:lstStyle/>
+          <a:p>
+            <a:pPr indent="0" marL="0">
+              <a:lnSpc>
+                <a:spcPct val="115000"/>
+              </a:lnSpc>
+              <a:buNone/>
+            </a:pPr>
+            <a:r>
+              <a:rPr lang="en-US" sz="950" i="1" dirty="0">
+                <a:solidFill>
+                  <a:srgbClr val="8A94A6"/>
+                </a:solidFill>
+                <a:latin typeface="Pretendard" pitchFamily="34" charset="0"/>
+                <a:ea typeface="Pretendard" pitchFamily="34" charset="-122"/>
+                <a:cs typeface="Pretendard" pitchFamily="34" charset="-120"/>
+              </a:rPr>
+              <a:t>※ n = PM2.5 결측 제외 측정치 수. 전체 누적 12,835건 → PM2.5 유효 12,286건 = 산단 9,895(4측정소 합산) + 거주지 2,391(1측정소).</a:t>
+            </a:r>
+            <a:endParaRPr lang="en-US" sz="950" dirty="0"/>
+          </a:p>
+        </p:txBody>
+      </p:sp>
       <p:pic>
         <p:nvPicPr>
-          <p:cNvPr id="7" name="Image 1" descr="preencoded.png">    </p:cNvPr>
+          <p:cNvPr id="8" name="Image 1" descr="preencoded.png">    </p:cNvPr>
           <p:cNvPicPr>
             <a:picLocks noChangeAspect="1"/>
           </p:cNvPicPr>
@@ -3727,7 +3858,7 @@
       </p:pic>
       <p:sp>
         <p:nvSpPr>
-          <p:cNvPr id="8" name="Text 4"/>
+          <p:cNvPr id="9" name="Text 5"/>
           <p:cNvSpPr/>
           <p:nvPr/>
         </p:nvSpPr>
@@ -3766,7 +3897,7 @@
       </p:sp>
       <p:sp>
         <p:nvSpPr>
-          <p:cNvPr id="9" name="Shape 5"/>
+          <p:cNvPr id="10" name="Shape 6"/>
           <p:cNvSpPr/>
           <p:nvPr/>
         </p:nvSpPr>
@@ -3789,7 +3920,7 @@
       </p:sp>
       <p:sp>
         <p:nvSpPr>
-          <p:cNvPr id="10" name="Text 6"/>
+          <p:cNvPr id="11" name="Text 7"/>
           <p:cNvSpPr/>
           <p:nvPr/>
         </p:nvSpPr>
@@ -3828,7 +3959,7 @@
       </p:sp>
       <p:sp>
         <p:nvSpPr>
-          <p:cNvPr id="11" name="Text 7"/>
+          <p:cNvPr id="12" name="Text 8"/>
           <p:cNvSpPr/>
           <p:nvPr/>
         </p:nvSpPr>
@@ -3870,7 +4001,7 @@
       </p:sp>
       <p:sp>
         <p:nvSpPr>
-          <p:cNvPr id="12" name="Text 8"/>
+          <p:cNvPr id="13" name="Text 9"/>
           <p:cNvSpPr/>
           <p:nvPr/>
         </p:nvSpPr>
@@ -3929,7 +4060,7 @@
       </p:sp>
       <p:sp>
         <p:nvSpPr>
-          <p:cNvPr id="13" name="Shape 9"/>
+          <p:cNvPr id="14" name="Shape 10"/>
           <p:cNvSpPr/>
           <p:nvPr/>
         </p:nvSpPr>
@@ -3951,7 +4082,7 @@
       </p:sp>
       <p:sp>
         <p:nvSpPr>
-          <p:cNvPr id="14" name="Text 10"/>
+          <p:cNvPr id="15" name="Text 11"/>
           <p:cNvSpPr/>
           <p:nvPr/>
         </p:nvSpPr>
@@ -3990,7 +4121,7 @@
       </p:sp>
       <p:sp>
         <p:nvSpPr>
-          <p:cNvPr id="15" name="Text 11"/>
+          <p:cNvPr id="16" name="Text 12"/>
           <p:cNvSpPr/>
           <p:nvPr/>
         </p:nvSpPr>
@@ -4029,7 +4160,7 @@
       </p:sp>
       <p:sp>
         <p:nvSpPr>
-          <p:cNvPr id="16" name="Text 12"/>
+          <p:cNvPr id="17" name="Text 13"/>
           <p:cNvSpPr/>
           <p:nvPr/>
         </p:nvSpPr>
@@ -5054,6 +5185,1360 @@
     <p:bg>
       <p:bgPr>
         <a:solidFill>
+          <a:srgbClr val="FFFFFF"/>
+        </a:solidFill>
+      </p:bgPr>
+    </p:bg>
+    <p:spTree>
+      <p:nvGrpSpPr>
+        <p:cNvPr id="1" name=""/>
+        <p:cNvGrpSpPr/>
+        <p:nvPr/>
+      </p:nvGrpSpPr>
+      <p:grpSpPr>
+        <a:xfrm>
+          <a:off x="0" y="0"/>
+          <a:ext cx="0" cy="0"/>
+          <a:chOff x="0" y="0"/>
+          <a:chExt cx="0" cy="0"/>
+        </a:xfrm>
+      </p:grpSpPr>
+      <p:sp>
+        <p:nvSpPr>
+          <p:cNvPr id="2" name="Shape 0"/>
+          <p:cNvSpPr/>
+          <p:nvPr/>
+        </p:nvSpPr>
+        <p:spPr>
+          <a:xfrm>
+            <a:off x="0" y="0"/>
+            <a:ext cx="146304" cy="6858000"/>
+          </a:xfrm>
+          <a:prstGeom prst="rect">
+            <a:avLst/>
+          </a:prstGeom>
+          <a:solidFill>
+            <a:srgbClr val="1F40E6"/>
+          </a:solidFill>
+          <a:ln/>
+        </p:spPr>
+      </p:sp>
+      <p:sp>
+        <p:nvSpPr>
+          <p:cNvPr id="3" name="Text 1"/>
+          <p:cNvSpPr/>
+          <p:nvPr/>
+        </p:nvSpPr>
+        <p:spPr>
+          <a:xfrm>
+            <a:off x="502920" y="274320"/>
+            <a:ext cx="10515600" cy="566928"/>
+          </a:xfrm>
+          <a:prstGeom prst="rect">
+            <a:avLst/>
+          </a:prstGeom>
+          <a:noFill/>
+          <a:ln/>
+        </p:spPr>
+        <p:txBody>
+          <a:bodyPr wrap="square" lIns="0" tIns="0" rIns="0" bIns="0" rtlCol="0" anchor="ctr"/>
+          <a:lstStyle/>
+          <a:p>
+            <a:pPr indent="0" marL="0">
+              <a:buNone/>
+            </a:pPr>
+            <a:r>
+              <a:rPr lang="en-US" sz="2700" b="1" dirty="0">
+                <a:solidFill>
+                  <a:srgbClr val="151B2E"/>
+                </a:solidFill>
+                <a:latin typeface="Pretendard" pitchFamily="34" charset="0"/>
+                <a:ea typeface="Pretendard" pitchFamily="34" charset="-122"/>
+                <a:cs typeface="Pretendard" pitchFamily="34" charset="-120"/>
+              </a:rPr>
+              <a:t>현업 전이 — GMP · 품질관리로의 확장</a:t>
+            </a:r>
+            <a:endParaRPr lang="en-US" sz="2700" dirty="0"/>
+          </a:p>
+        </p:txBody>
+      </p:sp>
+      <p:sp>
+        <p:nvSpPr>
+          <p:cNvPr id="4" name="Shape 2"/>
+          <p:cNvSpPr/>
+          <p:nvPr/>
+        </p:nvSpPr>
+        <p:spPr>
+          <a:xfrm>
+            <a:off x="530352" y="950976"/>
+            <a:ext cx="64008" cy="237744"/>
+          </a:xfrm>
+          <a:prstGeom prst="rect">
+            <a:avLst/>
+          </a:prstGeom>
+          <a:solidFill>
+            <a:srgbClr val="1F40E6"/>
+          </a:solidFill>
+          <a:ln/>
+        </p:spPr>
+      </p:sp>
+      <p:sp>
+        <p:nvSpPr>
+          <p:cNvPr id="5" name="Text 3"/>
+          <p:cNvSpPr/>
+          <p:nvPr/>
+        </p:nvSpPr>
+        <p:spPr>
+          <a:xfrm>
+            <a:off x="685800" y="914400"/>
+            <a:ext cx="10058400" cy="310896"/>
+          </a:xfrm>
+          <a:prstGeom prst="rect">
+            <a:avLst/>
+          </a:prstGeom>
+          <a:noFill/>
+          <a:ln/>
+        </p:spPr>
+        <p:txBody>
+          <a:bodyPr wrap="square" lIns="0" tIns="0" rIns="0" bIns="0" rtlCol="0" anchor="ctr"/>
+          <a:lstStyle/>
+          <a:p>
+            <a:pPr indent="0" marL="0">
+              <a:buNone/>
+            </a:pPr>
+            <a:r>
+              <a:rPr lang="en-US" sz="1300" dirty="0">
+                <a:solidFill>
+                  <a:srgbClr val="8A94A6"/>
+                </a:solidFill>
+                <a:latin typeface="Pretendard" pitchFamily="34" charset="0"/>
+                <a:ea typeface="Pretendard" pitchFamily="34" charset="-122"/>
+                <a:cs typeface="Pretendard" pitchFamily="34" charset="-120"/>
+              </a:rPr>
+              <a:t>SPC 역량이 실제 제조·품질 업무로 어떻게 이어지는가</a:t>
+            </a:r>
+            <a:endParaRPr lang="en-US" sz="1300" dirty="0"/>
+          </a:p>
+        </p:txBody>
+      </p:sp>
+      <p:sp>
+        <p:nvSpPr>
+          <p:cNvPr id="6" name="Shape 4"/>
+          <p:cNvSpPr/>
+          <p:nvPr/>
+        </p:nvSpPr>
+        <p:spPr>
+          <a:xfrm>
+            <a:off x="502920" y="1417320"/>
+            <a:ext cx="11201400" cy="566928"/>
+          </a:xfrm>
+          <a:prstGeom prst="roundRect">
+            <a:avLst>
+              <a:gd name="adj" fmla="val 9677"/>
+            </a:avLst>
+          </a:prstGeom>
+          <a:solidFill>
+            <a:srgbClr val="EEF1FB"/>
+          </a:solidFill>
+          <a:ln/>
+        </p:spPr>
+      </p:sp>
+      <p:sp>
+        <p:nvSpPr>
+          <p:cNvPr id="7" name="Shape 5"/>
+          <p:cNvSpPr/>
+          <p:nvPr/>
+        </p:nvSpPr>
+        <p:spPr>
+          <a:xfrm>
+            <a:off x="658368" y="1536192"/>
+            <a:ext cx="1874520" cy="329184"/>
+          </a:xfrm>
+          <a:prstGeom prst="roundRect">
+            <a:avLst>
+              <a:gd name="adj" fmla="val 50000"/>
+            </a:avLst>
+          </a:prstGeom>
+          <a:solidFill>
+            <a:srgbClr val="1F40E6"/>
+          </a:solidFill>
+          <a:ln/>
+        </p:spPr>
+      </p:sp>
+      <p:sp>
+        <p:nvSpPr>
+          <p:cNvPr id="8" name="Text 6"/>
+          <p:cNvSpPr/>
+          <p:nvPr/>
+        </p:nvSpPr>
+        <p:spPr>
+          <a:xfrm>
+            <a:off x="658368" y="1536192"/>
+            <a:ext cx="1874520" cy="329184"/>
+          </a:xfrm>
+          <a:prstGeom prst="rect">
+            <a:avLst/>
+          </a:prstGeom>
+          <a:noFill/>
+          <a:ln/>
+        </p:spPr>
+        <p:txBody>
+          <a:bodyPr wrap="square" lIns="0" tIns="0" rIns="0" bIns="0" rtlCol="0" anchor="ctr"/>
+          <a:lstStyle/>
+          <a:p>
+            <a:pPr algn="ctr" indent="0" marL="0">
+              <a:buNone/>
+            </a:pPr>
+            <a:r>
+              <a:rPr lang="en-US" sz="1100" b="1" dirty="0">
+                <a:solidFill>
+                  <a:srgbClr val="FFFFFF"/>
+                </a:solidFill>
+                <a:latin typeface="Pretendard" pitchFamily="34" charset="0"/>
+                <a:ea typeface="Pretendard" pitchFamily="34" charset="-122"/>
+                <a:cs typeface="Pretendard" pitchFamily="34" charset="-120"/>
+              </a:rPr>
+              <a:t>Governing Message</a:t>
+            </a:r>
+            <a:endParaRPr lang="en-US" sz="1100" dirty="0"/>
+          </a:p>
+        </p:txBody>
+      </p:sp>
+      <p:sp>
+        <p:nvSpPr>
+          <p:cNvPr id="9" name="Text 7"/>
+          <p:cNvSpPr/>
+          <p:nvPr/>
+        </p:nvSpPr>
+        <p:spPr>
+          <a:xfrm>
+            <a:off x="2697480" y="1417320"/>
+            <a:ext cx="8869680" cy="566928"/>
+          </a:xfrm>
+          <a:prstGeom prst="rect">
+            <a:avLst/>
+          </a:prstGeom>
+          <a:noFill/>
+          <a:ln/>
+        </p:spPr>
+        <p:txBody>
+          <a:bodyPr wrap="square" lIns="0" tIns="0" rIns="0" bIns="0" rtlCol="0" anchor="ctr"/>
+          <a:lstStyle/>
+          <a:p>
+            <a:pPr indent="0" marL="0">
+              <a:buNone/>
+            </a:pPr>
+            <a:r>
+              <a:rPr lang="en-US" sz="1350" b="1" dirty="0">
+                <a:solidFill>
+                  <a:srgbClr val="151B2E"/>
+                </a:solidFill>
+                <a:latin typeface="Pretendard" pitchFamily="34" charset="0"/>
+                <a:ea typeface="Pretendard" pitchFamily="34" charset="-122"/>
+                <a:cs typeface="Pretendard" pitchFamily="34" charset="-120"/>
+              </a:rPr>
+              <a:t>대기질로 검증한 SPC·통계·자동화 역량은 GMP 환경의 공정능력·일탈관리·밸리데이션으로 그대로 전이된다</a:t>
+            </a:r>
+            <a:endParaRPr lang="en-US" sz="1350" dirty="0"/>
+          </a:p>
+        </p:txBody>
+      </p:sp>
+      <p:graphicFrame>
+        <p:nvGraphicFramePr>
+          <p:cNvPr id="15" name="Table 0"/>
+          <p:cNvGraphicFramePr>
+            <a:graphicFrameLocks noGrp="1"/>
+          </p:cNvGraphicFramePr>
+          <p:nvPr>
+            <p:extLst>
+              <p:ext uri="{D42A27DB-BD31-4B8C-83A1-F6EECF244321}">
+                <p14:modId xmlns:p14="http://schemas.microsoft.com/office/powerpoint/2010/main" val="1579011935"/>
+              </p:ext>
+            </p:extLst>
+          </p:nvPr>
+        </p:nvGraphicFramePr>
+        <p:xfrm>
+          <a:off x="640080" y="2194560"/>
+          <a:ext cx="10927080" cy="914400"/>
+        </p:xfrm>
+        <a:graphic>
+          <a:graphicData uri="http://schemas.openxmlformats.org/drawingml/2006/table">
+            <a:tbl>
+              <a:tblPr/>
+              <a:tblGrid>
+                <a:gridCol w="3977640"/>
+                <a:gridCol w="6949440"/>
+              </a:tblGrid>
+              <a:tr h="438912">
+                <a:tc>
+                  <a:txBody>
+                    <a:bodyPr/>
+                    <a:lstStyle/>
+                    <a:p>
+                      <a:pPr algn="ctr" indent="0" marL="0">
+                        <a:buNone/>
+                      </a:pPr>
+                      <a:r>
+                        <a:rPr lang="en-US" sz="1200" b="1" dirty="0">
+                          <a:solidFill>
+                            <a:srgbClr val="FFFFFF"/>
+                          </a:solidFill>
+                          <a:latin typeface="Pretendard" pitchFamily="34" charset="0"/>
+                          <a:ea typeface="Pretendard" pitchFamily="34" charset="-122"/>
+                          <a:cs typeface="Pretendard" pitchFamily="34" charset="-120"/>
+                        </a:rPr>
+                        <a:t>본 프로젝트에서 구현</a:t>
+                      </a:r>
+                      <a:endParaRPr lang="en-US" sz="1200" dirty="0">
+                        <a:latin typeface="Pretendard" charset="0"/>
+                        <a:ea typeface="Pretendard" charset="0"/>
+                        <a:cs typeface="Pretendard" charset="0"/>
+                      </a:endParaRPr>
+                    </a:p>
+                  </a:txBody>
+                  <a:tcPr marL="91440" marR="91440" marT="45720" marB="45720" anchor="ctr">
+                    <a:lnL w="12700" cap="flat" cmpd="sng" algn="ctr">
+                      <a:solidFill>
+                        <a:srgbClr val="DCE3F2"/>
+                      </a:solidFill>
+                      <a:prstDash val="solid"/>
+                      <a:round/>
+                      <a:headEnd type="none" w="med" len="med"/>
+                      <a:tailEnd type="none" w="med" len="med"/>
+                    </a:lnL>
+                    <a:lnR w="12700" cap="flat" cmpd="sng" algn="ctr">
+                      <a:solidFill>
+                        <a:srgbClr val="DCE3F2"/>
+                      </a:solidFill>
+                      <a:prstDash val="solid"/>
+                      <a:round/>
+                      <a:headEnd type="none" w="med" len="med"/>
+                      <a:tailEnd type="none" w="med" len="med"/>
+                    </a:lnR>
+                    <a:lnT w="12700" cap="flat" cmpd="sng" algn="ctr">
+                      <a:solidFill>
+                        <a:srgbClr val="DCE3F2"/>
+                      </a:solidFill>
+                      <a:prstDash val="solid"/>
+                      <a:round/>
+                      <a:headEnd type="none" w="med" len="med"/>
+                      <a:tailEnd type="none" w="med" len="med"/>
+                    </a:lnT>
+                    <a:lnB w="12700" cap="flat" cmpd="sng" algn="ctr">
+                      <a:solidFill>
+                        <a:srgbClr val="DCE3F2"/>
+                      </a:solidFill>
+                      <a:prstDash val="solid"/>
+                      <a:round/>
+                      <a:headEnd type="none" w="med" len="med"/>
+                      <a:tailEnd type="none" w="med" len="med"/>
+                    </a:lnB>
+                    <a:solidFill>
+                      <a:srgbClr val="1F40E6"/>
+                    </a:solidFill>
+                  </a:tcPr>
+                </a:tc>
+                <a:tc>
+                  <a:txBody>
+                    <a:bodyPr/>
+                    <a:lstStyle/>
+                    <a:p>
+                      <a:pPr algn="ctr" indent="0" marL="0">
+                        <a:buNone/>
+                      </a:pPr>
+                      <a:r>
+                        <a:rPr lang="en-US" sz="1200" b="1" dirty="0">
+                          <a:solidFill>
+                            <a:srgbClr val="FFFFFF"/>
+                          </a:solidFill>
+                          <a:latin typeface="Pretendard" pitchFamily="34" charset="0"/>
+                          <a:ea typeface="Pretendard" pitchFamily="34" charset="-122"/>
+                          <a:cs typeface="Pretendard" pitchFamily="34" charset="-120"/>
+                        </a:rPr>
+                        <a:t>GMP · 품질관리 현업 적용</a:t>
+                      </a:r>
+                      <a:endParaRPr lang="en-US" sz="1200" dirty="0">
+                        <a:latin typeface="Pretendard" charset="0"/>
+                        <a:ea typeface="Pretendard" charset="0"/>
+                        <a:cs typeface="Pretendard" charset="0"/>
+                      </a:endParaRPr>
+                    </a:p>
+                  </a:txBody>
+                  <a:tcPr marL="91440" marR="91440" marT="45720" marB="45720" anchor="ctr">
+                    <a:lnL w="12700" cap="flat" cmpd="sng" algn="ctr">
+                      <a:solidFill>
+                        <a:srgbClr val="DCE3F2"/>
+                      </a:solidFill>
+                      <a:prstDash val="solid"/>
+                      <a:round/>
+                      <a:headEnd type="none" w="med" len="med"/>
+                      <a:tailEnd type="none" w="med" len="med"/>
+                    </a:lnL>
+                    <a:lnR w="12700" cap="flat" cmpd="sng" algn="ctr">
+                      <a:solidFill>
+                        <a:srgbClr val="DCE3F2"/>
+                      </a:solidFill>
+                      <a:prstDash val="solid"/>
+                      <a:round/>
+                      <a:headEnd type="none" w="med" len="med"/>
+                      <a:tailEnd type="none" w="med" len="med"/>
+                    </a:lnR>
+                    <a:lnT w="12700" cap="flat" cmpd="sng" algn="ctr">
+                      <a:solidFill>
+                        <a:srgbClr val="DCE3F2"/>
+                      </a:solidFill>
+                      <a:prstDash val="solid"/>
+                      <a:round/>
+                      <a:headEnd type="none" w="med" len="med"/>
+                      <a:tailEnd type="none" w="med" len="med"/>
+                    </a:lnT>
+                    <a:lnB w="12700" cap="flat" cmpd="sng" algn="ctr">
+                      <a:solidFill>
+                        <a:srgbClr val="DCE3F2"/>
+                      </a:solidFill>
+                      <a:prstDash val="solid"/>
+                      <a:round/>
+                      <a:headEnd type="none" w="med" len="med"/>
+                      <a:tailEnd type="none" w="med" len="med"/>
+                    </a:lnB>
+                    <a:solidFill>
+                      <a:srgbClr val="1F40E6"/>
+                    </a:solidFill>
+                  </a:tcPr>
+                </a:tc>
+              </a:tr>
+              <a:tr h="512064">
+                <a:tc>
+                  <a:txBody>
+                    <a:bodyPr/>
+                    <a:lstStyle/>
+                    <a:p>
+                      <a:pPr algn="l" indent="0" marL="0">
+                        <a:buNone/>
+                      </a:pPr>
+                      <a:r>
+                        <a:rPr lang="en-US" sz="1200" dirty="0">
+                          <a:solidFill>
+                            <a:srgbClr val="151B2E"/>
+                          </a:solidFill>
+                          <a:latin typeface="Pretendard" pitchFamily="34" charset="0"/>
+                          <a:ea typeface="Pretendard" pitchFamily="34" charset="-122"/>
+                          <a:cs typeface="Pretendard" pitchFamily="34" charset="-120"/>
+                        </a:rPr>
+                        <a:t>Cp / Cpk 공정능력 산출</a:t>
+                      </a:r>
+                      <a:endParaRPr lang="en-US" sz="1200" dirty="0">
+                        <a:latin typeface="Pretendard" charset="0"/>
+                        <a:ea typeface="Pretendard" charset="0"/>
+                        <a:cs typeface="Pretendard" charset="0"/>
+                      </a:endParaRPr>
+                    </a:p>
+                  </a:txBody>
+                  <a:tcPr marL="91440" marR="91440" marT="45720" marB="45720" anchor="ctr">
+                    <a:lnL w="12700" cap="flat" cmpd="sng" algn="ctr">
+                      <a:solidFill>
+                        <a:srgbClr val="DCE3F2"/>
+                      </a:solidFill>
+                      <a:prstDash val="solid"/>
+                      <a:round/>
+                      <a:headEnd type="none" w="med" len="med"/>
+                      <a:tailEnd type="none" w="med" len="med"/>
+                    </a:lnL>
+                    <a:lnR w="12700" cap="flat" cmpd="sng" algn="ctr">
+                      <a:solidFill>
+                        <a:srgbClr val="DCE3F2"/>
+                      </a:solidFill>
+                      <a:prstDash val="solid"/>
+                      <a:round/>
+                      <a:headEnd type="none" w="med" len="med"/>
+                      <a:tailEnd type="none" w="med" len="med"/>
+                    </a:lnR>
+                    <a:lnT w="12700" cap="flat" cmpd="sng" algn="ctr">
+                      <a:solidFill>
+                        <a:srgbClr val="DCE3F2"/>
+                      </a:solidFill>
+                      <a:prstDash val="solid"/>
+                      <a:round/>
+                      <a:headEnd type="none" w="med" len="med"/>
+                      <a:tailEnd type="none" w="med" len="med"/>
+                    </a:lnT>
+                    <a:lnB w="12700" cap="flat" cmpd="sng" algn="ctr">
+                      <a:solidFill>
+                        <a:srgbClr val="DCE3F2"/>
+                      </a:solidFill>
+                      <a:prstDash val="solid"/>
+                      <a:round/>
+                      <a:headEnd type="none" w="med" len="med"/>
+                      <a:tailEnd type="none" w="med" len="med"/>
+                    </a:lnB>
+                  </a:tcPr>
+                </a:tc>
+                <a:tc>
+                  <a:txBody>
+                    <a:bodyPr/>
+                    <a:lstStyle/>
+                    <a:p>
+                      <a:pPr algn="l" indent="0" marL="0">
+                        <a:buNone/>
+                      </a:pPr>
+                      <a:r>
+                        <a:rPr lang="en-US" sz="1200" dirty="0">
+                          <a:solidFill>
+                            <a:srgbClr val="151B2E"/>
+                          </a:solidFill>
+                          <a:latin typeface="Pretendard" pitchFamily="34" charset="0"/>
+                          <a:ea typeface="Pretendard" pitchFamily="34" charset="-122"/>
+                          <a:cs typeface="Pretendard" pitchFamily="34" charset="-120"/>
+                        </a:rPr>
+                        <a:t>공정밸리데이션(PPQ) 공정능력 평가 · 규격(spec) 대비 여유 판정</a:t>
+                      </a:r>
+                      <a:endParaRPr lang="en-US" sz="1200" dirty="0">
+                        <a:latin typeface="Pretendard" charset="0"/>
+                        <a:ea typeface="Pretendard" charset="0"/>
+                        <a:cs typeface="Pretendard" charset="0"/>
+                      </a:endParaRPr>
+                    </a:p>
+                  </a:txBody>
+                  <a:tcPr marL="91440" marR="91440" marT="45720" marB="45720" anchor="ctr">
+                    <a:lnL w="12700" cap="flat" cmpd="sng" algn="ctr">
+                      <a:solidFill>
+                        <a:srgbClr val="DCE3F2"/>
+                      </a:solidFill>
+                      <a:prstDash val="solid"/>
+                      <a:round/>
+                      <a:headEnd type="none" w="med" len="med"/>
+                      <a:tailEnd type="none" w="med" len="med"/>
+                    </a:lnL>
+                    <a:lnR w="12700" cap="flat" cmpd="sng" algn="ctr">
+                      <a:solidFill>
+                        <a:srgbClr val="DCE3F2"/>
+                      </a:solidFill>
+                      <a:prstDash val="solid"/>
+                      <a:round/>
+                      <a:headEnd type="none" w="med" len="med"/>
+                      <a:tailEnd type="none" w="med" len="med"/>
+                    </a:lnR>
+                    <a:lnT w="12700" cap="flat" cmpd="sng" algn="ctr">
+                      <a:solidFill>
+                        <a:srgbClr val="DCE3F2"/>
+                      </a:solidFill>
+                      <a:prstDash val="solid"/>
+                      <a:round/>
+                      <a:headEnd type="none" w="med" len="med"/>
+                      <a:tailEnd type="none" w="med" len="med"/>
+                    </a:lnT>
+                    <a:lnB w="12700" cap="flat" cmpd="sng" algn="ctr">
+                      <a:solidFill>
+                        <a:srgbClr val="DCE3F2"/>
+                      </a:solidFill>
+                      <a:prstDash val="solid"/>
+                      <a:round/>
+                      <a:headEnd type="none" w="med" len="med"/>
+                      <a:tailEnd type="none" w="med" len="med"/>
+                    </a:lnB>
+                  </a:tcPr>
+                </a:tc>
+              </a:tr>
+              <a:tr h="512064">
+                <a:tc>
+                  <a:txBody>
+                    <a:bodyPr/>
+                    <a:lstStyle/>
+                    <a:p>
+                      <a:pPr algn="l" indent="0" marL="0">
+                        <a:buNone/>
+                      </a:pPr>
+                      <a:r>
+                        <a:rPr lang="en-US" sz="1200" dirty="0">
+                          <a:solidFill>
+                            <a:srgbClr val="151B2E"/>
+                          </a:solidFill>
+                          <a:latin typeface="Pretendard" pitchFamily="34" charset="0"/>
+                          <a:ea typeface="Pretendard" pitchFamily="34" charset="-122"/>
+                          <a:cs typeface="Pretendard" pitchFamily="34" charset="-120"/>
+                        </a:rPr>
+                        <a:t>관리도 + Western Electric Rules</a:t>
+                      </a:r>
+                      <a:endParaRPr lang="en-US" sz="1200" dirty="0">
+                        <a:latin typeface="Pretendard" charset="0"/>
+                        <a:ea typeface="Pretendard" charset="0"/>
+                        <a:cs typeface="Pretendard" charset="0"/>
+                      </a:endParaRPr>
+                    </a:p>
+                  </a:txBody>
+                  <a:tcPr marL="91440" marR="91440" marT="45720" marB="45720" anchor="ctr">
+                    <a:lnL w="12700" cap="flat" cmpd="sng" algn="ctr">
+                      <a:solidFill>
+                        <a:srgbClr val="DCE3F2"/>
+                      </a:solidFill>
+                      <a:prstDash val="solid"/>
+                      <a:round/>
+                      <a:headEnd type="none" w="med" len="med"/>
+                      <a:tailEnd type="none" w="med" len="med"/>
+                    </a:lnL>
+                    <a:lnR w="12700" cap="flat" cmpd="sng" algn="ctr">
+                      <a:solidFill>
+                        <a:srgbClr val="DCE3F2"/>
+                      </a:solidFill>
+                      <a:prstDash val="solid"/>
+                      <a:round/>
+                      <a:headEnd type="none" w="med" len="med"/>
+                      <a:tailEnd type="none" w="med" len="med"/>
+                    </a:lnR>
+                    <a:lnT w="12700" cap="flat" cmpd="sng" algn="ctr">
+                      <a:solidFill>
+                        <a:srgbClr val="DCE3F2"/>
+                      </a:solidFill>
+                      <a:prstDash val="solid"/>
+                      <a:round/>
+                      <a:headEnd type="none" w="med" len="med"/>
+                      <a:tailEnd type="none" w="med" len="med"/>
+                    </a:lnT>
+                    <a:lnB w="12700" cap="flat" cmpd="sng" algn="ctr">
+                      <a:solidFill>
+                        <a:srgbClr val="DCE3F2"/>
+                      </a:solidFill>
+                      <a:prstDash val="solid"/>
+                      <a:round/>
+                      <a:headEnd type="none" w="med" len="med"/>
+                      <a:tailEnd type="none" w="med" len="med"/>
+                    </a:lnB>
+                  </a:tcPr>
+                </a:tc>
+                <a:tc>
+                  <a:txBody>
+                    <a:bodyPr/>
+                    <a:lstStyle/>
+                    <a:p>
+                      <a:pPr algn="l" indent="0" marL="0">
+                        <a:buNone/>
+                      </a:pPr>
+                      <a:r>
+                        <a:rPr lang="en-US" sz="1200" dirty="0">
+                          <a:solidFill>
+                            <a:srgbClr val="151B2E"/>
+                          </a:solidFill>
+                          <a:latin typeface="Pretendard" pitchFamily="34" charset="0"/>
+                          <a:ea typeface="Pretendard" pitchFamily="34" charset="-122"/>
+                          <a:cs typeface="Pretendard" pitchFamily="34" charset="-120"/>
+                        </a:rPr>
+                        <a:t>공정 모니터링 · 일탈(deviation)·OOT 조기 탐지 · CAPA 연계</a:t>
+                      </a:r>
+                      <a:endParaRPr lang="en-US" sz="1200" dirty="0">
+                        <a:latin typeface="Pretendard" charset="0"/>
+                        <a:ea typeface="Pretendard" charset="0"/>
+                        <a:cs typeface="Pretendard" charset="0"/>
+                      </a:endParaRPr>
+                    </a:p>
+                  </a:txBody>
+                  <a:tcPr marL="91440" marR="91440" marT="45720" marB="45720" anchor="ctr">
+                    <a:lnL w="12700" cap="flat" cmpd="sng" algn="ctr">
+                      <a:solidFill>
+                        <a:srgbClr val="DCE3F2"/>
+                      </a:solidFill>
+                      <a:prstDash val="solid"/>
+                      <a:round/>
+                      <a:headEnd type="none" w="med" len="med"/>
+                      <a:tailEnd type="none" w="med" len="med"/>
+                    </a:lnL>
+                    <a:lnR w="12700" cap="flat" cmpd="sng" algn="ctr">
+                      <a:solidFill>
+                        <a:srgbClr val="DCE3F2"/>
+                      </a:solidFill>
+                      <a:prstDash val="solid"/>
+                      <a:round/>
+                      <a:headEnd type="none" w="med" len="med"/>
+                      <a:tailEnd type="none" w="med" len="med"/>
+                    </a:lnR>
+                    <a:lnT w="12700" cap="flat" cmpd="sng" algn="ctr">
+                      <a:solidFill>
+                        <a:srgbClr val="DCE3F2"/>
+                      </a:solidFill>
+                      <a:prstDash val="solid"/>
+                      <a:round/>
+                      <a:headEnd type="none" w="med" len="med"/>
+                      <a:tailEnd type="none" w="med" len="med"/>
+                    </a:lnT>
+                    <a:lnB w="12700" cap="flat" cmpd="sng" algn="ctr">
+                      <a:solidFill>
+                        <a:srgbClr val="DCE3F2"/>
+                      </a:solidFill>
+                      <a:prstDash val="solid"/>
+                      <a:round/>
+                      <a:headEnd type="none" w="med" len="med"/>
+                      <a:tailEnd type="none" w="med" len="med"/>
+                    </a:lnB>
+                  </a:tcPr>
+                </a:tc>
+              </a:tr>
+              <a:tr h="512064">
+                <a:tc>
+                  <a:txBody>
+                    <a:bodyPr/>
+                    <a:lstStyle/>
+                    <a:p>
+                      <a:pPr algn="l" indent="0" marL="0">
+                        <a:buNone/>
+                      </a:pPr>
+                      <a:r>
+                        <a:rPr lang="en-US" sz="1200" dirty="0">
+                          <a:solidFill>
+                            <a:srgbClr val="151B2E"/>
+                          </a:solidFill>
+                          <a:latin typeface="Pretendard" pitchFamily="34" charset="0"/>
+                          <a:ea typeface="Pretendard" pitchFamily="34" charset="-122"/>
+                          <a:cs typeface="Pretendard" pitchFamily="34" charset="-120"/>
+                        </a:rPr>
+                        <a:t>자기상관 보정 잔차 관리도</a:t>
+                      </a:r>
+                      <a:endParaRPr lang="en-US" sz="1200" dirty="0">
+                        <a:latin typeface="Pretendard" charset="0"/>
+                        <a:ea typeface="Pretendard" charset="0"/>
+                        <a:cs typeface="Pretendard" charset="0"/>
+                      </a:endParaRPr>
+                    </a:p>
+                  </a:txBody>
+                  <a:tcPr marL="91440" marR="91440" marT="45720" marB="45720" anchor="ctr">
+                    <a:lnL w="12700" cap="flat" cmpd="sng" algn="ctr">
+                      <a:solidFill>
+                        <a:srgbClr val="DCE3F2"/>
+                      </a:solidFill>
+                      <a:prstDash val="solid"/>
+                      <a:round/>
+                      <a:headEnd type="none" w="med" len="med"/>
+                      <a:tailEnd type="none" w="med" len="med"/>
+                    </a:lnL>
+                    <a:lnR w="12700" cap="flat" cmpd="sng" algn="ctr">
+                      <a:solidFill>
+                        <a:srgbClr val="DCE3F2"/>
+                      </a:solidFill>
+                      <a:prstDash val="solid"/>
+                      <a:round/>
+                      <a:headEnd type="none" w="med" len="med"/>
+                      <a:tailEnd type="none" w="med" len="med"/>
+                    </a:lnR>
+                    <a:lnT w="12700" cap="flat" cmpd="sng" algn="ctr">
+                      <a:solidFill>
+                        <a:srgbClr val="DCE3F2"/>
+                      </a:solidFill>
+                      <a:prstDash val="solid"/>
+                      <a:round/>
+                      <a:headEnd type="none" w="med" len="med"/>
+                      <a:tailEnd type="none" w="med" len="med"/>
+                    </a:lnT>
+                    <a:lnB w="12700" cap="flat" cmpd="sng" algn="ctr">
+                      <a:solidFill>
+                        <a:srgbClr val="DCE3F2"/>
+                      </a:solidFill>
+                      <a:prstDash val="solid"/>
+                      <a:round/>
+                      <a:headEnd type="none" w="med" len="med"/>
+                      <a:tailEnd type="none" w="med" len="med"/>
+                    </a:lnB>
+                  </a:tcPr>
+                </a:tc>
+                <a:tc>
+                  <a:txBody>
+                    <a:bodyPr/>
+                    <a:lstStyle/>
+                    <a:p>
+                      <a:pPr algn="l" indent="0" marL="0">
+                        <a:buNone/>
+                      </a:pPr>
+                      <a:r>
+                        <a:rPr lang="en-US" sz="1200" dirty="0">
+                          <a:solidFill>
+                            <a:srgbClr val="151B2E"/>
+                          </a:solidFill>
+                          <a:latin typeface="Pretendard" pitchFamily="34" charset="0"/>
+                          <a:ea typeface="Pretendard" pitchFamily="34" charset="-122"/>
+                          <a:cs typeface="Pretendard" pitchFamily="34" charset="-120"/>
+                        </a:rPr>
+                        <a:t>자기상관 있는 연속공정 변수의 올바른 관리한계 설정 (거짓경보 억제)</a:t>
+                      </a:r>
+                      <a:endParaRPr lang="en-US" sz="1200" dirty="0">
+                        <a:latin typeface="Pretendard" charset="0"/>
+                        <a:ea typeface="Pretendard" charset="0"/>
+                        <a:cs typeface="Pretendard" charset="0"/>
+                      </a:endParaRPr>
+                    </a:p>
+                  </a:txBody>
+                  <a:tcPr marL="91440" marR="91440" marT="45720" marB="45720" anchor="ctr">
+                    <a:lnL w="12700" cap="flat" cmpd="sng" algn="ctr">
+                      <a:solidFill>
+                        <a:srgbClr val="DCE3F2"/>
+                      </a:solidFill>
+                      <a:prstDash val="solid"/>
+                      <a:round/>
+                      <a:headEnd type="none" w="med" len="med"/>
+                      <a:tailEnd type="none" w="med" len="med"/>
+                    </a:lnL>
+                    <a:lnR w="12700" cap="flat" cmpd="sng" algn="ctr">
+                      <a:solidFill>
+                        <a:srgbClr val="DCE3F2"/>
+                      </a:solidFill>
+                      <a:prstDash val="solid"/>
+                      <a:round/>
+                      <a:headEnd type="none" w="med" len="med"/>
+                      <a:tailEnd type="none" w="med" len="med"/>
+                    </a:lnR>
+                    <a:lnT w="12700" cap="flat" cmpd="sng" algn="ctr">
+                      <a:solidFill>
+                        <a:srgbClr val="DCE3F2"/>
+                      </a:solidFill>
+                      <a:prstDash val="solid"/>
+                      <a:round/>
+                      <a:headEnd type="none" w="med" len="med"/>
+                      <a:tailEnd type="none" w="med" len="med"/>
+                    </a:lnT>
+                    <a:lnB w="12700" cap="flat" cmpd="sng" algn="ctr">
+                      <a:solidFill>
+                        <a:srgbClr val="DCE3F2"/>
+                      </a:solidFill>
+                      <a:prstDash val="solid"/>
+                      <a:round/>
+                      <a:headEnd type="none" w="med" len="med"/>
+                      <a:tailEnd type="none" w="med" len="med"/>
+                    </a:lnB>
+                  </a:tcPr>
+                </a:tc>
+              </a:tr>
+              <a:tr h="512064">
+                <a:tc>
+                  <a:txBody>
+                    <a:bodyPr/>
+                    <a:lstStyle/>
+                    <a:p>
+                      <a:pPr algn="l" indent="0" marL="0">
+                        <a:buNone/>
+                      </a:pPr>
+                      <a:r>
+                        <a:rPr lang="en-US" sz="1200" dirty="0">
+                          <a:solidFill>
+                            <a:srgbClr val="151B2E"/>
+                          </a:solidFill>
+                          <a:latin typeface="Pretendard" pitchFamily="34" charset="0"/>
+                          <a:ea typeface="Pretendard" pitchFamily="34" charset="-122"/>
+                          <a:cs typeface="Pretendard" pitchFamily="34" charset="-120"/>
+                        </a:rPr>
+                        <a:t>Welch t-test · ANOVA</a:t>
+                      </a:r>
+                      <a:endParaRPr lang="en-US" sz="1200" dirty="0">
+                        <a:latin typeface="Pretendard" charset="0"/>
+                        <a:ea typeface="Pretendard" charset="0"/>
+                        <a:cs typeface="Pretendard" charset="0"/>
+                      </a:endParaRPr>
+                    </a:p>
+                  </a:txBody>
+                  <a:tcPr marL="91440" marR="91440" marT="45720" marB="45720" anchor="ctr">
+                    <a:lnL w="12700" cap="flat" cmpd="sng" algn="ctr">
+                      <a:solidFill>
+                        <a:srgbClr val="DCE3F2"/>
+                      </a:solidFill>
+                      <a:prstDash val="solid"/>
+                      <a:round/>
+                      <a:headEnd type="none" w="med" len="med"/>
+                      <a:tailEnd type="none" w="med" len="med"/>
+                    </a:lnL>
+                    <a:lnR w="12700" cap="flat" cmpd="sng" algn="ctr">
+                      <a:solidFill>
+                        <a:srgbClr val="DCE3F2"/>
+                      </a:solidFill>
+                      <a:prstDash val="solid"/>
+                      <a:round/>
+                      <a:headEnd type="none" w="med" len="med"/>
+                      <a:tailEnd type="none" w="med" len="med"/>
+                    </a:lnR>
+                    <a:lnT w="12700" cap="flat" cmpd="sng" algn="ctr">
+                      <a:solidFill>
+                        <a:srgbClr val="DCE3F2"/>
+                      </a:solidFill>
+                      <a:prstDash val="solid"/>
+                      <a:round/>
+                      <a:headEnd type="none" w="med" len="med"/>
+                      <a:tailEnd type="none" w="med" len="med"/>
+                    </a:lnT>
+                    <a:lnB w="12700" cap="flat" cmpd="sng" algn="ctr">
+                      <a:solidFill>
+                        <a:srgbClr val="DCE3F2"/>
+                      </a:solidFill>
+                      <a:prstDash val="solid"/>
+                      <a:round/>
+                      <a:headEnd type="none" w="med" len="med"/>
+                      <a:tailEnd type="none" w="med" len="med"/>
+                    </a:lnB>
+                  </a:tcPr>
+                </a:tc>
+                <a:tc>
+                  <a:txBody>
+                    <a:bodyPr/>
+                    <a:lstStyle/>
+                    <a:p>
+                      <a:pPr algn="l" indent="0" marL="0">
+                        <a:buNone/>
+                      </a:pPr>
+                      <a:r>
+                        <a:rPr lang="en-US" sz="1200" dirty="0">
+                          <a:solidFill>
+                            <a:srgbClr val="151B2E"/>
+                          </a:solidFill>
+                          <a:latin typeface="Pretendard" pitchFamily="34" charset="0"/>
+                          <a:ea typeface="Pretendard" pitchFamily="34" charset="-122"/>
+                          <a:cs typeface="Pretendard" pitchFamily="34" charset="-120"/>
+                        </a:rPr>
+                        <a:t>배치 간·라인 간 비교 · 동등성은 TOST로 확장(p·Cohen’s d 산출 완료, 임계 ±δ만 추가)</a:t>
+                      </a:r>
+                      <a:endParaRPr lang="en-US" sz="1200" dirty="0">
+                        <a:latin typeface="Pretendard" charset="0"/>
+                        <a:ea typeface="Pretendard" charset="0"/>
+                        <a:cs typeface="Pretendard" charset="0"/>
+                      </a:endParaRPr>
+                    </a:p>
+                  </a:txBody>
+                  <a:tcPr marL="91440" marR="91440" marT="45720" marB="45720" anchor="ctr">
+                    <a:lnL w="12700" cap="flat" cmpd="sng" algn="ctr">
+                      <a:solidFill>
+                        <a:srgbClr val="DCE3F2"/>
+                      </a:solidFill>
+                      <a:prstDash val="solid"/>
+                      <a:round/>
+                      <a:headEnd type="none" w="med" len="med"/>
+                      <a:tailEnd type="none" w="med" len="med"/>
+                    </a:lnL>
+                    <a:lnR w="12700" cap="flat" cmpd="sng" algn="ctr">
+                      <a:solidFill>
+                        <a:srgbClr val="DCE3F2"/>
+                      </a:solidFill>
+                      <a:prstDash val="solid"/>
+                      <a:round/>
+                      <a:headEnd type="none" w="med" len="med"/>
+                      <a:tailEnd type="none" w="med" len="med"/>
+                    </a:lnR>
+                    <a:lnT w="12700" cap="flat" cmpd="sng" algn="ctr">
+                      <a:solidFill>
+                        <a:srgbClr val="DCE3F2"/>
+                      </a:solidFill>
+                      <a:prstDash val="solid"/>
+                      <a:round/>
+                      <a:headEnd type="none" w="med" len="med"/>
+                      <a:tailEnd type="none" w="med" len="med"/>
+                    </a:lnT>
+                    <a:lnB w="12700" cap="flat" cmpd="sng" algn="ctr">
+                      <a:solidFill>
+                        <a:srgbClr val="DCE3F2"/>
+                      </a:solidFill>
+                      <a:prstDash val="solid"/>
+                      <a:round/>
+                      <a:headEnd type="none" w="med" len="med"/>
+                      <a:tailEnd type="none" w="med" len="med"/>
+                    </a:lnB>
+                  </a:tcPr>
+                </a:tc>
+              </a:tr>
+              <a:tr h="512064">
+                <a:tc>
+                  <a:txBody>
+                    <a:bodyPr/>
+                    <a:lstStyle/>
+                    <a:p>
+                      <a:pPr algn="l" indent="0" marL="0">
+                        <a:buNone/>
+                      </a:pPr>
+                      <a:r>
+                        <a:rPr lang="en-US" sz="1200" dirty="0">
+                          <a:solidFill>
+                            <a:srgbClr val="151B2E"/>
+                          </a:solidFill>
+                          <a:latin typeface="Pretendard" pitchFamily="34" charset="0"/>
+                          <a:ea typeface="Pretendard" pitchFamily="34" charset="-122"/>
+                          <a:cs typeface="Pretendard" pitchFamily="34" charset="-120"/>
+                        </a:rPr>
+                        <a:t>IsolationForest 다변량 탐지</a:t>
+                      </a:r>
+                      <a:endParaRPr lang="en-US" sz="1200" dirty="0">
+                        <a:latin typeface="Pretendard" charset="0"/>
+                        <a:ea typeface="Pretendard" charset="0"/>
+                        <a:cs typeface="Pretendard" charset="0"/>
+                      </a:endParaRPr>
+                    </a:p>
+                  </a:txBody>
+                  <a:tcPr marL="91440" marR="91440" marT="45720" marB="45720" anchor="ctr">
+                    <a:lnL w="12700" cap="flat" cmpd="sng" algn="ctr">
+                      <a:solidFill>
+                        <a:srgbClr val="DCE3F2"/>
+                      </a:solidFill>
+                      <a:prstDash val="solid"/>
+                      <a:round/>
+                      <a:headEnd type="none" w="med" len="med"/>
+                      <a:tailEnd type="none" w="med" len="med"/>
+                    </a:lnL>
+                    <a:lnR w="12700" cap="flat" cmpd="sng" algn="ctr">
+                      <a:solidFill>
+                        <a:srgbClr val="DCE3F2"/>
+                      </a:solidFill>
+                      <a:prstDash val="solid"/>
+                      <a:round/>
+                      <a:headEnd type="none" w="med" len="med"/>
+                      <a:tailEnd type="none" w="med" len="med"/>
+                    </a:lnR>
+                    <a:lnT w="12700" cap="flat" cmpd="sng" algn="ctr">
+                      <a:solidFill>
+                        <a:srgbClr val="DCE3F2"/>
+                      </a:solidFill>
+                      <a:prstDash val="solid"/>
+                      <a:round/>
+                      <a:headEnd type="none" w="med" len="med"/>
+                      <a:tailEnd type="none" w="med" len="med"/>
+                    </a:lnT>
+                    <a:lnB w="12700" cap="flat" cmpd="sng" algn="ctr">
+                      <a:solidFill>
+                        <a:srgbClr val="DCE3F2"/>
+                      </a:solidFill>
+                      <a:prstDash val="solid"/>
+                      <a:round/>
+                      <a:headEnd type="none" w="med" len="med"/>
+                      <a:tailEnd type="none" w="med" len="med"/>
+                    </a:lnB>
+                  </a:tcPr>
+                </a:tc>
+                <a:tc>
+                  <a:txBody>
+                    <a:bodyPr/>
+                    <a:lstStyle/>
+                    <a:p>
+                      <a:pPr algn="l" indent="0" marL="0">
+                        <a:buNone/>
+                      </a:pPr>
+                      <a:r>
+                        <a:rPr lang="en-US" sz="1200" dirty="0">
+                          <a:solidFill>
+                            <a:srgbClr val="151B2E"/>
+                          </a:solidFill>
+                          <a:latin typeface="Pretendard" pitchFamily="34" charset="0"/>
+                          <a:ea typeface="Pretendard" pitchFamily="34" charset="-122"/>
+                          <a:cs typeface="Pretendard" pitchFamily="34" charset="-120"/>
+                        </a:rPr>
+                        <a:t>다변량 공정이상(MSPC) 탐지 · OOS/OOT 조사 트리거 · 원인변수 스크리닝</a:t>
+                      </a:r>
+                      <a:endParaRPr lang="en-US" sz="1200" dirty="0">
+                        <a:latin typeface="Pretendard" charset="0"/>
+                        <a:ea typeface="Pretendard" charset="0"/>
+                        <a:cs typeface="Pretendard" charset="0"/>
+                      </a:endParaRPr>
+                    </a:p>
+                  </a:txBody>
+                  <a:tcPr marL="91440" marR="91440" marT="45720" marB="45720" anchor="ctr">
+                    <a:lnL w="12700" cap="flat" cmpd="sng" algn="ctr">
+                      <a:solidFill>
+                        <a:srgbClr val="DCE3F2"/>
+                      </a:solidFill>
+                      <a:prstDash val="solid"/>
+                      <a:round/>
+                      <a:headEnd type="none" w="med" len="med"/>
+                      <a:tailEnd type="none" w="med" len="med"/>
+                    </a:lnL>
+                    <a:lnR w="12700" cap="flat" cmpd="sng" algn="ctr">
+                      <a:solidFill>
+                        <a:srgbClr val="DCE3F2"/>
+                      </a:solidFill>
+                      <a:prstDash val="solid"/>
+                      <a:round/>
+                      <a:headEnd type="none" w="med" len="med"/>
+                      <a:tailEnd type="none" w="med" len="med"/>
+                    </a:lnR>
+                    <a:lnT w="12700" cap="flat" cmpd="sng" algn="ctr">
+                      <a:solidFill>
+                        <a:srgbClr val="DCE3F2"/>
+                      </a:solidFill>
+                      <a:prstDash val="solid"/>
+                      <a:round/>
+                      <a:headEnd type="none" w="med" len="med"/>
+                      <a:tailEnd type="none" w="med" len="med"/>
+                    </a:lnT>
+                    <a:lnB w="12700" cap="flat" cmpd="sng" algn="ctr">
+                      <a:solidFill>
+                        <a:srgbClr val="DCE3F2"/>
+                      </a:solidFill>
+                      <a:prstDash val="solid"/>
+                      <a:round/>
+                      <a:headEnd type="none" w="med" len="med"/>
+                      <a:tailEnd type="none" w="med" len="med"/>
+                    </a:lnB>
+                  </a:tcPr>
+                </a:tc>
+              </a:tr>
+              <a:tr h="512064">
+                <a:tc>
+                  <a:txBody>
+                    <a:bodyPr/>
+                    <a:lstStyle/>
+                    <a:p>
+                      <a:pPr algn="l" indent="0" marL="0">
+                        <a:buNone/>
+                      </a:pPr>
+                      <a:r>
+                        <a:rPr lang="en-US" sz="1200" dirty="0">
+                          <a:solidFill>
+                            <a:srgbClr val="151B2E"/>
+                          </a:solidFill>
+                          <a:latin typeface="Pretendard" pitchFamily="34" charset="0"/>
+                          <a:ea typeface="Pretendard" pitchFamily="34" charset="-122"/>
+                          <a:cs typeface="Pretendard" pitchFamily="34" charset="-120"/>
+                        </a:rPr>
+                        <a:t>수집→분석→알림 자동화</a:t>
+                      </a:r>
+                      <a:endParaRPr lang="en-US" sz="1200" dirty="0">
+                        <a:latin typeface="Pretendard" charset="0"/>
+                        <a:ea typeface="Pretendard" charset="0"/>
+                        <a:cs typeface="Pretendard" charset="0"/>
+                      </a:endParaRPr>
+                    </a:p>
+                  </a:txBody>
+                  <a:tcPr marL="91440" marR="91440" marT="45720" marB="45720" anchor="ctr">
+                    <a:lnL w="12700" cap="flat" cmpd="sng" algn="ctr">
+                      <a:solidFill>
+                        <a:srgbClr val="DCE3F2"/>
+                      </a:solidFill>
+                      <a:prstDash val="solid"/>
+                      <a:round/>
+                      <a:headEnd type="none" w="med" len="med"/>
+                      <a:tailEnd type="none" w="med" len="med"/>
+                    </a:lnL>
+                    <a:lnR w="12700" cap="flat" cmpd="sng" algn="ctr">
+                      <a:solidFill>
+                        <a:srgbClr val="DCE3F2"/>
+                      </a:solidFill>
+                      <a:prstDash val="solid"/>
+                      <a:round/>
+                      <a:headEnd type="none" w="med" len="med"/>
+                      <a:tailEnd type="none" w="med" len="med"/>
+                    </a:lnR>
+                    <a:lnT w="12700" cap="flat" cmpd="sng" algn="ctr">
+                      <a:solidFill>
+                        <a:srgbClr val="DCE3F2"/>
+                      </a:solidFill>
+                      <a:prstDash val="solid"/>
+                      <a:round/>
+                      <a:headEnd type="none" w="med" len="med"/>
+                      <a:tailEnd type="none" w="med" len="med"/>
+                    </a:lnT>
+                    <a:lnB w="12700" cap="flat" cmpd="sng" algn="ctr">
+                      <a:solidFill>
+                        <a:srgbClr val="DCE3F2"/>
+                      </a:solidFill>
+                      <a:prstDash val="solid"/>
+                      <a:round/>
+                      <a:headEnd type="none" w="med" len="med"/>
+                      <a:tailEnd type="none" w="med" len="med"/>
+                    </a:lnB>
+                  </a:tcPr>
+                </a:tc>
+                <a:tc>
+                  <a:txBody>
+                    <a:bodyPr/>
+                    <a:lstStyle/>
+                    <a:p>
+                      <a:pPr algn="l" indent="0" marL="0">
+                        <a:buNone/>
+                      </a:pPr>
+                      <a:r>
+                        <a:rPr lang="en-US" sz="1200" dirty="0">
+                          <a:solidFill>
+                            <a:srgbClr val="151B2E"/>
+                          </a:solidFill>
+                          <a:latin typeface="Pretendard" pitchFamily="34" charset="0"/>
+                          <a:ea typeface="Pretendard" pitchFamily="34" charset="-122"/>
+                          <a:cs typeface="Pretendard" pitchFamily="34" charset="-120"/>
+                        </a:rPr>
+                        <a:t>MES / LIMS 품질데이터 모니터링 · ALCOA+ · Part 11 audit trail</a:t>
+                      </a:r>
+                      <a:endParaRPr lang="en-US" sz="1200" dirty="0">
+                        <a:latin typeface="Pretendard" charset="0"/>
+                        <a:ea typeface="Pretendard" charset="0"/>
+                        <a:cs typeface="Pretendard" charset="0"/>
+                      </a:endParaRPr>
+                    </a:p>
+                  </a:txBody>
+                  <a:tcPr marL="91440" marR="91440" marT="45720" marB="45720" anchor="ctr">
+                    <a:lnL w="12700" cap="flat" cmpd="sng" algn="ctr">
+                      <a:solidFill>
+                        <a:srgbClr val="DCE3F2"/>
+                      </a:solidFill>
+                      <a:prstDash val="solid"/>
+                      <a:round/>
+                      <a:headEnd type="none" w="med" len="med"/>
+                      <a:tailEnd type="none" w="med" len="med"/>
+                    </a:lnL>
+                    <a:lnR w="12700" cap="flat" cmpd="sng" algn="ctr">
+                      <a:solidFill>
+                        <a:srgbClr val="DCE3F2"/>
+                      </a:solidFill>
+                      <a:prstDash val="solid"/>
+                      <a:round/>
+                      <a:headEnd type="none" w="med" len="med"/>
+                      <a:tailEnd type="none" w="med" len="med"/>
+                    </a:lnR>
+                    <a:lnT w="12700" cap="flat" cmpd="sng" algn="ctr">
+                      <a:solidFill>
+                        <a:srgbClr val="DCE3F2"/>
+                      </a:solidFill>
+                      <a:prstDash val="solid"/>
+                      <a:round/>
+                      <a:headEnd type="none" w="med" len="med"/>
+                      <a:tailEnd type="none" w="med" len="med"/>
+                    </a:lnT>
+                    <a:lnB w="12700" cap="flat" cmpd="sng" algn="ctr">
+                      <a:solidFill>
+                        <a:srgbClr val="DCE3F2"/>
+                      </a:solidFill>
+                      <a:prstDash val="solid"/>
+                      <a:round/>
+                      <a:headEnd type="none" w="med" len="med"/>
+                      <a:tailEnd type="none" w="med" len="med"/>
+                    </a:lnB>
+                  </a:tcPr>
+                </a:tc>
+              </a:tr>
+            </a:tbl>
+          </a:graphicData>
+        </a:graphic>
+      </p:graphicFrame>
+      <p:sp>
+        <p:nvSpPr>
+          <p:cNvPr id="11" name="Shape 8"/>
+          <p:cNvSpPr/>
+          <p:nvPr/>
+        </p:nvSpPr>
+        <p:spPr>
+          <a:xfrm>
+            <a:off x="640080" y="6035040"/>
+            <a:ext cx="10927080" cy="566928"/>
+          </a:xfrm>
+          <a:prstGeom prst="roundRect">
+            <a:avLst>
+              <a:gd name="adj" fmla="val 12903"/>
+            </a:avLst>
+          </a:prstGeom>
+          <a:solidFill>
+            <a:srgbClr val="EEF1FB"/>
+          </a:solidFill>
+          <a:ln/>
+        </p:spPr>
+      </p:sp>
+      <p:sp>
+        <p:nvSpPr>
+          <p:cNvPr id="12" name="Shape 9"/>
+          <p:cNvSpPr/>
+          <p:nvPr/>
+        </p:nvSpPr>
+        <p:spPr>
+          <a:xfrm>
+            <a:off x="841248" y="6163056"/>
+            <a:ext cx="1554480" cy="310896"/>
+          </a:xfrm>
+          <a:prstGeom prst="roundRect">
+            <a:avLst>
+              <a:gd name="adj" fmla="val 50000"/>
+            </a:avLst>
+          </a:prstGeom>
+          <a:solidFill>
+            <a:srgbClr val="1F40E6"/>
+          </a:solidFill>
+          <a:ln/>
+        </p:spPr>
+      </p:sp>
+      <p:sp>
+        <p:nvSpPr>
+          <p:cNvPr id="13" name="Text 10"/>
+          <p:cNvSpPr/>
+          <p:nvPr/>
+        </p:nvSpPr>
+        <p:spPr>
+          <a:xfrm>
+            <a:off x="841248" y="6163056"/>
+            <a:ext cx="1554480" cy="310896"/>
+          </a:xfrm>
+          <a:prstGeom prst="rect">
+            <a:avLst/>
+          </a:prstGeom>
+          <a:noFill/>
+          <a:ln/>
+        </p:spPr>
+        <p:txBody>
+          <a:bodyPr wrap="square" lIns="0" tIns="0" rIns="0" bIns="0" rtlCol="0" anchor="ctr"/>
+          <a:lstStyle/>
+          <a:p>
+            <a:pPr algn="ctr" indent="0" marL="0">
+              <a:buNone/>
+            </a:pPr>
+            <a:r>
+              <a:rPr lang="en-US" sz="1100" b="1" dirty="0">
+                <a:solidFill>
+                  <a:srgbClr val="FFFFFF"/>
+                </a:solidFill>
+                <a:latin typeface="Pretendard" pitchFamily="34" charset="0"/>
+                <a:ea typeface="Pretendard" pitchFamily="34" charset="-122"/>
+                <a:cs typeface="Pretendard" pitchFamily="34" charset="-120"/>
+              </a:rPr>
+              <a:t>생산관리 확장</a:t>
+            </a:r>
+            <a:endParaRPr lang="en-US" sz="1100" dirty="0"/>
+          </a:p>
+        </p:txBody>
+      </p:sp>
+      <p:sp>
+        <p:nvSpPr>
+          <p:cNvPr id="14" name="Text 11"/>
+          <p:cNvSpPr/>
+          <p:nvPr/>
+        </p:nvSpPr>
+        <p:spPr>
+          <a:xfrm>
+            <a:off x="2560320" y="6035040"/>
+            <a:ext cx="9006840" cy="566928"/>
+          </a:xfrm>
+          <a:prstGeom prst="rect">
+            <a:avLst/>
+          </a:prstGeom>
+          <a:noFill/>
+          <a:ln/>
+        </p:spPr>
+        <p:txBody>
+          <a:bodyPr wrap="square" lIns="0" tIns="0" rIns="0" bIns="0" rtlCol="0" anchor="ctr"/>
+          <a:lstStyle/>
+          <a:p>
+            <a:pPr indent="0" marL="0">
+              <a:buNone/>
+            </a:pPr>
+            <a:r>
+              <a:rPr lang="en-US" sz="1150" b="1" dirty="0">
+                <a:solidFill>
+                  <a:srgbClr val="151B2E"/>
+                </a:solidFill>
+                <a:latin typeface="Pretendard" pitchFamily="34" charset="0"/>
+                <a:ea typeface="Pretendard" pitchFamily="34" charset="-122"/>
+                <a:cs typeface="Pretendard" pitchFamily="34" charset="-120"/>
+              </a:rPr>
+              <a:t>연속공정 SPC를 배치공정으로 확장 — 골든배치 대비 Mahalanobis 거리 · 배치 간 변동 ANOVA/혼합효과모형 · 수율 모니터링</a:t>
+            </a:r>
+            <a:endParaRPr lang="en-US" sz="1150" dirty="0"/>
+          </a:p>
+        </p:txBody>
+      </p:sp>
+    </p:spTree>
+  </p:cSld>
+  <p:clrMapOvr>
+    <a:masterClrMapping/>
+  </p:clrMapOvr>
+</p:sld>
+</file>
+
+<file path=ppt/slides/slide15.xml><?xml version="1.0" encoding="utf-8"?>
+<p:sld xmlns:a="http://schemas.openxmlformats.org/drawingml/2006/main" xmlns:r="http://schemas.openxmlformats.org/officeDocument/2006/relationships" xmlns:p="http://schemas.openxmlformats.org/presentationml/2006/main">
+  <p:cSld name="Slide 15">
+    <p:bg>
+      <p:bgPr>
+        <a:solidFill>
           <a:srgbClr val="1F40E6"/>
         </a:solidFill>
       </p:bgPr>
@@ -5108,7 +6593,7 @@
         </p:blipFill>
         <p:spPr>
           <a:xfrm>
-            <a:off x="640080" y="640080"/>
+            <a:off x="640080" y="749808"/>
             <a:ext cx="502920" cy="502920"/>
           </a:xfrm>
           <a:prstGeom prst="rect">
@@ -5124,7 +6609,7 @@
         </p:nvSpPr>
         <p:spPr>
           <a:xfrm>
-            <a:off x="1280160" y="603504"/>
+            <a:off x="1280160" y="713232"/>
             <a:ext cx="10058400" cy="594360"/>
           </a:xfrm>
           <a:prstGeom prst="rect">
@@ -5272,7 +6757,7 @@
                 <a:ea typeface="Pretendard" pitchFamily="34" charset="-122"/>
                 <a:cs typeface="Pretendard" pitchFamily="34" charset="-120"/>
               </a:rPr>
-              <a:t>11주 무중단 수집</a:t>
+              <a:t>108일 무중단 수집</a:t>
             </a:r>
             <a:endParaRPr lang="en-US" sz="1250" dirty="0"/>
           </a:p>
@@ -6041,8 +7526,8 @@
         </p:nvSpPr>
         <p:spPr>
           <a:xfrm>
-            <a:off x="640080" y="6263640"/>
-            <a:ext cx="10972800" cy="365760"/>
+            <a:off x="640080" y="6053328"/>
+            <a:ext cx="10927080" cy="365760"/>
           </a:xfrm>
           <a:prstGeom prst="rect">
             <a:avLst/>
@@ -6058,7 +7543,7 @@
               <a:buNone/>
             </a:pPr>
             <a:r>
-              <a:rPr lang="en-US" sz="1150" dirty="0">
+              <a:rPr lang="en-US" sz="1300" b="1" dirty="0">
                 <a:solidFill>
                   <a:srgbClr val="9DB2FF"/>
                 </a:solidFill>
@@ -6066,9 +7551,62 @@
                 <a:ea typeface="Pretendard" pitchFamily="34" charset="-122"/>
                 <a:cs typeface="Pretendard" pitchFamily="34" charset="-120"/>
               </a:rPr>
+              <a:t>→ </a:t>
+            </a:r>
+            <a:pPr indent="0" marL="0">
+              <a:buNone/>
+            </a:pPr>
+            <a:r>
+              <a:rPr lang="en-US" sz="1300" b="1" dirty="0">
+                <a:solidFill>
+                  <a:srgbClr val="FFFFFF"/>
+                </a:solidFill>
+                <a:latin typeface="Pretendard" pitchFamily="34" charset="0"/>
+                <a:ea typeface="Pretendard" pitchFamily="34" charset="-122"/>
+                <a:cs typeface="Pretendard" pitchFamily="34" charset="-120"/>
+              </a:rPr>
+              <a:t>이 역량은 GMP 환경의 공정능력(PPQ)·일탈관리·밸리데이션으로 그대로 전이됩니다</a:t>
+            </a:r>
+            <a:endParaRPr lang="en-US" sz="1300" dirty="0"/>
+          </a:p>
+        </p:txBody>
+      </p:sp>
+      <p:sp>
+        <p:nvSpPr>
+          <p:cNvPr id="33" name="Text 27"/>
+          <p:cNvSpPr/>
+          <p:nvPr/>
+        </p:nvSpPr>
+        <p:spPr>
+          <a:xfrm>
+            <a:off x="640080" y="6446520"/>
+            <a:ext cx="10972800" cy="320040"/>
+          </a:xfrm>
+          <a:prstGeom prst="rect">
+            <a:avLst/>
+          </a:prstGeom>
+          <a:noFill/>
+          <a:ln/>
+        </p:spPr>
+        <p:txBody>
+          <a:bodyPr wrap="square" lIns="0" tIns="0" rIns="0" bIns="0" rtlCol="0" anchor="ctr"/>
+          <a:lstStyle/>
+          <a:p>
+            <a:pPr indent="0" marL="0">
+              <a:buNone/>
+            </a:pPr>
+            <a:r>
+              <a:rPr lang="en-US" sz="1100" dirty="0">
+                <a:solidFill>
+                  <a:srgbClr val="7E93D6"/>
+                </a:solidFill>
+                <a:latin typeface="Pretendard" pitchFamily="34" charset="0"/>
+                <a:ea typeface="Pretendard" pitchFamily="34" charset="-122"/>
+                <a:cs typeface="Pretendard" pitchFamily="34" charset="-120"/>
+              </a:rPr>
               <a:t>github.com/robinho0329/chungbuk-air-quality-monitor   ·   라이브 대시보드 6페이지 운영 중</a:t>
             </a:r>
-            <a:endParaRPr lang="en-US" sz="1150" dirty="0"/>
+            <a:endParaRPr lang="en-US" sz="1100" dirty="0"/>
           </a:p>
         </p:txBody>
       </p:sp>
@@ -6735,7 +8273,7 @@
                 <a:ea typeface="Pretendard" pitchFamily="34" charset="-122"/>
                 <a:cs typeface="Pretendard" pitchFamily="34" charset="-120"/>
               </a:rPr>
-              <a:t>11주 누적, 결측·이상치 점검</a:t>
+              <a:t>108일 누적, 결측·이상치 점검</a:t>
             </a:r>
             <a:endParaRPr lang="en-US" sz="1200" dirty="0"/>
           </a:p>
@@ -7215,7 +8753,7 @@
                 <a:ea typeface="Pretendard" pitchFamily="34" charset="-122"/>
                 <a:cs typeface="Pretendard" pitchFamily="34" charset="-120"/>
               </a:rPr>
-              <a:t>이상탐지·알림·결론</a:t>
+              <a:t>이상탐지·알림 · 현업 전이</a:t>
             </a:r>
             <a:endParaRPr lang="en-US" sz="1700" dirty="0"/>
           </a:p>
@@ -7254,7 +8792,7 @@
                 <a:ea typeface="Pretendard" pitchFamily="34" charset="-122"/>
                 <a:cs typeface="Pretendard" pitchFamily="34" charset="-120"/>
               </a:rPr>
-              <a:t>WE Rules · IsolationForest · Discord</a:t>
+              <a:t>WE Rules·IForest·Discord → GMP 품질관리 전이·결론</a:t>
             </a:r>
             <a:endParaRPr lang="en-US" sz="1200" dirty="0"/>
           </a:p>
@@ -8592,7 +10130,7 @@
                 <a:ea typeface="Pretendard" pitchFamily="34" charset="-122"/>
                 <a:cs typeface="Pretendard" pitchFamily="34" charset="-120"/>
               </a:rPr>
-              <a:t>대기질을 제조 공정에 빗대어 SPC로 상시 감시 — 산단 인근이 거주지보다 나쁜가?</a:t>
+              <a:t>산단 인근 대기질이 거주지보다 통계적으로 나쁜지, 어느 지표를 우선 관리해야 하는지 규명한다</a:t>
             </a:r>
             <a:endParaRPr lang="en-US" sz="1350" dirty="0"/>
           </a:p>
@@ -10230,23 +11768,26 @@
         <p:spPr>
           <a:xfrm>
             <a:off x="640080" y="4526280"/>
-            <a:ext cx="5669280" cy="320040"/>
-          </a:xfrm>
-          <a:prstGeom prst="rect">
-            <a:avLst/>
-          </a:prstGeom>
-          <a:noFill/>
-          <a:ln/>
-        </p:spPr>
-        <p:txBody>
-          <a:bodyPr wrap="square" lIns="0" tIns="0" rIns="0" bIns="0" rtlCol="0" anchor="ctr"/>
+            <a:ext cx="5760720" cy="502920"/>
+          </a:xfrm>
+          <a:prstGeom prst="rect">
+            <a:avLst/>
+          </a:prstGeom>
+          <a:noFill/>
+          <a:ln/>
+        </p:spPr>
+        <p:txBody>
+          <a:bodyPr wrap="square" lIns="0" tIns="0" rIns="0" bIns="0" rtlCol="0" anchor="t"/>
           <a:lstStyle/>
           <a:p>
             <a:pPr indent="0" marL="0">
-              <a:buNone/>
-            </a:pPr>
-            <a:r>
-              <a:rPr lang="en-US" sz="1100" i="1" dirty="0">
+              <a:lnSpc>
+                <a:spcPct val="115000"/>
+              </a:lnSpc>
+              <a:buNone/>
+            </a:pPr>
+            <a:r>
+              <a:rPr lang="en-US" sz="1050" i="1" dirty="0">
                 <a:solidFill>
                   <a:srgbClr val="8A94A6"/>
                 </a:solidFill>
@@ -10254,9 +11795,9 @@
                 <a:ea typeface="Pretendard" pitchFamily="34" charset="-122"/>
                 <a:cs typeface="Pretendard" pitchFamily="34" charset="-120"/>
               </a:rPr>
-              <a:t>USL = 대기환경보전법 환경기준 · LSL = 0 (낮을수록 좋음)</a:t>
-            </a:r>
-            <a:endParaRPr lang="en-US" sz="1100" dirty="0"/>
+              <a:t>USL=대기환경보전법 환경기준 · LSL=0 (단측 규격). 실제 배치공정 양측 규격(USL+LSL)에도 동일 Cpk 산식 적용 가능.</a:t>
+            </a:r>
+            <a:endParaRPr lang="en-US" sz="1050" dirty="0"/>
           </a:p>
         </p:txBody>
       </p:sp>
@@ -12637,7 +14178,7 @@
                 <a:ea typeface="Pretendard" pitchFamily="34" charset="-122"/>
                 <a:cs typeface="Pretendard" pitchFamily="34" charset="-120"/>
               </a:rPr>
-              <a:t>데이터 수집 성과</a:t>
+              <a:t>데이터 수집 성과 &amp; 농도 추세</a:t>
             </a:r>
             <a:endParaRPr lang="en-US" sz="2700" dirty="0"/>
           </a:p>
@@ -12696,7 +14237,7 @@
                 <a:ea typeface="Pretendard" pitchFamily="34" charset="-122"/>
                 <a:cs typeface="Pretendard" pitchFamily="34" charset="-120"/>
               </a:rPr>
-              <a:t>11주 무중단 · 측정소당 2,500+ 시각 누적</a:t>
+              <a:t>108일 무중단 12,835건 · PM2.5 일별 추세</a:t>
             </a:r>
             <a:endParaRPr lang="en-US" sz="1300" dirty="0"/>
           </a:p>
@@ -12749,7 +14290,7 @@
               <a:buNone/>
             </a:pPr>
             <a:r>
-              <a:rPr lang="en-US" sz="3800" b="1" dirty="0">
+              <a:rPr lang="en-US" sz="3600" b="1" dirty="0">
                 <a:solidFill>
                   <a:srgbClr val="1F40E6"/>
                 </a:solidFill>
@@ -12759,7 +14300,7 @@
               </a:rPr>
               <a:t>12,835</a:t>
             </a:r>
-            <a:endParaRPr lang="en-US" sz="3800" dirty="0"/>
+            <a:endParaRPr lang="en-US" sz="3600" dirty="0"/>
           </a:p>
         </p:txBody>
       </p:sp>
@@ -12849,7 +14390,7 @@
               <a:buNone/>
             </a:pPr>
             <a:r>
-              <a:rPr lang="en-US" sz="3800" b="1" dirty="0">
+              <a:rPr lang="en-US" sz="3600" b="1" dirty="0">
                 <a:solidFill>
                   <a:srgbClr val="1F40E6"/>
                 </a:solidFill>
@@ -12857,9 +14398,9 @@
                 <a:ea typeface="Pretendard" pitchFamily="34" charset="-122"/>
                 <a:cs typeface="Pretendard" pitchFamily="34" charset="-120"/>
               </a:rPr>
-              <a:t>5</a:t>
-            </a:r>
-            <a:endParaRPr lang="en-US" sz="3800" dirty="0"/>
+              <a:t>108일</a:t>
+            </a:r>
+            <a:endParaRPr lang="en-US" sz="3600" dirty="0"/>
           </a:p>
         </p:txBody>
       </p:sp>
@@ -12896,7 +14437,7 @@
                 <a:ea typeface="Pretendard" pitchFamily="34" charset="-122"/>
                 <a:cs typeface="Pretendard" pitchFamily="34" charset="-120"/>
               </a:rPr>
-              <a:t>측정소</a:t>
+              <a:t>연속 무중단 수집</a:t>
             </a:r>
             <a:endParaRPr lang="en-US" sz="1250" dirty="0"/>
           </a:p>
@@ -12949,7 +14490,7 @@
               <a:buNone/>
             </a:pPr>
             <a:r>
-              <a:rPr lang="en-US" sz="3800" b="1" dirty="0">
+              <a:rPr lang="en-US" sz="3600" b="1" dirty="0">
                 <a:solidFill>
                   <a:srgbClr val="1F40E6"/>
                 </a:solidFill>
@@ -12957,9 +14498,9 @@
                 <a:ea typeface="Pretendard" pitchFamily="34" charset="-122"/>
                 <a:cs typeface="Pretendard" pitchFamily="34" charset="-120"/>
               </a:rPr>
-              <a:t>100%</a:t>
-            </a:r>
-            <a:endParaRPr lang="en-US" sz="3800" dirty="0"/>
+              <a:t>15일</a:t>
+            </a:r>
+            <a:endParaRPr lang="en-US" sz="3600" dirty="0"/>
           </a:p>
         </p:txBody>
       </p:sp>
@@ -12996,7 +14537,7 @@
                 <a:ea typeface="Pretendard" pitchFamily="34" charset="-122"/>
                 <a:cs typeface="Pretendard" pitchFamily="34" charset="-120"/>
               </a:rPr>
-              <a:t>평시 24h 성공률</a:t>
+              <a:t>산단 USL 초과</a:t>
             </a:r>
             <a:endParaRPr lang="en-US" sz="1250" dirty="0"/>
           </a:p>
@@ -13049,7 +14590,7 @@
               <a:buNone/>
             </a:pPr>
             <a:r>
-              <a:rPr lang="en-US" sz="3800" b="1" dirty="0">
+              <a:rPr lang="en-US" sz="3600" b="1" dirty="0">
                 <a:solidFill>
                   <a:srgbClr val="1F40E6"/>
                 </a:solidFill>
@@ -13059,7 +14600,7 @@
               </a:rPr>
               <a:t>220</a:t>
             </a:r>
-            <a:endParaRPr lang="en-US" sz="3800" dirty="0"/>
+            <a:endParaRPr lang="en-US" sz="3600" dirty="0"/>
           </a:p>
         </p:txBody>
       </p:sp>
@@ -13104,7 +14645,7 @@
       </p:sp>
       <p:pic>
         <p:nvPicPr>
-          <p:cNvPr id="18" name="Image 0" descr="/Users/t2025-m0190/workspace/chungbuk-air-quality-monitor/build/deck/img/accumulation.png">    </p:cNvPr>
+          <p:cNvPr id="18" name="Image 0" descr="/Users/t2025-m0190/workspace/chungbuk-air-quality-monitor/build/deck/img/ts_pm25.png">    </p:cNvPr>
           <p:cNvPicPr>
             <a:picLocks noChangeAspect="1"/>
           </p:cNvPicPr>
@@ -13119,7 +14660,7 @@
         <p:spPr>
           <a:xfrm>
             <a:off x="640080" y="2926080"/>
-            <a:ext cx="6858000" cy="3224376"/>
+            <a:ext cx="7132320" cy="3274402"/>
           </a:xfrm>
           <a:prstGeom prst="rect">
             <a:avLst/>
@@ -13134,8 +14675,8 @@
         </p:nvSpPr>
         <p:spPr>
           <a:xfrm>
-            <a:off x="7772400" y="2926080"/>
-            <a:ext cx="3931920" cy="2743200"/>
+            <a:off x="7955280" y="2926080"/>
+            <a:ext cx="3749040" cy="2743200"/>
           </a:xfrm>
           <a:prstGeom prst="roundRect">
             <a:avLst>
@@ -13168,8 +14709,8 @@
         </p:nvSpPr>
         <p:spPr>
           <a:xfrm>
-            <a:off x="8046720" y="3154680"/>
-            <a:ext cx="3474720" cy="365760"/>
+            <a:off x="8229600" y="3154680"/>
+            <a:ext cx="3291840" cy="365760"/>
           </a:xfrm>
           <a:prstGeom prst="rect">
             <a:avLst/>
@@ -13193,7 +14734,7 @@
                 <a:ea typeface="Pretendard" pitchFamily="34" charset="-122"/>
                 <a:cs typeface="Pretendard" pitchFamily="34" charset="-120"/>
               </a:rPr>
-              <a:t>무누락 운영의 증거</a:t>
+              <a:t>수집을 넘어 ‘신호’까지</a:t>
             </a:r>
             <a:endParaRPr lang="en-US" sz="1500" dirty="0"/>
           </a:p>
@@ -13207,8 +14748,8 @@
         </p:nvSpPr>
         <p:spPr>
           <a:xfrm>
-            <a:off x="8046720" y="3611880"/>
-            <a:ext cx="3429000" cy="914400"/>
+            <a:off x="8229600" y="3611880"/>
+            <a:ext cx="3246120" cy="1188720"/>
           </a:xfrm>
           <a:prstGeom prst="rect">
             <a:avLst/>
@@ -13235,7 +14776,7 @@
                 <a:ea typeface="Pretendard" pitchFamily="34" charset="-122"/>
                 <a:cs typeface="Pretendard" pitchFamily="34" charset="-120"/>
               </a:rPr>
-              <a:t>선형 누적</a:t>
+              <a:t>산단 &gt; 거주지</a:t>
             </a:r>
             <a:pPr indent="0" marL="0">
               <a:lnSpc>
@@ -13252,33 +14793,8 @@
                 <a:ea typeface="Pretendard" pitchFamily="34" charset="-122"/>
                 <a:cs typeface="Pretendard" pitchFamily="34" charset="-120"/>
               </a:rPr>
-              <a:t> — 측정소별 그래프가 끊김 없이 직선으로 증가. 매시 자동 수집이 안정적으로 동작.</a:t>
-            </a:r>
-            <a:endParaRPr lang="en-US" sz="1250" dirty="0"/>
-          </a:p>
-        </p:txBody>
-      </p:sp>
-      <p:sp>
-        <p:nvSpPr>
-          <p:cNvPr id="22" name="Text 19"/>
-          <p:cNvSpPr/>
-          <p:nvPr/>
-        </p:nvSpPr>
-        <p:spPr>
-          <a:xfrm>
-            <a:off x="8046720" y="4617720"/>
-            <a:ext cx="3429000" cy="914400"/>
-          </a:xfrm>
-          <a:prstGeom prst="rect">
-            <a:avLst/>
-          </a:prstGeom>
-          <a:noFill/>
-          <a:ln/>
-        </p:spPr>
-        <p:txBody>
-          <a:bodyPr wrap="square" lIns="0" tIns="0" rIns="0" bIns="0" rtlCol="0" anchor="t"/>
-          <a:lstStyle/>
-          <a:p>
+              <a:t> — 산단 영향군 일평균이 대부분 거주지보다 높고, 환경기준(USL 35)을 108일 중 </a:t>
+            </a:r>
             <a:pPr indent="0" marL="0">
               <a:lnSpc>
                 <a:spcPct val="130000"/>
@@ -13288,13 +14804,13 @@
             <a:r>
               <a:rPr lang="en-US" sz="1250" b="1" dirty="0">
                 <a:solidFill>
-                  <a:srgbClr val="151B2E"/>
-                </a:solidFill>
-                <a:latin typeface="Pretendard" pitchFamily="34" charset="0"/>
-                <a:ea typeface="Pretendard" pitchFamily="34" charset="-122"/>
-                <a:cs typeface="Pretendard" pitchFamily="34" charset="-120"/>
-              </a:rPr>
-              <a:t>self-healing</a:t>
+                  <a:srgbClr val="E04646"/>
+                </a:solidFill>
+                <a:latin typeface="Pretendard" pitchFamily="34" charset="0"/>
+                <a:ea typeface="Pretendard" pitchFamily="34" charset="-122"/>
+                <a:cs typeface="Pretendard" pitchFamily="34" charset="-120"/>
+              </a:rPr>
+              <a:t>15일 초과</a:t>
             </a:r>
             <a:pPr indent="0" marL="0">
               <a:lnSpc>
@@ -13311,7 +14827,100 @@
                 <a:ea typeface="Pretendard" pitchFamily="34" charset="-122"/>
                 <a:cs typeface="Pretendard" pitchFamily="34" charset="-120"/>
               </a:rPr>
-              <a:t> — cron 드롭 시 다음 실행이 직전 24h 갭을 멱등 복구해 결측을 메움.</a:t>
+              <a:t>.</a:t>
+            </a:r>
+            <a:endParaRPr lang="en-US" sz="1250" dirty="0"/>
+          </a:p>
+        </p:txBody>
+      </p:sp>
+      <p:sp>
+        <p:nvSpPr>
+          <p:cNvPr id="22" name="Text 19"/>
+          <p:cNvSpPr/>
+          <p:nvPr/>
+        </p:nvSpPr>
+        <p:spPr>
+          <a:xfrm>
+            <a:off x="8229600" y="4800600"/>
+            <a:ext cx="3246120" cy="914400"/>
+          </a:xfrm>
+          <a:prstGeom prst="rect">
+            <a:avLst/>
+          </a:prstGeom>
+          <a:noFill/>
+          <a:ln/>
+        </p:spPr>
+        <p:txBody>
+          <a:bodyPr wrap="square" lIns="0" tIns="0" rIns="0" bIns="0" rtlCol="0" anchor="t"/>
+          <a:lstStyle/>
+          <a:p>
+            <a:pPr indent="0" marL="0">
+              <a:lnSpc>
+                <a:spcPct val="130000"/>
+              </a:lnSpc>
+              <a:buNone/>
+            </a:pPr>
+            <a:r>
+              <a:rPr lang="en-US" sz="1250" b="1" dirty="0">
+                <a:solidFill>
+                  <a:srgbClr val="151B2E"/>
+                </a:solidFill>
+                <a:latin typeface="Pretendard" pitchFamily="34" charset="0"/>
+                <a:ea typeface="Pretendard" pitchFamily="34" charset="-122"/>
+                <a:cs typeface="Pretendard" pitchFamily="34" charset="-120"/>
+              </a:rPr>
+              <a:t>self-healing</a:t>
+            </a:r>
+            <a:pPr indent="0" marL="0">
+              <a:lnSpc>
+                <a:spcPct val="130000"/>
+              </a:lnSpc>
+              <a:buNone/>
+            </a:pPr>
+            <a:r>
+              <a:rPr lang="en-US" sz="1250" dirty="0">
+                <a:solidFill>
+                  <a:srgbClr val="44506A"/>
+                </a:solidFill>
+                <a:latin typeface="Pretendard" pitchFamily="34" charset="0"/>
+                <a:ea typeface="Pretendard" pitchFamily="34" charset="-122"/>
+                <a:cs typeface="Pretendard" pitchFamily="34" charset="-120"/>
+              </a:rPr>
+              <a:t> — cron 드롭이 나도 다음 실행이 직전 24h 갭을 멱등 복구해 </a:t>
+            </a:r>
+            <a:pPr indent="0" marL="0">
+              <a:lnSpc>
+                <a:spcPct val="130000"/>
+              </a:lnSpc>
+              <a:buNone/>
+            </a:pPr>
+            <a:r>
+              <a:rPr lang="en-US" sz="1250" b="1" dirty="0">
+                <a:solidFill>
+                  <a:srgbClr val="0E9488"/>
+                </a:solidFill>
+                <a:latin typeface="Pretendard" pitchFamily="34" charset="0"/>
+                <a:ea typeface="Pretendard" pitchFamily="34" charset="-122"/>
+                <a:cs typeface="Pretendard" pitchFamily="34" charset="-120"/>
+              </a:rPr>
+              <a:t>최종 데이터는 무결</a:t>
+            </a:r>
+            <a:pPr indent="0" marL="0">
+              <a:lnSpc>
+                <a:spcPct val="130000"/>
+              </a:lnSpc>
+              <a:buNone/>
+            </a:pPr>
+            <a:r>
+              <a:rPr lang="en-US" sz="1250" dirty="0">
+                <a:solidFill>
+                  <a:srgbClr val="44506A"/>
+                </a:solidFill>
+                <a:latin typeface="Pretendard" pitchFamily="34" charset="0"/>
+                <a:ea typeface="Pretendard" pitchFamily="34" charset="-122"/>
+                <a:cs typeface="Pretendard" pitchFamily="34" charset="-120"/>
+              </a:rPr>
+              <a:t>.</a:t>
             </a:r>
             <a:endParaRPr lang="en-US" sz="1250" dirty="0"/>
           </a:p>
@@ -13638,7 +15247,7 @@
               <a:buNone/>
             </a:pPr>
             <a:r>
-              <a:rPr lang="en-US" sz="1300" b="1" dirty="0">
+              <a:rPr lang="en-US" sz="1250" b="1" dirty="0">
                 <a:solidFill>
                   <a:srgbClr val="151B2E"/>
                 </a:solidFill>
@@ -13646,9 +15255,9 @@
                 <a:ea typeface="Pretendard" pitchFamily="34" charset="-122"/>
                 <a:cs typeface="Pretendard" pitchFamily="34" charset="-120"/>
               </a:rPr>
-              <a:t>결측 0건 · 측정값 범위 정상 — 별도 제거/대체 없이 분석 진행 (data_time/created_at 분리 기록)</a:t>
-            </a:r>
-            <a:endParaRPr lang="en-US" sz="1300" dirty="0"/>
+              <a:t>결측 0건 · 측정값 범위 정상 — 측정시각(data_time)·수집시각(created_at) 분리 기록 = audit trail·ALCOA+ 데이터 무결성 원칙</a:t>
+            </a:r>
+            <a:endParaRPr lang="en-US" sz="1250" dirty="0"/>
           </a:p>
         </p:txBody>
       </p:sp>
@@ -14544,7 +16153,7 @@
                 <a:ea typeface="Pretendard" pitchFamily="34" charset="-122"/>
                 <a:cs typeface="Pretendard" pitchFamily="34" charset="-120"/>
               </a:rPr>
-              <a:t>ACF 0.93 → ≈ 0, 잔차가 독립에 근접</a:t>
+              <a:t>ACF 0.93 → ≈0(−0.03), 잔차가 독립에 근접</a:t>
             </a:r>
             <a:endParaRPr lang="en-US" sz="1150" dirty="0"/>
           </a:p>

--- a/reports/portfolio/포트폴리오_충북대기질_SPC.pptx
+++ b/reports/portfolio/포트폴리오_충북대기질_SPC.pptx
@@ -2612,7 +2612,7 @@
                 <a:ea typeface="Pretendard" pitchFamily="34" charset="-122"/>
                 <a:cs typeface="Pretendard" pitchFamily="34" charset="-120"/>
               </a:rPr>
-              <a:t>2026.02.28 ~ 2026.06.23</a:t>
+              <a:t>2026.02.28 ~ 2026.06.24</a:t>
             </a:r>
             <a:pPr indent="0" marL="0">
               <a:buNone/>
@@ -2640,7 +2640,7 @@
                 <a:ea typeface="Pretendard" pitchFamily="34" charset="-122"/>
                 <a:cs typeface="Pretendard" pitchFamily="34" charset="-120"/>
               </a:rPr>
-              <a:t>13,685건 · 측정소 5곳 · 1시간 해상도</a:t>
+              <a:t>13,810건 · 측정소 5곳 · 1시간 해상도</a:t>
             </a:r>
             <a:endParaRPr lang="en-US" sz="1250" dirty="0"/>
           </a:p>
@@ -3360,7 +3360,7 @@
                 <a:ea typeface="Pretendard" pitchFamily="34" charset="-122"/>
                 <a:cs typeface="Pretendard" pitchFamily="34" charset="-120"/>
               </a:rPr>
-              <a:t>실측 이탈률 44% — 특수원인 식별 불가</a:t>
+              <a:t>실측 이탈률 45% — 특수원인 식별 불가</a:t>
             </a:r>
             <a:endParaRPr lang="en-US" sz="1150" dirty="0"/>
           </a:p>
@@ -3842,7 +3842,7 @@
                 <a:ea typeface="Pretendard" pitchFamily="34" charset="-122"/>
                 <a:cs typeface="Pretendard" pitchFamily="34" charset="-120"/>
               </a:rPr>
-              <a:t>실측 이탈률 44% → 2%, 특수원인 후보만 남김</a:t>
+              <a:t>실측 이탈률 45% → 2%, 특수원인 후보만 남김</a:t>
             </a:r>
             <a:endParaRPr lang="en-US" sz="1150" dirty="0"/>
           </a:p>
@@ -4039,7 +4039,7 @@
       </p:sp>
       <p:pic>
         <p:nvPicPr>
-          <p:cNvPr id="6" name="Image 0" descr="C:\Users\xcv54\workspace\Sideproject_260526\scripts\portfolio_deck\img\cpk_heatmap.png">    </p:cNvPr>
+          <p:cNvPr id="6" name="Image 0" descr="/Users/t2025-m0190/workspace/chungbuk-air-quality-monitor/scripts/portfolio_deck/img/cpk_heatmap.png">    </p:cNvPr>
           <p:cNvPicPr>
             <a:picLocks noChangeAspect="1"/>
           </p:cNvPicPr>
@@ -4054,7 +4054,7 @@
         <p:spPr>
           <a:xfrm>
             <a:off x="502920" y="2148840"/>
-            <a:ext cx="7040880" cy="3167603"/>
+            <a:ext cx="7040880" cy="3169388"/>
           </a:xfrm>
           <a:prstGeom prst="rect">
             <a:avLst/>
@@ -4170,7 +4170,7 @@
         <p:spPr>
           <a:xfrm>
             <a:off x="8321040" y="2450592"/>
-            <a:ext cx="3200400" cy="1325880"/>
+            <a:ext cx="3200400" cy="1463040"/>
           </a:xfrm>
           <a:prstGeom prst="rect">
             <a:avLst/>
@@ -4184,12 +4184,12 @@
           <a:p>
             <a:pPr indent="0" marL="0">
               <a:lnSpc>
-                <a:spcPct val="130000"/>
+                <a:spcPct val="128000"/>
               </a:lnSpc>
               <a:buNone/>
             </a:pPr>
             <a:r>
-              <a:rPr lang="en-US" sz="1250" dirty="0">
+              <a:rPr lang="en-US" sz="1200" dirty="0">
                 <a:solidFill>
                   <a:srgbClr val="44506A"/>
                 </a:solidFill>
@@ -4197,9 +4197,9 @@
                 <a:ea typeface="Pretendard" pitchFamily="34" charset="-122"/>
                 <a:cs typeface="Pretendard" pitchFamily="34" charset="-120"/>
               </a:rPr>
-              <a:t>전 측정소 Cpk &lt; 1.0 ‘불량 위험’. 특히 오송읍 PM2.5 Cpk 0.29로 최저 → 1순위 관리 대상. 미세먼지가 구조적 핵심 인자.</a:t>
-            </a:r>
-            <a:endParaRPr lang="en-US" sz="1250" dirty="0"/>
+              <a:t>전 측정소에서 PM2.5·PM10·O₃·NO₂가 Cpk &lt; 1.0 ‘불량 위험’. 특히 오송읍 PM2.5 Cpk 0.3로 최저 → 1순위 관리 대상. 미세먼지가 구조적 핵심 인자.</a:t>
+            </a:r>
+            <a:endParaRPr lang="en-US" sz="1200" dirty="0"/>
           </a:p>
         </p:txBody>
       </p:sp>
@@ -4501,7 +4501,7 @@
                 <a:ea typeface="Pretendard" pitchFamily="34" charset="-122"/>
                 <a:cs typeface="Pretendard" pitchFamily="34" charset="-120"/>
               </a:rPr>
-              <a:t>잔차 관리도로 거짓경보율 44% → 2% 정상화</a:t>
+              <a:t>잔차 관리도로 거짓경보율 45% → 2% 정상화</a:t>
             </a:r>
             <a:endParaRPr lang="en-US" sz="1300" dirty="0"/>
           </a:p>
@@ -4509,7 +4509,7 @@
       </p:sp>
       <p:pic>
         <p:nvPicPr>
-          <p:cNvPr id="6" name="Image 0" descr="C:\Users\xcv54\workspace\Sideproject_260526\scripts\portfolio_deck\img\residual_ba.png">    </p:cNvPr>
+          <p:cNvPr id="6" name="Image 0" descr="/Users/t2025-m0190/workspace/chungbuk-air-quality-monitor/scripts/portfolio_deck/img/residual_ba.png">    </p:cNvPr>
           <p:cNvPicPr>
             <a:picLocks noChangeAspect="1"/>
           </p:cNvPicPr>
@@ -4637,7 +4637,7 @@
                 <a:ea typeface="Pretendard" pitchFamily="34" charset="-122"/>
                 <a:cs typeface="Pretendard" pitchFamily="34" charset="-120"/>
               </a:rPr>
-              <a:t>44%</a:t>
+              <a:t>45%</a:t>
             </a:r>
             <a:endParaRPr lang="en-US" sz="5000" dirty="0"/>
           </a:p>
@@ -5020,7 +5020,7 @@
                 <a:ea typeface="Pretendard" pitchFamily="34" charset="-122"/>
                 <a:cs typeface="Pretendard" pitchFamily="34" charset="-120"/>
               </a:rPr>
-              <a:t>통계 분석 — 단지 비교 검정</a:t>
+              <a:t>통계 분석 — 단지 비교 &amp; 변동의 출처</a:t>
             </a:r>
             <a:endParaRPr lang="en-US" sz="2700" dirty="0"/>
           </a:p>
@@ -5079,7 +5079,7 @@
                 <a:ea typeface="Pretendard" pitchFamily="34" charset="-122"/>
                 <a:cs typeface="Pretendard" pitchFamily="34" charset="-120"/>
               </a:rPr>
-              <a:t>산단 영향군 vs 거주지 (Welch t-test)</a:t>
+              <a:t>산단 vs 거주지(Welch t-test) + PM2.5 분산분해</a:t>
             </a:r>
             <a:endParaRPr lang="en-US" sz="1300" dirty="0"/>
           </a:p>
@@ -5087,7 +5087,7 @@
       </p:sp>
       <p:pic>
         <p:nvPicPr>
-          <p:cNvPr id="6" name="Image 0" descr="C:\Users\xcv54\workspace\Sideproject_260526\scripts\portfolio_deck\img\group_box.png">    </p:cNvPr>
+          <p:cNvPr id="6" name="Image 0" descr="/Users/t2025-m0190/workspace/chungbuk-air-quality-monitor/scripts/portfolio_deck/img/group_box.png">    </p:cNvPr>
           <p:cNvPicPr>
             <a:picLocks noChangeAspect="1"/>
           </p:cNvPicPr>
@@ -5101,8 +5101,8 @@
         </p:blipFill>
         <p:spPr>
           <a:xfrm>
-            <a:off x="640080" y="1600200"/>
-            <a:ext cx="6400800" cy="3584448"/>
+            <a:off x="502920" y="1554480"/>
+            <a:ext cx="5852160" cy="3277210"/>
           </a:xfrm>
           <a:prstGeom prst="rect">
             <a:avLst/>
@@ -5117,8 +5117,8 @@
         </p:nvSpPr>
         <p:spPr>
           <a:xfrm>
-            <a:off x="640080" y="5806440"/>
-            <a:ext cx="6583680" cy="548640"/>
+            <a:off x="502920" y="5029200"/>
+            <a:ext cx="6035040" cy="502920"/>
           </a:xfrm>
           <a:prstGeom prst="rect">
             <a:avLst/>
@@ -5145,7 +5145,7 @@
                 <a:ea typeface="Pretendard" pitchFamily="34" charset="-122"/>
                 <a:cs typeface="Pretendard" pitchFamily="34" charset="-120"/>
               </a:rPr>
-              <a:t>※ 전체 누적 13,685건. PM2.5 결측 제외 측정치로 산단 4측정소(합산) vs 거주지 1측정소를 Welch t-test 비교.</a:t>
+              <a:t>※ 전체 누적 13,810건 중 PM2.5 유효 13,141건(결측 제외) = 산단 4측정소(합산) + 거주지 1측정소.</a:t>
             </a:r>
             <a:endParaRPr lang="en-US" sz="950" dirty="0"/>
           </a:p>
@@ -5153,7 +5153,7 @@
       </p:sp>
       <p:pic>
         <p:nvPicPr>
-          <p:cNvPr id="8" name="Image 1" descr="preencoded.png">    </p:cNvPr>
+          <p:cNvPr id="8" name="Image 1" descr="/Users/t2025-m0190/workspace/chungbuk-air-quality-monitor/scripts/portfolio_deck/img/variance_decomp.png">    </p:cNvPr>
           <p:cNvPicPr>
             <a:picLocks noChangeAspect="1"/>
           </p:cNvPicPr>
@@ -5167,24 +5167,48 @@
         </p:blipFill>
         <p:spPr>
           <a:xfrm>
-            <a:off x="7589520" y="1783080"/>
-            <a:ext cx="411480" cy="411480"/>
+            <a:off x="502920" y="5532120"/>
+            <a:ext cx="6035040" cy="1527858"/>
           </a:xfrm>
           <a:prstGeom prst="rect">
             <a:avLst/>
           </a:prstGeom>
         </p:spPr>
       </p:pic>
-      <p:sp>
-        <p:nvSpPr>
-          <p:cNvPr id="9" name="Text 5"/>
-          <p:cNvSpPr/>
-          <p:nvPr/>
-        </p:nvSpPr>
-        <p:spPr>
-          <a:xfrm>
-            <a:off x="8092440" y="1783080"/>
-            <a:ext cx="3657600" cy="411480"/>
+      <p:pic>
+        <p:nvPicPr>
+          <p:cNvPr id="9" name="Image 2" descr="preencoded.png">    </p:cNvPr>
+          <p:cNvPicPr>
+            <a:picLocks noChangeAspect="1"/>
+          </p:cNvPicPr>
+          <p:nvPr/>
+        </p:nvPicPr>
+        <p:blipFill>
+          <a:blip r:embed="rId3"/>
+          <a:stretch>
+            <a:fillRect/>
+          </a:stretch>
+        </p:blipFill>
+        <p:spPr>
+          <a:xfrm>
+            <a:off x="6766560" y="1691640"/>
+            <a:ext cx="384048" cy="384048"/>
+          </a:xfrm>
+          <a:prstGeom prst="rect">
+            <a:avLst/>
+          </a:prstGeom>
+        </p:spPr>
+      </p:pic>
+      <p:sp>
+        <p:nvSpPr>
+          <p:cNvPr id="10" name="Text 5"/>
+          <p:cNvSpPr/>
+          <p:nvPr/>
+        </p:nvSpPr>
+        <p:spPr>
+          <a:xfrm>
+            <a:off x="7242048" y="1691640"/>
+            <a:ext cx="4572000" cy="384048"/>
           </a:xfrm>
           <a:prstGeom prst="rect">
             <a:avLst/>
@@ -5200,7 +5224,7 @@
               <a:buNone/>
             </a:pPr>
             <a:r>
-              <a:rPr lang="en-US" sz="1700" b="1" dirty="0">
+              <a:rPr lang="en-US" sz="1600" b="1" dirty="0">
                 <a:solidFill>
                   <a:srgbClr val="1F40E6"/>
                 </a:solidFill>
@@ -5208,22 +5232,22 @@
                 <a:ea typeface="Pretendard" pitchFamily="34" charset="-122"/>
                 <a:cs typeface="Pretendard" pitchFamily="34" charset="-120"/>
               </a:rPr>
-              <a:t>검증 결과</a:t>
-            </a:r>
-            <a:endParaRPr lang="en-US" sz="1700" dirty="0"/>
-          </a:p>
-        </p:txBody>
-      </p:sp>
-      <p:sp>
-        <p:nvSpPr>
-          <p:cNvPr id="10" name="Shape 6"/>
-          <p:cNvSpPr/>
-          <p:nvPr/>
-        </p:nvSpPr>
-        <p:spPr>
-          <a:xfrm>
-            <a:off x="7589520" y="2377440"/>
-            <a:ext cx="4114800" cy="0"/>
+              <a:t>검증 결과 — 진짜 변동 원인</a:t>
+            </a:r>
+            <a:endParaRPr lang="en-US" sz="1600" dirty="0"/>
+          </a:p>
+        </p:txBody>
+      </p:sp>
+      <p:sp>
+        <p:nvSpPr>
+          <p:cNvPr id="11" name="Shape 6"/>
+          <p:cNvSpPr/>
+          <p:nvPr/>
+        </p:nvSpPr>
+        <p:spPr>
+          <a:xfrm>
+            <a:off x="6766560" y="2212848"/>
+            <a:ext cx="4937760" cy="0"/>
           </a:xfrm>
           <a:prstGeom prst="line">
             <a:avLst/>
@@ -5239,95 +5263,14 @@
       </p:sp>
       <p:sp>
         <p:nvSpPr>
-          <p:cNvPr id="11" name="Text 7"/>
-          <p:cNvSpPr/>
-          <p:nvPr/>
-        </p:nvSpPr>
-        <p:spPr>
-          <a:xfrm>
-            <a:off x="7589520" y="2560320"/>
-            <a:ext cx="4114800" cy="320040"/>
-          </a:xfrm>
-          <a:prstGeom prst="rect">
-            <a:avLst/>
-          </a:prstGeom>
-          <a:noFill/>
-          <a:ln/>
-        </p:spPr>
-        <p:txBody>
-          <a:bodyPr wrap="square" lIns="0" tIns="0" rIns="0" bIns="0" rtlCol="0" anchor="ctr"/>
-          <a:lstStyle/>
-          <a:p>
-            <a:pPr indent="0" marL="0">
-              <a:buNone/>
-            </a:pPr>
-            <a:r>
-              <a:rPr lang="en-US" sz="1200" b="1" dirty="0">
-                <a:solidFill>
-                  <a:srgbClr val="8A94A6"/>
-                </a:solidFill>
-                <a:latin typeface="Pretendard" pitchFamily="34" charset="0"/>
-                <a:ea typeface="Pretendard" pitchFamily="34" charset="-122"/>
-                <a:cs typeface="Pretendard" pitchFamily="34" charset="-120"/>
-              </a:rPr>
-              <a:t>가설</a:t>
-            </a:r>
-            <a:endParaRPr lang="en-US" sz="1200" dirty="0"/>
-          </a:p>
-        </p:txBody>
-      </p:sp>
-      <p:sp>
-        <p:nvSpPr>
-          <p:cNvPr id="12" name="Text 8"/>
-          <p:cNvSpPr/>
-          <p:nvPr/>
-        </p:nvSpPr>
-        <p:spPr>
-          <a:xfrm>
-            <a:off x="7589520" y="2880360"/>
-            <a:ext cx="4160520" cy="731520"/>
-          </a:xfrm>
-          <a:prstGeom prst="rect">
-            <a:avLst/>
-          </a:prstGeom>
-          <a:noFill/>
-          <a:ln/>
-        </p:spPr>
-        <p:txBody>
-          <a:bodyPr wrap="square" lIns="0" tIns="0" rIns="0" bIns="0" rtlCol="0" anchor="t"/>
-          <a:lstStyle/>
-          <a:p>
-            <a:pPr indent="0" marL="0">
-              <a:lnSpc>
-                <a:spcPct val="125000"/>
-              </a:lnSpc>
-              <a:buNone/>
-            </a:pPr>
-            <a:r>
-              <a:rPr lang="en-US" sz="1400" b="1" dirty="0">
-                <a:solidFill>
-                  <a:srgbClr val="151B2E"/>
-                </a:solidFill>
-                <a:latin typeface="Pretendard" pitchFamily="34" charset="0"/>
-                <a:ea typeface="Pretendard" pitchFamily="34" charset="-122"/>
-                <a:cs typeface="Pretendard" pitchFamily="34" charset="-120"/>
-              </a:rPr>
-              <a:t>“산단 영향군의 PM2.5 평균이 거주지보다 높을 것이다”</a:t>
-            </a:r>
-            <a:endParaRPr lang="en-US" sz="1400" dirty="0"/>
-          </a:p>
-        </p:txBody>
-      </p:sp>
-      <p:sp>
-        <p:nvSpPr>
-          <p:cNvPr id="13" name="Text 9"/>
-          <p:cNvSpPr/>
-          <p:nvPr/>
-        </p:nvSpPr>
-        <p:spPr>
-          <a:xfrm>
-            <a:off x="7589520" y="3703320"/>
-            <a:ext cx="4160520" cy="1188720"/>
+          <p:cNvPr id="12" name="Text 7"/>
+          <p:cNvSpPr/>
+          <p:nvPr/>
+        </p:nvSpPr>
+        <p:spPr>
+          <a:xfrm>
+            <a:off x="6766560" y="2377440"/>
+            <a:ext cx="4937760" cy="822960"/>
           </a:xfrm>
           <a:prstGeom prst="rect">
             <a:avLst/>
@@ -5348,7 +5291,7 @@
             <a:r>
               <a:rPr lang="en-US" sz="1250" b="1" dirty="0">
                 <a:solidFill>
-                  <a:srgbClr val="1F40E6"/>
+                  <a:srgbClr val="151B2E"/>
                 </a:solidFill>
                 <a:latin typeface="Pretendard" pitchFamily="34" charset="0"/>
                 <a:ea typeface="Pretendard" pitchFamily="34" charset="-122"/>
@@ -5371,7 +5314,7 @@
                 <a:ea typeface="Pretendard" pitchFamily="34" charset="-122"/>
                 <a:cs typeface="Pretendard" pitchFamily="34" charset="-120"/>
               </a:rPr>
-              <a:t>로 두 군 평균차의 통계적 유의성을 검정. Cohen’s d로 효과크기를 함께 산출해 실질적 차이를 확인.</a:t>
+              <a:t>로 산단&gt;거주지 평균차의 유의성을 검정했지만, 두 분포는 크게 겹친다.</a:t>
             </a:r>
             <a:endParaRPr lang="en-US" sz="1250" dirty="0"/>
           </a:p>
@@ -5379,107 +5322,150 @@
       </p:sp>
       <p:sp>
         <p:nvSpPr>
-          <p:cNvPr id="14" name="Shape 10"/>
-          <p:cNvSpPr/>
-          <p:nvPr/>
-        </p:nvSpPr>
-        <p:spPr>
-          <a:xfrm>
-            <a:off x="7589520" y="5074920"/>
-            <a:ext cx="1828800" cy="457200"/>
+          <p:cNvPr id="13" name="Shape 8"/>
+          <p:cNvSpPr/>
+          <p:nvPr/>
+        </p:nvSpPr>
+        <p:spPr>
+          <a:xfrm>
+            <a:off x="6766560" y="3337560"/>
+            <a:ext cx="4937760" cy="1371600"/>
           </a:xfrm>
           <a:prstGeom prst="roundRect">
             <a:avLst>
-              <a:gd name="adj" fmla="val 50000"/>
+              <a:gd name="adj" fmla="val 5333"/>
             </a:avLst>
           </a:prstGeom>
           <a:solidFill>
-            <a:srgbClr val="1F40E6"/>
+            <a:srgbClr val="EEF1FB"/>
           </a:solidFill>
           <a:ln/>
         </p:spPr>
       </p:sp>
       <p:sp>
         <p:nvSpPr>
-          <p:cNvPr id="15" name="Text 11"/>
-          <p:cNvSpPr/>
-          <p:nvPr/>
-        </p:nvSpPr>
-        <p:spPr>
-          <a:xfrm>
-            <a:off x="7589520" y="5074920"/>
-            <a:ext cx="1828800" cy="457200"/>
-          </a:xfrm>
-          <a:prstGeom prst="rect">
-            <a:avLst/>
-          </a:prstGeom>
-          <a:noFill/>
-          <a:ln/>
-        </p:spPr>
-        <p:txBody>
-          <a:bodyPr wrap="square" lIns="0" tIns="0" rIns="0" bIns="0" rtlCol="0" anchor="ctr"/>
-          <a:lstStyle/>
-          <a:p>
-            <a:pPr algn="ctr" indent="0" marL="0">
+          <p:cNvPr id="14" name="Text 9"/>
+          <p:cNvSpPr/>
+          <p:nvPr/>
+        </p:nvSpPr>
+        <p:spPr>
+          <a:xfrm>
+            <a:off x="6995160" y="3520440"/>
+            <a:ext cx="4526280" cy="1005840"/>
+          </a:xfrm>
+          <a:prstGeom prst="rect">
+            <a:avLst/>
+          </a:prstGeom>
+          <a:noFill/>
+          <a:ln/>
+        </p:spPr>
+        <p:txBody>
+          <a:bodyPr wrap="square" lIns="0" tIns="0" rIns="0" bIns="0" rtlCol="0" anchor="t"/>
+          <a:lstStyle/>
+          <a:p>
+            <a:pPr indent="0" marL="0">
+              <a:lnSpc>
+                <a:spcPct val="130000"/>
+              </a:lnSpc>
               <a:buNone/>
             </a:pPr>
             <a:r>
               <a:rPr lang="en-US" sz="1250" b="1" dirty="0">
                 <a:solidFill>
-                  <a:srgbClr val="FFFFFF"/>
-                </a:solidFill>
-                <a:latin typeface="Pretendard" pitchFamily="34" charset="0"/>
-                <a:ea typeface="Pretendard" pitchFamily="34" charset="-122"/>
-                <a:cs typeface="Pretendard" pitchFamily="34" charset="-120"/>
-              </a:rPr>
-              <a:t>가설 검정 자동화</a:t>
+                  <a:srgbClr val="1F40E6"/>
+                </a:solidFill>
+                <a:latin typeface="Pretendard" pitchFamily="34" charset="0"/>
+                <a:ea typeface="Pretendard" pitchFamily="34" charset="-122"/>
+                <a:cs typeface="Pretendard" pitchFamily="34" charset="-120"/>
+              </a:rPr>
+              <a:t>위치(측정소)는 PM2.5 총변동의 2.4%만 설명</a:t>
             </a:r>
             <a:endParaRPr lang="en-US" sz="1250" dirty="0"/>
           </a:p>
-        </p:txBody>
-      </p:sp>
-      <p:sp>
-        <p:nvSpPr>
-          <p:cNvPr id="16" name="Text 12"/>
-          <p:cNvSpPr/>
-          <p:nvPr/>
-        </p:nvSpPr>
-        <p:spPr>
-          <a:xfrm>
-            <a:off x="7589520" y="5596128"/>
-            <a:ext cx="4160520" cy="365760"/>
-          </a:xfrm>
-          <a:prstGeom prst="rect">
-            <a:avLst/>
-          </a:prstGeom>
-          <a:noFill/>
-          <a:ln/>
-        </p:spPr>
-        <p:txBody>
-          <a:bodyPr wrap="square" lIns="0" tIns="0" rIns="0" bIns="0" rtlCol="0" anchor="ctr"/>
-          <a:lstStyle/>
           <a:p>
             <a:pPr indent="0" marL="0">
-              <a:buNone/>
-            </a:pPr>
-            <a:r>
-              <a:rPr lang="en-US" sz="1100" i="1" dirty="0">
-                <a:solidFill>
-                  <a:srgbClr val="8A94A6"/>
-                </a:solidFill>
-                <a:latin typeface="Pretendard" pitchFamily="34" charset="0"/>
-                <a:ea typeface="Pretendard" pitchFamily="34" charset="-122"/>
-                <a:cs typeface="Pretendard" pitchFamily="34" charset="-120"/>
-              </a:rPr>
-              <a:t>daily 루프가 MD·Word 리포트 자동 생성</a:t>
-            </a:r>
-            <a:endParaRPr lang="en-US" sz="1100" dirty="0"/>
-          </a:p>
-        </p:txBody>
-      </p:sp>
-      <p:sp>
-        <p:nvSpPr>
-          <p:cNvPr id="17" name="Text 13"/>
+              <a:lnSpc>
+                <a:spcPct val="130000"/>
+              </a:lnSpc>
+              <a:buNone/>
+            </a:pPr>
+            <a:r>
+              <a:rPr lang="en-US" sz="1250" dirty="0">
+                <a:solidFill>
+                  <a:srgbClr val="44506A"/>
+                </a:solidFill>
+                <a:latin typeface="Pretendard" pitchFamily="34" charset="0"/>
+                <a:ea typeface="Pretendard" pitchFamily="34" charset="-122"/>
+                <a:cs typeface="Pretendard" pitchFamily="34" charset="-120"/>
+              </a:rPr>
+              <a:t>시간·기상이 97.6% — 변동의 대부분은 ‘어디서’가 아니라 ‘언제’.</a:t>
+            </a:r>
+            <a:endParaRPr lang="en-US" sz="1250" dirty="0"/>
+          </a:p>
+        </p:txBody>
+      </p:sp>
+      <p:sp>
+        <p:nvSpPr>
+          <p:cNvPr id="15" name="Text 10"/>
+          <p:cNvSpPr/>
+          <p:nvPr/>
+        </p:nvSpPr>
+        <p:spPr>
+          <a:xfrm>
+            <a:off x="6766560" y="4892040"/>
+            <a:ext cx="4937760" cy="1005840"/>
+          </a:xfrm>
+          <a:prstGeom prst="rect">
+            <a:avLst/>
+          </a:prstGeom>
+          <a:noFill/>
+          <a:ln/>
+        </p:spPr>
+        <p:txBody>
+          <a:bodyPr wrap="square" lIns="0" tIns="0" rIns="0" bIns="0" rtlCol="0" anchor="t"/>
+          <a:lstStyle/>
+          <a:p>
+            <a:pPr indent="0" marL="0">
+              <a:lnSpc>
+                <a:spcPct val="130000"/>
+              </a:lnSpc>
+              <a:buNone/>
+            </a:pPr>
+            <a:r>
+              <a:rPr lang="en-US" sz="1250" b="1" dirty="0">
+                <a:solidFill>
+                  <a:srgbClr val="151B2E"/>
+                </a:solidFill>
+                <a:latin typeface="Pretendard" pitchFamily="34" charset="0"/>
+                <a:ea typeface="Pretendard" pitchFamily="34" charset="-122"/>
+                <a:cs typeface="Pretendard" pitchFamily="34" charset="-120"/>
+              </a:rPr>
+              <a:t>→ 결론: </a:t>
+            </a:r>
+            <a:pPr indent="0" marL="0">
+              <a:lnSpc>
+                <a:spcPct val="130000"/>
+              </a:lnSpc>
+              <a:buNone/>
+            </a:pPr>
+            <a:r>
+              <a:rPr lang="en-US" sz="1250" dirty="0">
+                <a:solidFill>
+                  <a:srgbClr val="44506A"/>
+                </a:solidFill>
+                <a:latin typeface="Pretendard" pitchFamily="34" charset="0"/>
+                <a:ea typeface="Pretendard" pitchFamily="34" charset="-122"/>
+                <a:cs typeface="Pretendard" pitchFamily="34" charset="-120"/>
+              </a:rPr>
+              <a:t>‘라인(위치)별 관리’가 아니라 ‘공통원인(시계열) 관리’가 답. 잔차 관리도가 바로 그 해법.</a:t>
+            </a:r>
+            <a:endParaRPr lang="en-US" sz="1250" dirty="0"/>
+          </a:p>
+        </p:txBody>
+      </p:sp>
+      <p:sp>
+        <p:nvSpPr>
+          <p:cNvPr id="16" name="Text 11"/>
           <p:cNvSpPr/>
           <p:nvPr/>
         </p:nvSpPr>
@@ -8034,7 +8020,7 @@
                 <a:ea typeface="Pretendard" pitchFamily="34" charset="-122"/>
                 <a:cs typeface="Pretendard" pitchFamily="34" charset="-120"/>
               </a:rPr>
-              <a:t>13,685건</a:t>
+              <a:t>13,810건</a:t>
             </a:r>
             <a:endParaRPr lang="en-US" sz="2400" dirty="0"/>
           </a:p>
@@ -8076,7 +8062,7 @@
                 <a:ea typeface="Pretendard" pitchFamily="34" charset="-122"/>
                 <a:cs typeface="Pretendard" pitchFamily="34" charset="-120"/>
               </a:rPr>
-              <a:t>116일 무중단 수집</a:t>
+              <a:t>117일 무중단 수집</a:t>
             </a:r>
             <a:endParaRPr lang="en-US" sz="1250" dirty="0"/>
           </a:p>
@@ -8157,7 +8143,7 @@
                 <a:ea typeface="Pretendard" pitchFamily="34" charset="-122"/>
                 <a:cs typeface="Pretendard" pitchFamily="34" charset="-120"/>
               </a:rPr>
-              <a:t>44% → 2%</a:t>
+              <a:t>45% → 2%</a:t>
             </a:r>
             <a:endParaRPr lang="en-US" sz="2400" dirty="0"/>
           </a:p>
@@ -9458,7 +9444,7 @@
                           <a:ea typeface="Pretendard" pitchFamily="34" charset="-122"/>
                           <a:cs typeface="Pretendard" pitchFamily="34" charset="-120"/>
                         </a:rPr>
-                        <a:t>공정 조작 불가가 한계. Improve를 ‘방법론 개선(잔차 보정 거짓경보 44%→2%)’ + alert/action 정책으로 매핑.</a:t>
+                        <a:t>공정 조작 불가가 한계. Improve를 ‘방법론 개선(잔차 보정 거짓경보 45% → 2%)’ + alert/action 정책으로 매핑.</a:t>
                       </a:r>
                       <a:endParaRPr lang="en-US" sz="1200" dirty="0">
                         <a:latin typeface="Pretendard" charset="0"/>
@@ -10186,7 +10172,7 @@
                 <a:ea typeface="Pretendard" pitchFamily="34" charset="-122"/>
                 <a:cs typeface="Pretendard" pitchFamily="34" charset="-120"/>
               </a:rPr>
-              <a:t>변동의 95%는 측정소(위치)가 아니라 시간·기상에서 왔다.</a:t>
+              <a:t>변동의 97.6%는 측정소(위치)가 아니라 시간·기상에서 왔다 (위치 기여 2.4%).</a:t>
             </a:r>
             <a:endParaRPr lang="en-US" sz="1500" dirty="0"/>
           </a:p>
@@ -10875,7 +10861,7 @@
                 <a:ea typeface="Pretendard" pitchFamily="34" charset="-122"/>
                 <a:cs typeface="Pretendard" pitchFamily="34" charset="-120"/>
               </a:rPr>
-              <a:t>108일 누적, 결측·이상치 점검</a:t>
+              <a:t>117일 누적, 결측·이상치 점검</a:t>
             </a:r>
             <a:endParaRPr lang="en-US" sz="1200" dirty="0"/>
           </a:p>
@@ -13527,7 +13513,7 @@
                 <a:ea typeface="Pretendard" pitchFamily="34" charset="-122"/>
                 <a:cs typeface="Pretendard" pitchFamily="34" charset="-120"/>
               </a:rPr>
-              <a:t>잔차 관리도로 거짓경보 44% → 2% 개선</a:t>
+              <a:t>잔차 관리도로 거짓경보 45% → 2% 개선</a:t>
             </a:r>
             <a:endParaRPr lang="en-US" sz="1350" dirty="0"/>
           </a:p>
@@ -16839,7 +16825,7 @@
                 <a:ea typeface="Pretendard" pitchFamily="34" charset="-122"/>
                 <a:cs typeface="Pretendard" pitchFamily="34" charset="-120"/>
               </a:rPr>
-              <a:t>116일 무중단 13,685건 · PM2.5 일별 추세</a:t>
+              <a:t>117일 무중단 13,810건 · PM2.5 일별 추세</a:t>
             </a:r>
             <a:endParaRPr lang="en-US" sz="1300" dirty="0"/>
           </a:p>
@@ -16900,7 +16886,7 @@
                 <a:ea typeface="Pretendard" pitchFamily="34" charset="-122"/>
                 <a:cs typeface="Pretendard" pitchFamily="34" charset="-120"/>
               </a:rPr>
-              <a:t>13,685</a:t>
+              <a:t>13,810</a:t>
             </a:r>
             <a:endParaRPr lang="en-US" sz="3600" dirty="0"/>
           </a:p>
@@ -17000,7 +16986,7 @@
                 <a:ea typeface="Pretendard" pitchFamily="34" charset="-122"/>
                 <a:cs typeface="Pretendard" pitchFamily="34" charset="-120"/>
               </a:rPr>
-              <a:t>116일</a:t>
+              <a:t>117일</a:t>
             </a:r>
             <a:endParaRPr lang="en-US" sz="3600" dirty="0"/>
           </a:p>
@@ -17247,7 +17233,7 @@
       </p:sp>
       <p:pic>
         <p:nvPicPr>
-          <p:cNvPr id="18" name="Image 0" descr="C:\Users\xcv54\workspace\Sideproject_260526\scripts\portfolio_deck\img\ts_pm25.png">    </p:cNvPr>
+          <p:cNvPr id="18" name="Image 0" descr="/Users/t2025-m0190/workspace/chungbuk-air-quality-monitor/scripts/portfolio_deck/img/ts_pm25.png">    </p:cNvPr>
           <p:cNvPicPr>
             <a:picLocks noChangeAspect="1"/>
           </p:cNvPicPr>
@@ -17262,7 +17248,7 @@
         <p:spPr>
           <a:xfrm>
             <a:off x="640080" y="2926080"/>
-            <a:ext cx="7132320" cy="3268281"/>
+            <a:ext cx="7132320" cy="3274402"/>
           </a:xfrm>
           <a:prstGeom prst="rect">
             <a:avLst/>
@@ -17395,7 +17381,7 @@
                 <a:ea typeface="Pretendard" pitchFamily="34" charset="-122"/>
                 <a:cs typeface="Pretendard" pitchFamily="34" charset="-120"/>
               </a:rPr>
-              <a:t> — 산단 영향군 일평균이 대부분 거주지보다 높고, 환경기준(USL 35)을 116일 중 </a:t>
+              <a:t> — 산단 영향군 일평균이 대부분 거주지보다 높고, 환경기준(USL 35)을 117일 중 </a:t>
             </a:r>
             <a:pPr indent="0" marL="0">
               <a:lnSpc>
@@ -17719,7 +17705,7 @@
       </p:sp>
       <p:pic>
         <p:nvPicPr>
-          <p:cNvPr id="6" name="Image 0" descr="C:\Users\xcv54\workspace\Sideproject_260526\scripts\portfolio_deck\img\box_grid.png">    </p:cNvPr>
+          <p:cNvPr id="6" name="Image 0" descr="/Users/t2025-m0190/workspace/chungbuk-air-quality-monitor/scripts/portfolio_deck/img/box_grid.png">    </p:cNvPr>
           <p:cNvPicPr>
             <a:picLocks noChangeAspect="1"/>
           </p:cNvPicPr>
@@ -17734,7 +17720,7 @@
         <p:spPr>
           <a:xfrm>
             <a:off x="1234440" y="1508760"/>
-            <a:ext cx="9692640" cy="4477462"/>
+            <a:ext cx="9692640" cy="4481406"/>
           </a:xfrm>
           <a:prstGeom prst="rect">
             <a:avLst/>

--- a/reports/portfolio/포트폴리오_충북대기질_SPC.pptx
+++ b/reports/portfolio/포트폴리오_충북대기질_SPC.pptx
@@ -2640,7 +2640,7 @@
                 <a:ea typeface="Pretendard" pitchFamily="34" charset="-122"/>
                 <a:cs typeface="Pretendard" pitchFamily="34" charset="-120"/>
               </a:rPr>
-              <a:t>13,810건 · 측정소 5곳 · 1시간 해상도</a:t>
+              <a:t>13,815건 · 측정소 5곳 · 1시간 해상도</a:t>
             </a:r>
             <a:endParaRPr lang="en-US" sz="1250" dirty="0"/>
           </a:p>
@@ -5145,7 +5145,7 @@
                 <a:ea typeface="Pretendard" pitchFamily="34" charset="-122"/>
                 <a:cs typeface="Pretendard" pitchFamily="34" charset="-120"/>
               </a:rPr>
-              <a:t>※ 전체 누적 13,810건 중 PM2.5 유효 13,141건(결측 제외) = 산단 4측정소(합산) + 거주지 1측정소.</a:t>
+              <a:t>※ 전체 누적 13,815건 중 PM2.5 유효 13,144건(결측 제외) = 산단 4측정소(합산) + 거주지 1측정소.</a:t>
             </a:r>
             <a:endParaRPr lang="en-US" sz="950" dirty="0"/>
           </a:p>
@@ -5168,7 +5168,7 @@
         <p:spPr>
           <a:xfrm>
             <a:off x="502920" y="5532120"/>
-            <a:ext cx="6035040" cy="1527858"/>
+            <a:ext cx="6035040" cy="928468"/>
           </a:xfrm>
           <a:prstGeom prst="rect">
             <a:avLst/>
@@ -8020,7 +8020,7 @@
                 <a:ea typeface="Pretendard" pitchFamily="34" charset="-122"/>
                 <a:cs typeface="Pretendard" pitchFamily="34" charset="-120"/>
               </a:rPr>
-              <a:t>13,810건</a:t>
+              <a:t>13,815건</a:t>
             </a:r>
             <a:endParaRPr lang="en-US" sz="2400" dirty="0"/>
           </a:p>
@@ -16825,7 +16825,7 @@
                 <a:ea typeface="Pretendard" pitchFamily="34" charset="-122"/>
                 <a:cs typeface="Pretendard" pitchFamily="34" charset="-120"/>
               </a:rPr>
-              <a:t>117일 무중단 13,810건 · PM2.5 일별 추세</a:t>
+              <a:t>117일 무중단 13,815건 · PM2.5 일별 추세</a:t>
             </a:r>
             <a:endParaRPr lang="en-US" sz="1300" dirty="0"/>
           </a:p>
@@ -16886,7 +16886,7 @@
                 <a:ea typeface="Pretendard" pitchFamily="34" charset="-122"/>
                 <a:cs typeface="Pretendard" pitchFamily="34" charset="-120"/>
               </a:rPr>
-              <a:t>13,810</a:t>
+              <a:t>13,815</a:t>
             </a:r>
             <a:endParaRPr lang="en-US" sz="3600" dirty="0"/>
           </a:p>
